--- a/Lecture03/DSTP_W3_LMMSD_01102026.pptx
+++ b/Lecture03/DSTP_W3_LMMSD_01102026.pptx
@@ -5,49 +5,48 @@
     <p:sldMasterId id="2147483648" r:id="rId1"/>
   </p:sldMasterIdLst>
   <p:notesMasterIdLst>
-    <p:notesMasterId r:id="rId42"/>
+    <p:notesMasterId r:id="rId41"/>
   </p:notesMasterIdLst>
   <p:sldIdLst>
     <p:sldId id="311" r:id="rId2"/>
-    <p:sldId id="379" r:id="rId3"/>
-    <p:sldId id="334" r:id="rId4"/>
-    <p:sldId id="335" r:id="rId5"/>
-    <p:sldId id="367" r:id="rId6"/>
-    <p:sldId id="339" r:id="rId7"/>
-    <p:sldId id="342" r:id="rId8"/>
-    <p:sldId id="336" r:id="rId9"/>
-    <p:sldId id="343" r:id="rId10"/>
-    <p:sldId id="344" r:id="rId11"/>
-    <p:sldId id="369" r:id="rId12"/>
-    <p:sldId id="368" r:id="rId13"/>
-    <p:sldId id="371" r:id="rId14"/>
-    <p:sldId id="372" r:id="rId15"/>
-    <p:sldId id="370" r:id="rId16"/>
-    <p:sldId id="373" r:id="rId17"/>
-    <p:sldId id="374" r:id="rId18"/>
-    <p:sldId id="351" r:id="rId19"/>
-    <p:sldId id="345" r:id="rId20"/>
-    <p:sldId id="375" r:id="rId21"/>
-    <p:sldId id="376" r:id="rId22"/>
-    <p:sldId id="378" r:id="rId23"/>
-    <p:sldId id="348" r:id="rId24"/>
-    <p:sldId id="349" r:id="rId25"/>
-    <p:sldId id="377" r:id="rId26"/>
-    <p:sldId id="352" r:id="rId27"/>
-    <p:sldId id="354" r:id="rId28"/>
-    <p:sldId id="355" r:id="rId29"/>
-    <p:sldId id="356" r:id="rId30"/>
-    <p:sldId id="357" r:id="rId31"/>
-    <p:sldId id="358" r:id="rId32"/>
-    <p:sldId id="359" r:id="rId33"/>
-    <p:sldId id="361" r:id="rId34"/>
-    <p:sldId id="363" r:id="rId35"/>
-    <p:sldId id="364" r:id="rId36"/>
-    <p:sldId id="362" r:id="rId37"/>
-    <p:sldId id="360" r:id="rId38"/>
-    <p:sldId id="365" r:id="rId39"/>
-    <p:sldId id="366" r:id="rId40"/>
-    <p:sldId id="353" r:id="rId41"/>
+    <p:sldId id="334" r:id="rId3"/>
+    <p:sldId id="335" r:id="rId4"/>
+    <p:sldId id="367" r:id="rId5"/>
+    <p:sldId id="339" r:id="rId6"/>
+    <p:sldId id="342" r:id="rId7"/>
+    <p:sldId id="336" r:id="rId8"/>
+    <p:sldId id="343" r:id="rId9"/>
+    <p:sldId id="344" r:id="rId10"/>
+    <p:sldId id="369" r:id="rId11"/>
+    <p:sldId id="368" r:id="rId12"/>
+    <p:sldId id="371" r:id="rId13"/>
+    <p:sldId id="372" r:id="rId14"/>
+    <p:sldId id="370" r:id="rId15"/>
+    <p:sldId id="373" r:id="rId16"/>
+    <p:sldId id="374" r:id="rId17"/>
+    <p:sldId id="351" r:id="rId18"/>
+    <p:sldId id="345" r:id="rId19"/>
+    <p:sldId id="375" r:id="rId20"/>
+    <p:sldId id="376" r:id="rId21"/>
+    <p:sldId id="378" r:id="rId22"/>
+    <p:sldId id="348" r:id="rId23"/>
+    <p:sldId id="349" r:id="rId24"/>
+    <p:sldId id="377" r:id="rId25"/>
+    <p:sldId id="352" r:id="rId26"/>
+    <p:sldId id="354" r:id="rId27"/>
+    <p:sldId id="355" r:id="rId28"/>
+    <p:sldId id="356" r:id="rId29"/>
+    <p:sldId id="357" r:id="rId30"/>
+    <p:sldId id="358" r:id="rId31"/>
+    <p:sldId id="359" r:id="rId32"/>
+    <p:sldId id="361" r:id="rId33"/>
+    <p:sldId id="363" r:id="rId34"/>
+    <p:sldId id="364" r:id="rId35"/>
+    <p:sldId id="362" r:id="rId36"/>
+    <p:sldId id="360" r:id="rId37"/>
+    <p:sldId id="365" r:id="rId38"/>
+    <p:sldId id="366" r:id="rId39"/>
+    <p:sldId id="353" r:id="rId40"/>
   </p:sldIdLst>
   <p:sldSz cx="12192000" cy="6858000"/>
   <p:notesSz cx="6858000" cy="9144000"/>
@@ -1101,7 +1100,7 @@
           <a:p>
             <a:fld id="{F4865783-4221-46C4-B404-1430702566E8}" type="datetimeFigureOut">
               <a:rPr lang="en-CH" smtClean="0"/>
-              <a:t>01.10.2026</a:t>
+              <a:t>05.10.2026</a:t>
             </a:fld>
             <a:endParaRPr lang="en-CH"/>
           </a:p>
@@ -1432,9 +1431,9 @@
           <a:bodyPr/>
           <a:lstStyle/>
           <a:p>
-            <a:fld id="{F4A5E487-4208-43B4-82B3-E72BE32A6318}" type="slidenum">
+            <a:fld id="{E6820292-1CE7-4EA0-B18B-88DA866A7021}" type="slidenum">
               <a:rPr lang="en-CH" smtClean="0"/>
-              <a:t>2</a:t>
+              <a:t>3</a:t>
             </a:fld>
             <a:endParaRPr lang="en-CH"/>
           </a:p>
@@ -1443,7 +1442,7 @@
     </p:spTree>
     <p:extLst>
       <p:ext uri="{BB962C8B-B14F-4D97-AF65-F5344CB8AC3E}">
-        <p14:creationId xmlns:p14="http://schemas.microsoft.com/office/powerpoint/2010/main" val="2381871486"/>
+        <p14:creationId xmlns:p14="http://schemas.microsoft.com/office/powerpoint/2010/main" val="2246854455"/>
       </p:ext>
     </p:extLst>
   </p:cSld>
@@ -1499,7 +1498,7 @@
           <a:p>
             <a:r>
               <a:rPr lang="en-US" dirty="0"/>
-              <a:t>Today, we are going to launch cats in the air. Some days ago, two cats showed up on our doorstep and told us that they are magic—because they could fall from any distance and remain unscathed. These self-proclaimed magic cats bragged about how they learned a simple transformation that allows them to soften their fall. Instead of falling like normal cats, they fall by half of their current distance from the ground every second.</a:t>
+              <a:t>So, if they are currently at 10 meters in 1 second they will be at 5, then after a second at 2.5, then 1.25 and so on. We are convinced by the charisma of these cats and we decide to do an experiment. But as you can imagine our proposal was not very popular with the ethics committee.</a:t>
             </a:r>
             <a:endParaRPr lang="en-CH" dirty="0"/>
           </a:p>
@@ -1523,94 +1522,6 @@
             <a:fld id="{F4A5E487-4208-43B4-82B3-E72BE32A6318}" type="slidenum">
               <a:rPr lang="en-CH" smtClean="0"/>
               <a:t>28</a:t>
-            </a:fld>
-            <a:endParaRPr lang="en-CH"/>
-          </a:p>
-        </p:txBody>
-      </p:sp>
-    </p:spTree>
-    <p:extLst>
-      <p:ext uri="{BB962C8B-B14F-4D97-AF65-F5344CB8AC3E}">
-        <p14:creationId xmlns:p14="http://schemas.microsoft.com/office/powerpoint/2010/main" val="2494440960"/>
-      </p:ext>
-    </p:extLst>
-  </p:cSld>
-  <p:clrMapOvr>
-    <a:masterClrMapping/>
-  </p:clrMapOvr>
-</p:notes>
-</file>
-
-<file path=ppt/notesSlides/notesSlide11.xml><?xml version="1.0" encoding="utf-8"?>
-<p:notes xmlns:a="http://schemas.openxmlformats.org/drawingml/2006/main" xmlns:r="http://schemas.openxmlformats.org/officeDocument/2006/relationships" xmlns:p="http://schemas.openxmlformats.org/presentationml/2006/main">
-  <p:cSld>
-    <p:spTree>
-      <p:nvGrpSpPr>
-        <p:cNvPr id="1" name=""/>
-        <p:cNvGrpSpPr/>
-        <p:nvPr/>
-      </p:nvGrpSpPr>
-      <p:grpSpPr>
-        <a:xfrm>
-          <a:off x="0" y="0"/>
-          <a:ext cx="0" cy="0"/>
-          <a:chOff x="0" y="0"/>
-          <a:chExt cx="0" cy="0"/>
-        </a:xfrm>
-      </p:grpSpPr>
-      <p:sp>
-        <p:nvSpPr>
-          <p:cNvPr id="2" name="Slide Image Placeholder 1"/>
-          <p:cNvSpPr>
-            <a:spLocks noGrp="1" noRot="1" noChangeAspect="1"/>
-          </p:cNvSpPr>
-          <p:nvPr>
-            <p:ph type="sldImg"/>
-          </p:nvPr>
-        </p:nvSpPr>
-        <p:spPr/>
-      </p:sp>
-      <p:sp>
-        <p:nvSpPr>
-          <p:cNvPr id="3" name="Notes Placeholder 2"/>
-          <p:cNvSpPr>
-            <a:spLocks noGrp="1"/>
-          </p:cNvSpPr>
-          <p:nvPr>
-            <p:ph type="body" idx="1"/>
-          </p:nvPr>
-        </p:nvSpPr>
-        <p:spPr/>
-        <p:txBody>
-          <a:bodyPr/>
-          <a:lstStyle/>
-          <a:p>
-            <a:r>
-              <a:rPr lang="en-US" dirty="0"/>
-              <a:t>So, if they are currently at 10 meters in 1 second they will be at 5, then after a second at 2.5, then 1.25 and so on. We are convinced by the charisma of these cats and we decide to do an experiment. But as you can imagine our proposal was not very popular with the ethics committee.</a:t>
-            </a:r>
-            <a:endParaRPr lang="en-CH" dirty="0"/>
-          </a:p>
-        </p:txBody>
-      </p:sp>
-      <p:sp>
-        <p:nvSpPr>
-          <p:cNvPr id="4" name="Slide Number Placeholder 3"/>
-          <p:cNvSpPr>
-            <a:spLocks noGrp="1"/>
-          </p:cNvSpPr>
-          <p:nvPr>
-            <p:ph type="sldNum" sz="quarter" idx="5"/>
-          </p:nvPr>
-        </p:nvSpPr>
-        <p:spPr/>
-        <p:txBody>
-          <a:bodyPr/>
-          <a:lstStyle/>
-          <a:p>
-            <a:fld id="{F4A5E487-4208-43B4-82B3-E72BE32A6318}" type="slidenum">
-              <a:rPr lang="en-CH" smtClean="0"/>
-              <a:t>29</a:t>
             </a:fld>
             <a:endParaRPr lang="en-CH"/>
           </a:p>
@@ -1673,6 +1584,10 @@
           <a:bodyPr/>
           <a:lstStyle/>
           <a:p>
+            <a:r>
+              <a:rPr lang="en-US" dirty="0"/>
+              <a:t>This is what we call a fixed effects model</a:t>
+            </a:r>
             <a:endParaRPr lang="en-CH" dirty="0"/>
           </a:p>
         </p:txBody>
@@ -1694,7 +1609,7 @@
           <a:p>
             <a:fld id="{E6820292-1CE7-4EA0-B18B-88DA866A7021}" type="slidenum">
               <a:rPr lang="en-CH" smtClean="0"/>
-              <a:t>4</a:t>
+              <a:t>6</a:t>
             </a:fld>
             <a:endParaRPr lang="en-CH"/>
           </a:p>
@@ -1703,7 +1618,7 @@
     </p:spTree>
     <p:extLst>
       <p:ext uri="{BB962C8B-B14F-4D97-AF65-F5344CB8AC3E}">
-        <p14:creationId xmlns:p14="http://schemas.microsoft.com/office/powerpoint/2010/main" val="2246854455"/>
+        <p14:creationId xmlns:p14="http://schemas.microsoft.com/office/powerpoint/2010/main" val="4138903544"/>
       </p:ext>
     </p:extLst>
   </p:cSld>
@@ -1757,11 +1672,7 @@
           <a:bodyPr/>
           <a:lstStyle/>
           <a:p>
-            <a:r>
-              <a:rPr lang="en-US" dirty="0"/>
-              <a:t>This is what we call a fixed effects model</a:t>
-            </a:r>
-            <a:endParaRPr lang="en-CH" dirty="0"/>
+            <a:endParaRPr lang="en-US" dirty="0"/>
           </a:p>
         </p:txBody>
       </p:sp>
@@ -1780,9 +1691,9 @@
           <a:bodyPr/>
           <a:lstStyle/>
           <a:p>
-            <a:fld id="{E6820292-1CE7-4EA0-B18B-88DA866A7021}" type="slidenum">
+            <a:fld id="{F4A5E487-4208-43B4-82B3-E72BE32A6318}" type="slidenum">
               <a:rPr lang="en-CH" smtClean="0"/>
-              <a:t>7</a:t>
+              <a:t>10</a:t>
             </a:fld>
             <a:endParaRPr lang="en-CH"/>
           </a:p>
@@ -1791,7 +1702,7 @@
     </p:spTree>
     <p:extLst>
       <p:ext uri="{BB962C8B-B14F-4D97-AF65-F5344CB8AC3E}">
-        <p14:creationId xmlns:p14="http://schemas.microsoft.com/office/powerpoint/2010/main" val="4138903544"/>
+        <p14:creationId xmlns:p14="http://schemas.microsoft.com/office/powerpoint/2010/main" val="2518427544"/>
       </p:ext>
     </p:extLst>
   </p:cSld>
@@ -1845,7 +1756,7 @@
           <a:bodyPr/>
           <a:lstStyle/>
           <a:p>
-            <a:endParaRPr lang="en-US" dirty="0"/>
+            <a:endParaRPr lang="en-CH" dirty="0"/>
           </a:p>
         </p:txBody>
       </p:sp>
@@ -1864,9 +1775,9 @@
           <a:bodyPr/>
           <a:lstStyle/>
           <a:p>
-            <a:fld id="{F4A5E487-4208-43B4-82B3-E72BE32A6318}" type="slidenum">
+            <a:fld id="{E6820292-1CE7-4EA0-B18B-88DA866A7021}" type="slidenum">
               <a:rPr lang="en-CH" smtClean="0"/>
-              <a:t>11</a:t>
+              <a:t>18</a:t>
             </a:fld>
             <a:endParaRPr lang="en-CH"/>
           </a:p>
@@ -1875,7 +1786,7 @@
     </p:spTree>
     <p:extLst>
       <p:ext uri="{BB962C8B-B14F-4D97-AF65-F5344CB8AC3E}">
-        <p14:creationId xmlns:p14="http://schemas.microsoft.com/office/powerpoint/2010/main" val="2518427544"/>
+        <p14:creationId xmlns:p14="http://schemas.microsoft.com/office/powerpoint/2010/main" val="1962853572"/>
       </p:ext>
     </p:extLst>
   </p:cSld>
@@ -1929,7 +1840,7 @@
           <a:bodyPr/>
           <a:lstStyle/>
           <a:p>
-            <a:endParaRPr lang="en-CH" dirty="0"/>
+            <a:endParaRPr lang="en-US" dirty="0"/>
           </a:p>
         </p:txBody>
       </p:sp>
@@ -1948,7 +1859,7 @@
           <a:bodyPr/>
           <a:lstStyle/>
           <a:p>
-            <a:fld id="{E6820292-1CE7-4EA0-B18B-88DA866A7021}" type="slidenum">
+            <a:fld id="{F4A5E487-4208-43B4-82B3-E72BE32A6318}" type="slidenum">
               <a:rPr lang="en-CH" smtClean="0"/>
               <a:t>19</a:t>
             </a:fld>
@@ -1959,7 +1870,7 @@
     </p:spTree>
     <p:extLst>
       <p:ext uri="{BB962C8B-B14F-4D97-AF65-F5344CB8AC3E}">
-        <p14:creationId xmlns:p14="http://schemas.microsoft.com/office/powerpoint/2010/main" val="1962853572"/>
+        <p14:creationId xmlns:p14="http://schemas.microsoft.com/office/powerpoint/2010/main" val="3742603794"/>
       </p:ext>
     </p:extLst>
   </p:cSld>
@@ -2043,7 +1954,7 @@
     </p:spTree>
     <p:extLst>
       <p:ext uri="{BB962C8B-B14F-4D97-AF65-F5344CB8AC3E}">
-        <p14:creationId xmlns:p14="http://schemas.microsoft.com/office/powerpoint/2010/main" val="3742603794"/>
+        <p14:creationId xmlns:p14="http://schemas.microsoft.com/office/powerpoint/2010/main" val="1717934544"/>
       </p:ext>
     </p:extLst>
   </p:cSld>
@@ -2127,7 +2038,7 @@
     </p:spTree>
     <p:extLst>
       <p:ext uri="{BB962C8B-B14F-4D97-AF65-F5344CB8AC3E}">
-        <p14:creationId xmlns:p14="http://schemas.microsoft.com/office/powerpoint/2010/main" val="1717934544"/>
+        <p14:creationId xmlns:p14="http://schemas.microsoft.com/office/powerpoint/2010/main" val="2697703667"/>
       </p:ext>
     </p:extLst>
   </p:cSld>
@@ -2181,7 +2092,7 @@
           <a:bodyPr/>
           <a:lstStyle/>
           <a:p>
-            <a:endParaRPr lang="en-US" dirty="0"/>
+            <a:endParaRPr lang="en-CH" dirty="0"/>
           </a:p>
         </p:txBody>
       </p:sp>
@@ -2200,9 +2111,9 @@
           <a:bodyPr/>
           <a:lstStyle/>
           <a:p>
-            <a:fld id="{F4A5E487-4208-43B4-82B3-E72BE32A6318}" type="slidenum">
+            <a:fld id="{E6820292-1CE7-4EA0-B18B-88DA866A7021}" type="slidenum">
               <a:rPr lang="en-CH" smtClean="0"/>
-              <a:t>22</a:t>
+              <a:t>23</a:t>
             </a:fld>
             <a:endParaRPr lang="en-CH"/>
           </a:p>
@@ -2211,7 +2122,7 @@
     </p:spTree>
     <p:extLst>
       <p:ext uri="{BB962C8B-B14F-4D97-AF65-F5344CB8AC3E}">
-        <p14:creationId xmlns:p14="http://schemas.microsoft.com/office/powerpoint/2010/main" val="2697703667"/>
+        <p14:creationId xmlns:p14="http://schemas.microsoft.com/office/powerpoint/2010/main" val="309754034"/>
       </p:ext>
     </p:extLst>
   </p:cSld>
@@ -2265,6 +2176,10 @@
           <a:bodyPr/>
           <a:lstStyle/>
           <a:p>
+            <a:r>
+              <a:rPr lang="en-US" dirty="0"/>
+              <a:t>Today, we are going to launch cats in the air. Some days ago, two cats showed up on our doorstep and told us that they are magic—because they could fall from any distance and remain unscathed. These self-proclaimed magic cats bragged about how they learned a simple transformation that allows them to soften their fall. Instead of falling like normal cats, they fall by half of their current distance from the ground every second.</a:t>
+            </a:r>
             <a:endParaRPr lang="en-CH" dirty="0"/>
           </a:p>
         </p:txBody>
@@ -2284,9 +2199,9 @@
           <a:bodyPr/>
           <a:lstStyle/>
           <a:p>
-            <a:fld id="{E6820292-1CE7-4EA0-B18B-88DA866A7021}" type="slidenum">
+            <a:fld id="{F4A5E487-4208-43B4-82B3-E72BE32A6318}" type="slidenum">
               <a:rPr lang="en-CH" smtClean="0"/>
-              <a:t>24</a:t>
+              <a:t>27</a:t>
             </a:fld>
             <a:endParaRPr lang="en-CH"/>
           </a:p>
@@ -2295,7 +2210,7 @@
     </p:spTree>
     <p:extLst>
       <p:ext uri="{BB962C8B-B14F-4D97-AF65-F5344CB8AC3E}">
-        <p14:creationId xmlns:p14="http://schemas.microsoft.com/office/powerpoint/2010/main" val="309754034"/>
+        <p14:creationId xmlns:p14="http://schemas.microsoft.com/office/powerpoint/2010/main" val="2494440960"/>
       </p:ext>
     </p:extLst>
   </p:cSld>
@@ -2454,7 +2369,7 @@
           <a:p>
             <a:fld id="{DF37AE19-736D-4DED-8A34-1B4308634605}" type="datetimeFigureOut">
               <a:rPr lang="en-CH" smtClean="0"/>
-              <a:t>01.10.2026</a:t>
+              <a:t>05.10.2026</a:t>
             </a:fld>
             <a:endParaRPr lang="en-CH"/>
           </a:p>
@@ -2654,7 +2569,7 @@
           <a:p>
             <a:fld id="{DF37AE19-736D-4DED-8A34-1B4308634605}" type="datetimeFigureOut">
               <a:rPr lang="en-CH" smtClean="0"/>
-              <a:t>01.10.2026</a:t>
+              <a:t>05.10.2026</a:t>
             </a:fld>
             <a:endParaRPr lang="en-CH"/>
           </a:p>
@@ -2864,7 +2779,7 @@
           <a:p>
             <a:fld id="{DF37AE19-736D-4DED-8A34-1B4308634605}" type="datetimeFigureOut">
               <a:rPr lang="en-CH" smtClean="0"/>
-              <a:t>01.10.2026</a:t>
+              <a:t>05.10.2026</a:t>
             </a:fld>
             <a:endParaRPr lang="en-CH"/>
           </a:p>
@@ -3064,7 +2979,7 @@
           <a:p>
             <a:fld id="{DF37AE19-736D-4DED-8A34-1B4308634605}" type="datetimeFigureOut">
               <a:rPr lang="en-CH" smtClean="0"/>
-              <a:t>01.10.2026</a:t>
+              <a:t>05.10.2026</a:t>
             </a:fld>
             <a:endParaRPr lang="en-CH"/>
           </a:p>
@@ -3340,7 +3255,7 @@
           <a:p>
             <a:fld id="{DF37AE19-736D-4DED-8A34-1B4308634605}" type="datetimeFigureOut">
               <a:rPr lang="en-CH" smtClean="0"/>
-              <a:t>01.10.2026</a:t>
+              <a:t>05.10.2026</a:t>
             </a:fld>
             <a:endParaRPr lang="en-CH"/>
           </a:p>
@@ -3608,7 +3523,7 @@
           <a:p>
             <a:fld id="{DF37AE19-736D-4DED-8A34-1B4308634605}" type="datetimeFigureOut">
               <a:rPr lang="en-CH" smtClean="0"/>
-              <a:t>01.10.2026</a:t>
+              <a:t>05.10.2026</a:t>
             </a:fld>
             <a:endParaRPr lang="en-CH"/>
           </a:p>
@@ -4023,7 +3938,7 @@
           <a:p>
             <a:fld id="{DF37AE19-736D-4DED-8A34-1B4308634605}" type="datetimeFigureOut">
               <a:rPr lang="en-CH" smtClean="0"/>
-              <a:t>01.10.2026</a:t>
+              <a:t>05.10.2026</a:t>
             </a:fld>
             <a:endParaRPr lang="en-CH"/>
           </a:p>
@@ -4165,7 +4080,7 @@
           <a:p>
             <a:fld id="{DF37AE19-736D-4DED-8A34-1B4308634605}" type="datetimeFigureOut">
               <a:rPr lang="en-CH" smtClean="0"/>
-              <a:t>01.10.2026</a:t>
+              <a:t>05.10.2026</a:t>
             </a:fld>
             <a:endParaRPr lang="en-CH"/>
           </a:p>
@@ -4278,7 +4193,7 @@
           <a:p>
             <a:fld id="{DF37AE19-736D-4DED-8A34-1B4308634605}" type="datetimeFigureOut">
               <a:rPr lang="en-CH" smtClean="0"/>
-              <a:t>01.10.2026</a:t>
+              <a:t>05.10.2026</a:t>
             </a:fld>
             <a:endParaRPr lang="en-CH"/>
           </a:p>
@@ -4591,7 +4506,7 @@
           <a:p>
             <a:fld id="{DF37AE19-736D-4DED-8A34-1B4308634605}" type="datetimeFigureOut">
               <a:rPr lang="en-CH" smtClean="0"/>
-              <a:t>01.10.2026</a:t>
+              <a:t>05.10.2026</a:t>
             </a:fld>
             <a:endParaRPr lang="en-CH"/>
           </a:p>
@@ -4880,7 +4795,7 @@
           <a:p>
             <a:fld id="{DF37AE19-736D-4DED-8A34-1B4308634605}" type="datetimeFigureOut">
               <a:rPr lang="en-CH" smtClean="0"/>
-              <a:t>01.10.2026</a:t>
+              <a:t>05.10.2026</a:t>
             </a:fld>
             <a:endParaRPr lang="en-CH"/>
           </a:p>
@@ -5123,7 +5038,7 @@
           <a:p>
             <a:fld id="{DF37AE19-736D-4DED-8A34-1B4308634605}" type="datetimeFigureOut">
               <a:rPr lang="en-CH" smtClean="0"/>
-              <a:t>01.10.2026</a:t>
+              <a:t>05.10.2026</a:t>
             </a:fld>
             <a:endParaRPr lang="en-CH"/>
           </a:p>
@@ -5944,579 +5859,6 @@
   <p:cSld>
     <p:spTree>
       <p:nvGrpSpPr>
-        <p:cNvPr id="1" name="">
-          <a:extLst>
-            <a:ext uri="{FF2B5EF4-FFF2-40B4-BE49-F238E27FC236}">
-              <a16:creationId xmlns:a16="http://schemas.microsoft.com/office/drawing/2014/main" id="{CB36E30A-682D-8103-5379-A4C332366FF6}"/>
-            </a:ext>
-          </a:extLst>
-        </p:cNvPr>
-        <p:cNvGrpSpPr/>
-        <p:nvPr/>
-      </p:nvGrpSpPr>
-      <p:grpSpPr>
-        <a:xfrm>
-          <a:off x="0" y="0"/>
-          <a:ext cx="0" cy="0"/>
-          <a:chOff x="0" y="0"/>
-          <a:chExt cx="0" cy="0"/>
-        </a:xfrm>
-      </p:grpSpPr>
-      <p:sp>
-        <p:nvSpPr>
-          <p:cNvPr id="2" name="Title 1">
-            <a:extLst>
-              <a:ext uri="{FF2B5EF4-FFF2-40B4-BE49-F238E27FC236}">
-                <a16:creationId xmlns:a16="http://schemas.microsoft.com/office/drawing/2014/main" id="{EE2A2004-6EAA-D504-07C3-671634B203F6}"/>
-              </a:ext>
-            </a:extLst>
-          </p:cNvPr>
-          <p:cNvSpPr>
-            <a:spLocks noGrp="1"/>
-          </p:cNvSpPr>
-          <p:nvPr>
-            <p:ph type="title"/>
-          </p:nvPr>
-        </p:nvSpPr>
-        <p:spPr/>
-        <p:txBody>
-          <a:bodyPr/>
-          <a:lstStyle/>
-          <a:p>
-            <a:r>
-              <a:rPr lang="en-US" dirty="0"/>
-              <a:t>What if people actually differ?</a:t>
-            </a:r>
-            <a:endParaRPr lang="en-CH" dirty="0"/>
-          </a:p>
-        </p:txBody>
-      </p:sp>
-      <p:sp>
-        <p:nvSpPr>
-          <p:cNvPr id="3" name="Content Placeholder 2">
-            <a:extLst>
-              <a:ext uri="{FF2B5EF4-FFF2-40B4-BE49-F238E27FC236}">
-                <a16:creationId xmlns:a16="http://schemas.microsoft.com/office/drawing/2014/main" id="{B7A7C5E4-AFF0-E246-FB42-D417224191EE}"/>
-              </a:ext>
-            </a:extLst>
-          </p:cNvPr>
-          <p:cNvSpPr>
-            <a:spLocks noGrp="1"/>
-          </p:cNvSpPr>
-          <p:nvPr>
-            <p:ph idx="1"/>
-          </p:nvPr>
-        </p:nvSpPr>
-        <p:spPr>
-          <a:xfrm>
-            <a:off x="838200" y="1825625"/>
-            <a:ext cx="10515600" cy="2024132"/>
-          </a:xfrm>
-        </p:spPr>
-        <p:txBody>
-          <a:bodyPr>
-            <a:normAutofit/>
-          </a:bodyPr>
-          <a:lstStyle/>
-          <a:p>
-            <a:pPr marL="0" indent="0">
-              <a:buNone/>
-            </a:pPr>
-            <a:r>
-              <a:rPr lang="en-US" b="1" dirty="0"/>
-              <a:t>What do we need to change in this model?</a:t>
-            </a:r>
-            <a:endParaRPr lang="en-CH" b="1" dirty="0"/>
-          </a:p>
-        </p:txBody>
-      </p:sp>
-      <mc:AlternateContent xmlns:mc="http://schemas.openxmlformats.org/markup-compatibility/2006" xmlns:a14="http://schemas.microsoft.com/office/drawing/2010/main">
-        <mc:Choice Requires="a14">
-          <p:sp>
-            <p:nvSpPr>
-              <p:cNvPr id="15" name="TextBox 14">
-                <a:extLst>
-                  <a:ext uri="{FF2B5EF4-FFF2-40B4-BE49-F238E27FC236}">
-                    <a16:creationId xmlns:a16="http://schemas.microsoft.com/office/drawing/2014/main" id="{6699F381-15BB-1C9F-3199-94B9FF383858}"/>
-                  </a:ext>
-                </a:extLst>
-              </p:cNvPr>
-              <p:cNvSpPr txBox="1"/>
-              <p:nvPr/>
-            </p:nvSpPr>
-            <p:spPr>
-              <a:xfrm>
-                <a:off x="3741401" y="3335706"/>
-                <a:ext cx="5229317" cy="514051"/>
-              </a:xfrm>
-              <a:prstGeom prst="rect">
-                <a:avLst/>
-              </a:prstGeom>
-              <a:noFill/>
-            </p:spPr>
-            <p:txBody>
-              <a:bodyPr wrap="none" lIns="0" tIns="0" rIns="0" bIns="0" rtlCol="0">
-                <a:spAutoFit/>
-              </a:bodyPr>
-              <a:lstStyle/>
-              <a:p>
-                <a:pPr/>
-                <a14:m>
-                  <m:oMathPara xmlns:m="http://schemas.openxmlformats.org/officeDocument/2006/math">
-                    <m:oMath>
-                      <m:sSub>
-                        <m:sSubPr>
-                          <m:ctrlPr>
-                            <a:rPr lang="en-US" sz="3200" b="0" i="1" smtClean="0">
-                              <a:latin typeface="Cambria Math" panose="02040503050406030204" pitchFamily="18" charset="0"/>
-                            </a:rPr>
-                          </m:ctrlPr>
-                        </m:sSubPr>
-                        <m:e>
-                          <m:r>
-                            <a:rPr lang="en-US" sz="3200" b="0" i="1" smtClean="0">
-                              <a:latin typeface="Cambria Math" panose="02040503050406030204" pitchFamily="18" charset="0"/>
-                            </a:rPr>
-                            <m:t>𝑌</m:t>
-                          </m:r>
-                        </m:e>
-                        <m:sub>
-                          <m:r>
-                            <a:rPr lang="en-US" sz="3200" b="0" i="1" smtClean="0">
-                              <a:latin typeface="Cambria Math" panose="02040503050406030204" pitchFamily="18" charset="0"/>
-                            </a:rPr>
-                            <m:t>𝑖</m:t>
-                          </m:r>
-                          <m:r>
-                            <a:rPr lang="en-US" sz="3200" b="0" i="1" smtClean="0">
-                              <a:latin typeface="Cambria Math" panose="02040503050406030204" pitchFamily="18" charset="0"/>
-                            </a:rPr>
-                            <m:t>,</m:t>
-                          </m:r>
-                          <m:r>
-                            <a:rPr lang="en-US" sz="3200" b="0" i="1" smtClean="0">
-                              <a:latin typeface="Cambria Math" panose="02040503050406030204" pitchFamily="18" charset="0"/>
-                            </a:rPr>
-                            <m:t>𝑡</m:t>
-                          </m:r>
-                        </m:sub>
-                      </m:sSub>
-                      <m:r>
-                        <a:rPr lang="en-US" sz="3200" b="0" i="1" smtClean="0">
-                          <a:latin typeface="Cambria Math" panose="02040503050406030204" pitchFamily="18" charset="0"/>
-                        </a:rPr>
-                        <m:t>=</m:t>
-                      </m:r>
-                      <m:sSub>
-                        <m:sSubPr>
-                          <m:ctrlPr>
-                            <a:rPr lang="en-US" sz="3200" i="1">
-                              <a:latin typeface="Cambria Math" panose="02040503050406030204" pitchFamily="18" charset="0"/>
-                            </a:rPr>
-                          </m:ctrlPr>
-                        </m:sSubPr>
-                        <m:e>
-                          <m:r>
-                            <a:rPr lang="en-US" sz="3200" i="1">
-                              <a:latin typeface="Cambria Math" panose="02040503050406030204" pitchFamily="18" charset="0"/>
-                            </a:rPr>
-                            <m:t>𝛽</m:t>
-                          </m:r>
-                        </m:e>
-                        <m:sub>
-                          <m:r>
-                            <a:rPr lang="en-US" sz="3200" b="0" i="1" smtClean="0">
-                              <a:latin typeface="Cambria Math" panose="02040503050406030204" pitchFamily="18" charset="0"/>
-                            </a:rPr>
-                            <m:t>0</m:t>
-                          </m:r>
-                          <m:r>
-                            <a:rPr lang="en-US" sz="3200" b="0" i="1" smtClean="0">
-                              <a:solidFill>
-                                <a:srgbClr val="FF0000"/>
-                              </a:solidFill>
-                              <a:latin typeface="Cambria Math" panose="02040503050406030204" pitchFamily="18" charset="0"/>
-                            </a:rPr>
-                            <m:t>𝑖</m:t>
-                          </m:r>
-                        </m:sub>
-                      </m:sSub>
-                      <m:r>
-                        <a:rPr lang="en-US" sz="3200" b="0" i="1" smtClean="0">
-                          <a:latin typeface="Cambria Math" panose="02040503050406030204" pitchFamily="18" charset="0"/>
-                        </a:rPr>
-                        <m:t>+</m:t>
-                      </m:r>
-                      <m:sSub>
-                        <m:sSubPr>
-                          <m:ctrlPr>
-                            <a:rPr lang="en-US" sz="3200" i="1">
-                              <a:latin typeface="Cambria Math" panose="02040503050406030204" pitchFamily="18" charset="0"/>
-                            </a:rPr>
-                          </m:ctrlPr>
-                        </m:sSubPr>
-                        <m:e>
-                          <m:r>
-                            <a:rPr lang="en-US" sz="3200" i="1">
-                              <a:latin typeface="Cambria Math" panose="02040503050406030204" pitchFamily="18" charset="0"/>
-                            </a:rPr>
-                            <m:t>𝛽</m:t>
-                          </m:r>
-                        </m:e>
-                        <m:sub>
-                          <m:r>
-                            <a:rPr lang="en-US" sz="3200" b="0" i="1" smtClean="0">
-                              <a:latin typeface="Cambria Math" panose="02040503050406030204" pitchFamily="18" charset="0"/>
-                            </a:rPr>
-                            <m:t>1</m:t>
-                          </m:r>
-                          <m:r>
-                            <a:rPr lang="en-US" sz="3200" b="0" i="1" smtClean="0">
-                              <a:solidFill>
-                                <a:srgbClr val="FF0000"/>
-                              </a:solidFill>
-                              <a:latin typeface="Cambria Math" panose="02040503050406030204" pitchFamily="18" charset="0"/>
-                            </a:rPr>
-                            <m:t>𝑖</m:t>
-                          </m:r>
-                        </m:sub>
-                      </m:sSub>
-                      <m:r>
-                        <a:rPr lang="en-US" sz="3200" b="0" i="1" smtClean="0">
-                          <a:latin typeface="Cambria Math" panose="02040503050406030204" pitchFamily="18" charset="0"/>
-                        </a:rPr>
-                        <m:t>∗</m:t>
-                      </m:r>
-                      <m:r>
-                        <a:rPr lang="en-US" sz="3200" b="0" i="1" smtClean="0">
-                          <a:latin typeface="Cambria Math" panose="02040503050406030204" pitchFamily="18" charset="0"/>
-                        </a:rPr>
-                        <m:t>𝑡𝑖𝑚</m:t>
-                      </m:r>
-                      <m:sSub>
-                        <m:sSubPr>
-                          <m:ctrlPr>
-                            <a:rPr lang="en-US" sz="3200" b="0" i="1" smtClean="0">
-                              <a:latin typeface="Cambria Math" panose="02040503050406030204" pitchFamily="18" charset="0"/>
-                            </a:rPr>
-                          </m:ctrlPr>
-                        </m:sSubPr>
-                        <m:e>
-                          <m:r>
-                            <a:rPr lang="en-US" sz="3200" b="0" i="1" smtClean="0">
-                              <a:latin typeface="Cambria Math" panose="02040503050406030204" pitchFamily="18" charset="0"/>
-                            </a:rPr>
-                            <m:t>𝑒</m:t>
-                          </m:r>
-                        </m:e>
-                        <m:sub>
-                          <m:r>
-                            <a:rPr lang="en-US" sz="3200" b="0" i="1" smtClean="0">
-                              <a:latin typeface="Cambria Math" panose="02040503050406030204" pitchFamily="18" charset="0"/>
-                            </a:rPr>
-                            <m:t>𝑖</m:t>
-                          </m:r>
-                          <m:r>
-                            <a:rPr lang="en-US" sz="3200" b="0" i="1" smtClean="0">
-                              <a:latin typeface="Cambria Math" panose="02040503050406030204" pitchFamily="18" charset="0"/>
-                            </a:rPr>
-                            <m:t>,</m:t>
-                          </m:r>
-                          <m:r>
-                            <a:rPr lang="en-US" sz="3200" b="0" i="1" smtClean="0">
-                              <a:latin typeface="Cambria Math" panose="02040503050406030204" pitchFamily="18" charset="0"/>
-                            </a:rPr>
-                            <m:t>𝑡</m:t>
-                          </m:r>
-                        </m:sub>
-                      </m:sSub>
-                      <m:r>
-                        <a:rPr lang="en-US" sz="3200" b="0" i="1" smtClean="0">
-                          <a:latin typeface="Cambria Math" panose="02040503050406030204" pitchFamily="18" charset="0"/>
-                        </a:rPr>
-                        <m:t>+</m:t>
-                      </m:r>
-                      <m:sSub>
-                        <m:sSubPr>
-                          <m:ctrlPr>
-                            <a:rPr lang="en-US" sz="3200" b="0" i="1" smtClean="0">
-                              <a:latin typeface="Cambria Math" panose="02040503050406030204" pitchFamily="18" charset="0"/>
-                            </a:rPr>
-                          </m:ctrlPr>
-                        </m:sSubPr>
-                        <m:e>
-                          <m:r>
-                            <a:rPr lang="en-US" sz="3200" b="0" i="1" smtClean="0">
-                              <a:latin typeface="Cambria Math" panose="02040503050406030204" pitchFamily="18" charset="0"/>
-                            </a:rPr>
-                            <m:t>𝜖</m:t>
-                          </m:r>
-                        </m:e>
-                        <m:sub>
-                          <m:r>
-                            <a:rPr lang="en-US" sz="3200" b="0" i="1" smtClean="0">
-                              <a:latin typeface="Cambria Math" panose="02040503050406030204" pitchFamily="18" charset="0"/>
-                            </a:rPr>
-                            <m:t>𝑖</m:t>
-                          </m:r>
-                          <m:r>
-                            <a:rPr lang="en-US" sz="3200" b="0" i="1" smtClean="0">
-                              <a:latin typeface="Cambria Math" panose="02040503050406030204" pitchFamily="18" charset="0"/>
-                            </a:rPr>
-                            <m:t>,</m:t>
-                          </m:r>
-                          <m:r>
-                            <a:rPr lang="en-US" sz="3200" b="0" i="1" smtClean="0">
-                              <a:latin typeface="Cambria Math" panose="02040503050406030204" pitchFamily="18" charset="0"/>
-                            </a:rPr>
-                            <m:t>𝑡</m:t>
-                          </m:r>
-                        </m:sub>
-                      </m:sSub>
-                    </m:oMath>
-                  </m:oMathPara>
-                </a14:m>
-                <a:endParaRPr lang="en-US" sz="3200" b="0" dirty="0"/>
-              </a:p>
-            </p:txBody>
-          </p:sp>
-        </mc:Choice>
-        <mc:Fallback xmlns="">
-          <p:sp>
-            <p:nvSpPr>
-              <p:cNvPr id="15" name="TextBox 14">
-                <a:extLst>
-                  <a:ext uri="{FF2B5EF4-FFF2-40B4-BE49-F238E27FC236}">
-                    <a16:creationId xmlns:a16="http://schemas.microsoft.com/office/drawing/2014/main" id="{6699F381-15BB-1C9F-3199-94B9FF383858}"/>
-                  </a:ext>
-                </a:extLst>
-              </p:cNvPr>
-              <p:cNvSpPr txBox="1">
-                <a:spLocks noRot="1" noChangeAspect="1" noMove="1" noResize="1" noEditPoints="1" noAdjustHandles="1" noChangeArrowheads="1" noChangeShapeType="1" noTextEdit="1"/>
-              </p:cNvSpPr>
-              <p:nvPr/>
-            </p:nvSpPr>
-            <p:spPr>
-              <a:xfrm>
-                <a:off x="3741401" y="3335706"/>
-                <a:ext cx="5229317" cy="514051"/>
-              </a:xfrm>
-              <a:prstGeom prst="rect">
-                <a:avLst/>
-              </a:prstGeom>
-              <a:blipFill>
-                <a:blip r:embed="rId2"/>
-                <a:stretch>
-                  <a:fillRect/>
-                </a:stretch>
-              </a:blipFill>
-            </p:spPr>
-            <p:txBody>
-              <a:bodyPr/>
-              <a:lstStyle/>
-              <a:p>
-                <a:r>
-                  <a:rPr lang="en-US">
-                    <a:noFill/>
-                  </a:rPr>
-                  <a:t> </a:t>
-                </a:r>
-              </a:p>
-            </p:txBody>
-          </p:sp>
-        </mc:Fallback>
-      </mc:AlternateContent>
-      <mc:AlternateContent xmlns:mc="http://schemas.openxmlformats.org/markup-compatibility/2006" xmlns:a14="http://schemas.microsoft.com/office/drawing/2010/main">
-        <mc:Choice Requires="a14">
-          <p:sp>
-            <p:nvSpPr>
-              <p:cNvPr id="17" name="TextBox 16">
-                <a:extLst>
-                  <a:ext uri="{FF2B5EF4-FFF2-40B4-BE49-F238E27FC236}">
-                    <a16:creationId xmlns:a16="http://schemas.microsoft.com/office/drawing/2014/main" id="{7AF3CC1A-3145-6621-D288-52732757D7EA}"/>
-                  </a:ext>
-                </a:extLst>
-              </p:cNvPr>
-              <p:cNvSpPr txBox="1"/>
-              <p:nvPr/>
-            </p:nvSpPr>
-            <p:spPr>
-              <a:xfrm>
-                <a:off x="5042302" y="4171790"/>
-                <a:ext cx="2167966" cy="458459"/>
-              </a:xfrm>
-              <a:prstGeom prst="rect">
-                <a:avLst/>
-              </a:prstGeom>
-              <a:noFill/>
-            </p:spPr>
-            <p:txBody>
-              <a:bodyPr wrap="none" lIns="0" tIns="0" rIns="0" bIns="0" rtlCol="0">
-                <a:spAutoFit/>
-              </a:bodyPr>
-              <a:lstStyle/>
-              <a:p>
-                <a:pPr/>
-                <a14:m>
-                  <m:oMathPara xmlns:m="http://schemas.openxmlformats.org/officeDocument/2006/math">
-                    <m:oMath>
-                      <m:sSub>
-                        <m:sSubPr>
-                          <m:ctrlPr>
-                            <a:rPr lang="en-US" sz="2800" b="0" i="1" smtClean="0">
-                              <a:latin typeface="Cambria Math" panose="02040503050406030204" pitchFamily="18" charset="0"/>
-                            </a:rPr>
-                          </m:ctrlPr>
-                        </m:sSubPr>
-                        <m:e>
-                          <m:r>
-                            <a:rPr lang="en-US" sz="2800" b="0" i="1" smtClean="0">
-                              <a:latin typeface="Cambria Math" panose="02040503050406030204" pitchFamily="18" charset="0"/>
-                            </a:rPr>
-                            <m:t>𝜖</m:t>
-                          </m:r>
-                        </m:e>
-                        <m:sub>
-                          <m:r>
-                            <a:rPr lang="en-US" sz="2800" b="0" i="1" smtClean="0">
-                              <a:latin typeface="Cambria Math" panose="02040503050406030204" pitchFamily="18" charset="0"/>
-                            </a:rPr>
-                            <m:t>𝑖</m:t>
-                          </m:r>
-                          <m:r>
-                            <a:rPr lang="en-US" sz="2800" b="0" i="1" smtClean="0">
-                              <a:latin typeface="Cambria Math" panose="02040503050406030204" pitchFamily="18" charset="0"/>
-                            </a:rPr>
-                            <m:t>,</m:t>
-                          </m:r>
-                          <m:r>
-                            <a:rPr lang="en-US" sz="2800" b="0" i="1" smtClean="0">
-                              <a:latin typeface="Cambria Math" panose="02040503050406030204" pitchFamily="18" charset="0"/>
-                            </a:rPr>
-                            <m:t>𝑡</m:t>
-                          </m:r>
-                        </m:sub>
-                      </m:sSub>
-                      <m:r>
-                        <a:rPr lang="en-US" sz="2800" b="0" i="1" smtClean="0">
-                          <a:latin typeface="Cambria Math" panose="02040503050406030204" pitchFamily="18" charset="0"/>
-                        </a:rPr>
-                        <m:t>~ </m:t>
-                      </m:r>
-                      <m:r>
-                        <a:rPr lang="en-US" sz="2800" b="0" i="1" smtClean="0">
-                          <a:latin typeface="Cambria Math" panose="02040503050406030204" pitchFamily="18" charset="0"/>
-                        </a:rPr>
-                        <m:t>𝑁</m:t>
-                      </m:r>
-                      <m:r>
-                        <a:rPr lang="en-US" sz="2800" b="0" i="1" smtClean="0">
-                          <a:latin typeface="Cambria Math" panose="02040503050406030204" pitchFamily="18" charset="0"/>
-                        </a:rPr>
-                        <m:t>(0,</m:t>
-                      </m:r>
-                      <m:sSup>
-                        <m:sSupPr>
-                          <m:ctrlPr>
-                            <a:rPr lang="en-US" sz="2800" b="0" i="1" smtClean="0">
-                              <a:latin typeface="Cambria Math" panose="02040503050406030204" pitchFamily="18" charset="0"/>
-                            </a:rPr>
-                          </m:ctrlPr>
-                        </m:sSupPr>
-                        <m:e>
-                          <m:r>
-                            <a:rPr lang="en-US" sz="2800" b="0" i="1" smtClean="0">
-                              <a:latin typeface="Cambria Math" panose="02040503050406030204" pitchFamily="18" charset="0"/>
-                            </a:rPr>
-                            <m:t>𝜎</m:t>
-                          </m:r>
-                        </m:e>
-                        <m:sup>
-                          <m:r>
-                            <a:rPr lang="en-US" sz="2800" b="0" i="1" smtClean="0">
-                              <a:latin typeface="Cambria Math" panose="02040503050406030204" pitchFamily="18" charset="0"/>
-                            </a:rPr>
-                            <m:t>2</m:t>
-                          </m:r>
-                        </m:sup>
-                      </m:sSup>
-                      <m:r>
-                        <a:rPr lang="en-US" sz="2800" b="0" i="1" smtClean="0">
-                          <a:latin typeface="Cambria Math" panose="02040503050406030204" pitchFamily="18" charset="0"/>
-                        </a:rPr>
-                        <m:t>)</m:t>
-                      </m:r>
-                    </m:oMath>
-                  </m:oMathPara>
-                </a14:m>
-                <a:endParaRPr lang="en-CH" sz="2800" dirty="0"/>
-              </a:p>
-            </p:txBody>
-          </p:sp>
-        </mc:Choice>
-        <mc:Fallback xmlns="">
-          <p:sp>
-            <p:nvSpPr>
-              <p:cNvPr id="17" name="TextBox 16">
-                <a:extLst>
-                  <a:ext uri="{FF2B5EF4-FFF2-40B4-BE49-F238E27FC236}">
-                    <a16:creationId xmlns:a16="http://schemas.microsoft.com/office/drawing/2014/main" id="{7AF3CC1A-3145-6621-D288-52732757D7EA}"/>
-                  </a:ext>
-                </a:extLst>
-              </p:cNvPr>
-              <p:cNvSpPr txBox="1">
-                <a:spLocks noRot="1" noChangeAspect="1" noMove="1" noResize="1" noEditPoints="1" noAdjustHandles="1" noChangeArrowheads="1" noChangeShapeType="1" noTextEdit="1"/>
-              </p:cNvSpPr>
-              <p:nvPr/>
-            </p:nvSpPr>
-            <p:spPr>
-              <a:xfrm>
-                <a:off x="5042302" y="4171790"/>
-                <a:ext cx="2167966" cy="458459"/>
-              </a:xfrm>
-              <a:prstGeom prst="rect">
-                <a:avLst/>
-              </a:prstGeom>
-              <a:blipFill>
-                <a:blip r:embed="rId3"/>
-                <a:stretch>
-                  <a:fillRect/>
-                </a:stretch>
-              </a:blipFill>
-            </p:spPr>
-            <p:txBody>
-              <a:bodyPr/>
-              <a:lstStyle/>
-              <a:p>
-                <a:r>
-                  <a:rPr lang="en-US">
-                    <a:noFill/>
-                  </a:rPr>
-                  <a:t> </a:t>
-                </a:r>
-              </a:p>
-            </p:txBody>
-          </p:sp>
-        </mc:Fallback>
-      </mc:AlternateContent>
-    </p:spTree>
-    <p:extLst>
-      <p:ext uri="{BB962C8B-B14F-4D97-AF65-F5344CB8AC3E}">
-        <p14:creationId xmlns:p14="http://schemas.microsoft.com/office/powerpoint/2010/main" val="3462526471"/>
-      </p:ext>
-    </p:extLst>
-  </p:cSld>
-  <p:clrMapOvr>
-    <a:masterClrMapping/>
-  </p:clrMapOvr>
-</p:sld>
-</file>
-
-<file path=ppt/slides/slide11.xml><?xml version="1.0" encoding="utf-8"?>
-<p:sld xmlns:a="http://schemas.openxmlformats.org/drawingml/2006/main" xmlns:r="http://schemas.openxmlformats.org/officeDocument/2006/relationships" xmlns:p="http://schemas.openxmlformats.org/presentationml/2006/main">
-  <p:cSld>
-    <p:spTree>
-      <p:nvGrpSpPr>
         <p:cNvPr id="1" name=""/>
         <p:cNvGrpSpPr/>
         <p:nvPr/>
@@ -6578,7 +5920,7 @@
 </p:sld>
 </file>
 
-<file path=ppt/slides/slide12.xml><?xml version="1.0" encoding="utf-8"?>
+<file path=ppt/slides/slide11.xml><?xml version="1.0" encoding="utf-8"?>
 <p:sld xmlns:a="http://schemas.openxmlformats.org/drawingml/2006/main" xmlns:r="http://schemas.openxmlformats.org/officeDocument/2006/relationships" xmlns:p="http://schemas.openxmlformats.org/presentationml/2006/main">
   <p:cSld>
     <p:spTree>
@@ -6637,7 +5979,7 @@
 </p:sld>
 </file>
 
-<file path=ppt/slides/slide13.xml><?xml version="1.0" encoding="utf-8"?>
+<file path=ppt/slides/slide12.xml><?xml version="1.0" encoding="utf-8"?>
 <p:sld xmlns:a="http://schemas.openxmlformats.org/drawingml/2006/main" xmlns:r="http://schemas.openxmlformats.org/officeDocument/2006/relationships" xmlns:p="http://schemas.openxmlformats.org/presentationml/2006/main">
   <p:cSld>
     <p:spTree>
@@ -6738,7 +6080,7 @@
 </p:sld>
 </file>
 
-<file path=ppt/slides/slide14.xml><?xml version="1.0" encoding="utf-8"?>
+<file path=ppt/slides/slide13.xml><?xml version="1.0" encoding="utf-8"?>
 <p:sld xmlns:a="http://schemas.openxmlformats.org/drawingml/2006/main" xmlns:r="http://schemas.openxmlformats.org/officeDocument/2006/relationships" xmlns:p="http://schemas.openxmlformats.org/presentationml/2006/main">
   <p:cSld>
     <p:spTree>
@@ -6802,7 +6144,7 @@
 </p:sld>
 </file>
 
-<file path=ppt/slides/slide15.xml><?xml version="1.0" encoding="utf-8"?>
+<file path=ppt/slides/slide14.xml><?xml version="1.0" encoding="utf-8"?>
 <p:sld xmlns:a="http://schemas.openxmlformats.org/drawingml/2006/main" xmlns:r="http://schemas.openxmlformats.org/officeDocument/2006/relationships" xmlns:p="http://schemas.openxmlformats.org/presentationml/2006/main">
   <p:cSld>
     <p:spTree>
@@ -6898,7 +6240,7 @@
 </p:sld>
 </file>
 
-<file path=ppt/slides/slide16.xml><?xml version="1.0" encoding="utf-8"?>
+<file path=ppt/slides/slide15.xml><?xml version="1.0" encoding="utf-8"?>
 <p:sld xmlns:a="http://schemas.openxmlformats.org/drawingml/2006/main" xmlns:r="http://schemas.openxmlformats.org/officeDocument/2006/relationships" xmlns:p="http://schemas.openxmlformats.org/presentationml/2006/main">
   <p:cSld>
     <p:spTree>
@@ -8290,7 +7632,7 @@
 </p:sld>
 </file>
 
-<file path=ppt/slides/slide17.xml><?xml version="1.0" encoding="utf-8"?>
+<file path=ppt/slides/slide16.xml><?xml version="1.0" encoding="utf-8"?>
 <p:sld xmlns:a="http://schemas.openxmlformats.org/drawingml/2006/main" xmlns:r="http://schemas.openxmlformats.org/officeDocument/2006/relationships" xmlns:p="http://schemas.openxmlformats.org/presentationml/2006/main">
   <p:cSld>
     <p:spTree>
@@ -9724,7 +9066,7 @@
 </p:sld>
 </file>
 
-<file path=ppt/slides/slide18.xml><?xml version="1.0" encoding="utf-8"?>
+<file path=ppt/slides/slide17.xml><?xml version="1.0" encoding="utf-8"?>
 <p:sld xmlns:a="http://schemas.openxmlformats.org/drawingml/2006/main" xmlns:r="http://schemas.openxmlformats.org/officeDocument/2006/relationships" xmlns:p="http://schemas.openxmlformats.org/presentationml/2006/main">
   <p:cSld>
     <p:spTree>
@@ -11203,7 +10545,7 @@
 </p:sld>
 </file>
 
-<file path=ppt/slides/slide19.xml><?xml version="1.0" encoding="utf-8"?>
+<file path=ppt/slides/slide18.xml><?xml version="1.0" encoding="utf-8"?>
 <p:sld xmlns:a="http://schemas.openxmlformats.org/drawingml/2006/main" xmlns:r="http://schemas.openxmlformats.org/officeDocument/2006/relationships" xmlns:p="http://schemas.openxmlformats.org/presentationml/2006/main">
   <p:cSld>
     <p:spTree>
@@ -11267,73 +10609,7 @@
 </p:sld>
 </file>
 
-<file path=ppt/slides/slide2.xml><?xml version="1.0" encoding="utf-8"?>
-<p:sld xmlns:a="http://schemas.openxmlformats.org/drawingml/2006/main" xmlns:r="http://schemas.openxmlformats.org/officeDocument/2006/relationships" xmlns:p="http://schemas.openxmlformats.org/presentationml/2006/main">
-  <p:cSld>
-    <p:spTree>
-      <p:nvGrpSpPr>
-        <p:cNvPr id="1" name=""/>
-        <p:cNvGrpSpPr/>
-        <p:nvPr/>
-      </p:nvGrpSpPr>
-      <p:grpSpPr>
-        <a:xfrm>
-          <a:off x="0" y="0"/>
-          <a:ext cx="0" cy="0"/>
-          <a:chOff x="0" y="0"/>
-          <a:chExt cx="0" cy="0"/>
-        </a:xfrm>
-      </p:grpSpPr>
-      <p:pic>
-        <p:nvPicPr>
-          <p:cNvPr id="5" name="Picture 4">
-            <a:extLst>
-              <a:ext uri="{FF2B5EF4-FFF2-40B4-BE49-F238E27FC236}">
-                <a16:creationId xmlns:a16="http://schemas.microsoft.com/office/drawing/2014/main" id="{01FA8386-C4C0-2257-7075-BDC911A6E20E}"/>
-              </a:ext>
-            </a:extLst>
-          </p:cNvPr>
-          <p:cNvPicPr>
-            <a:picLocks noChangeAspect="1"/>
-          </p:cNvPicPr>
-          <p:nvPr/>
-        </p:nvPicPr>
-        <p:blipFill>
-          <a:blip r:embed="rId3">
-            <a:extLst>
-              <a:ext uri="{28A0092B-C50C-407E-A947-70E740481C1C}">
-                <a14:useLocalDpi xmlns:a14="http://schemas.microsoft.com/office/drawing/2010/main" val="0"/>
-              </a:ext>
-            </a:extLst>
-          </a:blip>
-          <a:stretch>
-            <a:fillRect/>
-          </a:stretch>
-        </p:blipFill>
-        <p:spPr>
-          <a:xfrm>
-            <a:off x="0" y="125361"/>
-            <a:ext cx="12192000" cy="6607277"/>
-          </a:xfrm>
-          <a:prstGeom prst="rect">
-            <a:avLst/>
-          </a:prstGeom>
-        </p:spPr>
-      </p:pic>
-    </p:spTree>
-    <p:extLst>
-      <p:ext uri="{BB962C8B-B14F-4D97-AF65-F5344CB8AC3E}">
-        <p14:creationId xmlns:p14="http://schemas.microsoft.com/office/powerpoint/2010/main" val="4131601729"/>
-      </p:ext>
-    </p:extLst>
-  </p:cSld>
-  <p:clrMapOvr>
-    <a:masterClrMapping/>
-  </p:clrMapOvr>
-</p:sld>
-</file>
-
-<file path=ppt/slides/slide20.xml><?xml version="1.0" encoding="utf-8"?>
+<file path=ppt/slides/slide19.xml><?xml version="1.0" encoding="utf-8"?>
 <p:sld xmlns:a="http://schemas.openxmlformats.org/drawingml/2006/main" xmlns:r="http://schemas.openxmlformats.org/officeDocument/2006/relationships" xmlns:p="http://schemas.openxmlformats.org/presentationml/2006/main">
   <p:cSld>
     <p:spTree>
@@ -11399,7 +10675,177 @@
 </p:sld>
 </file>
 
-<file path=ppt/slides/slide21.xml><?xml version="1.0" encoding="utf-8"?>
+<file path=ppt/slides/slide2.xml><?xml version="1.0" encoding="utf-8"?>
+<p:sld xmlns:a="http://schemas.openxmlformats.org/drawingml/2006/main" xmlns:r="http://schemas.openxmlformats.org/officeDocument/2006/relationships" xmlns:p="http://schemas.openxmlformats.org/presentationml/2006/main">
+  <p:cSld>
+    <p:spTree>
+      <p:nvGrpSpPr>
+        <p:cNvPr id="1" name=""/>
+        <p:cNvGrpSpPr/>
+        <p:nvPr/>
+      </p:nvGrpSpPr>
+      <p:grpSpPr>
+        <a:xfrm>
+          <a:off x="0" y="0"/>
+          <a:ext cx="0" cy="0"/>
+          <a:chOff x="0" y="0"/>
+          <a:chExt cx="0" cy="0"/>
+        </a:xfrm>
+      </p:grpSpPr>
+      <p:sp>
+        <p:nvSpPr>
+          <p:cNvPr id="2" name="Title 1">
+            <a:extLst>
+              <a:ext uri="{FF2B5EF4-FFF2-40B4-BE49-F238E27FC236}">
+                <a16:creationId xmlns:a16="http://schemas.microsoft.com/office/drawing/2014/main" id="{305628C6-EC2F-28C3-F35B-15921492F3C7}"/>
+              </a:ext>
+            </a:extLst>
+          </p:cNvPr>
+          <p:cNvSpPr>
+            <a:spLocks noGrp="1"/>
+          </p:cNvSpPr>
+          <p:nvPr>
+            <p:ph type="title"/>
+          </p:nvPr>
+        </p:nvSpPr>
+        <p:spPr>
+          <a:xfrm>
+            <a:off x="838200" y="4909457"/>
+            <a:ext cx="10515600" cy="1325563"/>
+          </a:xfrm>
+        </p:spPr>
+        <p:txBody>
+          <a:bodyPr/>
+          <a:lstStyle/>
+          <a:p>
+            <a:r>
+              <a:rPr lang="en-US" dirty="0"/>
+              <a:t>Is therapy going well?</a:t>
+            </a:r>
+            <a:endParaRPr lang="en-CH" dirty="0"/>
+          </a:p>
+        </p:txBody>
+      </p:sp>
+      <p:pic>
+        <p:nvPicPr>
+          <p:cNvPr id="4" name="Picture 3">
+            <a:extLst>
+              <a:ext uri="{FF2B5EF4-FFF2-40B4-BE49-F238E27FC236}">
+                <a16:creationId xmlns:a16="http://schemas.microsoft.com/office/drawing/2014/main" id="{AC678A46-0AF6-71DA-EF97-373403313CE4}"/>
+              </a:ext>
+            </a:extLst>
+          </p:cNvPr>
+          <p:cNvPicPr>
+            <a:picLocks noChangeAspect="1"/>
+          </p:cNvPicPr>
+          <p:nvPr/>
+        </p:nvPicPr>
+        <p:blipFill>
+          <a:blip r:embed="rId2"/>
+          <a:stretch>
+            <a:fillRect/>
+          </a:stretch>
+        </p:blipFill>
+        <p:spPr>
+          <a:xfrm>
+            <a:off x="1600702" y="744210"/>
+            <a:ext cx="8990596" cy="4165247"/>
+          </a:xfrm>
+          <a:prstGeom prst="rect">
+            <a:avLst/>
+          </a:prstGeom>
+        </p:spPr>
+      </p:pic>
+      <p:cxnSp>
+        <p:nvCxnSpPr>
+          <p:cNvPr id="5" name="Straight Connector 4">
+            <a:extLst>
+              <a:ext uri="{FF2B5EF4-FFF2-40B4-BE49-F238E27FC236}">
+                <a16:creationId xmlns:a16="http://schemas.microsoft.com/office/drawing/2014/main" id="{8090753C-18A9-E9FE-7B4A-7A37765C2CAA}"/>
+              </a:ext>
+            </a:extLst>
+          </p:cNvPr>
+          <p:cNvCxnSpPr>
+            <a:cxnSpLocks/>
+          </p:cNvCxnSpPr>
+          <p:nvPr/>
+        </p:nvCxnSpPr>
+        <p:spPr>
+          <a:xfrm>
+            <a:off x="8820150" y="1704975"/>
+            <a:ext cx="0" cy="581025"/>
+          </a:xfrm>
+          <a:prstGeom prst="line">
+            <a:avLst/>
+          </a:prstGeom>
+        </p:spPr>
+        <p:style>
+          <a:lnRef idx="2">
+            <a:schemeClr val="accent1"/>
+          </a:lnRef>
+          <a:fillRef idx="0">
+            <a:schemeClr val="accent1"/>
+          </a:fillRef>
+          <a:effectRef idx="1">
+            <a:schemeClr val="accent1"/>
+          </a:effectRef>
+          <a:fontRef idx="minor">
+            <a:schemeClr val="tx1"/>
+          </a:fontRef>
+        </p:style>
+      </p:cxnSp>
+      <p:cxnSp>
+        <p:nvCxnSpPr>
+          <p:cNvPr id="6" name="Straight Connector 5">
+            <a:extLst>
+              <a:ext uri="{FF2B5EF4-FFF2-40B4-BE49-F238E27FC236}">
+                <a16:creationId xmlns:a16="http://schemas.microsoft.com/office/drawing/2014/main" id="{81F8DC54-5F02-F92E-A5FA-62CA7A30CC3B}"/>
+              </a:ext>
+            </a:extLst>
+          </p:cNvPr>
+          <p:cNvCxnSpPr>
+            <a:cxnSpLocks/>
+          </p:cNvCxnSpPr>
+          <p:nvPr/>
+        </p:nvCxnSpPr>
+        <p:spPr>
+          <a:xfrm>
+            <a:off x="7181850" y="2286000"/>
+            <a:ext cx="1638300" cy="0"/>
+          </a:xfrm>
+          <a:prstGeom prst="line">
+            <a:avLst/>
+          </a:prstGeom>
+        </p:spPr>
+        <p:style>
+          <a:lnRef idx="2">
+            <a:schemeClr val="accent1"/>
+          </a:lnRef>
+          <a:fillRef idx="0">
+            <a:schemeClr val="accent1"/>
+          </a:fillRef>
+          <a:effectRef idx="1">
+            <a:schemeClr val="accent1"/>
+          </a:effectRef>
+          <a:fontRef idx="minor">
+            <a:schemeClr val="tx1"/>
+          </a:fontRef>
+        </p:style>
+      </p:cxnSp>
+    </p:spTree>
+    <p:extLst>
+      <p:ext uri="{BB962C8B-B14F-4D97-AF65-F5344CB8AC3E}">
+        <p14:creationId xmlns:p14="http://schemas.microsoft.com/office/powerpoint/2010/main" val="2381353793"/>
+      </p:ext>
+    </p:extLst>
+  </p:cSld>
+  <p:clrMapOvr>
+    <a:masterClrMapping/>
+  </p:clrMapOvr>
+</p:sld>
+</file>
+
+<file path=ppt/slides/slide20.xml><?xml version="1.0" encoding="utf-8"?>
 <p:sld xmlns:a="http://schemas.openxmlformats.org/drawingml/2006/main" xmlns:r="http://schemas.openxmlformats.org/officeDocument/2006/relationships" xmlns:p="http://schemas.openxmlformats.org/presentationml/2006/main">
   <p:cSld>
     <p:spTree>
@@ -11465,7 +10911,7 @@
 </p:sld>
 </file>
 
-<file path=ppt/slides/slide22.xml><?xml version="1.0" encoding="utf-8"?>
+<file path=ppt/slides/slide21.xml><?xml version="1.0" encoding="utf-8"?>
 <p:sld xmlns:a="http://schemas.openxmlformats.org/drawingml/2006/main" xmlns:r="http://schemas.openxmlformats.org/officeDocument/2006/relationships" xmlns:p="http://schemas.openxmlformats.org/presentationml/2006/main">
   <p:cSld>
     <p:spTree>
@@ -11719,7 +11165,7 @@
 </p:sld>
 </file>
 
-<file path=ppt/slides/slide23.xml><?xml version="1.0" encoding="utf-8"?>
+<file path=ppt/slides/slide22.xml><?xml version="1.0" encoding="utf-8"?>
 <p:sld xmlns:a="http://schemas.openxmlformats.org/drawingml/2006/main" xmlns:r="http://schemas.openxmlformats.org/officeDocument/2006/relationships" xmlns:p="http://schemas.openxmlformats.org/presentationml/2006/main">
   <p:cSld>
     <p:spTree>
@@ -12258,7 +11704,7 @@
 </p:sld>
 </file>
 
-<file path=ppt/slides/slide24.xml><?xml version="1.0" encoding="utf-8"?>
+<file path=ppt/slides/slide23.xml><?xml version="1.0" encoding="utf-8"?>
 <p:sld xmlns:a="http://schemas.openxmlformats.org/drawingml/2006/main" xmlns:r="http://schemas.openxmlformats.org/officeDocument/2006/relationships" xmlns:p="http://schemas.openxmlformats.org/presentationml/2006/main">
   <p:cSld>
     <p:spTree>
@@ -12835,7 +12281,7 @@
 </p:sld>
 </file>
 
-<file path=ppt/slides/slide25.xml><?xml version="1.0" encoding="utf-8"?>
+<file path=ppt/slides/slide24.xml><?xml version="1.0" encoding="utf-8"?>
 <p:sld xmlns:a="http://schemas.openxmlformats.org/drawingml/2006/main" xmlns:r="http://schemas.openxmlformats.org/officeDocument/2006/relationships" xmlns:p="http://schemas.openxmlformats.org/presentationml/2006/main">
   <p:cSld>
     <p:spTree>
@@ -12901,7 +12347,7 @@
 </p:sld>
 </file>
 
-<file path=ppt/slides/slide26.xml><?xml version="1.0" encoding="utf-8"?>
+<file path=ppt/slides/slide25.xml><?xml version="1.0" encoding="utf-8"?>
 <p:sld xmlns:a="http://schemas.openxmlformats.org/drawingml/2006/main" xmlns:r="http://schemas.openxmlformats.org/officeDocument/2006/relationships" xmlns:p="http://schemas.openxmlformats.org/presentationml/2006/main">
   <p:cSld>
     <p:spTree>
@@ -13127,7 +12573,7 @@
 </p:sld>
 </file>
 
-<file path=ppt/slides/slide27.xml><?xml version="1.0" encoding="utf-8"?>
+<file path=ppt/slides/slide26.xml><?xml version="1.0" encoding="utf-8"?>
 <p:sld xmlns:a="http://schemas.openxmlformats.org/drawingml/2006/main" xmlns:r="http://schemas.openxmlformats.org/officeDocument/2006/relationships" xmlns:p="http://schemas.openxmlformats.org/presentationml/2006/main">
   <p:cSld>
     <p:spTree>
@@ -13191,7 +12637,7 @@
 </p:sld>
 </file>
 
-<file path=ppt/slides/slide28.xml><?xml version="1.0" encoding="utf-8"?>
+<file path=ppt/slides/slide27.xml><?xml version="1.0" encoding="utf-8"?>
 <p:sld xmlns:a="http://schemas.openxmlformats.org/drawingml/2006/main" xmlns:r="http://schemas.openxmlformats.org/officeDocument/2006/relationships" xmlns:p="http://schemas.openxmlformats.org/presentationml/2006/main">
   <p:cSld>
     <p:spTree>
@@ -13282,7 +12728,7 @@
 </p:sld>
 </file>
 
-<file path=ppt/slides/slide29.xml><?xml version="1.0" encoding="utf-8"?>
+<file path=ppt/slides/slide28.xml><?xml version="1.0" encoding="utf-8"?>
 <p:sld xmlns:a="http://schemas.openxmlformats.org/drawingml/2006/main" xmlns:r="http://schemas.openxmlformats.org/officeDocument/2006/relationships" xmlns:p="http://schemas.openxmlformats.org/presentationml/2006/main">
   <p:cSld>
     <p:spTree>
@@ -13380,177 +12826,7 @@
 </p:sld>
 </file>
 
-<file path=ppt/slides/slide3.xml><?xml version="1.0" encoding="utf-8"?>
-<p:sld xmlns:a="http://schemas.openxmlformats.org/drawingml/2006/main" xmlns:r="http://schemas.openxmlformats.org/officeDocument/2006/relationships" xmlns:p="http://schemas.openxmlformats.org/presentationml/2006/main">
-  <p:cSld>
-    <p:spTree>
-      <p:nvGrpSpPr>
-        <p:cNvPr id="1" name=""/>
-        <p:cNvGrpSpPr/>
-        <p:nvPr/>
-      </p:nvGrpSpPr>
-      <p:grpSpPr>
-        <a:xfrm>
-          <a:off x="0" y="0"/>
-          <a:ext cx="0" cy="0"/>
-          <a:chOff x="0" y="0"/>
-          <a:chExt cx="0" cy="0"/>
-        </a:xfrm>
-      </p:grpSpPr>
-      <p:sp>
-        <p:nvSpPr>
-          <p:cNvPr id="2" name="Title 1">
-            <a:extLst>
-              <a:ext uri="{FF2B5EF4-FFF2-40B4-BE49-F238E27FC236}">
-                <a16:creationId xmlns:a16="http://schemas.microsoft.com/office/drawing/2014/main" id="{305628C6-EC2F-28C3-F35B-15921492F3C7}"/>
-              </a:ext>
-            </a:extLst>
-          </p:cNvPr>
-          <p:cNvSpPr>
-            <a:spLocks noGrp="1"/>
-          </p:cNvSpPr>
-          <p:nvPr>
-            <p:ph type="title"/>
-          </p:nvPr>
-        </p:nvSpPr>
-        <p:spPr>
-          <a:xfrm>
-            <a:off x="838200" y="4909457"/>
-            <a:ext cx="10515600" cy="1325563"/>
-          </a:xfrm>
-        </p:spPr>
-        <p:txBody>
-          <a:bodyPr/>
-          <a:lstStyle/>
-          <a:p>
-            <a:r>
-              <a:rPr lang="en-US" dirty="0"/>
-              <a:t>Is therapy going well?</a:t>
-            </a:r>
-            <a:endParaRPr lang="en-CH" dirty="0"/>
-          </a:p>
-        </p:txBody>
-      </p:sp>
-      <p:pic>
-        <p:nvPicPr>
-          <p:cNvPr id="4" name="Picture 3">
-            <a:extLst>
-              <a:ext uri="{FF2B5EF4-FFF2-40B4-BE49-F238E27FC236}">
-                <a16:creationId xmlns:a16="http://schemas.microsoft.com/office/drawing/2014/main" id="{AC678A46-0AF6-71DA-EF97-373403313CE4}"/>
-              </a:ext>
-            </a:extLst>
-          </p:cNvPr>
-          <p:cNvPicPr>
-            <a:picLocks noChangeAspect="1"/>
-          </p:cNvPicPr>
-          <p:nvPr/>
-        </p:nvPicPr>
-        <p:blipFill>
-          <a:blip r:embed="rId2"/>
-          <a:stretch>
-            <a:fillRect/>
-          </a:stretch>
-        </p:blipFill>
-        <p:spPr>
-          <a:xfrm>
-            <a:off x="1600702" y="744210"/>
-            <a:ext cx="8990596" cy="4165247"/>
-          </a:xfrm>
-          <a:prstGeom prst="rect">
-            <a:avLst/>
-          </a:prstGeom>
-        </p:spPr>
-      </p:pic>
-      <p:cxnSp>
-        <p:nvCxnSpPr>
-          <p:cNvPr id="5" name="Straight Connector 4">
-            <a:extLst>
-              <a:ext uri="{FF2B5EF4-FFF2-40B4-BE49-F238E27FC236}">
-                <a16:creationId xmlns:a16="http://schemas.microsoft.com/office/drawing/2014/main" id="{8090753C-18A9-E9FE-7B4A-7A37765C2CAA}"/>
-              </a:ext>
-            </a:extLst>
-          </p:cNvPr>
-          <p:cNvCxnSpPr>
-            <a:cxnSpLocks/>
-          </p:cNvCxnSpPr>
-          <p:nvPr/>
-        </p:nvCxnSpPr>
-        <p:spPr>
-          <a:xfrm>
-            <a:off x="8820150" y="1704975"/>
-            <a:ext cx="0" cy="581025"/>
-          </a:xfrm>
-          <a:prstGeom prst="line">
-            <a:avLst/>
-          </a:prstGeom>
-        </p:spPr>
-        <p:style>
-          <a:lnRef idx="2">
-            <a:schemeClr val="accent1"/>
-          </a:lnRef>
-          <a:fillRef idx="0">
-            <a:schemeClr val="accent1"/>
-          </a:fillRef>
-          <a:effectRef idx="1">
-            <a:schemeClr val="accent1"/>
-          </a:effectRef>
-          <a:fontRef idx="minor">
-            <a:schemeClr val="tx1"/>
-          </a:fontRef>
-        </p:style>
-      </p:cxnSp>
-      <p:cxnSp>
-        <p:nvCxnSpPr>
-          <p:cNvPr id="6" name="Straight Connector 5">
-            <a:extLst>
-              <a:ext uri="{FF2B5EF4-FFF2-40B4-BE49-F238E27FC236}">
-                <a16:creationId xmlns:a16="http://schemas.microsoft.com/office/drawing/2014/main" id="{81F8DC54-5F02-F92E-A5FA-62CA7A30CC3B}"/>
-              </a:ext>
-            </a:extLst>
-          </p:cNvPr>
-          <p:cNvCxnSpPr>
-            <a:cxnSpLocks/>
-          </p:cNvCxnSpPr>
-          <p:nvPr/>
-        </p:nvCxnSpPr>
-        <p:spPr>
-          <a:xfrm>
-            <a:off x="7181850" y="2286000"/>
-            <a:ext cx="1638300" cy="0"/>
-          </a:xfrm>
-          <a:prstGeom prst="line">
-            <a:avLst/>
-          </a:prstGeom>
-        </p:spPr>
-        <p:style>
-          <a:lnRef idx="2">
-            <a:schemeClr val="accent1"/>
-          </a:lnRef>
-          <a:fillRef idx="0">
-            <a:schemeClr val="accent1"/>
-          </a:fillRef>
-          <a:effectRef idx="1">
-            <a:schemeClr val="accent1"/>
-          </a:effectRef>
-          <a:fontRef idx="minor">
-            <a:schemeClr val="tx1"/>
-          </a:fontRef>
-        </p:style>
-      </p:cxnSp>
-    </p:spTree>
-    <p:extLst>
-      <p:ext uri="{BB962C8B-B14F-4D97-AF65-F5344CB8AC3E}">
-        <p14:creationId xmlns:p14="http://schemas.microsoft.com/office/powerpoint/2010/main" val="2381353793"/>
-      </p:ext>
-    </p:extLst>
-  </p:cSld>
-  <p:clrMapOvr>
-    <a:masterClrMapping/>
-  </p:clrMapOvr>
-</p:sld>
-</file>
-
-<file path=ppt/slides/slide30.xml><?xml version="1.0" encoding="utf-8"?>
+<file path=ppt/slides/slide29.xml><?xml version="1.0" encoding="utf-8"?>
 <p:sld xmlns:a="http://schemas.openxmlformats.org/drawingml/2006/main" xmlns:r="http://schemas.openxmlformats.org/officeDocument/2006/relationships" xmlns:p="http://schemas.openxmlformats.org/presentationml/2006/main">
   <p:cSld>
     <p:spTree>
@@ -13817,3638 +13093,7 @@
 </p:sld>
 </file>
 
-<file path=ppt/slides/slide31.xml><?xml version="1.0" encoding="utf-8"?>
-<p:sld xmlns:a="http://schemas.openxmlformats.org/drawingml/2006/main" xmlns:r="http://schemas.openxmlformats.org/officeDocument/2006/relationships" xmlns:p="http://schemas.openxmlformats.org/presentationml/2006/main">
-  <p:cSld>
-    <p:spTree>
-      <p:nvGrpSpPr>
-        <p:cNvPr id="1" name=""/>
-        <p:cNvGrpSpPr/>
-        <p:nvPr/>
-      </p:nvGrpSpPr>
-      <p:grpSpPr>
-        <a:xfrm>
-          <a:off x="0" y="0"/>
-          <a:ext cx="0" cy="0"/>
-          <a:chOff x="0" y="0"/>
-          <a:chExt cx="0" cy="0"/>
-        </a:xfrm>
-      </p:grpSpPr>
-      <p:sp>
-        <p:nvSpPr>
-          <p:cNvPr id="2" name="Title 1">
-            <a:extLst>
-              <a:ext uri="{FF2B5EF4-FFF2-40B4-BE49-F238E27FC236}">
-                <a16:creationId xmlns:a16="http://schemas.microsoft.com/office/drawing/2014/main" id="{EB97F503-BC5A-D210-C8CB-BC9E55A33818}"/>
-              </a:ext>
-            </a:extLst>
-          </p:cNvPr>
-          <p:cNvSpPr>
-            <a:spLocks noGrp="1"/>
-          </p:cNvSpPr>
-          <p:nvPr>
-            <p:ph type="title"/>
-          </p:nvPr>
-        </p:nvSpPr>
-        <p:spPr/>
-        <p:txBody>
-          <a:bodyPr/>
-          <a:lstStyle/>
-          <a:p>
-            <a:r>
-              <a:rPr lang="en-US" dirty="0"/>
-              <a:t>Let’s launch some cats</a:t>
-            </a:r>
-            <a:endParaRPr lang="LID4096" dirty="0"/>
-          </a:p>
-        </p:txBody>
-      </p:sp>
-      <p:pic>
-        <p:nvPicPr>
-          <p:cNvPr id="4" name="Content Placeholder 4">
-            <a:extLst>
-              <a:ext uri="{FF2B5EF4-FFF2-40B4-BE49-F238E27FC236}">
-                <a16:creationId xmlns:a16="http://schemas.microsoft.com/office/drawing/2014/main" id="{F6354694-814F-87E0-67D4-795723151AD6}"/>
-              </a:ext>
-            </a:extLst>
-          </p:cNvPr>
-          <p:cNvPicPr>
-            <a:picLocks noGrp="1" noChangeAspect="1"/>
-          </p:cNvPicPr>
-          <p:nvPr>
-            <p:ph idx="1"/>
-          </p:nvPr>
-        </p:nvPicPr>
-        <p:blipFill>
-          <a:blip r:embed="rId2"/>
-          <a:stretch>
-            <a:fillRect/>
-          </a:stretch>
-        </p:blipFill>
-        <p:spPr>
-          <a:xfrm>
-            <a:off x="734492" y="3114501"/>
-            <a:ext cx="4940554" cy="3378374"/>
-          </a:xfrm>
-          <a:prstGeom prst="rect">
-            <a:avLst/>
-          </a:prstGeom>
-        </p:spPr>
-      </p:pic>
-      <p:sp>
-        <p:nvSpPr>
-          <p:cNvPr id="5" name="TextBox 4">
-            <a:extLst>
-              <a:ext uri="{FF2B5EF4-FFF2-40B4-BE49-F238E27FC236}">
-                <a16:creationId xmlns:a16="http://schemas.microsoft.com/office/drawing/2014/main" id="{75AE0D7F-4E5C-AE38-0E90-FB604CD0B73E}"/>
-              </a:ext>
-            </a:extLst>
-          </p:cNvPr>
-          <p:cNvSpPr txBox="1"/>
-          <p:nvPr/>
-        </p:nvSpPr>
-        <p:spPr>
-          <a:xfrm>
-            <a:off x="5501175" y="1449423"/>
-            <a:ext cx="6627564" cy="3539430"/>
-          </a:xfrm>
-          <a:prstGeom prst="rect">
-            <a:avLst/>
-          </a:prstGeom>
-          <a:noFill/>
-        </p:spPr>
-        <p:txBody>
-          <a:bodyPr wrap="square" rtlCol="0">
-            <a:spAutoFit/>
-          </a:bodyPr>
-          <a:lstStyle/>
-          <a:p>
-            <a:endParaRPr lang="en-US" sz="2800" dirty="0"/>
-          </a:p>
-          <a:p>
-            <a:pPr marL="342900" indent="-342900">
-              <a:buFont typeface="Arial" panose="020B0604020202020204" pitchFamily="34" charset="0"/>
-              <a:buChar char="•"/>
-            </a:pPr>
-            <a:r>
-              <a:rPr lang="en-US" sz="2800" dirty="0"/>
-              <a:t>Launch them </a:t>
-            </a:r>
-            <a:r>
-              <a:rPr lang="en-US" sz="2800" b="1" dirty="0"/>
-              <a:t>20 meters </a:t>
-            </a:r>
-            <a:r>
-              <a:rPr lang="en-US" sz="2800" dirty="0"/>
-              <a:t>in the air (T0)</a:t>
-            </a:r>
-          </a:p>
-          <a:p>
-            <a:pPr marL="342900" indent="-342900">
-              <a:buFont typeface="Arial" panose="020B0604020202020204" pitchFamily="34" charset="0"/>
-              <a:buChar char="•"/>
-            </a:pPr>
-            <a:r>
-              <a:rPr lang="en-US" sz="2800" dirty="0"/>
-              <a:t>Model their fall using the AR-1 model</a:t>
-            </a:r>
-          </a:p>
-          <a:p>
-            <a:pPr marL="342900" indent="-342900">
-              <a:buFont typeface="Arial" panose="020B0604020202020204" pitchFamily="34" charset="0"/>
-              <a:buChar char="•"/>
-            </a:pPr>
-            <a:r>
-              <a:rPr lang="en-US" sz="2800" dirty="0"/>
-              <a:t>By hand calculate where they will be after 4 seconds, i.e., by time point (T4)</a:t>
-            </a:r>
-          </a:p>
-          <a:p>
-            <a:pPr marL="342900" indent="-342900">
-              <a:buFont typeface="Arial" panose="020B0604020202020204" pitchFamily="34" charset="0"/>
-              <a:buChar char="•"/>
-            </a:pPr>
-            <a:r>
-              <a:rPr lang="en-US" sz="2800" dirty="0"/>
-              <a:t>Draw a graph of their current height at each time point</a:t>
-            </a:r>
-          </a:p>
-          <a:p>
-            <a:endParaRPr lang="LID4096" sz="2800" dirty="0"/>
-          </a:p>
-        </p:txBody>
-      </p:sp>
-      <mc:AlternateContent xmlns:mc="http://schemas.openxmlformats.org/markup-compatibility/2006" xmlns:a14="http://schemas.microsoft.com/office/drawing/2010/main">
-        <mc:Choice Requires="a14">
-          <p:sp>
-            <p:nvSpPr>
-              <p:cNvPr id="6" name="TextBox 5">
-                <a:extLst>
-                  <a:ext uri="{FF2B5EF4-FFF2-40B4-BE49-F238E27FC236}">
-                    <a16:creationId xmlns:a16="http://schemas.microsoft.com/office/drawing/2014/main" id="{CD88093D-AF68-4C52-990F-3E1BFD36CB9A}"/>
-                  </a:ext>
-                </a:extLst>
-              </p:cNvPr>
-              <p:cNvSpPr txBox="1"/>
-              <p:nvPr/>
-            </p:nvSpPr>
-            <p:spPr>
-              <a:xfrm>
-                <a:off x="6051220" y="4803688"/>
-                <a:ext cx="4903009" cy="677108"/>
-              </a:xfrm>
-              <a:prstGeom prst="rect">
-                <a:avLst/>
-              </a:prstGeom>
-              <a:noFill/>
-            </p:spPr>
-            <p:txBody>
-              <a:bodyPr wrap="none" lIns="0" tIns="0" rIns="0" bIns="0" rtlCol="0">
-                <a:spAutoFit/>
-              </a:bodyPr>
-              <a:lstStyle/>
-              <a:p>
-                <a:pPr/>
-                <a14:m>
-                  <m:oMathPara xmlns:m="http://schemas.openxmlformats.org/officeDocument/2006/math">
-                    <m:oMath>
-                      <m:r>
-                        <a:rPr lang="en-US" sz="4400" b="0" i="1" smtClean="0">
-                          <a:latin typeface="Cambria Math" panose="02040503050406030204" pitchFamily="18" charset="0"/>
-                        </a:rPr>
-                        <m:t>𝑦</m:t>
-                      </m:r>
-                      <m:d>
-                        <m:dPr>
-                          <m:ctrlPr>
-                            <a:rPr lang="en-US" sz="4400" b="0" i="1" smtClean="0">
-                              <a:latin typeface="Cambria Math" panose="02040503050406030204" pitchFamily="18" charset="0"/>
-                            </a:rPr>
-                          </m:ctrlPr>
-                        </m:dPr>
-                        <m:e>
-                          <m:r>
-                            <a:rPr lang="en-US" sz="4400" b="0" i="1" smtClean="0">
-                              <a:latin typeface="Cambria Math" panose="02040503050406030204" pitchFamily="18" charset="0"/>
-                            </a:rPr>
-                            <m:t>𝑡</m:t>
-                          </m:r>
-                        </m:e>
-                      </m:d>
-                      <m:r>
-                        <a:rPr lang="en-US" sz="4400" b="0" i="1" smtClean="0">
-                          <a:latin typeface="Cambria Math" panose="02040503050406030204" pitchFamily="18" charset="0"/>
-                        </a:rPr>
-                        <m:t>=</m:t>
-                      </m:r>
-                      <m:r>
-                        <a:rPr lang="en-US" sz="4400" b="0" i="1" smtClean="0">
-                          <a:solidFill>
-                            <a:srgbClr val="FF0000"/>
-                          </a:solidFill>
-                          <a:latin typeface="Cambria Math" panose="02040503050406030204" pitchFamily="18" charset="0"/>
-                        </a:rPr>
-                        <m:t>𝛽</m:t>
-                      </m:r>
-                      <m:r>
-                        <a:rPr lang="en-US" sz="4400" b="0" i="1" smtClean="0">
-                          <a:latin typeface="Cambria Math" panose="02040503050406030204" pitchFamily="18" charset="0"/>
-                        </a:rPr>
-                        <m:t>∗</m:t>
-                      </m:r>
-                      <m:r>
-                        <a:rPr lang="en-US" sz="4400" b="0" i="1" smtClean="0">
-                          <a:latin typeface="Cambria Math" panose="02040503050406030204" pitchFamily="18" charset="0"/>
-                        </a:rPr>
-                        <m:t>𝑦</m:t>
-                      </m:r>
-                      <m:d>
-                        <m:dPr>
-                          <m:ctrlPr>
-                            <a:rPr lang="en-US" sz="4400" b="0" i="1" smtClean="0">
-                              <a:latin typeface="Cambria Math" panose="02040503050406030204" pitchFamily="18" charset="0"/>
-                            </a:rPr>
-                          </m:ctrlPr>
-                        </m:dPr>
-                        <m:e>
-                          <m:r>
-                            <a:rPr lang="en-US" sz="4400" b="0" i="1" smtClean="0">
-                              <a:latin typeface="Cambria Math" panose="02040503050406030204" pitchFamily="18" charset="0"/>
-                            </a:rPr>
-                            <m:t>𝑡</m:t>
-                          </m:r>
-                          <m:r>
-                            <a:rPr lang="en-US" sz="4400" b="0" i="1" smtClean="0">
-                              <a:latin typeface="Cambria Math" panose="02040503050406030204" pitchFamily="18" charset="0"/>
-                            </a:rPr>
-                            <m:t>−1</m:t>
-                          </m:r>
-                        </m:e>
-                      </m:d>
-                      <m:r>
-                        <a:rPr lang="en-US" sz="4400" b="0" i="1" smtClean="0">
-                          <a:latin typeface="Cambria Math" panose="02040503050406030204" pitchFamily="18" charset="0"/>
-                        </a:rPr>
-                        <m:t> </m:t>
-                      </m:r>
-                    </m:oMath>
-                  </m:oMathPara>
-                </a14:m>
-                <a:endParaRPr lang="LID4096" sz="4400" dirty="0"/>
-              </a:p>
-            </p:txBody>
-          </p:sp>
-        </mc:Choice>
-        <mc:Fallback xmlns="">
-          <p:sp>
-            <p:nvSpPr>
-              <p:cNvPr id="6" name="TextBox 5">
-                <a:extLst>
-                  <a:ext uri="{FF2B5EF4-FFF2-40B4-BE49-F238E27FC236}">
-                    <a16:creationId xmlns:a16="http://schemas.microsoft.com/office/drawing/2014/main" id="{CD88093D-AF68-4C52-990F-3E1BFD36CB9A}"/>
-                  </a:ext>
-                </a:extLst>
-              </p:cNvPr>
-              <p:cNvSpPr txBox="1">
-                <a:spLocks noRot="1" noChangeAspect="1" noMove="1" noResize="1" noEditPoints="1" noAdjustHandles="1" noChangeArrowheads="1" noChangeShapeType="1" noTextEdit="1"/>
-              </p:cNvSpPr>
-              <p:nvPr/>
-            </p:nvSpPr>
-            <p:spPr>
-              <a:xfrm>
-                <a:off x="6051220" y="4803688"/>
-                <a:ext cx="4903009" cy="677108"/>
-              </a:xfrm>
-              <a:prstGeom prst="rect">
-                <a:avLst/>
-              </a:prstGeom>
-              <a:blipFill>
-                <a:blip r:embed="rId3"/>
-                <a:stretch>
-                  <a:fillRect/>
-                </a:stretch>
-              </a:blipFill>
-            </p:spPr>
-            <p:txBody>
-              <a:bodyPr/>
-              <a:lstStyle/>
-              <a:p>
-                <a:r>
-                  <a:rPr lang="LID4096">
-                    <a:noFill/>
-                  </a:rPr>
-                  <a:t> </a:t>
-                </a:r>
-              </a:p>
-            </p:txBody>
-          </p:sp>
-        </mc:Fallback>
-      </mc:AlternateContent>
-      <mc:AlternateContent xmlns:mc="http://schemas.openxmlformats.org/markup-compatibility/2006" xmlns:a14="http://schemas.microsoft.com/office/drawing/2010/main">
-        <mc:Choice Requires="a14">
-          <p:sp>
-            <p:nvSpPr>
-              <p:cNvPr id="7" name="TextBox 6">
-                <a:extLst>
-                  <a:ext uri="{FF2B5EF4-FFF2-40B4-BE49-F238E27FC236}">
-                    <a16:creationId xmlns:a16="http://schemas.microsoft.com/office/drawing/2014/main" id="{3EC067A0-2D30-E5FC-8CE4-0035FC2B47C2}"/>
-                  </a:ext>
-                </a:extLst>
-              </p:cNvPr>
-              <p:cNvSpPr txBox="1"/>
-              <p:nvPr/>
-            </p:nvSpPr>
-            <p:spPr>
-              <a:xfrm>
-                <a:off x="6051220" y="5734597"/>
-                <a:ext cx="5285101" cy="677108"/>
-              </a:xfrm>
-              <a:prstGeom prst="rect">
-                <a:avLst/>
-              </a:prstGeom>
-              <a:noFill/>
-            </p:spPr>
-            <p:txBody>
-              <a:bodyPr wrap="none" lIns="0" tIns="0" rIns="0" bIns="0" rtlCol="0">
-                <a:spAutoFit/>
-              </a:bodyPr>
-              <a:lstStyle/>
-              <a:p>
-                <a:pPr/>
-                <a14:m>
-                  <m:oMathPara xmlns:m="http://schemas.openxmlformats.org/officeDocument/2006/math">
-                    <m:oMath>
-                      <m:r>
-                        <a:rPr lang="en-US" sz="4400" b="0" i="1" smtClean="0">
-                          <a:latin typeface="Cambria Math" panose="02040503050406030204" pitchFamily="18" charset="0"/>
-                        </a:rPr>
-                        <m:t>𝑦</m:t>
-                      </m:r>
-                      <m:d>
-                        <m:dPr>
-                          <m:ctrlPr>
-                            <a:rPr lang="en-US" sz="4400" b="0" i="1" smtClean="0">
-                              <a:latin typeface="Cambria Math" panose="02040503050406030204" pitchFamily="18" charset="0"/>
-                            </a:rPr>
-                          </m:ctrlPr>
-                        </m:dPr>
-                        <m:e>
-                          <m:r>
-                            <a:rPr lang="en-US" sz="4400" b="0" i="1" smtClean="0">
-                              <a:latin typeface="Cambria Math" panose="02040503050406030204" pitchFamily="18" charset="0"/>
-                            </a:rPr>
-                            <m:t>𝑡</m:t>
-                          </m:r>
-                        </m:e>
-                      </m:d>
-                      <m:r>
-                        <a:rPr lang="en-US" sz="4400" b="0" i="1" smtClean="0">
-                          <a:latin typeface="Cambria Math" panose="02040503050406030204" pitchFamily="18" charset="0"/>
-                        </a:rPr>
-                        <m:t>=</m:t>
-                      </m:r>
-                      <m:r>
-                        <a:rPr lang="en-US" sz="4400" b="0" i="1" smtClean="0">
-                          <a:solidFill>
-                            <a:srgbClr val="FF0000"/>
-                          </a:solidFill>
-                          <a:latin typeface="Cambria Math" panose="02040503050406030204" pitchFamily="18" charset="0"/>
-                        </a:rPr>
-                        <m:t>0.5</m:t>
-                      </m:r>
-                      <m:r>
-                        <a:rPr lang="en-US" sz="4400" b="0" i="1" smtClean="0">
-                          <a:latin typeface="Cambria Math" panose="02040503050406030204" pitchFamily="18" charset="0"/>
-                        </a:rPr>
-                        <m:t>∗</m:t>
-                      </m:r>
-                      <m:r>
-                        <a:rPr lang="en-US" sz="4400" b="0" i="1" smtClean="0">
-                          <a:latin typeface="Cambria Math" panose="02040503050406030204" pitchFamily="18" charset="0"/>
-                        </a:rPr>
-                        <m:t>𝑦</m:t>
-                      </m:r>
-                      <m:d>
-                        <m:dPr>
-                          <m:ctrlPr>
-                            <a:rPr lang="en-US" sz="4400" b="0" i="1" smtClean="0">
-                              <a:latin typeface="Cambria Math" panose="02040503050406030204" pitchFamily="18" charset="0"/>
-                            </a:rPr>
-                          </m:ctrlPr>
-                        </m:dPr>
-                        <m:e>
-                          <m:r>
-                            <a:rPr lang="en-US" sz="4400" b="0" i="1" smtClean="0">
-                              <a:latin typeface="Cambria Math" panose="02040503050406030204" pitchFamily="18" charset="0"/>
-                            </a:rPr>
-                            <m:t>𝑡</m:t>
-                          </m:r>
-                          <m:r>
-                            <a:rPr lang="en-US" sz="4400" b="0" i="1" smtClean="0">
-                              <a:latin typeface="Cambria Math" panose="02040503050406030204" pitchFamily="18" charset="0"/>
-                            </a:rPr>
-                            <m:t>−1</m:t>
-                          </m:r>
-                        </m:e>
-                      </m:d>
-                      <m:r>
-                        <a:rPr lang="en-US" sz="4400" b="0" i="1" smtClean="0">
-                          <a:latin typeface="Cambria Math" panose="02040503050406030204" pitchFamily="18" charset="0"/>
-                        </a:rPr>
-                        <m:t> </m:t>
-                      </m:r>
-                    </m:oMath>
-                  </m:oMathPara>
-                </a14:m>
-                <a:endParaRPr lang="LID4096" sz="4400" dirty="0"/>
-              </a:p>
-            </p:txBody>
-          </p:sp>
-        </mc:Choice>
-        <mc:Fallback xmlns="">
-          <p:sp>
-            <p:nvSpPr>
-              <p:cNvPr id="7" name="TextBox 6">
-                <a:extLst>
-                  <a:ext uri="{FF2B5EF4-FFF2-40B4-BE49-F238E27FC236}">
-                    <a16:creationId xmlns:a16="http://schemas.microsoft.com/office/drawing/2014/main" id="{3EC067A0-2D30-E5FC-8CE4-0035FC2B47C2}"/>
-                  </a:ext>
-                </a:extLst>
-              </p:cNvPr>
-              <p:cNvSpPr txBox="1">
-                <a:spLocks noRot="1" noChangeAspect="1" noMove="1" noResize="1" noEditPoints="1" noAdjustHandles="1" noChangeArrowheads="1" noChangeShapeType="1" noTextEdit="1"/>
-              </p:cNvSpPr>
-              <p:nvPr/>
-            </p:nvSpPr>
-            <p:spPr>
-              <a:xfrm>
-                <a:off x="6051220" y="5734597"/>
-                <a:ext cx="5285101" cy="677108"/>
-              </a:xfrm>
-              <a:prstGeom prst="rect">
-                <a:avLst/>
-              </a:prstGeom>
-              <a:blipFill>
-                <a:blip r:embed="rId4"/>
-                <a:stretch>
-                  <a:fillRect/>
-                </a:stretch>
-              </a:blipFill>
-            </p:spPr>
-            <p:txBody>
-              <a:bodyPr/>
-              <a:lstStyle/>
-              <a:p>
-                <a:r>
-                  <a:rPr lang="LID4096">
-                    <a:noFill/>
-                  </a:rPr>
-                  <a:t> </a:t>
-                </a:r>
-              </a:p>
-            </p:txBody>
-          </p:sp>
-        </mc:Fallback>
-      </mc:AlternateContent>
-    </p:spTree>
-    <p:extLst>
-      <p:ext uri="{BB962C8B-B14F-4D97-AF65-F5344CB8AC3E}">
-        <p14:creationId xmlns:p14="http://schemas.microsoft.com/office/powerpoint/2010/main" val="3210891694"/>
-      </p:ext>
-    </p:extLst>
-  </p:cSld>
-  <p:clrMapOvr>
-    <a:masterClrMapping/>
-  </p:clrMapOvr>
-</p:sld>
-</file>
-
-<file path=ppt/slides/slide32.xml><?xml version="1.0" encoding="utf-8"?>
-<p:sld xmlns:a="http://schemas.openxmlformats.org/drawingml/2006/main" xmlns:r="http://schemas.openxmlformats.org/officeDocument/2006/relationships" xmlns:p="http://schemas.openxmlformats.org/presentationml/2006/main">
-  <p:cSld>
-    <p:spTree>
-      <p:nvGrpSpPr>
-        <p:cNvPr id="1" name=""/>
-        <p:cNvGrpSpPr/>
-        <p:nvPr/>
-      </p:nvGrpSpPr>
-      <p:grpSpPr>
-        <a:xfrm>
-          <a:off x="0" y="0"/>
-          <a:ext cx="0" cy="0"/>
-          <a:chOff x="0" y="0"/>
-          <a:chExt cx="0" cy="0"/>
-        </a:xfrm>
-      </p:grpSpPr>
-      <p:sp>
-        <p:nvSpPr>
-          <p:cNvPr id="2" name="Title 1">
-            <a:extLst>
-              <a:ext uri="{FF2B5EF4-FFF2-40B4-BE49-F238E27FC236}">
-                <a16:creationId xmlns:a16="http://schemas.microsoft.com/office/drawing/2014/main" id="{24E45AFB-0166-E685-3CAC-395C79AFD893}"/>
-              </a:ext>
-            </a:extLst>
-          </p:cNvPr>
-          <p:cNvSpPr>
-            <a:spLocks noGrp="1"/>
-          </p:cNvSpPr>
-          <p:nvPr>
-            <p:ph type="title"/>
-          </p:nvPr>
-        </p:nvSpPr>
-        <p:spPr/>
-        <p:txBody>
-          <a:bodyPr/>
-          <a:lstStyle/>
-          <a:p>
-            <a:r>
-              <a:rPr lang="en-US" dirty="0"/>
-              <a:t>Let’s add some shocks!</a:t>
-            </a:r>
-            <a:endParaRPr lang="LID4096" dirty="0"/>
-          </a:p>
-        </p:txBody>
-      </p:sp>
-      <p:sp>
-        <p:nvSpPr>
-          <p:cNvPr id="4" name="TextBox 3">
-            <a:extLst>
-              <a:ext uri="{FF2B5EF4-FFF2-40B4-BE49-F238E27FC236}">
-                <a16:creationId xmlns:a16="http://schemas.microsoft.com/office/drawing/2014/main" id="{DC8D7D05-9F4D-A661-3DA1-26A3CC208906}"/>
-              </a:ext>
-            </a:extLst>
-          </p:cNvPr>
-          <p:cNvSpPr txBox="1"/>
-          <p:nvPr/>
-        </p:nvSpPr>
-        <p:spPr>
-          <a:xfrm>
-            <a:off x="1001486" y="2166257"/>
-            <a:ext cx="9960428" cy="2677656"/>
-          </a:xfrm>
-          <a:prstGeom prst="rect">
-            <a:avLst/>
-          </a:prstGeom>
-          <a:noFill/>
-        </p:spPr>
-        <p:txBody>
-          <a:bodyPr wrap="square" rtlCol="0">
-            <a:spAutoFit/>
-          </a:bodyPr>
-          <a:lstStyle/>
-          <a:p>
-            <a:r>
-              <a:rPr lang="en-US" sz="2800" dirty="0"/>
-              <a:t>Two people getting in an argument, John and Luca.</a:t>
-            </a:r>
-          </a:p>
-          <a:p>
-            <a:endParaRPr lang="en-US" sz="2800" dirty="0"/>
-          </a:p>
-          <a:p>
-            <a:r>
-              <a:rPr lang="en-US" sz="2800" dirty="0">
-                <a:solidFill>
-                  <a:schemeClr val="accent2"/>
-                </a:solidFill>
-              </a:rPr>
-              <a:t>John</a:t>
-            </a:r>
-            <a:r>
-              <a:rPr lang="en-US" sz="2800" dirty="0"/>
-              <a:t> (reactive, composes himself quick)</a:t>
-            </a:r>
-          </a:p>
-          <a:p>
-            <a:r>
-              <a:rPr lang="en-US" sz="2800" dirty="0">
-                <a:solidFill>
-                  <a:schemeClr val="accent5">
-                    <a:lumMod val="75000"/>
-                  </a:schemeClr>
-                </a:solidFill>
-              </a:rPr>
-              <a:t>Luca</a:t>
-            </a:r>
-            <a:r>
-              <a:rPr lang="en-US" sz="2800" dirty="0"/>
-              <a:t> (hard to shake, slow to compose himself)</a:t>
-            </a:r>
-          </a:p>
-          <a:p>
-            <a:endParaRPr lang="en-US" sz="2800" dirty="0"/>
-          </a:p>
-          <a:p>
-            <a:endParaRPr lang="en-US" sz="2800" dirty="0"/>
-          </a:p>
-        </p:txBody>
-      </p:sp>
-    </p:spTree>
-    <p:extLst>
-      <p:ext uri="{BB962C8B-B14F-4D97-AF65-F5344CB8AC3E}">
-        <p14:creationId xmlns:p14="http://schemas.microsoft.com/office/powerpoint/2010/main" val="1400339295"/>
-      </p:ext>
-    </p:extLst>
-  </p:cSld>
-  <p:clrMapOvr>
-    <a:masterClrMapping/>
-  </p:clrMapOvr>
-</p:sld>
-</file>
-
-<file path=ppt/slides/slide33.xml><?xml version="1.0" encoding="utf-8"?>
-<p:sld xmlns:a="http://schemas.openxmlformats.org/drawingml/2006/main" xmlns:r="http://schemas.openxmlformats.org/officeDocument/2006/relationships" xmlns:p="http://schemas.openxmlformats.org/presentationml/2006/main">
-  <p:cSld>
-    <p:spTree>
-      <p:nvGrpSpPr>
-        <p:cNvPr id="1" name="">
-          <a:extLst>
-            <a:ext uri="{FF2B5EF4-FFF2-40B4-BE49-F238E27FC236}">
-              <a16:creationId xmlns:a16="http://schemas.microsoft.com/office/drawing/2014/main" id="{6FBCE967-0AFB-726F-A422-8EECDD1B9041}"/>
-            </a:ext>
-          </a:extLst>
-        </p:cNvPr>
-        <p:cNvGrpSpPr/>
-        <p:nvPr/>
-      </p:nvGrpSpPr>
-      <p:grpSpPr>
-        <a:xfrm>
-          <a:off x="0" y="0"/>
-          <a:ext cx="0" cy="0"/>
-          <a:chOff x="0" y="0"/>
-          <a:chExt cx="0" cy="0"/>
-        </a:xfrm>
-      </p:grpSpPr>
-      <p:sp>
-        <p:nvSpPr>
-          <p:cNvPr id="2" name="Title 1">
-            <a:extLst>
-              <a:ext uri="{FF2B5EF4-FFF2-40B4-BE49-F238E27FC236}">
-                <a16:creationId xmlns:a16="http://schemas.microsoft.com/office/drawing/2014/main" id="{6BBB46CC-D73C-2139-CA99-933631A55A0B}"/>
-              </a:ext>
-            </a:extLst>
-          </p:cNvPr>
-          <p:cNvSpPr>
-            <a:spLocks noGrp="1"/>
-          </p:cNvSpPr>
-          <p:nvPr>
-            <p:ph type="title"/>
-          </p:nvPr>
-        </p:nvSpPr>
-        <p:spPr/>
-        <p:txBody>
-          <a:bodyPr/>
-          <a:lstStyle/>
-          <a:p>
-            <a:r>
-              <a:rPr lang="en-US" dirty="0"/>
-              <a:t>Let’s add some shocks!</a:t>
-            </a:r>
-            <a:endParaRPr lang="LID4096" dirty="0"/>
-          </a:p>
-        </p:txBody>
-      </p:sp>
-      <p:sp>
-        <p:nvSpPr>
-          <p:cNvPr id="4" name="TextBox 3">
-            <a:extLst>
-              <a:ext uri="{FF2B5EF4-FFF2-40B4-BE49-F238E27FC236}">
-                <a16:creationId xmlns:a16="http://schemas.microsoft.com/office/drawing/2014/main" id="{8D494D1E-88CB-74AF-1E5E-729B4193A6D3}"/>
-              </a:ext>
-            </a:extLst>
-          </p:cNvPr>
-          <p:cNvSpPr txBox="1"/>
-          <p:nvPr/>
-        </p:nvSpPr>
-        <p:spPr>
-          <a:xfrm>
-            <a:off x="1001486" y="2166257"/>
-            <a:ext cx="9960428" cy="2677656"/>
-          </a:xfrm>
-          <a:prstGeom prst="rect">
-            <a:avLst/>
-          </a:prstGeom>
-          <a:noFill/>
-        </p:spPr>
-        <p:txBody>
-          <a:bodyPr wrap="square" rtlCol="0">
-            <a:spAutoFit/>
-          </a:bodyPr>
-          <a:lstStyle/>
-          <a:p>
-            <a:r>
-              <a:rPr lang="en-US" sz="2800" dirty="0"/>
-              <a:t>Two people getting in an argument, John and Luca.</a:t>
-            </a:r>
-          </a:p>
-          <a:p>
-            <a:endParaRPr lang="en-US" sz="2800" dirty="0"/>
-          </a:p>
-          <a:p>
-            <a:r>
-              <a:rPr lang="en-US" sz="2800" dirty="0">
-                <a:solidFill>
-                  <a:schemeClr val="accent2"/>
-                </a:solidFill>
-              </a:rPr>
-              <a:t>John</a:t>
-            </a:r>
-            <a:r>
-              <a:rPr lang="en-US" sz="2800" dirty="0"/>
-              <a:t> (reactive, composes himself quick)</a:t>
-            </a:r>
-          </a:p>
-          <a:p>
-            <a:r>
-              <a:rPr lang="en-US" sz="2800" dirty="0">
-                <a:solidFill>
-                  <a:schemeClr val="accent5">
-                    <a:lumMod val="75000"/>
-                  </a:schemeClr>
-                </a:solidFill>
-              </a:rPr>
-              <a:t>Luca</a:t>
-            </a:r>
-            <a:r>
-              <a:rPr lang="en-US" sz="2800" dirty="0"/>
-              <a:t> (hard to shake, slow to compose himself)</a:t>
-            </a:r>
-          </a:p>
-          <a:p>
-            <a:endParaRPr lang="en-US" sz="2800" dirty="0"/>
-          </a:p>
-          <a:p>
-            <a:endParaRPr lang="en-US" sz="2800" dirty="0"/>
-          </a:p>
-        </p:txBody>
-      </p:sp>
-      <mc:AlternateContent xmlns:mc="http://schemas.openxmlformats.org/markup-compatibility/2006" xmlns:a14="http://schemas.microsoft.com/office/drawing/2010/main">
-        <mc:Choice Requires="a14">
-          <p:sp>
-            <p:nvSpPr>
-              <p:cNvPr id="3" name="TextBox 2">
-                <a:extLst>
-                  <a:ext uri="{FF2B5EF4-FFF2-40B4-BE49-F238E27FC236}">
-                    <a16:creationId xmlns:a16="http://schemas.microsoft.com/office/drawing/2014/main" id="{CC7B3F49-61FB-AD0E-98C4-B07AF6F535A2}"/>
-                  </a:ext>
-                </a:extLst>
-              </p:cNvPr>
-              <p:cNvSpPr txBox="1"/>
-              <p:nvPr/>
-            </p:nvSpPr>
-            <p:spPr>
-              <a:xfrm>
-                <a:off x="2538071" y="4843913"/>
-                <a:ext cx="7115858" cy="706797"/>
-              </a:xfrm>
-              <a:prstGeom prst="rect">
-                <a:avLst/>
-              </a:prstGeom>
-              <a:noFill/>
-            </p:spPr>
-            <p:txBody>
-              <a:bodyPr wrap="none" lIns="0" tIns="0" rIns="0" bIns="0" rtlCol="0">
-                <a:spAutoFit/>
-              </a:bodyPr>
-              <a:lstStyle/>
-              <a:p>
-                <a:pPr/>
-                <a14:m>
-                  <m:oMathPara xmlns:m="http://schemas.openxmlformats.org/officeDocument/2006/math">
-                    <m:oMath>
-                      <m:r>
-                        <a:rPr lang="en-US" sz="4400" b="0" i="1" smtClean="0">
-                          <a:latin typeface="Cambria Math" panose="02040503050406030204" pitchFamily="18" charset="0"/>
-                        </a:rPr>
-                        <m:t>𝑦</m:t>
-                      </m:r>
-                      <m:d>
-                        <m:dPr>
-                          <m:ctrlPr>
-                            <a:rPr lang="en-US" sz="4400" b="0" i="1" smtClean="0">
-                              <a:latin typeface="Cambria Math" panose="02040503050406030204" pitchFamily="18" charset="0"/>
-                            </a:rPr>
-                          </m:ctrlPr>
-                        </m:dPr>
-                        <m:e>
-                          <m:r>
-                            <a:rPr lang="en-US" sz="4400" b="0" i="1" smtClean="0">
-                              <a:latin typeface="Cambria Math" panose="02040503050406030204" pitchFamily="18" charset="0"/>
-                            </a:rPr>
-                            <m:t>𝑖</m:t>
-                          </m:r>
-                          <m:r>
-                            <a:rPr lang="en-US" sz="4400" b="0" i="1" smtClean="0">
-                              <a:latin typeface="Cambria Math" panose="02040503050406030204" pitchFamily="18" charset="0"/>
-                            </a:rPr>
-                            <m:t>,</m:t>
-                          </m:r>
-                          <m:r>
-                            <a:rPr lang="en-US" sz="4400" b="0" i="1" smtClean="0">
-                              <a:latin typeface="Cambria Math" panose="02040503050406030204" pitchFamily="18" charset="0"/>
-                            </a:rPr>
-                            <m:t>𝑡</m:t>
-                          </m:r>
-                        </m:e>
-                      </m:d>
-                      <m:r>
-                        <a:rPr lang="en-US" sz="4400" b="0" i="1" smtClean="0">
-                          <a:latin typeface="Cambria Math" panose="02040503050406030204" pitchFamily="18" charset="0"/>
-                        </a:rPr>
-                        <m:t>=</m:t>
-                      </m:r>
-                      <m:sSub>
-                        <m:sSubPr>
-                          <m:ctrlPr>
-                            <a:rPr lang="en-US" sz="4400" b="0" i="1" smtClean="0">
-                              <a:latin typeface="Cambria Math" panose="02040503050406030204" pitchFamily="18" charset="0"/>
-                            </a:rPr>
-                          </m:ctrlPr>
-                        </m:sSubPr>
-                        <m:e>
-                          <m:r>
-                            <a:rPr lang="en-US" sz="4400" b="0" i="1" smtClean="0">
-                              <a:latin typeface="Cambria Math" panose="02040503050406030204" pitchFamily="18" charset="0"/>
-                            </a:rPr>
-                            <m:t>𝛽</m:t>
-                          </m:r>
-                        </m:e>
-                        <m:sub>
-                          <m:r>
-                            <a:rPr lang="en-US" sz="4400" b="0" i="1" smtClean="0">
-                              <a:latin typeface="Cambria Math" panose="02040503050406030204" pitchFamily="18" charset="0"/>
-                            </a:rPr>
-                            <m:t>𝑖</m:t>
-                          </m:r>
-                        </m:sub>
-                      </m:sSub>
-                      <m:r>
-                        <a:rPr lang="en-US" sz="4400" b="0" i="1" smtClean="0">
-                          <a:latin typeface="Cambria Math" panose="02040503050406030204" pitchFamily="18" charset="0"/>
-                        </a:rPr>
-                        <m:t>∗</m:t>
-                      </m:r>
-                      <m:r>
-                        <a:rPr lang="en-US" sz="4400" b="0" i="1" smtClean="0">
-                          <a:latin typeface="Cambria Math" panose="02040503050406030204" pitchFamily="18" charset="0"/>
-                        </a:rPr>
-                        <m:t>𝑦</m:t>
-                      </m:r>
-                      <m:d>
-                        <m:dPr>
-                          <m:ctrlPr>
-                            <a:rPr lang="en-US" sz="4400" b="0" i="1" smtClean="0">
-                              <a:latin typeface="Cambria Math" panose="02040503050406030204" pitchFamily="18" charset="0"/>
-                            </a:rPr>
-                          </m:ctrlPr>
-                        </m:dPr>
-                        <m:e>
-                          <m:r>
-                            <a:rPr lang="en-US" sz="4400" b="0" i="1" smtClean="0">
-                              <a:latin typeface="Cambria Math" panose="02040503050406030204" pitchFamily="18" charset="0"/>
-                            </a:rPr>
-                            <m:t>𝑖</m:t>
-                          </m:r>
-                          <m:r>
-                            <a:rPr lang="en-US" sz="4400" b="0" i="1" smtClean="0">
-                              <a:latin typeface="Cambria Math" panose="02040503050406030204" pitchFamily="18" charset="0"/>
-                            </a:rPr>
-                            <m:t>,</m:t>
-                          </m:r>
-                          <m:r>
-                            <a:rPr lang="en-US" sz="4400" b="0" i="1" smtClean="0">
-                              <a:latin typeface="Cambria Math" panose="02040503050406030204" pitchFamily="18" charset="0"/>
-                            </a:rPr>
-                            <m:t>𝑡</m:t>
-                          </m:r>
-                          <m:r>
-                            <a:rPr lang="en-US" sz="4400" b="0" i="1" smtClean="0">
-                              <a:latin typeface="Cambria Math" panose="02040503050406030204" pitchFamily="18" charset="0"/>
-                            </a:rPr>
-                            <m:t>−1</m:t>
-                          </m:r>
-                        </m:e>
-                      </m:d>
-                      <m:r>
-                        <a:rPr lang="en-US" sz="4400" b="0" i="1" smtClean="0">
-                          <a:latin typeface="Cambria Math" panose="02040503050406030204" pitchFamily="18" charset="0"/>
-                        </a:rPr>
-                        <m:t>+</m:t>
-                      </m:r>
-                      <m:sSub>
-                        <m:sSubPr>
-                          <m:ctrlPr>
-                            <a:rPr lang="en-US" sz="4400" b="0" i="1" smtClean="0">
-                              <a:latin typeface="Cambria Math" panose="02040503050406030204" pitchFamily="18" charset="0"/>
-                            </a:rPr>
-                          </m:ctrlPr>
-                        </m:sSubPr>
-                        <m:e>
-                          <m:r>
-                            <a:rPr lang="en-US" sz="4400" b="0" i="1" smtClean="0">
-                              <a:latin typeface="Cambria Math" panose="02040503050406030204" pitchFamily="18" charset="0"/>
-                            </a:rPr>
-                            <m:t>𝑒</m:t>
-                          </m:r>
-                        </m:e>
-                        <m:sub>
-                          <m:r>
-                            <a:rPr lang="en-US" sz="4400" b="0" i="1" smtClean="0">
-                              <a:latin typeface="Cambria Math" panose="02040503050406030204" pitchFamily="18" charset="0"/>
-                            </a:rPr>
-                            <m:t>𝑖</m:t>
-                          </m:r>
-                          <m:r>
-                            <a:rPr lang="en-US" sz="4400" b="0" i="1" smtClean="0">
-                              <a:latin typeface="Cambria Math" panose="02040503050406030204" pitchFamily="18" charset="0"/>
-                            </a:rPr>
-                            <m:t>,</m:t>
-                          </m:r>
-                          <m:r>
-                            <a:rPr lang="en-US" sz="4400" b="0" i="1" smtClean="0">
-                              <a:latin typeface="Cambria Math" panose="02040503050406030204" pitchFamily="18" charset="0"/>
-                            </a:rPr>
-                            <m:t>𝑡</m:t>
-                          </m:r>
-                        </m:sub>
-                      </m:sSub>
-                    </m:oMath>
-                  </m:oMathPara>
-                </a14:m>
-                <a:endParaRPr lang="LID4096" sz="4400" dirty="0"/>
-              </a:p>
-            </p:txBody>
-          </p:sp>
-        </mc:Choice>
-        <mc:Fallback xmlns="">
-          <p:sp>
-            <p:nvSpPr>
-              <p:cNvPr id="3" name="TextBox 2">
-                <a:extLst>
-                  <a:ext uri="{FF2B5EF4-FFF2-40B4-BE49-F238E27FC236}">
-                    <a16:creationId xmlns:a16="http://schemas.microsoft.com/office/drawing/2014/main" id="{CC7B3F49-61FB-AD0E-98C4-B07AF6F535A2}"/>
-                  </a:ext>
-                </a:extLst>
-              </p:cNvPr>
-              <p:cNvSpPr txBox="1">
-                <a:spLocks noRot="1" noChangeAspect="1" noMove="1" noResize="1" noEditPoints="1" noAdjustHandles="1" noChangeArrowheads="1" noChangeShapeType="1" noTextEdit="1"/>
-              </p:cNvSpPr>
-              <p:nvPr/>
-            </p:nvSpPr>
-            <p:spPr>
-              <a:xfrm>
-                <a:off x="2538071" y="4843913"/>
-                <a:ext cx="7115858" cy="706797"/>
-              </a:xfrm>
-              <a:prstGeom prst="rect">
-                <a:avLst/>
-              </a:prstGeom>
-              <a:blipFill>
-                <a:blip r:embed="rId2"/>
-                <a:stretch>
-                  <a:fillRect/>
-                </a:stretch>
-              </a:blipFill>
-            </p:spPr>
-            <p:txBody>
-              <a:bodyPr/>
-              <a:lstStyle/>
-              <a:p>
-                <a:r>
-                  <a:rPr lang="LID4096">
-                    <a:noFill/>
-                  </a:rPr>
-                  <a:t> </a:t>
-                </a:r>
-              </a:p>
-            </p:txBody>
-          </p:sp>
-        </mc:Fallback>
-      </mc:AlternateContent>
-    </p:spTree>
-    <p:extLst>
-      <p:ext uri="{BB962C8B-B14F-4D97-AF65-F5344CB8AC3E}">
-        <p14:creationId xmlns:p14="http://schemas.microsoft.com/office/powerpoint/2010/main" val="718001610"/>
-      </p:ext>
-    </p:extLst>
-  </p:cSld>
-  <p:clrMapOvr>
-    <a:masterClrMapping/>
-  </p:clrMapOvr>
-</p:sld>
-</file>
-
-<file path=ppt/slides/slide34.xml><?xml version="1.0" encoding="utf-8"?>
-<p:sld xmlns:a="http://schemas.openxmlformats.org/drawingml/2006/main" xmlns:r="http://schemas.openxmlformats.org/officeDocument/2006/relationships" xmlns:p="http://schemas.openxmlformats.org/presentationml/2006/main">
-  <p:cSld>
-    <p:spTree>
-      <p:nvGrpSpPr>
-        <p:cNvPr id="1" name="">
-          <a:extLst>
-            <a:ext uri="{FF2B5EF4-FFF2-40B4-BE49-F238E27FC236}">
-              <a16:creationId xmlns:a16="http://schemas.microsoft.com/office/drawing/2014/main" id="{7C00DFCF-90D2-7D45-F51F-B871B17A161F}"/>
-            </a:ext>
-          </a:extLst>
-        </p:cNvPr>
-        <p:cNvGrpSpPr/>
-        <p:nvPr/>
-      </p:nvGrpSpPr>
-      <p:grpSpPr>
-        <a:xfrm>
-          <a:off x="0" y="0"/>
-          <a:ext cx="0" cy="0"/>
-          <a:chOff x="0" y="0"/>
-          <a:chExt cx="0" cy="0"/>
-        </a:xfrm>
-      </p:grpSpPr>
-      <p:sp>
-        <p:nvSpPr>
-          <p:cNvPr id="2" name="Title 1">
-            <a:extLst>
-              <a:ext uri="{FF2B5EF4-FFF2-40B4-BE49-F238E27FC236}">
-                <a16:creationId xmlns:a16="http://schemas.microsoft.com/office/drawing/2014/main" id="{BFAC562F-EAEE-BD4C-8646-EE41BEFBF3F0}"/>
-              </a:ext>
-            </a:extLst>
-          </p:cNvPr>
-          <p:cNvSpPr>
-            <a:spLocks noGrp="1"/>
-          </p:cNvSpPr>
-          <p:nvPr>
-            <p:ph type="title"/>
-          </p:nvPr>
-        </p:nvSpPr>
-        <p:spPr/>
-        <p:txBody>
-          <a:bodyPr/>
-          <a:lstStyle/>
-          <a:p>
-            <a:r>
-              <a:rPr lang="en-US" dirty="0"/>
-              <a:t>Let’s add some shocks!</a:t>
-            </a:r>
-            <a:endParaRPr lang="LID4096" dirty="0"/>
-          </a:p>
-        </p:txBody>
-      </p:sp>
-      <p:sp>
-        <p:nvSpPr>
-          <p:cNvPr id="4" name="TextBox 3">
-            <a:extLst>
-              <a:ext uri="{FF2B5EF4-FFF2-40B4-BE49-F238E27FC236}">
-                <a16:creationId xmlns:a16="http://schemas.microsoft.com/office/drawing/2014/main" id="{D4D4A998-4C73-4792-F7D4-F41AB193FF22}"/>
-              </a:ext>
-            </a:extLst>
-          </p:cNvPr>
-          <p:cNvSpPr txBox="1"/>
-          <p:nvPr/>
-        </p:nvSpPr>
-        <p:spPr>
-          <a:xfrm>
-            <a:off x="1001486" y="2166257"/>
-            <a:ext cx="9960428" cy="2677656"/>
-          </a:xfrm>
-          <a:prstGeom prst="rect">
-            <a:avLst/>
-          </a:prstGeom>
-          <a:noFill/>
-        </p:spPr>
-        <p:txBody>
-          <a:bodyPr wrap="square" rtlCol="0">
-            <a:spAutoFit/>
-          </a:bodyPr>
-          <a:lstStyle/>
-          <a:p>
-            <a:r>
-              <a:rPr lang="en-US" sz="2800" dirty="0"/>
-              <a:t>Two people getting in an argument, John and Luca.</a:t>
-            </a:r>
-          </a:p>
-          <a:p>
-            <a:endParaRPr lang="en-US" sz="2800" dirty="0"/>
-          </a:p>
-          <a:p>
-            <a:r>
-              <a:rPr lang="en-US" sz="2800" dirty="0">
-                <a:solidFill>
-                  <a:schemeClr val="accent2"/>
-                </a:solidFill>
-              </a:rPr>
-              <a:t>John</a:t>
-            </a:r>
-            <a:r>
-              <a:rPr lang="en-US" sz="2800" dirty="0"/>
-              <a:t> (reactive, composes himself quick)</a:t>
-            </a:r>
-          </a:p>
-          <a:p>
-            <a:r>
-              <a:rPr lang="en-US" sz="2800" dirty="0">
-                <a:solidFill>
-                  <a:schemeClr val="accent5">
-                    <a:lumMod val="75000"/>
-                  </a:schemeClr>
-                </a:solidFill>
-              </a:rPr>
-              <a:t>Luca</a:t>
-            </a:r>
-            <a:r>
-              <a:rPr lang="en-US" sz="2800" dirty="0"/>
-              <a:t> (hard to shake, slow to compose himself)</a:t>
-            </a:r>
-          </a:p>
-          <a:p>
-            <a:endParaRPr lang="en-US" sz="2800" dirty="0"/>
-          </a:p>
-          <a:p>
-            <a:endParaRPr lang="en-US" sz="2800" dirty="0"/>
-          </a:p>
-        </p:txBody>
-      </p:sp>
-      <mc:AlternateContent xmlns:mc="http://schemas.openxmlformats.org/markup-compatibility/2006" xmlns:a14="http://schemas.microsoft.com/office/drawing/2010/main">
-        <mc:Choice Requires="a14">
-          <p:sp>
-            <p:nvSpPr>
-              <p:cNvPr id="3" name="TextBox 2">
-                <a:extLst>
-                  <a:ext uri="{FF2B5EF4-FFF2-40B4-BE49-F238E27FC236}">
-                    <a16:creationId xmlns:a16="http://schemas.microsoft.com/office/drawing/2014/main" id="{215EA723-8B0A-8C58-248B-BA2A9CCA4845}"/>
-                  </a:ext>
-                </a:extLst>
-              </p:cNvPr>
-              <p:cNvSpPr txBox="1"/>
-              <p:nvPr/>
-            </p:nvSpPr>
-            <p:spPr>
-              <a:xfrm>
-                <a:off x="2538071" y="4490514"/>
-                <a:ext cx="7115858" cy="706797"/>
-              </a:xfrm>
-              <a:prstGeom prst="rect">
-                <a:avLst/>
-              </a:prstGeom>
-              <a:noFill/>
-            </p:spPr>
-            <p:txBody>
-              <a:bodyPr wrap="none" lIns="0" tIns="0" rIns="0" bIns="0" rtlCol="0">
-                <a:spAutoFit/>
-              </a:bodyPr>
-              <a:lstStyle/>
-              <a:p>
-                <a:pPr/>
-                <a14:m>
-                  <m:oMathPara xmlns:m="http://schemas.openxmlformats.org/officeDocument/2006/math">
-                    <m:oMath>
-                      <m:r>
-                        <a:rPr lang="en-US" sz="4400" b="0" i="1" smtClean="0">
-                          <a:latin typeface="Cambria Math" panose="02040503050406030204" pitchFamily="18" charset="0"/>
-                        </a:rPr>
-                        <m:t>𝑦</m:t>
-                      </m:r>
-                      <m:d>
-                        <m:dPr>
-                          <m:ctrlPr>
-                            <a:rPr lang="en-US" sz="4400" b="0" i="1" smtClean="0">
-                              <a:latin typeface="Cambria Math" panose="02040503050406030204" pitchFamily="18" charset="0"/>
-                            </a:rPr>
-                          </m:ctrlPr>
-                        </m:dPr>
-                        <m:e>
-                          <m:r>
-                            <a:rPr lang="en-US" sz="4400" b="0" i="1" smtClean="0">
-                              <a:latin typeface="Cambria Math" panose="02040503050406030204" pitchFamily="18" charset="0"/>
-                            </a:rPr>
-                            <m:t>𝑖</m:t>
-                          </m:r>
-                          <m:r>
-                            <a:rPr lang="en-US" sz="4400" b="0" i="1" smtClean="0">
-                              <a:latin typeface="Cambria Math" panose="02040503050406030204" pitchFamily="18" charset="0"/>
-                            </a:rPr>
-                            <m:t>,</m:t>
-                          </m:r>
-                          <m:r>
-                            <a:rPr lang="en-US" sz="4400" b="0" i="1" smtClean="0">
-                              <a:latin typeface="Cambria Math" panose="02040503050406030204" pitchFamily="18" charset="0"/>
-                            </a:rPr>
-                            <m:t>𝑡</m:t>
-                          </m:r>
-                        </m:e>
-                      </m:d>
-                      <m:r>
-                        <a:rPr lang="en-US" sz="4400" b="0" i="1" smtClean="0">
-                          <a:latin typeface="Cambria Math" panose="02040503050406030204" pitchFamily="18" charset="0"/>
-                        </a:rPr>
-                        <m:t>=</m:t>
-                      </m:r>
-                      <m:sSub>
-                        <m:sSubPr>
-                          <m:ctrlPr>
-                            <a:rPr lang="en-US" sz="4400" b="0" i="1" smtClean="0">
-                              <a:latin typeface="Cambria Math" panose="02040503050406030204" pitchFamily="18" charset="0"/>
-                            </a:rPr>
-                          </m:ctrlPr>
-                        </m:sSubPr>
-                        <m:e>
-                          <m:r>
-                            <a:rPr lang="en-US" sz="4400" b="0" i="1" smtClean="0">
-                              <a:latin typeface="Cambria Math" panose="02040503050406030204" pitchFamily="18" charset="0"/>
-                            </a:rPr>
-                            <m:t>𝛽</m:t>
-                          </m:r>
-                        </m:e>
-                        <m:sub>
-                          <m:r>
-                            <a:rPr lang="en-US" sz="4400" b="0" i="1" smtClean="0">
-                              <a:latin typeface="Cambria Math" panose="02040503050406030204" pitchFamily="18" charset="0"/>
-                            </a:rPr>
-                            <m:t>𝑖</m:t>
-                          </m:r>
-                        </m:sub>
-                      </m:sSub>
-                      <m:r>
-                        <a:rPr lang="en-US" sz="4400" b="0" i="1" smtClean="0">
-                          <a:latin typeface="Cambria Math" panose="02040503050406030204" pitchFamily="18" charset="0"/>
-                        </a:rPr>
-                        <m:t>∗</m:t>
-                      </m:r>
-                      <m:r>
-                        <a:rPr lang="en-US" sz="4400" b="0" i="1" smtClean="0">
-                          <a:latin typeface="Cambria Math" panose="02040503050406030204" pitchFamily="18" charset="0"/>
-                        </a:rPr>
-                        <m:t>𝑦</m:t>
-                      </m:r>
-                      <m:d>
-                        <m:dPr>
-                          <m:ctrlPr>
-                            <a:rPr lang="en-US" sz="4400" b="0" i="1" smtClean="0">
-                              <a:latin typeface="Cambria Math" panose="02040503050406030204" pitchFamily="18" charset="0"/>
-                            </a:rPr>
-                          </m:ctrlPr>
-                        </m:dPr>
-                        <m:e>
-                          <m:r>
-                            <a:rPr lang="en-US" sz="4400" b="0" i="1" smtClean="0">
-                              <a:latin typeface="Cambria Math" panose="02040503050406030204" pitchFamily="18" charset="0"/>
-                            </a:rPr>
-                            <m:t>𝑖</m:t>
-                          </m:r>
-                          <m:r>
-                            <a:rPr lang="en-US" sz="4400" b="0" i="1" smtClean="0">
-                              <a:latin typeface="Cambria Math" panose="02040503050406030204" pitchFamily="18" charset="0"/>
-                            </a:rPr>
-                            <m:t>,</m:t>
-                          </m:r>
-                          <m:r>
-                            <a:rPr lang="en-US" sz="4400" b="0" i="1" smtClean="0">
-                              <a:latin typeface="Cambria Math" panose="02040503050406030204" pitchFamily="18" charset="0"/>
-                            </a:rPr>
-                            <m:t>𝑡</m:t>
-                          </m:r>
-                          <m:r>
-                            <a:rPr lang="en-US" sz="4400" b="0" i="1" smtClean="0">
-                              <a:latin typeface="Cambria Math" panose="02040503050406030204" pitchFamily="18" charset="0"/>
-                            </a:rPr>
-                            <m:t>−1</m:t>
-                          </m:r>
-                        </m:e>
-                      </m:d>
-                      <m:r>
-                        <a:rPr lang="en-US" sz="4400" b="0" i="1" smtClean="0">
-                          <a:latin typeface="Cambria Math" panose="02040503050406030204" pitchFamily="18" charset="0"/>
-                        </a:rPr>
-                        <m:t>+</m:t>
-                      </m:r>
-                      <m:sSub>
-                        <m:sSubPr>
-                          <m:ctrlPr>
-                            <a:rPr lang="en-US" sz="4400" b="0" i="1" smtClean="0">
-                              <a:latin typeface="Cambria Math" panose="02040503050406030204" pitchFamily="18" charset="0"/>
-                            </a:rPr>
-                          </m:ctrlPr>
-                        </m:sSubPr>
-                        <m:e>
-                          <m:r>
-                            <a:rPr lang="en-US" sz="4400" b="0" i="1" smtClean="0">
-                              <a:latin typeface="Cambria Math" panose="02040503050406030204" pitchFamily="18" charset="0"/>
-                            </a:rPr>
-                            <m:t>𝑒</m:t>
-                          </m:r>
-                        </m:e>
-                        <m:sub>
-                          <m:r>
-                            <a:rPr lang="en-US" sz="4400" b="0" i="1" smtClean="0">
-                              <a:latin typeface="Cambria Math" panose="02040503050406030204" pitchFamily="18" charset="0"/>
-                            </a:rPr>
-                            <m:t>𝑖</m:t>
-                          </m:r>
-                          <m:r>
-                            <a:rPr lang="en-US" sz="4400" b="0" i="1" smtClean="0">
-                              <a:latin typeface="Cambria Math" panose="02040503050406030204" pitchFamily="18" charset="0"/>
-                            </a:rPr>
-                            <m:t>,</m:t>
-                          </m:r>
-                          <m:r>
-                            <a:rPr lang="en-US" sz="4400" b="0" i="1" smtClean="0">
-                              <a:latin typeface="Cambria Math" panose="02040503050406030204" pitchFamily="18" charset="0"/>
-                            </a:rPr>
-                            <m:t>𝑡</m:t>
-                          </m:r>
-                        </m:sub>
-                      </m:sSub>
-                    </m:oMath>
-                  </m:oMathPara>
-                </a14:m>
-                <a:endParaRPr lang="LID4096" sz="4400" dirty="0"/>
-              </a:p>
-            </p:txBody>
-          </p:sp>
-        </mc:Choice>
-        <mc:Fallback xmlns="">
-          <p:sp>
-            <p:nvSpPr>
-              <p:cNvPr id="3" name="TextBox 2">
-                <a:extLst>
-                  <a:ext uri="{FF2B5EF4-FFF2-40B4-BE49-F238E27FC236}">
-                    <a16:creationId xmlns:a16="http://schemas.microsoft.com/office/drawing/2014/main" id="{215EA723-8B0A-8C58-248B-BA2A9CCA4845}"/>
-                  </a:ext>
-                </a:extLst>
-              </p:cNvPr>
-              <p:cNvSpPr txBox="1">
-                <a:spLocks noRot="1" noChangeAspect="1" noMove="1" noResize="1" noEditPoints="1" noAdjustHandles="1" noChangeArrowheads="1" noChangeShapeType="1" noTextEdit="1"/>
-              </p:cNvSpPr>
-              <p:nvPr/>
-            </p:nvSpPr>
-            <p:spPr>
-              <a:xfrm>
-                <a:off x="2538071" y="4490514"/>
-                <a:ext cx="7115858" cy="706797"/>
-              </a:xfrm>
-              <a:prstGeom prst="rect">
-                <a:avLst/>
-              </a:prstGeom>
-              <a:blipFill>
-                <a:blip r:embed="rId2"/>
-                <a:stretch>
-                  <a:fillRect/>
-                </a:stretch>
-              </a:blipFill>
-            </p:spPr>
-            <p:txBody>
-              <a:bodyPr/>
-              <a:lstStyle/>
-              <a:p>
-                <a:r>
-                  <a:rPr lang="LID4096">
-                    <a:noFill/>
-                  </a:rPr>
-                  <a:t> </a:t>
-                </a:r>
-              </a:p>
-            </p:txBody>
-          </p:sp>
-        </mc:Fallback>
-      </mc:AlternateContent>
-      <mc:AlternateContent xmlns:mc="http://schemas.openxmlformats.org/markup-compatibility/2006" xmlns:a14="http://schemas.microsoft.com/office/drawing/2010/main">
-        <mc:Choice Requires="a14">
-          <p:sp>
-            <p:nvSpPr>
-              <p:cNvPr id="6" name="TextBox 5">
-                <a:extLst>
-                  <a:ext uri="{FF2B5EF4-FFF2-40B4-BE49-F238E27FC236}">
-                    <a16:creationId xmlns:a16="http://schemas.microsoft.com/office/drawing/2014/main" id="{6FFD4433-4150-0B87-CD70-7F48716BCEB7}"/>
-                  </a:ext>
-                </a:extLst>
-              </p:cNvPr>
-              <p:cNvSpPr txBox="1"/>
-              <p:nvPr/>
-            </p:nvSpPr>
-            <p:spPr>
-              <a:xfrm>
-                <a:off x="2538071" y="5384878"/>
-                <a:ext cx="1560876" cy="492443"/>
-              </a:xfrm>
-              <a:prstGeom prst="rect">
-                <a:avLst/>
-              </a:prstGeom>
-              <a:noFill/>
-            </p:spPr>
-            <p:txBody>
-              <a:bodyPr wrap="none" lIns="0" tIns="0" rIns="0" bIns="0" rtlCol="0">
-                <a:spAutoFit/>
-              </a:bodyPr>
-              <a:lstStyle/>
-              <a:p>
-                <a:pPr/>
-                <a14:m>
-                  <m:oMathPara xmlns:m="http://schemas.openxmlformats.org/officeDocument/2006/math">
-                    <m:oMath>
-                      <m:sSub>
-                        <m:sSubPr>
-                          <m:ctrlPr>
-                            <a:rPr lang="en-US" sz="3200" b="0" i="1" smtClean="0">
-                              <a:latin typeface="Cambria Math" panose="02040503050406030204" pitchFamily="18" charset="0"/>
-                            </a:rPr>
-                          </m:ctrlPr>
-                        </m:sSubPr>
-                        <m:e>
-                          <m:r>
-                            <a:rPr lang="en-US" sz="3200" b="0" i="1" smtClean="0">
-                              <a:latin typeface="Cambria Math" panose="02040503050406030204" pitchFamily="18" charset="0"/>
-                            </a:rPr>
-                            <m:t>𝛽</m:t>
-                          </m:r>
-                        </m:e>
-                        <m:sub>
-                          <m:r>
-                            <a:rPr lang="en-US" sz="3200" b="0" i="1" smtClean="0">
-                              <a:latin typeface="Cambria Math" panose="02040503050406030204" pitchFamily="18" charset="0"/>
-                            </a:rPr>
-                            <m:t>1</m:t>
-                          </m:r>
-                        </m:sub>
-                      </m:sSub>
-                      <m:r>
-                        <a:rPr lang="en-US" sz="3200" b="0" i="1" smtClean="0">
-                          <a:latin typeface="Cambria Math" panose="02040503050406030204" pitchFamily="18" charset="0"/>
-                        </a:rPr>
-                        <m:t>=0.2</m:t>
-                      </m:r>
-                    </m:oMath>
-                  </m:oMathPara>
-                </a14:m>
-                <a:endParaRPr lang="LID4096" sz="3200" dirty="0"/>
-              </a:p>
-            </p:txBody>
-          </p:sp>
-        </mc:Choice>
-        <mc:Fallback xmlns="">
-          <p:sp>
-            <p:nvSpPr>
-              <p:cNvPr id="6" name="TextBox 5">
-                <a:extLst>
-                  <a:ext uri="{FF2B5EF4-FFF2-40B4-BE49-F238E27FC236}">
-                    <a16:creationId xmlns:a16="http://schemas.microsoft.com/office/drawing/2014/main" id="{6FFD4433-4150-0B87-CD70-7F48716BCEB7}"/>
-                  </a:ext>
-                </a:extLst>
-              </p:cNvPr>
-              <p:cNvSpPr txBox="1">
-                <a:spLocks noRot="1" noChangeAspect="1" noMove="1" noResize="1" noEditPoints="1" noAdjustHandles="1" noChangeArrowheads="1" noChangeShapeType="1" noTextEdit="1"/>
-              </p:cNvSpPr>
-              <p:nvPr/>
-            </p:nvSpPr>
-            <p:spPr>
-              <a:xfrm>
-                <a:off x="2538071" y="5384878"/>
-                <a:ext cx="1560876" cy="492443"/>
-              </a:xfrm>
-              <a:prstGeom prst="rect">
-                <a:avLst/>
-              </a:prstGeom>
-              <a:blipFill>
-                <a:blip r:embed="rId3"/>
-                <a:stretch>
-                  <a:fillRect/>
-                </a:stretch>
-              </a:blipFill>
-            </p:spPr>
-            <p:txBody>
-              <a:bodyPr/>
-              <a:lstStyle/>
-              <a:p>
-                <a:r>
-                  <a:rPr lang="LID4096">
-                    <a:noFill/>
-                  </a:rPr>
-                  <a:t> </a:t>
-                </a:r>
-              </a:p>
-            </p:txBody>
-          </p:sp>
-        </mc:Fallback>
-      </mc:AlternateContent>
-      <mc:AlternateContent xmlns:mc="http://schemas.openxmlformats.org/markup-compatibility/2006" xmlns:a14="http://schemas.microsoft.com/office/drawing/2010/main">
-        <mc:Choice Requires="a14">
-          <p:sp>
-            <p:nvSpPr>
-              <p:cNvPr id="7" name="TextBox 6">
-                <a:extLst>
-                  <a:ext uri="{FF2B5EF4-FFF2-40B4-BE49-F238E27FC236}">
-                    <a16:creationId xmlns:a16="http://schemas.microsoft.com/office/drawing/2014/main" id="{356934BF-9F8D-FE06-0B5C-24D8A49350B7}"/>
-                  </a:ext>
-                </a:extLst>
-              </p:cNvPr>
-              <p:cNvSpPr txBox="1"/>
-              <p:nvPr/>
-            </p:nvSpPr>
-            <p:spPr>
-              <a:xfrm>
-                <a:off x="2528582" y="6064888"/>
-                <a:ext cx="1570365" cy="492443"/>
-              </a:xfrm>
-              <a:prstGeom prst="rect">
-                <a:avLst/>
-              </a:prstGeom>
-              <a:noFill/>
-            </p:spPr>
-            <p:txBody>
-              <a:bodyPr wrap="none" lIns="0" tIns="0" rIns="0" bIns="0" rtlCol="0">
-                <a:spAutoFit/>
-              </a:bodyPr>
-              <a:lstStyle/>
-              <a:p>
-                <a:pPr/>
-                <a14:m>
-                  <m:oMathPara xmlns:m="http://schemas.openxmlformats.org/officeDocument/2006/math">
-                    <m:oMath>
-                      <m:sSub>
-                        <m:sSubPr>
-                          <m:ctrlPr>
-                            <a:rPr lang="en-US" sz="3200" b="0" i="1" smtClean="0">
-                              <a:latin typeface="Cambria Math" panose="02040503050406030204" pitchFamily="18" charset="0"/>
-                            </a:rPr>
-                          </m:ctrlPr>
-                        </m:sSubPr>
-                        <m:e>
-                          <m:r>
-                            <a:rPr lang="en-US" sz="3200" b="0" i="1" smtClean="0">
-                              <a:latin typeface="Cambria Math" panose="02040503050406030204" pitchFamily="18" charset="0"/>
-                            </a:rPr>
-                            <m:t>𝛽</m:t>
-                          </m:r>
-                        </m:e>
-                        <m:sub>
-                          <m:r>
-                            <a:rPr lang="en-US" sz="3200" b="0" i="1" smtClean="0">
-                              <a:latin typeface="Cambria Math" panose="02040503050406030204" pitchFamily="18" charset="0"/>
-                            </a:rPr>
-                            <m:t>2</m:t>
-                          </m:r>
-                        </m:sub>
-                      </m:sSub>
-                      <m:r>
-                        <a:rPr lang="en-US" sz="3200" b="0" i="1" smtClean="0">
-                          <a:latin typeface="Cambria Math" panose="02040503050406030204" pitchFamily="18" charset="0"/>
-                        </a:rPr>
-                        <m:t>=0.6</m:t>
-                      </m:r>
-                    </m:oMath>
-                  </m:oMathPara>
-                </a14:m>
-                <a:endParaRPr lang="LID4096" sz="3200" dirty="0"/>
-              </a:p>
-            </p:txBody>
-          </p:sp>
-        </mc:Choice>
-        <mc:Fallback xmlns="">
-          <p:sp>
-            <p:nvSpPr>
-              <p:cNvPr id="7" name="TextBox 6">
-                <a:extLst>
-                  <a:ext uri="{FF2B5EF4-FFF2-40B4-BE49-F238E27FC236}">
-                    <a16:creationId xmlns:a16="http://schemas.microsoft.com/office/drawing/2014/main" id="{356934BF-9F8D-FE06-0B5C-24D8A49350B7}"/>
-                  </a:ext>
-                </a:extLst>
-              </p:cNvPr>
-              <p:cNvSpPr txBox="1">
-                <a:spLocks noRot="1" noChangeAspect="1" noMove="1" noResize="1" noEditPoints="1" noAdjustHandles="1" noChangeArrowheads="1" noChangeShapeType="1" noTextEdit="1"/>
-              </p:cNvSpPr>
-              <p:nvPr/>
-            </p:nvSpPr>
-            <p:spPr>
-              <a:xfrm>
-                <a:off x="2528582" y="6064888"/>
-                <a:ext cx="1570365" cy="492443"/>
-              </a:xfrm>
-              <a:prstGeom prst="rect">
-                <a:avLst/>
-              </a:prstGeom>
-              <a:blipFill>
-                <a:blip r:embed="rId4"/>
-                <a:stretch>
-                  <a:fillRect/>
-                </a:stretch>
-              </a:blipFill>
-            </p:spPr>
-            <p:txBody>
-              <a:bodyPr/>
-              <a:lstStyle/>
-              <a:p>
-                <a:r>
-                  <a:rPr lang="LID4096">
-                    <a:noFill/>
-                  </a:rPr>
-                  <a:t> </a:t>
-                </a:r>
-              </a:p>
-            </p:txBody>
-          </p:sp>
-        </mc:Fallback>
-      </mc:AlternateContent>
-    </p:spTree>
-    <p:extLst>
-      <p:ext uri="{BB962C8B-B14F-4D97-AF65-F5344CB8AC3E}">
-        <p14:creationId xmlns:p14="http://schemas.microsoft.com/office/powerpoint/2010/main" val="3259288382"/>
-      </p:ext>
-    </p:extLst>
-  </p:cSld>
-  <p:clrMapOvr>
-    <a:masterClrMapping/>
-  </p:clrMapOvr>
-</p:sld>
-</file>
-
-<file path=ppt/slides/slide35.xml><?xml version="1.0" encoding="utf-8"?>
-<p:sld xmlns:a="http://schemas.openxmlformats.org/drawingml/2006/main" xmlns:r="http://schemas.openxmlformats.org/officeDocument/2006/relationships" xmlns:p="http://schemas.openxmlformats.org/presentationml/2006/main">
-  <p:cSld>
-    <p:spTree>
-      <p:nvGrpSpPr>
-        <p:cNvPr id="1" name="">
-          <a:extLst>
-            <a:ext uri="{FF2B5EF4-FFF2-40B4-BE49-F238E27FC236}">
-              <a16:creationId xmlns:a16="http://schemas.microsoft.com/office/drawing/2014/main" id="{51006E9C-E3B4-442D-97FF-A07A4A21E6B8}"/>
-            </a:ext>
-          </a:extLst>
-        </p:cNvPr>
-        <p:cNvGrpSpPr/>
-        <p:nvPr/>
-      </p:nvGrpSpPr>
-      <p:grpSpPr>
-        <a:xfrm>
-          <a:off x="0" y="0"/>
-          <a:ext cx="0" cy="0"/>
-          <a:chOff x="0" y="0"/>
-          <a:chExt cx="0" cy="0"/>
-        </a:xfrm>
-      </p:grpSpPr>
-      <p:sp>
-        <p:nvSpPr>
-          <p:cNvPr id="2" name="Title 1">
-            <a:extLst>
-              <a:ext uri="{FF2B5EF4-FFF2-40B4-BE49-F238E27FC236}">
-                <a16:creationId xmlns:a16="http://schemas.microsoft.com/office/drawing/2014/main" id="{AE9C7B85-DFA9-DFCE-F30C-F036C33D5FBD}"/>
-              </a:ext>
-            </a:extLst>
-          </p:cNvPr>
-          <p:cNvSpPr>
-            <a:spLocks noGrp="1"/>
-          </p:cNvSpPr>
-          <p:nvPr>
-            <p:ph type="title"/>
-          </p:nvPr>
-        </p:nvSpPr>
-        <p:spPr/>
-        <p:txBody>
-          <a:bodyPr/>
-          <a:lstStyle/>
-          <a:p>
-            <a:r>
-              <a:rPr lang="en-US" dirty="0"/>
-              <a:t>Let’s add some shocks!</a:t>
-            </a:r>
-            <a:endParaRPr lang="LID4096" dirty="0"/>
-          </a:p>
-        </p:txBody>
-      </p:sp>
-      <p:sp>
-        <p:nvSpPr>
-          <p:cNvPr id="4" name="TextBox 3">
-            <a:extLst>
-              <a:ext uri="{FF2B5EF4-FFF2-40B4-BE49-F238E27FC236}">
-                <a16:creationId xmlns:a16="http://schemas.microsoft.com/office/drawing/2014/main" id="{BC48C816-25FF-9394-867C-E18EA6E0BE5E}"/>
-              </a:ext>
-            </a:extLst>
-          </p:cNvPr>
-          <p:cNvSpPr txBox="1"/>
-          <p:nvPr/>
-        </p:nvSpPr>
-        <p:spPr>
-          <a:xfrm>
-            <a:off x="1001486" y="2166257"/>
-            <a:ext cx="9960428" cy="2677656"/>
-          </a:xfrm>
-          <a:prstGeom prst="rect">
-            <a:avLst/>
-          </a:prstGeom>
-          <a:noFill/>
-        </p:spPr>
-        <p:txBody>
-          <a:bodyPr wrap="square" rtlCol="0">
-            <a:spAutoFit/>
-          </a:bodyPr>
-          <a:lstStyle/>
-          <a:p>
-            <a:r>
-              <a:rPr lang="en-US" sz="2800" dirty="0"/>
-              <a:t>Two people getting in an argument, John and Luca.</a:t>
-            </a:r>
-          </a:p>
-          <a:p>
-            <a:endParaRPr lang="en-US" sz="2800" dirty="0"/>
-          </a:p>
-          <a:p>
-            <a:r>
-              <a:rPr lang="en-US" sz="2800" dirty="0">
-                <a:solidFill>
-                  <a:schemeClr val="accent2"/>
-                </a:solidFill>
-              </a:rPr>
-              <a:t>John</a:t>
-            </a:r>
-            <a:r>
-              <a:rPr lang="en-US" sz="2800" dirty="0"/>
-              <a:t> (reactive, composes himself quick)</a:t>
-            </a:r>
-          </a:p>
-          <a:p>
-            <a:r>
-              <a:rPr lang="en-US" sz="2800" dirty="0">
-                <a:solidFill>
-                  <a:schemeClr val="accent5">
-                    <a:lumMod val="75000"/>
-                  </a:schemeClr>
-                </a:solidFill>
-              </a:rPr>
-              <a:t>Luca</a:t>
-            </a:r>
-            <a:r>
-              <a:rPr lang="en-US" sz="2800" dirty="0"/>
-              <a:t> (hard to shake, slow to compose himself)</a:t>
-            </a:r>
-          </a:p>
-          <a:p>
-            <a:endParaRPr lang="en-US" sz="2800" dirty="0"/>
-          </a:p>
-          <a:p>
-            <a:endParaRPr lang="en-US" sz="2800" dirty="0"/>
-          </a:p>
-        </p:txBody>
-      </p:sp>
-      <mc:AlternateContent xmlns:mc="http://schemas.openxmlformats.org/markup-compatibility/2006" xmlns:a14="http://schemas.microsoft.com/office/drawing/2010/main">
-        <mc:Choice Requires="a14">
-          <p:sp>
-            <p:nvSpPr>
-              <p:cNvPr id="3" name="TextBox 2">
-                <a:extLst>
-                  <a:ext uri="{FF2B5EF4-FFF2-40B4-BE49-F238E27FC236}">
-                    <a16:creationId xmlns:a16="http://schemas.microsoft.com/office/drawing/2014/main" id="{617AA81D-C570-EA75-C0CC-C98165F3F9D4}"/>
-                  </a:ext>
-                </a:extLst>
-              </p:cNvPr>
-              <p:cNvSpPr txBox="1"/>
-              <p:nvPr/>
-            </p:nvSpPr>
-            <p:spPr>
-              <a:xfrm>
-                <a:off x="2538071" y="4490514"/>
-                <a:ext cx="7115858" cy="706797"/>
-              </a:xfrm>
-              <a:prstGeom prst="rect">
-                <a:avLst/>
-              </a:prstGeom>
-              <a:noFill/>
-            </p:spPr>
-            <p:txBody>
-              <a:bodyPr wrap="none" lIns="0" tIns="0" rIns="0" bIns="0" rtlCol="0">
-                <a:spAutoFit/>
-              </a:bodyPr>
-              <a:lstStyle/>
-              <a:p>
-                <a:pPr/>
-                <a14:m>
-                  <m:oMathPara xmlns:m="http://schemas.openxmlformats.org/officeDocument/2006/math">
-                    <m:oMath>
-                      <m:r>
-                        <a:rPr lang="en-US" sz="4400" b="0" i="1" smtClean="0">
-                          <a:latin typeface="Cambria Math" panose="02040503050406030204" pitchFamily="18" charset="0"/>
-                        </a:rPr>
-                        <m:t>𝑦</m:t>
-                      </m:r>
-                      <m:d>
-                        <m:dPr>
-                          <m:ctrlPr>
-                            <a:rPr lang="en-US" sz="4400" b="0" i="1" smtClean="0">
-                              <a:latin typeface="Cambria Math" panose="02040503050406030204" pitchFamily="18" charset="0"/>
-                            </a:rPr>
-                          </m:ctrlPr>
-                        </m:dPr>
-                        <m:e>
-                          <m:r>
-                            <a:rPr lang="en-US" sz="4400" b="0" i="1" smtClean="0">
-                              <a:latin typeface="Cambria Math" panose="02040503050406030204" pitchFamily="18" charset="0"/>
-                            </a:rPr>
-                            <m:t>𝑖</m:t>
-                          </m:r>
-                          <m:r>
-                            <a:rPr lang="en-US" sz="4400" b="0" i="1" smtClean="0">
-                              <a:latin typeface="Cambria Math" panose="02040503050406030204" pitchFamily="18" charset="0"/>
-                            </a:rPr>
-                            <m:t>,</m:t>
-                          </m:r>
-                          <m:r>
-                            <a:rPr lang="en-US" sz="4400" b="0" i="1" smtClean="0">
-                              <a:latin typeface="Cambria Math" panose="02040503050406030204" pitchFamily="18" charset="0"/>
-                            </a:rPr>
-                            <m:t>𝑡</m:t>
-                          </m:r>
-                        </m:e>
-                      </m:d>
-                      <m:r>
-                        <a:rPr lang="en-US" sz="4400" b="0" i="1" smtClean="0">
-                          <a:latin typeface="Cambria Math" panose="02040503050406030204" pitchFamily="18" charset="0"/>
-                        </a:rPr>
-                        <m:t>=</m:t>
-                      </m:r>
-                      <m:sSub>
-                        <m:sSubPr>
-                          <m:ctrlPr>
-                            <a:rPr lang="en-US" sz="4400" b="0" i="1" smtClean="0">
-                              <a:latin typeface="Cambria Math" panose="02040503050406030204" pitchFamily="18" charset="0"/>
-                            </a:rPr>
-                          </m:ctrlPr>
-                        </m:sSubPr>
-                        <m:e>
-                          <m:r>
-                            <a:rPr lang="en-US" sz="4400" b="0" i="1" smtClean="0">
-                              <a:latin typeface="Cambria Math" panose="02040503050406030204" pitchFamily="18" charset="0"/>
-                            </a:rPr>
-                            <m:t>𝛽</m:t>
-                          </m:r>
-                        </m:e>
-                        <m:sub>
-                          <m:r>
-                            <a:rPr lang="en-US" sz="4400" b="0" i="1" smtClean="0">
-                              <a:latin typeface="Cambria Math" panose="02040503050406030204" pitchFamily="18" charset="0"/>
-                            </a:rPr>
-                            <m:t>𝑖</m:t>
-                          </m:r>
-                        </m:sub>
-                      </m:sSub>
-                      <m:r>
-                        <a:rPr lang="en-US" sz="4400" b="0" i="1" smtClean="0">
-                          <a:latin typeface="Cambria Math" panose="02040503050406030204" pitchFamily="18" charset="0"/>
-                        </a:rPr>
-                        <m:t>∗</m:t>
-                      </m:r>
-                      <m:r>
-                        <a:rPr lang="en-US" sz="4400" b="0" i="1" smtClean="0">
-                          <a:latin typeface="Cambria Math" panose="02040503050406030204" pitchFamily="18" charset="0"/>
-                        </a:rPr>
-                        <m:t>𝑦</m:t>
-                      </m:r>
-                      <m:d>
-                        <m:dPr>
-                          <m:ctrlPr>
-                            <a:rPr lang="en-US" sz="4400" b="0" i="1" smtClean="0">
-                              <a:latin typeface="Cambria Math" panose="02040503050406030204" pitchFamily="18" charset="0"/>
-                            </a:rPr>
-                          </m:ctrlPr>
-                        </m:dPr>
-                        <m:e>
-                          <m:r>
-                            <a:rPr lang="en-US" sz="4400" b="0" i="1" smtClean="0">
-                              <a:latin typeface="Cambria Math" panose="02040503050406030204" pitchFamily="18" charset="0"/>
-                            </a:rPr>
-                            <m:t>𝑖</m:t>
-                          </m:r>
-                          <m:r>
-                            <a:rPr lang="en-US" sz="4400" b="0" i="1" smtClean="0">
-                              <a:latin typeface="Cambria Math" panose="02040503050406030204" pitchFamily="18" charset="0"/>
-                            </a:rPr>
-                            <m:t>,</m:t>
-                          </m:r>
-                          <m:r>
-                            <a:rPr lang="en-US" sz="4400" b="0" i="1" smtClean="0">
-                              <a:latin typeface="Cambria Math" panose="02040503050406030204" pitchFamily="18" charset="0"/>
-                            </a:rPr>
-                            <m:t>𝑡</m:t>
-                          </m:r>
-                          <m:r>
-                            <a:rPr lang="en-US" sz="4400" b="0" i="1" smtClean="0">
-                              <a:latin typeface="Cambria Math" panose="02040503050406030204" pitchFamily="18" charset="0"/>
-                            </a:rPr>
-                            <m:t>−1</m:t>
-                          </m:r>
-                        </m:e>
-                      </m:d>
-                      <m:r>
-                        <a:rPr lang="en-US" sz="4400" b="0" i="1" smtClean="0">
-                          <a:latin typeface="Cambria Math" panose="02040503050406030204" pitchFamily="18" charset="0"/>
-                        </a:rPr>
-                        <m:t>+</m:t>
-                      </m:r>
-                      <m:sSub>
-                        <m:sSubPr>
-                          <m:ctrlPr>
-                            <a:rPr lang="en-US" sz="4400" b="0" i="1" smtClean="0">
-                              <a:latin typeface="Cambria Math" panose="02040503050406030204" pitchFamily="18" charset="0"/>
-                            </a:rPr>
-                          </m:ctrlPr>
-                        </m:sSubPr>
-                        <m:e>
-                          <m:r>
-                            <a:rPr lang="en-US" sz="4400" b="0" i="1" smtClean="0">
-                              <a:latin typeface="Cambria Math" panose="02040503050406030204" pitchFamily="18" charset="0"/>
-                            </a:rPr>
-                            <m:t>𝑒</m:t>
-                          </m:r>
-                        </m:e>
-                        <m:sub>
-                          <m:r>
-                            <a:rPr lang="en-US" sz="4400" b="0" i="1" smtClean="0">
-                              <a:latin typeface="Cambria Math" panose="02040503050406030204" pitchFamily="18" charset="0"/>
-                            </a:rPr>
-                            <m:t>𝑖</m:t>
-                          </m:r>
-                          <m:r>
-                            <a:rPr lang="en-US" sz="4400" b="0" i="1" smtClean="0">
-                              <a:latin typeface="Cambria Math" panose="02040503050406030204" pitchFamily="18" charset="0"/>
-                            </a:rPr>
-                            <m:t>,</m:t>
-                          </m:r>
-                          <m:r>
-                            <a:rPr lang="en-US" sz="4400" b="0" i="1" smtClean="0">
-                              <a:latin typeface="Cambria Math" panose="02040503050406030204" pitchFamily="18" charset="0"/>
-                            </a:rPr>
-                            <m:t>𝑡</m:t>
-                          </m:r>
-                        </m:sub>
-                      </m:sSub>
-                    </m:oMath>
-                  </m:oMathPara>
-                </a14:m>
-                <a:endParaRPr lang="LID4096" sz="4400" dirty="0"/>
-              </a:p>
-            </p:txBody>
-          </p:sp>
-        </mc:Choice>
-        <mc:Fallback xmlns="">
-          <p:sp>
-            <p:nvSpPr>
-              <p:cNvPr id="3" name="TextBox 2">
-                <a:extLst>
-                  <a:ext uri="{FF2B5EF4-FFF2-40B4-BE49-F238E27FC236}">
-                    <a16:creationId xmlns:a16="http://schemas.microsoft.com/office/drawing/2014/main" id="{617AA81D-C570-EA75-C0CC-C98165F3F9D4}"/>
-                  </a:ext>
-                </a:extLst>
-              </p:cNvPr>
-              <p:cNvSpPr txBox="1">
-                <a:spLocks noRot="1" noChangeAspect="1" noMove="1" noResize="1" noEditPoints="1" noAdjustHandles="1" noChangeArrowheads="1" noChangeShapeType="1" noTextEdit="1"/>
-              </p:cNvSpPr>
-              <p:nvPr/>
-            </p:nvSpPr>
-            <p:spPr>
-              <a:xfrm>
-                <a:off x="2538071" y="4490514"/>
-                <a:ext cx="7115858" cy="706797"/>
-              </a:xfrm>
-              <a:prstGeom prst="rect">
-                <a:avLst/>
-              </a:prstGeom>
-              <a:blipFill>
-                <a:blip r:embed="rId2"/>
-                <a:stretch>
-                  <a:fillRect/>
-                </a:stretch>
-              </a:blipFill>
-            </p:spPr>
-            <p:txBody>
-              <a:bodyPr/>
-              <a:lstStyle/>
-              <a:p>
-                <a:r>
-                  <a:rPr lang="LID4096">
-                    <a:noFill/>
-                  </a:rPr>
-                  <a:t> </a:t>
-                </a:r>
-              </a:p>
-            </p:txBody>
-          </p:sp>
-        </mc:Fallback>
-      </mc:AlternateContent>
-      <mc:AlternateContent xmlns:mc="http://schemas.openxmlformats.org/markup-compatibility/2006" xmlns:a14="http://schemas.microsoft.com/office/drawing/2010/main">
-        <mc:Choice Requires="a14">
-          <p:sp>
-            <p:nvSpPr>
-              <p:cNvPr id="6" name="TextBox 5">
-                <a:extLst>
-                  <a:ext uri="{FF2B5EF4-FFF2-40B4-BE49-F238E27FC236}">
-                    <a16:creationId xmlns:a16="http://schemas.microsoft.com/office/drawing/2014/main" id="{8D8A7FB3-48ED-7EE7-2F5B-DE3A89E09456}"/>
-                  </a:ext>
-                </a:extLst>
-              </p:cNvPr>
-              <p:cNvSpPr txBox="1"/>
-              <p:nvPr/>
-            </p:nvSpPr>
-            <p:spPr>
-              <a:xfrm>
-                <a:off x="2538071" y="5384878"/>
-                <a:ext cx="1560876" cy="492443"/>
-              </a:xfrm>
-              <a:prstGeom prst="rect">
-                <a:avLst/>
-              </a:prstGeom>
-              <a:noFill/>
-            </p:spPr>
-            <p:txBody>
-              <a:bodyPr wrap="none" lIns="0" tIns="0" rIns="0" bIns="0" rtlCol="0">
-                <a:spAutoFit/>
-              </a:bodyPr>
-              <a:lstStyle/>
-              <a:p>
-                <a:pPr/>
-                <a14:m>
-                  <m:oMathPara xmlns:m="http://schemas.openxmlformats.org/officeDocument/2006/math">
-                    <m:oMath>
-                      <m:sSub>
-                        <m:sSubPr>
-                          <m:ctrlPr>
-                            <a:rPr lang="en-US" sz="3200" b="0" i="1" smtClean="0">
-                              <a:solidFill>
-                                <a:schemeClr val="accent2"/>
-                              </a:solidFill>
-                              <a:latin typeface="Cambria Math" panose="02040503050406030204" pitchFamily="18" charset="0"/>
-                            </a:rPr>
-                          </m:ctrlPr>
-                        </m:sSubPr>
-                        <m:e>
-                          <m:r>
-                            <a:rPr lang="en-US" sz="3200" b="0" i="1" smtClean="0">
-                              <a:solidFill>
-                                <a:schemeClr val="accent2"/>
-                              </a:solidFill>
-                              <a:latin typeface="Cambria Math" panose="02040503050406030204" pitchFamily="18" charset="0"/>
-                            </a:rPr>
-                            <m:t>𝛽</m:t>
-                          </m:r>
-                        </m:e>
-                        <m:sub>
-                          <m:r>
-                            <a:rPr lang="en-US" sz="3200" b="0" i="1" smtClean="0">
-                              <a:solidFill>
-                                <a:schemeClr val="accent2"/>
-                              </a:solidFill>
-                              <a:latin typeface="Cambria Math" panose="02040503050406030204" pitchFamily="18" charset="0"/>
-                            </a:rPr>
-                            <m:t>1</m:t>
-                          </m:r>
-                        </m:sub>
-                      </m:sSub>
-                      <m:r>
-                        <a:rPr lang="en-US" sz="3200" b="0" i="1" smtClean="0">
-                          <a:solidFill>
-                            <a:schemeClr val="accent2"/>
-                          </a:solidFill>
-                          <a:latin typeface="Cambria Math" panose="02040503050406030204" pitchFamily="18" charset="0"/>
-                        </a:rPr>
-                        <m:t>=0.2</m:t>
-                      </m:r>
-                    </m:oMath>
-                  </m:oMathPara>
-                </a14:m>
-                <a:endParaRPr lang="LID4096" sz="3200" dirty="0"/>
-              </a:p>
-            </p:txBody>
-          </p:sp>
-        </mc:Choice>
-        <mc:Fallback xmlns="">
-          <p:sp>
-            <p:nvSpPr>
-              <p:cNvPr id="6" name="TextBox 5">
-                <a:extLst>
-                  <a:ext uri="{FF2B5EF4-FFF2-40B4-BE49-F238E27FC236}">
-                    <a16:creationId xmlns:a16="http://schemas.microsoft.com/office/drawing/2014/main" id="{8D8A7FB3-48ED-7EE7-2F5B-DE3A89E09456}"/>
-                  </a:ext>
-                </a:extLst>
-              </p:cNvPr>
-              <p:cNvSpPr txBox="1">
-                <a:spLocks noRot="1" noChangeAspect="1" noMove="1" noResize="1" noEditPoints="1" noAdjustHandles="1" noChangeArrowheads="1" noChangeShapeType="1" noTextEdit="1"/>
-              </p:cNvSpPr>
-              <p:nvPr/>
-            </p:nvSpPr>
-            <p:spPr>
-              <a:xfrm>
-                <a:off x="2538071" y="5384878"/>
-                <a:ext cx="1560876" cy="492443"/>
-              </a:xfrm>
-              <a:prstGeom prst="rect">
-                <a:avLst/>
-              </a:prstGeom>
-              <a:blipFill>
-                <a:blip r:embed="rId3"/>
-                <a:stretch>
-                  <a:fillRect/>
-                </a:stretch>
-              </a:blipFill>
-            </p:spPr>
-            <p:txBody>
-              <a:bodyPr/>
-              <a:lstStyle/>
-              <a:p>
-                <a:r>
-                  <a:rPr lang="LID4096">
-                    <a:noFill/>
-                  </a:rPr>
-                  <a:t> </a:t>
-                </a:r>
-              </a:p>
-            </p:txBody>
-          </p:sp>
-        </mc:Fallback>
-      </mc:AlternateContent>
-      <mc:AlternateContent xmlns:mc="http://schemas.openxmlformats.org/markup-compatibility/2006" xmlns:a14="http://schemas.microsoft.com/office/drawing/2010/main">
-        <mc:Choice Requires="a14">
-          <p:sp>
-            <p:nvSpPr>
-              <p:cNvPr id="7" name="TextBox 6">
-                <a:extLst>
-                  <a:ext uri="{FF2B5EF4-FFF2-40B4-BE49-F238E27FC236}">
-                    <a16:creationId xmlns:a16="http://schemas.microsoft.com/office/drawing/2014/main" id="{7346C5DC-4A88-2FF5-FED5-82D02789321B}"/>
-                  </a:ext>
-                </a:extLst>
-              </p:cNvPr>
-              <p:cNvSpPr txBox="1"/>
-              <p:nvPr/>
-            </p:nvSpPr>
-            <p:spPr>
-              <a:xfrm>
-                <a:off x="2528582" y="6064888"/>
-                <a:ext cx="1570365" cy="492443"/>
-              </a:xfrm>
-              <a:prstGeom prst="rect">
-                <a:avLst/>
-              </a:prstGeom>
-              <a:noFill/>
-            </p:spPr>
-            <p:txBody>
-              <a:bodyPr wrap="none" lIns="0" tIns="0" rIns="0" bIns="0" rtlCol="0">
-                <a:spAutoFit/>
-              </a:bodyPr>
-              <a:lstStyle/>
-              <a:p>
-                <a:pPr/>
-                <a14:m>
-                  <m:oMathPara xmlns:m="http://schemas.openxmlformats.org/officeDocument/2006/math">
-                    <m:oMath>
-                      <m:sSub>
-                        <m:sSubPr>
-                          <m:ctrlPr>
-                            <a:rPr lang="en-US" sz="3200" b="0" i="1" smtClean="0">
-                              <a:solidFill>
-                                <a:srgbClr val="7030A0"/>
-                              </a:solidFill>
-                              <a:latin typeface="Cambria Math" panose="02040503050406030204" pitchFamily="18" charset="0"/>
-                            </a:rPr>
-                          </m:ctrlPr>
-                        </m:sSubPr>
-                        <m:e>
-                          <m:r>
-                            <a:rPr lang="en-US" sz="3200" b="0" i="1" smtClean="0">
-                              <a:solidFill>
-                                <a:srgbClr val="7030A0"/>
-                              </a:solidFill>
-                              <a:latin typeface="Cambria Math" panose="02040503050406030204" pitchFamily="18" charset="0"/>
-                            </a:rPr>
-                            <m:t>𝛽</m:t>
-                          </m:r>
-                        </m:e>
-                        <m:sub>
-                          <m:r>
-                            <a:rPr lang="en-US" sz="3200" b="0" i="1" smtClean="0">
-                              <a:solidFill>
-                                <a:srgbClr val="7030A0"/>
-                              </a:solidFill>
-                              <a:latin typeface="Cambria Math" panose="02040503050406030204" pitchFamily="18" charset="0"/>
-                            </a:rPr>
-                            <m:t>2</m:t>
-                          </m:r>
-                        </m:sub>
-                      </m:sSub>
-                      <m:r>
-                        <a:rPr lang="en-US" sz="3200" b="0" i="1" smtClean="0">
-                          <a:solidFill>
-                            <a:srgbClr val="7030A0"/>
-                          </a:solidFill>
-                          <a:latin typeface="Cambria Math" panose="02040503050406030204" pitchFamily="18" charset="0"/>
-                        </a:rPr>
-                        <m:t>=0.6</m:t>
-                      </m:r>
-                    </m:oMath>
-                  </m:oMathPara>
-                </a14:m>
-                <a:endParaRPr lang="LID4096" sz="3200" dirty="0">
-                  <a:solidFill>
-                    <a:srgbClr val="7030A0"/>
-                  </a:solidFill>
-                </a:endParaRPr>
-              </a:p>
-            </p:txBody>
-          </p:sp>
-        </mc:Choice>
-        <mc:Fallback xmlns="">
-          <p:sp>
-            <p:nvSpPr>
-              <p:cNvPr id="7" name="TextBox 6">
-                <a:extLst>
-                  <a:ext uri="{FF2B5EF4-FFF2-40B4-BE49-F238E27FC236}">
-                    <a16:creationId xmlns:a16="http://schemas.microsoft.com/office/drawing/2014/main" id="{7346C5DC-4A88-2FF5-FED5-82D02789321B}"/>
-                  </a:ext>
-                </a:extLst>
-              </p:cNvPr>
-              <p:cNvSpPr txBox="1">
-                <a:spLocks noRot="1" noChangeAspect="1" noMove="1" noResize="1" noEditPoints="1" noAdjustHandles="1" noChangeArrowheads="1" noChangeShapeType="1" noTextEdit="1"/>
-              </p:cNvSpPr>
-              <p:nvPr/>
-            </p:nvSpPr>
-            <p:spPr>
-              <a:xfrm>
-                <a:off x="2528582" y="6064888"/>
-                <a:ext cx="1570365" cy="492443"/>
-              </a:xfrm>
-              <a:prstGeom prst="rect">
-                <a:avLst/>
-              </a:prstGeom>
-              <a:blipFill>
-                <a:blip r:embed="rId4"/>
-                <a:stretch>
-                  <a:fillRect/>
-                </a:stretch>
-              </a:blipFill>
-            </p:spPr>
-            <p:txBody>
-              <a:bodyPr/>
-              <a:lstStyle/>
-              <a:p>
-                <a:r>
-                  <a:rPr lang="LID4096">
-                    <a:noFill/>
-                  </a:rPr>
-                  <a:t> </a:t>
-                </a:r>
-              </a:p>
-            </p:txBody>
-          </p:sp>
-        </mc:Fallback>
-      </mc:AlternateContent>
-    </p:spTree>
-    <p:extLst>
-      <p:ext uri="{BB962C8B-B14F-4D97-AF65-F5344CB8AC3E}">
-        <p14:creationId xmlns:p14="http://schemas.microsoft.com/office/powerpoint/2010/main" val="2015475321"/>
-      </p:ext>
-    </p:extLst>
-  </p:cSld>
-  <p:clrMapOvr>
-    <a:masterClrMapping/>
-  </p:clrMapOvr>
-</p:sld>
-</file>
-
-<file path=ppt/slides/slide36.xml><?xml version="1.0" encoding="utf-8"?>
-<p:sld xmlns:a="http://schemas.openxmlformats.org/drawingml/2006/main" xmlns:r="http://schemas.openxmlformats.org/officeDocument/2006/relationships" xmlns:p="http://schemas.openxmlformats.org/presentationml/2006/main">
-  <p:cSld>
-    <p:spTree>
-      <p:nvGrpSpPr>
-        <p:cNvPr id="1" name=""/>
-        <p:cNvGrpSpPr/>
-        <p:nvPr/>
-      </p:nvGrpSpPr>
-      <p:grpSpPr>
-        <a:xfrm>
-          <a:off x="0" y="0"/>
-          <a:ext cx="0" cy="0"/>
-          <a:chOff x="0" y="0"/>
-          <a:chExt cx="0" cy="0"/>
-        </a:xfrm>
-      </p:grpSpPr>
-      <p:sp>
-        <p:nvSpPr>
-          <p:cNvPr id="2" name="Title 1">
-            <a:extLst>
-              <a:ext uri="{FF2B5EF4-FFF2-40B4-BE49-F238E27FC236}">
-                <a16:creationId xmlns:a16="http://schemas.microsoft.com/office/drawing/2014/main" id="{82042941-0833-03A8-AE77-6127A49A2039}"/>
-              </a:ext>
-            </a:extLst>
-          </p:cNvPr>
-          <p:cNvSpPr>
-            <a:spLocks noGrp="1"/>
-          </p:cNvSpPr>
-          <p:nvPr>
-            <p:ph type="title"/>
-          </p:nvPr>
-        </p:nvSpPr>
-        <p:spPr/>
-        <p:txBody>
-          <a:bodyPr/>
-          <a:lstStyle/>
-          <a:p>
-            <a:r>
-              <a:rPr lang="en-US" dirty="0"/>
-              <a:t>Simulated arguing</a:t>
-            </a:r>
-            <a:endParaRPr lang="LID4096" dirty="0"/>
-          </a:p>
-        </p:txBody>
-      </p:sp>
-      <p:sp>
-        <p:nvSpPr>
-          <p:cNvPr id="3" name="Content Placeholder 2">
-            <a:extLst>
-              <a:ext uri="{FF2B5EF4-FFF2-40B4-BE49-F238E27FC236}">
-                <a16:creationId xmlns:a16="http://schemas.microsoft.com/office/drawing/2014/main" id="{8C2D298A-E852-C4A7-4B3D-0A475E7CB1DB}"/>
-              </a:ext>
-            </a:extLst>
-          </p:cNvPr>
-          <p:cNvSpPr>
-            <a:spLocks noGrp="1"/>
-          </p:cNvSpPr>
-          <p:nvPr>
-            <p:ph idx="1"/>
-          </p:nvPr>
-        </p:nvSpPr>
-        <p:spPr>
-          <a:xfrm>
-            <a:off x="838200" y="1825625"/>
-            <a:ext cx="10515600" cy="686221"/>
-          </a:xfrm>
-        </p:spPr>
-        <p:txBody>
-          <a:bodyPr>
-            <a:normAutofit/>
-          </a:bodyPr>
-          <a:lstStyle/>
-          <a:p>
-            <a:r>
-              <a:rPr lang="en-US" dirty="0"/>
-              <a:t>Draw the ebb and flow of John and Luca’s emotions as they argue</a:t>
-            </a:r>
-          </a:p>
-        </p:txBody>
-      </p:sp>
-      <mc:AlternateContent xmlns:mc="http://schemas.openxmlformats.org/markup-compatibility/2006" xmlns:a14="http://schemas.microsoft.com/office/drawing/2010/main">
-        <mc:Choice Requires="a14">
-          <p:sp>
-            <p:nvSpPr>
-              <p:cNvPr id="8" name="TextBox 7">
-                <a:extLst>
-                  <a:ext uri="{FF2B5EF4-FFF2-40B4-BE49-F238E27FC236}">
-                    <a16:creationId xmlns:a16="http://schemas.microsoft.com/office/drawing/2014/main" id="{C77B2214-39C6-3296-F81F-4B4C31300F31}"/>
-                  </a:ext>
-                </a:extLst>
-              </p:cNvPr>
-              <p:cNvSpPr txBox="1"/>
-              <p:nvPr/>
-            </p:nvSpPr>
-            <p:spPr>
-              <a:xfrm>
-                <a:off x="2075362" y="3075601"/>
-                <a:ext cx="8333884" cy="706797"/>
-              </a:xfrm>
-              <a:prstGeom prst="rect">
-                <a:avLst/>
-              </a:prstGeom>
-              <a:noFill/>
-            </p:spPr>
-            <p:txBody>
-              <a:bodyPr wrap="none" lIns="0" tIns="0" rIns="0" bIns="0" rtlCol="0">
-                <a:spAutoFit/>
-              </a:bodyPr>
-              <a:lstStyle/>
-              <a:p>
-                <a:pPr/>
-                <a14:m>
-                  <m:oMathPara xmlns:m="http://schemas.openxmlformats.org/officeDocument/2006/math">
-                    <m:oMath>
-                      <m:r>
-                        <a:rPr lang="en-US" sz="4400" b="0" i="1" smtClean="0">
-                          <a:solidFill>
-                            <a:schemeClr val="accent2">
-                              <a:lumMod val="75000"/>
-                            </a:schemeClr>
-                          </a:solidFill>
-                          <a:latin typeface="Cambria Math" panose="02040503050406030204" pitchFamily="18" charset="0"/>
-                        </a:rPr>
-                        <m:t>𝑦</m:t>
-                      </m:r>
-                      <m:d>
-                        <m:dPr>
-                          <m:ctrlPr>
-                            <a:rPr lang="en-US" sz="4400" b="0" i="1" smtClean="0">
-                              <a:solidFill>
-                                <a:schemeClr val="accent2">
-                                  <a:lumMod val="75000"/>
-                                </a:schemeClr>
-                              </a:solidFill>
-                              <a:latin typeface="Cambria Math" panose="02040503050406030204" pitchFamily="18" charset="0"/>
-                            </a:rPr>
-                          </m:ctrlPr>
-                        </m:dPr>
-                        <m:e>
-                          <m:r>
-                            <a:rPr lang="en-US" sz="4400" b="0" i="1" smtClean="0">
-                              <a:solidFill>
-                                <a:schemeClr val="accent2">
-                                  <a:lumMod val="75000"/>
-                                </a:schemeClr>
-                              </a:solidFill>
-                              <a:latin typeface="Cambria Math" panose="02040503050406030204" pitchFamily="18" charset="0"/>
-                            </a:rPr>
-                            <m:t>𝐽𝑜ℎ𝑛</m:t>
-                          </m:r>
-                          <m:r>
-                            <a:rPr lang="en-US" sz="4400" b="0" i="1" smtClean="0">
-                              <a:solidFill>
-                                <a:schemeClr val="accent2">
-                                  <a:lumMod val="75000"/>
-                                </a:schemeClr>
-                              </a:solidFill>
-                              <a:latin typeface="Cambria Math" panose="02040503050406030204" pitchFamily="18" charset="0"/>
-                            </a:rPr>
-                            <m:t>,</m:t>
-                          </m:r>
-                          <m:r>
-                            <a:rPr lang="en-US" sz="4400" b="0" i="1" smtClean="0">
-                              <a:solidFill>
-                                <a:schemeClr val="accent2">
-                                  <a:lumMod val="75000"/>
-                                </a:schemeClr>
-                              </a:solidFill>
-                              <a:latin typeface="Cambria Math" panose="02040503050406030204" pitchFamily="18" charset="0"/>
-                            </a:rPr>
-                            <m:t>𝑡</m:t>
-                          </m:r>
-                        </m:e>
-                      </m:d>
-                      <m:r>
-                        <a:rPr lang="en-US" sz="4400" b="0" i="1" smtClean="0">
-                          <a:solidFill>
-                            <a:schemeClr val="accent2">
-                              <a:lumMod val="75000"/>
-                            </a:schemeClr>
-                          </a:solidFill>
-                          <a:latin typeface="Cambria Math" panose="02040503050406030204" pitchFamily="18" charset="0"/>
-                        </a:rPr>
-                        <m:t>=0.2∗</m:t>
-                      </m:r>
-                      <m:r>
-                        <a:rPr lang="en-US" sz="4400" b="0" i="1" smtClean="0">
-                          <a:solidFill>
-                            <a:schemeClr val="accent2">
-                              <a:lumMod val="75000"/>
-                            </a:schemeClr>
-                          </a:solidFill>
-                          <a:latin typeface="Cambria Math" panose="02040503050406030204" pitchFamily="18" charset="0"/>
-                        </a:rPr>
-                        <m:t>𝑦</m:t>
-                      </m:r>
-                      <m:d>
-                        <m:dPr>
-                          <m:ctrlPr>
-                            <a:rPr lang="en-US" sz="4400" b="0" i="1" smtClean="0">
-                              <a:solidFill>
-                                <a:schemeClr val="accent2">
-                                  <a:lumMod val="75000"/>
-                                </a:schemeClr>
-                              </a:solidFill>
-                              <a:latin typeface="Cambria Math" panose="02040503050406030204" pitchFamily="18" charset="0"/>
-                            </a:rPr>
-                          </m:ctrlPr>
-                        </m:dPr>
-                        <m:e>
-                          <m:r>
-                            <a:rPr lang="en-US" sz="4400" b="0" i="1" smtClean="0">
-                              <a:solidFill>
-                                <a:schemeClr val="accent2">
-                                  <a:lumMod val="75000"/>
-                                </a:schemeClr>
-                              </a:solidFill>
-                              <a:latin typeface="Cambria Math" panose="02040503050406030204" pitchFamily="18" charset="0"/>
-                            </a:rPr>
-                            <m:t>𝑖</m:t>
-                          </m:r>
-                          <m:r>
-                            <a:rPr lang="en-US" sz="4400" b="0" i="1" smtClean="0">
-                              <a:solidFill>
-                                <a:schemeClr val="accent2">
-                                  <a:lumMod val="75000"/>
-                                </a:schemeClr>
-                              </a:solidFill>
-                              <a:latin typeface="Cambria Math" panose="02040503050406030204" pitchFamily="18" charset="0"/>
-                            </a:rPr>
-                            <m:t>,</m:t>
-                          </m:r>
-                          <m:r>
-                            <a:rPr lang="en-US" sz="4400" b="0" i="1" smtClean="0">
-                              <a:solidFill>
-                                <a:schemeClr val="accent2">
-                                  <a:lumMod val="75000"/>
-                                </a:schemeClr>
-                              </a:solidFill>
-                              <a:latin typeface="Cambria Math" panose="02040503050406030204" pitchFamily="18" charset="0"/>
-                            </a:rPr>
-                            <m:t>𝑡</m:t>
-                          </m:r>
-                          <m:r>
-                            <a:rPr lang="en-US" sz="4400" b="0" i="1" smtClean="0">
-                              <a:solidFill>
-                                <a:schemeClr val="accent2">
-                                  <a:lumMod val="75000"/>
-                                </a:schemeClr>
-                              </a:solidFill>
-                              <a:latin typeface="Cambria Math" panose="02040503050406030204" pitchFamily="18" charset="0"/>
-                            </a:rPr>
-                            <m:t>−1</m:t>
-                          </m:r>
-                        </m:e>
-                      </m:d>
-                      <m:r>
-                        <a:rPr lang="en-US" sz="4400" b="0" i="1" smtClean="0">
-                          <a:solidFill>
-                            <a:schemeClr val="accent2">
-                              <a:lumMod val="75000"/>
-                            </a:schemeClr>
-                          </a:solidFill>
-                          <a:latin typeface="Cambria Math" panose="02040503050406030204" pitchFamily="18" charset="0"/>
-                        </a:rPr>
-                        <m:t>+</m:t>
-                      </m:r>
-                      <m:sSub>
-                        <m:sSubPr>
-                          <m:ctrlPr>
-                            <a:rPr lang="en-US" sz="4400" b="0" i="1" smtClean="0">
-                              <a:solidFill>
-                                <a:schemeClr val="accent2">
-                                  <a:lumMod val="75000"/>
-                                </a:schemeClr>
-                              </a:solidFill>
-                              <a:latin typeface="Cambria Math" panose="02040503050406030204" pitchFamily="18" charset="0"/>
-                            </a:rPr>
-                          </m:ctrlPr>
-                        </m:sSubPr>
-                        <m:e>
-                          <m:r>
-                            <a:rPr lang="en-US" sz="4400" b="0" i="1" smtClean="0">
-                              <a:solidFill>
-                                <a:schemeClr val="accent2">
-                                  <a:lumMod val="75000"/>
-                                </a:schemeClr>
-                              </a:solidFill>
-                              <a:latin typeface="Cambria Math" panose="02040503050406030204" pitchFamily="18" charset="0"/>
-                            </a:rPr>
-                            <m:t>𝑒</m:t>
-                          </m:r>
-                        </m:e>
-                        <m:sub>
-                          <m:r>
-                            <a:rPr lang="en-US" sz="4400" b="0" i="1" smtClean="0">
-                              <a:solidFill>
-                                <a:schemeClr val="accent2">
-                                  <a:lumMod val="75000"/>
-                                </a:schemeClr>
-                              </a:solidFill>
-                              <a:latin typeface="Cambria Math" panose="02040503050406030204" pitchFamily="18" charset="0"/>
-                            </a:rPr>
-                            <m:t>𝑖</m:t>
-                          </m:r>
-                          <m:r>
-                            <a:rPr lang="en-US" sz="4400" b="0" i="1" smtClean="0">
-                              <a:solidFill>
-                                <a:schemeClr val="accent2">
-                                  <a:lumMod val="75000"/>
-                                </a:schemeClr>
-                              </a:solidFill>
-                              <a:latin typeface="Cambria Math" panose="02040503050406030204" pitchFamily="18" charset="0"/>
-                            </a:rPr>
-                            <m:t>,</m:t>
-                          </m:r>
-                          <m:r>
-                            <a:rPr lang="en-US" sz="4400" b="0" i="1" smtClean="0">
-                              <a:solidFill>
-                                <a:schemeClr val="accent2">
-                                  <a:lumMod val="75000"/>
-                                </a:schemeClr>
-                              </a:solidFill>
-                              <a:latin typeface="Cambria Math" panose="02040503050406030204" pitchFamily="18" charset="0"/>
-                            </a:rPr>
-                            <m:t>𝑡</m:t>
-                          </m:r>
-                        </m:sub>
-                      </m:sSub>
-                    </m:oMath>
-                  </m:oMathPara>
-                </a14:m>
-                <a:endParaRPr lang="LID4096" sz="4400" dirty="0">
-                  <a:solidFill>
-                    <a:schemeClr val="accent2">
-                      <a:lumMod val="75000"/>
-                    </a:schemeClr>
-                  </a:solidFill>
-                </a:endParaRPr>
-              </a:p>
-            </p:txBody>
-          </p:sp>
-        </mc:Choice>
-        <mc:Fallback xmlns="">
-          <p:sp>
-            <p:nvSpPr>
-              <p:cNvPr id="8" name="TextBox 7">
-                <a:extLst>
-                  <a:ext uri="{FF2B5EF4-FFF2-40B4-BE49-F238E27FC236}">
-                    <a16:creationId xmlns:a16="http://schemas.microsoft.com/office/drawing/2014/main" id="{C77B2214-39C6-3296-F81F-4B4C31300F31}"/>
-                  </a:ext>
-                </a:extLst>
-              </p:cNvPr>
-              <p:cNvSpPr txBox="1">
-                <a:spLocks noRot="1" noChangeAspect="1" noMove="1" noResize="1" noEditPoints="1" noAdjustHandles="1" noChangeArrowheads="1" noChangeShapeType="1" noTextEdit="1"/>
-              </p:cNvSpPr>
-              <p:nvPr/>
-            </p:nvSpPr>
-            <p:spPr>
-              <a:xfrm>
-                <a:off x="2075362" y="3075601"/>
-                <a:ext cx="8333884" cy="706797"/>
-              </a:xfrm>
-              <a:prstGeom prst="rect">
-                <a:avLst/>
-              </a:prstGeom>
-              <a:blipFill>
-                <a:blip r:embed="rId2"/>
-                <a:stretch>
-                  <a:fillRect/>
-                </a:stretch>
-              </a:blipFill>
-            </p:spPr>
-            <p:txBody>
-              <a:bodyPr/>
-              <a:lstStyle/>
-              <a:p>
-                <a:r>
-                  <a:rPr lang="en-US">
-                    <a:noFill/>
-                  </a:rPr>
-                  <a:t> </a:t>
-                </a:r>
-              </a:p>
-            </p:txBody>
-          </p:sp>
-        </mc:Fallback>
-      </mc:AlternateContent>
-      <mc:AlternateContent xmlns:mc="http://schemas.openxmlformats.org/markup-compatibility/2006" xmlns:a14="http://schemas.microsoft.com/office/drawing/2010/main">
-        <mc:Choice Requires="a14">
-          <p:sp>
-            <p:nvSpPr>
-              <p:cNvPr id="9" name="TextBox 8">
-                <a:extLst>
-                  <a:ext uri="{FF2B5EF4-FFF2-40B4-BE49-F238E27FC236}">
-                    <a16:creationId xmlns:a16="http://schemas.microsoft.com/office/drawing/2014/main" id="{A3994D20-CB9E-138A-A252-CEE7B72C5CFB}"/>
-                  </a:ext>
-                </a:extLst>
-              </p:cNvPr>
-              <p:cNvSpPr txBox="1"/>
-              <p:nvPr/>
-            </p:nvSpPr>
-            <p:spPr>
-              <a:xfrm>
-                <a:off x="2075361" y="4264283"/>
-                <a:ext cx="8382936" cy="706797"/>
-              </a:xfrm>
-              <a:prstGeom prst="rect">
-                <a:avLst/>
-              </a:prstGeom>
-              <a:noFill/>
-            </p:spPr>
-            <p:txBody>
-              <a:bodyPr wrap="none" lIns="0" tIns="0" rIns="0" bIns="0" rtlCol="0">
-                <a:spAutoFit/>
-              </a:bodyPr>
-              <a:lstStyle/>
-              <a:p>
-                <a:pPr/>
-                <a14:m>
-                  <m:oMathPara xmlns:m="http://schemas.openxmlformats.org/officeDocument/2006/math">
-                    <m:oMath>
-                      <m:r>
-                        <a:rPr lang="en-US" sz="4400" b="0" i="1" smtClean="0">
-                          <a:solidFill>
-                            <a:schemeClr val="accent5">
-                              <a:lumMod val="75000"/>
-                            </a:schemeClr>
-                          </a:solidFill>
-                          <a:latin typeface="Cambria Math" panose="02040503050406030204" pitchFamily="18" charset="0"/>
-                        </a:rPr>
-                        <m:t>𝑦</m:t>
-                      </m:r>
-                      <m:d>
-                        <m:dPr>
-                          <m:ctrlPr>
-                            <a:rPr lang="en-US" sz="4400" b="0" i="1" smtClean="0">
-                              <a:solidFill>
-                                <a:schemeClr val="accent5">
-                                  <a:lumMod val="75000"/>
-                                </a:schemeClr>
-                              </a:solidFill>
-                              <a:latin typeface="Cambria Math" panose="02040503050406030204" pitchFamily="18" charset="0"/>
-                            </a:rPr>
-                          </m:ctrlPr>
-                        </m:dPr>
-                        <m:e>
-                          <m:r>
-                            <a:rPr lang="en-US" sz="4400" b="0" i="1" smtClean="0">
-                              <a:solidFill>
-                                <a:schemeClr val="accent5">
-                                  <a:lumMod val="75000"/>
-                                </a:schemeClr>
-                              </a:solidFill>
-                              <a:latin typeface="Cambria Math" panose="02040503050406030204" pitchFamily="18" charset="0"/>
-                            </a:rPr>
-                            <m:t>𝐿𝑢𝑐𝑎</m:t>
-                          </m:r>
-                          <m:r>
-                            <a:rPr lang="en-US" sz="4400" b="0" i="1" smtClean="0">
-                              <a:solidFill>
-                                <a:schemeClr val="accent5">
-                                  <a:lumMod val="75000"/>
-                                </a:schemeClr>
-                              </a:solidFill>
-                              <a:latin typeface="Cambria Math" panose="02040503050406030204" pitchFamily="18" charset="0"/>
-                            </a:rPr>
-                            <m:t>,</m:t>
-                          </m:r>
-                          <m:r>
-                            <a:rPr lang="en-US" sz="4400" b="0" i="1" smtClean="0">
-                              <a:solidFill>
-                                <a:schemeClr val="accent5">
-                                  <a:lumMod val="75000"/>
-                                </a:schemeClr>
-                              </a:solidFill>
-                              <a:latin typeface="Cambria Math" panose="02040503050406030204" pitchFamily="18" charset="0"/>
-                            </a:rPr>
-                            <m:t>𝑡</m:t>
-                          </m:r>
-                        </m:e>
-                      </m:d>
-                      <m:r>
-                        <a:rPr lang="en-US" sz="4400" b="0" i="1" smtClean="0">
-                          <a:solidFill>
-                            <a:schemeClr val="accent5">
-                              <a:lumMod val="75000"/>
-                            </a:schemeClr>
-                          </a:solidFill>
-                          <a:latin typeface="Cambria Math" panose="02040503050406030204" pitchFamily="18" charset="0"/>
-                        </a:rPr>
-                        <m:t>=0.6∗</m:t>
-                      </m:r>
-                      <m:r>
-                        <a:rPr lang="en-US" sz="4400" b="0" i="1" smtClean="0">
-                          <a:solidFill>
-                            <a:schemeClr val="accent5">
-                              <a:lumMod val="75000"/>
-                            </a:schemeClr>
-                          </a:solidFill>
-                          <a:latin typeface="Cambria Math" panose="02040503050406030204" pitchFamily="18" charset="0"/>
-                        </a:rPr>
-                        <m:t>𝑦</m:t>
-                      </m:r>
-                      <m:d>
-                        <m:dPr>
-                          <m:ctrlPr>
-                            <a:rPr lang="en-US" sz="4400" b="0" i="1" smtClean="0">
-                              <a:solidFill>
-                                <a:schemeClr val="accent5">
-                                  <a:lumMod val="75000"/>
-                                </a:schemeClr>
-                              </a:solidFill>
-                              <a:latin typeface="Cambria Math" panose="02040503050406030204" pitchFamily="18" charset="0"/>
-                            </a:rPr>
-                          </m:ctrlPr>
-                        </m:dPr>
-                        <m:e>
-                          <m:r>
-                            <a:rPr lang="en-US" sz="4400" b="0" i="1" smtClean="0">
-                              <a:solidFill>
-                                <a:schemeClr val="accent5">
-                                  <a:lumMod val="75000"/>
-                                </a:schemeClr>
-                              </a:solidFill>
-                              <a:latin typeface="Cambria Math" panose="02040503050406030204" pitchFamily="18" charset="0"/>
-                            </a:rPr>
-                            <m:t>𝑖</m:t>
-                          </m:r>
-                          <m:r>
-                            <a:rPr lang="en-US" sz="4400" b="0" i="1" smtClean="0">
-                              <a:solidFill>
-                                <a:schemeClr val="accent5">
-                                  <a:lumMod val="75000"/>
-                                </a:schemeClr>
-                              </a:solidFill>
-                              <a:latin typeface="Cambria Math" panose="02040503050406030204" pitchFamily="18" charset="0"/>
-                            </a:rPr>
-                            <m:t>,</m:t>
-                          </m:r>
-                          <m:r>
-                            <a:rPr lang="en-US" sz="4400" b="0" i="1" smtClean="0">
-                              <a:solidFill>
-                                <a:schemeClr val="accent5">
-                                  <a:lumMod val="75000"/>
-                                </a:schemeClr>
-                              </a:solidFill>
-                              <a:latin typeface="Cambria Math" panose="02040503050406030204" pitchFamily="18" charset="0"/>
-                            </a:rPr>
-                            <m:t>𝑡</m:t>
-                          </m:r>
-                          <m:r>
-                            <a:rPr lang="en-US" sz="4400" b="0" i="1" smtClean="0">
-                              <a:solidFill>
-                                <a:schemeClr val="accent5">
-                                  <a:lumMod val="75000"/>
-                                </a:schemeClr>
-                              </a:solidFill>
-                              <a:latin typeface="Cambria Math" panose="02040503050406030204" pitchFamily="18" charset="0"/>
-                            </a:rPr>
-                            <m:t>−1</m:t>
-                          </m:r>
-                        </m:e>
-                      </m:d>
-                      <m:r>
-                        <a:rPr lang="en-US" sz="4400" b="0" i="1" smtClean="0">
-                          <a:solidFill>
-                            <a:schemeClr val="accent5">
-                              <a:lumMod val="75000"/>
-                            </a:schemeClr>
-                          </a:solidFill>
-                          <a:latin typeface="Cambria Math" panose="02040503050406030204" pitchFamily="18" charset="0"/>
-                        </a:rPr>
-                        <m:t>+</m:t>
-                      </m:r>
-                      <m:sSub>
-                        <m:sSubPr>
-                          <m:ctrlPr>
-                            <a:rPr lang="en-US" sz="4400" b="0" i="1" smtClean="0">
-                              <a:solidFill>
-                                <a:schemeClr val="accent5">
-                                  <a:lumMod val="75000"/>
-                                </a:schemeClr>
-                              </a:solidFill>
-                              <a:latin typeface="Cambria Math" panose="02040503050406030204" pitchFamily="18" charset="0"/>
-                            </a:rPr>
-                          </m:ctrlPr>
-                        </m:sSubPr>
-                        <m:e>
-                          <m:r>
-                            <a:rPr lang="en-US" sz="4400" b="0" i="1" smtClean="0">
-                              <a:solidFill>
-                                <a:schemeClr val="accent5">
-                                  <a:lumMod val="75000"/>
-                                </a:schemeClr>
-                              </a:solidFill>
-                              <a:latin typeface="Cambria Math" panose="02040503050406030204" pitchFamily="18" charset="0"/>
-                            </a:rPr>
-                            <m:t>𝑒</m:t>
-                          </m:r>
-                        </m:e>
-                        <m:sub>
-                          <m:r>
-                            <a:rPr lang="en-US" sz="4400" b="0" i="1" smtClean="0">
-                              <a:solidFill>
-                                <a:schemeClr val="accent5">
-                                  <a:lumMod val="75000"/>
-                                </a:schemeClr>
-                              </a:solidFill>
-                              <a:latin typeface="Cambria Math" panose="02040503050406030204" pitchFamily="18" charset="0"/>
-                            </a:rPr>
-                            <m:t>𝑖</m:t>
-                          </m:r>
-                          <m:r>
-                            <a:rPr lang="en-US" sz="4400" b="0" i="1" smtClean="0">
-                              <a:solidFill>
-                                <a:schemeClr val="accent5">
-                                  <a:lumMod val="75000"/>
-                                </a:schemeClr>
-                              </a:solidFill>
-                              <a:latin typeface="Cambria Math" panose="02040503050406030204" pitchFamily="18" charset="0"/>
-                            </a:rPr>
-                            <m:t>,</m:t>
-                          </m:r>
-                          <m:r>
-                            <a:rPr lang="en-US" sz="4400" b="0" i="1" smtClean="0">
-                              <a:solidFill>
-                                <a:schemeClr val="accent5">
-                                  <a:lumMod val="75000"/>
-                                </a:schemeClr>
-                              </a:solidFill>
-                              <a:latin typeface="Cambria Math" panose="02040503050406030204" pitchFamily="18" charset="0"/>
-                            </a:rPr>
-                            <m:t>𝑡</m:t>
-                          </m:r>
-                        </m:sub>
-                      </m:sSub>
-                    </m:oMath>
-                  </m:oMathPara>
-                </a14:m>
-                <a:endParaRPr lang="LID4096" sz="4400" dirty="0"/>
-              </a:p>
-            </p:txBody>
-          </p:sp>
-        </mc:Choice>
-        <mc:Fallback xmlns="">
-          <p:sp>
-            <p:nvSpPr>
-              <p:cNvPr id="9" name="TextBox 8">
-                <a:extLst>
-                  <a:ext uri="{FF2B5EF4-FFF2-40B4-BE49-F238E27FC236}">
-                    <a16:creationId xmlns:a16="http://schemas.microsoft.com/office/drawing/2014/main" id="{A3994D20-CB9E-138A-A252-CEE7B72C5CFB}"/>
-                  </a:ext>
-                </a:extLst>
-              </p:cNvPr>
-              <p:cNvSpPr txBox="1">
-                <a:spLocks noRot="1" noChangeAspect="1" noMove="1" noResize="1" noEditPoints="1" noAdjustHandles="1" noChangeArrowheads="1" noChangeShapeType="1" noTextEdit="1"/>
-              </p:cNvSpPr>
-              <p:nvPr/>
-            </p:nvSpPr>
-            <p:spPr>
-              <a:xfrm>
-                <a:off x="2075361" y="4264283"/>
-                <a:ext cx="8382936" cy="706797"/>
-              </a:xfrm>
-              <a:prstGeom prst="rect">
-                <a:avLst/>
-              </a:prstGeom>
-              <a:blipFill>
-                <a:blip r:embed="rId3"/>
-                <a:stretch>
-                  <a:fillRect/>
-                </a:stretch>
-              </a:blipFill>
-            </p:spPr>
-            <p:txBody>
-              <a:bodyPr/>
-              <a:lstStyle/>
-              <a:p>
-                <a:r>
-                  <a:rPr lang="en-US">
-                    <a:noFill/>
-                  </a:rPr>
-                  <a:t> </a:t>
-                </a:r>
-              </a:p>
-            </p:txBody>
-          </p:sp>
-        </mc:Fallback>
-      </mc:AlternateContent>
-      <mc:AlternateContent xmlns:mc="http://schemas.openxmlformats.org/markup-compatibility/2006" xmlns:a14="http://schemas.microsoft.com/office/drawing/2010/main">
-        <mc:Choice Requires="a14">
-          <p:sp>
-            <p:nvSpPr>
-              <p:cNvPr id="10" name="TextBox 9">
-                <a:extLst>
-                  <a:ext uri="{FF2B5EF4-FFF2-40B4-BE49-F238E27FC236}">
-                    <a16:creationId xmlns:a16="http://schemas.microsoft.com/office/drawing/2014/main" id="{9FB8A456-0819-0889-ADE1-D52DA1462990}"/>
-                  </a:ext>
-                </a:extLst>
-              </p:cNvPr>
-              <p:cNvSpPr txBox="1"/>
-              <p:nvPr/>
-            </p:nvSpPr>
-            <p:spPr>
-              <a:xfrm>
-                <a:off x="2075361" y="5534835"/>
-                <a:ext cx="4080476" cy="724557"/>
-              </a:xfrm>
-              <a:prstGeom prst="rect">
-                <a:avLst/>
-              </a:prstGeom>
-              <a:noFill/>
-            </p:spPr>
-            <p:txBody>
-              <a:bodyPr wrap="none" lIns="0" tIns="0" rIns="0" bIns="0" rtlCol="0">
-                <a:spAutoFit/>
-              </a:bodyPr>
-              <a:lstStyle/>
-              <a:p>
-                <a:pPr/>
-                <a14:m>
-                  <m:oMathPara xmlns:m="http://schemas.openxmlformats.org/officeDocument/2006/math">
-                    <m:oMath>
-                      <m:sSub>
-                        <m:sSubPr>
-                          <m:ctrlPr>
-                            <a:rPr lang="en-US" sz="4400" b="0" i="1" smtClean="0">
-                              <a:solidFill>
-                                <a:schemeClr val="accent2">
-                                  <a:lumMod val="75000"/>
-                                </a:schemeClr>
-                              </a:solidFill>
-                              <a:latin typeface="Cambria Math" panose="02040503050406030204" pitchFamily="18" charset="0"/>
-                            </a:rPr>
-                          </m:ctrlPr>
-                        </m:sSubPr>
-                        <m:e>
-                          <m:r>
-                            <a:rPr lang="en-US" sz="4400" b="0" i="1" smtClean="0">
-                              <a:solidFill>
-                                <a:schemeClr val="accent2">
-                                  <a:lumMod val="75000"/>
-                                </a:schemeClr>
-                              </a:solidFill>
-                              <a:latin typeface="Cambria Math" panose="02040503050406030204" pitchFamily="18" charset="0"/>
-                            </a:rPr>
-                            <m:t>𝑒</m:t>
-                          </m:r>
-                        </m:e>
-                        <m:sub>
-                          <m:r>
-                            <a:rPr lang="en-US" sz="4400" b="0" i="1" smtClean="0">
-                              <a:solidFill>
-                                <a:schemeClr val="accent2">
-                                  <a:lumMod val="75000"/>
-                                </a:schemeClr>
-                              </a:solidFill>
-                              <a:latin typeface="Cambria Math" panose="02040503050406030204" pitchFamily="18" charset="0"/>
-                            </a:rPr>
-                            <m:t>𝐽𝑜ℎ𝑛</m:t>
-                          </m:r>
-                          <m:r>
-                            <a:rPr lang="en-US" sz="4400" b="0" i="1" smtClean="0">
-                              <a:solidFill>
-                                <a:schemeClr val="accent2">
-                                  <a:lumMod val="75000"/>
-                                </a:schemeClr>
-                              </a:solidFill>
-                              <a:latin typeface="Cambria Math" panose="02040503050406030204" pitchFamily="18" charset="0"/>
-                            </a:rPr>
-                            <m:t>,</m:t>
-                          </m:r>
-                          <m:r>
-                            <a:rPr lang="en-US" sz="4400" b="0" i="1" smtClean="0">
-                              <a:solidFill>
-                                <a:schemeClr val="accent2">
-                                  <a:lumMod val="75000"/>
-                                </a:schemeClr>
-                              </a:solidFill>
-                              <a:latin typeface="Cambria Math" panose="02040503050406030204" pitchFamily="18" charset="0"/>
-                            </a:rPr>
-                            <m:t>𝑡</m:t>
-                          </m:r>
-                        </m:sub>
-                      </m:sSub>
-                      <m:r>
-                        <a:rPr lang="en-US" sz="4400" b="0" i="1" smtClean="0">
-                          <a:solidFill>
-                            <a:schemeClr val="accent2">
-                              <a:lumMod val="75000"/>
-                            </a:schemeClr>
-                          </a:solidFill>
-                          <a:latin typeface="Cambria Math" panose="02040503050406030204" pitchFamily="18" charset="0"/>
-                        </a:rPr>
-                        <m:t>=6,0,8,0 </m:t>
-                      </m:r>
-                    </m:oMath>
-                  </m:oMathPara>
-                </a14:m>
-                <a:endParaRPr lang="LID4096" sz="4400" dirty="0"/>
-              </a:p>
-            </p:txBody>
-          </p:sp>
-        </mc:Choice>
-        <mc:Fallback xmlns="">
-          <p:sp>
-            <p:nvSpPr>
-              <p:cNvPr id="10" name="TextBox 9">
-                <a:extLst>
-                  <a:ext uri="{FF2B5EF4-FFF2-40B4-BE49-F238E27FC236}">
-                    <a16:creationId xmlns:a16="http://schemas.microsoft.com/office/drawing/2014/main" id="{9FB8A456-0819-0889-ADE1-D52DA1462990}"/>
-                  </a:ext>
-                </a:extLst>
-              </p:cNvPr>
-              <p:cNvSpPr txBox="1">
-                <a:spLocks noRot="1" noChangeAspect="1" noMove="1" noResize="1" noEditPoints="1" noAdjustHandles="1" noChangeArrowheads="1" noChangeShapeType="1" noTextEdit="1"/>
-              </p:cNvSpPr>
-              <p:nvPr/>
-            </p:nvSpPr>
-            <p:spPr>
-              <a:xfrm>
-                <a:off x="2075361" y="5534835"/>
-                <a:ext cx="4080476" cy="724557"/>
-              </a:xfrm>
-              <a:prstGeom prst="rect">
-                <a:avLst/>
-              </a:prstGeom>
-              <a:blipFill>
-                <a:blip r:embed="rId4"/>
-                <a:stretch>
-                  <a:fillRect/>
-                </a:stretch>
-              </a:blipFill>
-            </p:spPr>
-            <p:txBody>
-              <a:bodyPr/>
-              <a:lstStyle/>
-              <a:p>
-                <a:r>
-                  <a:rPr lang="en-US">
-                    <a:noFill/>
-                  </a:rPr>
-                  <a:t> </a:t>
-                </a:r>
-              </a:p>
-            </p:txBody>
-          </p:sp>
-        </mc:Fallback>
-      </mc:AlternateContent>
-      <mc:AlternateContent xmlns:mc="http://schemas.openxmlformats.org/markup-compatibility/2006" xmlns:a14="http://schemas.microsoft.com/office/drawing/2010/main">
-        <mc:Choice Requires="a14">
-          <p:sp>
-            <p:nvSpPr>
-              <p:cNvPr id="11" name="TextBox 10">
-                <a:extLst>
-                  <a:ext uri="{FF2B5EF4-FFF2-40B4-BE49-F238E27FC236}">
-                    <a16:creationId xmlns:a16="http://schemas.microsoft.com/office/drawing/2014/main" id="{50A98EBB-5B69-86FF-24CA-32492E25B0B6}"/>
-                  </a:ext>
-                </a:extLst>
-              </p:cNvPr>
-              <p:cNvSpPr txBox="1"/>
-              <p:nvPr/>
-            </p:nvSpPr>
-            <p:spPr>
-              <a:xfrm>
-                <a:off x="7033835" y="5534835"/>
-                <a:ext cx="4105226" cy="706797"/>
-              </a:xfrm>
-              <a:prstGeom prst="rect">
-                <a:avLst/>
-              </a:prstGeom>
-              <a:noFill/>
-            </p:spPr>
-            <p:txBody>
-              <a:bodyPr wrap="none" lIns="0" tIns="0" rIns="0" bIns="0" rtlCol="0">
-                <a:spAutoFit/>
-              </a:bodyPr>
-              <a:lstStyle/>
-              <a:p>
-                <a:pPr/>
-                <a14:m>
-                  <m:oMathPara xmlns:m="http://schemas.openxmlformats.org/officeDocument/2006/math">
-                    <m:oMath>
-                      <m:sSub>
-                        <m:sSubPr>
-                          <m:ctrlPr>
-                            <a:rPr lang="en-US" sz="4400" b="0" i="1" smtClean="0">
-                              <a:solidFill>
-                                <a:schemeClr val="accent5">
-                                  <a:lumMod val="75000"/>
-                                </a:schemeClr>
-                              </a:solidFill>
-                              <a:latin typeface="Cambria Math" panose="02040503050406030204" pitchFamily="18" charset="0"/>
-                            </a:rPr>
-                          </m:ctrlPr>
-                        </m:sSubPr>
-                        <m:e>
-                          <m:r>
-                            <a:rPr lang="en-US" sz="4400" b="0" i="1" smtClean="0">
-                              <a:solidFill>
-                                <a:schemeClr val="accent5">
-                                  <a:lumMod val="75000"/>
-                                </a:schemeClr>
-                              </a:solidFill>
-                              <a:latin typeface="Cambria Math" panose="02040503050406030204" pitchFamily="18" charset="0"/>
-                            </a:rPr>
-                            <m:t>𝑒</m:t>
-                          </m:r>
-                        </m:e>
-                        <m:sub>
-                          <m:r>
-                            <a:rPr lang="en-US" sz="4400" b="0" i="1" smtClean="0">
-                              <a:solidFill>
-                                <a:schemeClr val="accent5">
-                                  <a:lumMod val="75000"/>
-                                </a:schemeClr>
-                              </a:solidFill>
-                              <a:latin typeface="Cambria Math" panose="02040503050406030204" pitchFamily="18" charset="0"/>
-                            </a:rPr>
-                            <m:t>𝐿𝑢𝑐𝑎</m:t>
-                          </m:r>
-                          <m:r>
-                            <a:rPr lang="en-US" sz="4400" b="0" i="1" smtClean="0">
-                              <a:solidFill>
-                                <a:schemeClr val="accent5">
-                                  <a:lumMod val="75000"/>
-                                </a:schemeClr>
-                              </a:solidFill>
-                              <a:latin typeface="Cambria Math" panose="02040503050406030204" pitchFamily="18" charset="0"/>
-                            </a:rPr>
-                            <m:t>,</m:t>
-                          </m:r>
-                          <m:r>
-                            <a:rPr lang="en-US" sz="4400" b="0" i="1" smtClean="0">
-                              <a:solidFill>
-                                <a:schemeClr val="accent5">
-                                  <a:lumMod val="75000"/>
-                                </a:schemeClr>
-                              </a:solidFill>
-                              <a:latin typeface="Cambria Math" panose="02040503050406030204" pitchFamily="18" charset="0"/>
-                            </a:rPr>
-                            <m:t>𝑡</m:t>
-                          </m:r>
-                        </m:sub>
-                      </m:sSub>
-                      <m:r>
-                        <a:rPr lang="en-US" sz="4400" b="0" i="1" smtClean="0">
-                          <a:solidFill>
-                            <a:schemeClr val="accent5">
-                              <a:lumMod val="75000"/>
-                            </a:schemeClr>
-                          </a:solidFill>
-                          <a:latin typeface="Cambria Math" panose="02040503050406030204" pitchFamily="18" charset="0"/>
-                        </a:rPr>
-                        <m:t>=0,2,0,6 </m:t>
-                      </m:r>
-                    </m:oMath>
-                  </m:oMathPara>
-                </a14:m>
-                <a:endParaRPr lang="LID4096" sz="4400" dirty="0"/>
-              </a:p>
-            </p:txBody>
-          </p:sp>
-        </mc:Choice>
-        <mc:Fallback xmlns="">
-          <p:sp>
-            <p:nvSpPr>
-              <p:cNvPr id="11" name="TextBox 10">
-                <a:extLst>
-                  <a:ext uri="{FF2B5EF4-FFF2-40B4-BE49-F238E27FC236}">
-                    <a16:creationId xmlns:a16="http://schemas.microsoft.com/office/drawing/2014/main" id="{50A98EBB-5B69-86FF-24CA-32492E25B0B6}"/>
-                  </a:ext>
-                </a:extLst>
-              </p:cNvPr>
-              <p:cNvSpPr txBox="1">
-                <a:spLocks noRot="1" noChangeAspect="1" noMove="1" noResize="1" noEditPoints="1" noAdjustHandles="1" noChangeArrowheads="1" noChangeShapeType="1" noTextEdit="1"/>
-              </p:cNvSpPr>
-              <p:nvPr/>
-            </p:nvSpPr>
-            <p:spPr>
-              <a:xfrm>
-                <a:off x="7033835" y="5534835"/>
-                <a:ext cx="4105226" cy="706797"/>
-              </a:xfrm>
-              <a:prstGeom prst="rect">
-                <a:avLst/>
-              </a:prstGeom>
-              <a:blipFill>
-                <a:blip r:embed="rId5"/>
-                <a:stretch>
-                  <a:fillRect/>
-                </a:stretch>
-              </a:blipFill>
-            </p:spPr>
-            <p:txBody>
-              <a:bodyPr/>
-              <a:lstStyle/>
-              <a:p>
-                <a:r>
-                  <a:rPr lang="en-US">
-                    <a:noFill/>
-                  </a:rPr>
-                  <a:t> </a:t>
-                </a:r>
-              </a:p>
-            </p:txBody>
-          </p:sp>
-        </mc:Fallback>
-      </mc:AlternateContent>
-    </p:spTree>
-    <p:extLst>
-      <p:ext uri="{BB962C8B-B14F-4D97-AF65-F5344CB8AC3E}">
-        <p14:creationId xmlns:p14="http://schemas.microsoft.com/office/powerpoint/2010/main" val="1540284240"/>
-      </p:ext>
-    </p:extLst>
-  </p:cSld>
-  <p:clrMapOvr>
-    <a:masterClrMapping/>
-  </p:clrMapOvr>
-</p:sld>
-</file>
-
-<file path=ppt/slides/slide37.xml><?xml version="1.0" encoding="utf-8"?>
-<p:sld xmlns:a="http://schemas.openxmlformats.org/drawingml/2006/main" xmlns:r="http://schemas.openxmlformats.org/officeDocument/2006/relationships" xmlns:p="http://schemas.openxmlformats.org/presentationml/2006/main">
-  <p:cSld>
-    <p:spTree>
-      <p:nvGrpSpPr>
-        <p:cNvPr id="1" name=""/>
-        <p:cNvGrpSpPr/>
-        <p:nvPr/>
-      </p:nvGrpSpPr>
-      <p:grpSpPr>
-        <a:xfrm>
-          <a:off x="0" y="0"/>
-          <a:ext cx="0" cy="0"/>
-          <a:chOff x="0" y="0"/>
-          <a:chExt cx="0" cy="0"/>
-        </a:xfrm>
-      </p:grpSpPr>
-      <p:sp>
-        <p:nvSpPr>
-          <p:cNvPr id="2" name="Title 1">
-            <a:extLst>
-              <a:ext uri="{FF2B5EF4-FFF2-40B4-BE49-F238E27FC236}">
-                <a16:creationId xmlns:a16="http://schemas.microsoft.com/office/drawing/2014/main" id="{99BD79AA-2962-DA7E-8E5C-B5F2293072B7}"/>
-              </a:ext>
-            </a:extLst>
-          </p:cNvPr>
-          <p:cNvSpPr>
-            <a:spLocks noGrp="1"/>
-          </p:cNvSpPr>
-          <p:nvPr>
-            <p:ph type="title"/>
-          </p:nvPr>
-        </p:nvSpPr>
-        <p:spPr/>
-        <p:txBody>
-          <a:bodyPr/>
-          <a:lstStyle/>
-          <a:p>
-            <a:r>
-              <a:rPr lang="en-US" dirty="0"/>
-              <a:t>Two questions about these models</a:t>
-            </a:r>
-            <a:endParaRPr lang="LID4096" dirty="0"/>
-          </a:p>
-        </p:txBody>
-      </p:sp>
-      <p:sp>
-        <p:nvSpPr>
-          <p:cNvPr id="3" name="Content Placeholder 2">
-            <a:extLst>
-              <a:ext uri="{FF2B5EF4-FFF2-40B4-BE49-F238E27FC236}">
-                <a16:creationId xmlns:a16="http://schemas.microsoft.com/office/drawing/2014/main" id="{60A9DF38-9B9A-533A-E0C4-169EEC0E917E}"/>
-              </a:ext>
-            </a:extLst>
-          </p:cNvPr>
-          <p:cNvSpPr>
-            <a:spLocks noGrp="1"/>
-          </p:cNvSpPr>
-          <p:nvPr>
-            <p:ph idx="1"/>
-          </p:nvPr>
-        </p:nvSpPr>
-        <p:spPr/>
-        <p:txBody>
-          <a:bodyPr>
-            <a:normAutofit/>
-          </a:bodyPr>
-          <a:lstStyle/>
-          <a:p>
-            <a:r>
-              <a:rPr lang="en-US" sz="3200" dirty="0"/>
-              <a:t>What happens in between the observations?</a:t>
-            </a:r>
-          </a:p>
-          <a:p>
-            <a:r>
-              <a:rPr lang="en-US" sz="3200" dirty="0"/>
-              <a:t>How can we stop noise from carrying over to the next occasion?</a:t>
-            </a:r>
-            <a:endParaRPr lang="LID4096" sz="3200" dirty="0"/>
-          </a:p>
-        </p:txBody>
-      </p:sp>
-    </p:spTree>
-    <p:extLst>
-      <p:ext uri="{BB962C8B-B14F-4D97-AF65-F5344CB8AC3E}">
-        <p14:creationId xmlns:p14="http://schemas.microsoft.com/office/powerpoint/2010/main" val="2347330004"/>
-      </p:ext>
-    </p:extLst>
-  </p:cSld>
-  <p:clrMapOvr>
-    <a:masterClrMapping/>
-  </p:clrMapOvr>
-</p:sld>
-</file>
-
-<file path=ppt/slides/slide38.xml><?xml version="1.0" encoding="utf-8"?>
-<p:sld xmlns:a="http://schemas.openxmlformats.org/drawingml/2006/main" xmlns:r="http://schemas.openxmlformats.org/officeDocument/2006/relationships" xmlns:p="http://schemas.openxmlformats.org/presentationml/2006/main">
-  <p:cSld>
-    <p:spTree>
-      <p:nvGrpSpPr>
-        <p:cNvPr id="1" name=""/>
-        <p:cNvGrpSpPr/>
-        <p:nvPr/>
-      </p:nvGrpSpPr>
-      <p:grpSpPr>
-        <a:xfrm>
-          <a:off x="0" y="0"/>
-          <a:ext cx="0" cy="0"/>
-          <a:chOff x="0" y="0"/>
-          <a:chExt cx="0" cy="0"/>
-        </a:xfrm>
-      </p:grpSpPr>
-      <p:sp>
-        <p:nvSpPr>
-          <p:cNvPr id="2" name="Title 1">
-            <a:extLst>
-              <a:ext uri="{FF2B5EF4-FFF2-40B4-BE49-F238E27FC236}">
-                <a16:creationId xmlns:a16="http://schemas.microsoft.com/office/drawing/2014/main" id="{B9FA17AC-A41C-8EE8-FF84-33210C97C9B4}"/>
-              </a:ext>
-            </a:extLst>
-          </p:cNvPr>
-          <p:cNvSpPr>
-            <a:spLocks noGrp="1"/>
-          </p:cNvSpPr>
-          <p:nvPr>
-            <p:ph type="title"/>
-          </p:nvPr>
-        </p:nvSpPr>
-        <p:spPr/>
-        <p:txBody>
-          <a:bodyPr/>
-          <a:lstStyle/>
-          <a:p>
-            <a:r>
-              <a:rPr lang="en-US" dirty="0"/>
-              <a:t>Download </a:t>
-            </a:r>
-            <a:r>
-              <a:rPr lang="en-US" b="1" dirty="0" err="1"/>
-              <a:t>ctsem</a:t>
-            </a:r>
-            <a:r>
-              <a:rPr lang="en-US" dirty="0"/>
-              <a:t> package in R</a:t>
-            </a:r>
-            <a:endParaRPr lang="LID4096" dirty="0"/>
-          </a:p>
-        </p:txBody>
-      </p:sp>
-      <p:pic>
-        <p:nvPicPr>
-          <p:cNvPr id="5" name="Picture 4">
-            <a:extLst>
-              <a:ext uri="{FF2B5EF4-FFF2-40B4-BE49-F238E27FC236}">
-                <a16:creationId xmlns:a16="http://schemas.microsoft.com/office/drawing/2014/main" id="{122701FC-577E-83F3-0000-F56E00FC950C}"/>
-              </a:ext>
-            </a:extLst>
-          </p:cNvPr>
-          <p:cNvPicPr>
-            <a:picLocks noChangeAspect="1"/>
-          </p:cNvPicPr>
-          <p:nvPr/>
-        </p:nvPicPr>
-        <p:blipFill>
-          <a:blip r:embed="rId2"/>
-          <a:stretch>
-            <a:fillRect/>
-          </a:stretch>
-        </p:blipFill>
-        <p:spPr>
-          <a:xfrm>
-            <a:off x="1620510" y="1613934"/>
-            <a:ext cx="8950980" cy="4878941"/>
-          </a:xfrm>
-          <a:prstGeom prst="rect">
-            <a:avLst/>
-          </a:prstGeom>
-        </p:spPr>
-      </p:pic>
-    </p:spTree>
-    <p:extLst>
-      <p:ext uri="{BB962C8B-B14F-4D97-AF65-F5344CB8AC3E}">
-        <p14:creationId xmlns:p14="http://schemas.microsoft.com/office/powerpoint/2010/main" val="3883886726"/>
-      </p:ext>
-    </p:extLst>
-  </p:cSld>
-  <p:clrMapOvr>
-    <a:masterClrMapping/>
-  </p:clrMapOvr>
-</p:sld>
-</file>
-
-<file path=ppt/slides/slide39.xml><?xml version="1.0" encoding="utf-8"?>
-<p:sld xmlns:a="http://schemas.openxmlformats.org/drawingml/2006/main" xmlns:r="http://schemas.openxmlformats.org/officeDocument/2006/relationships" xmlns:p="http://schemas.openxmlformats.org/presentationml/2006/main">
-  <p:cSld>
-    <p:spTree>
-      <p:nvGrpSpPr>
-        <p:cNvPr id="1" name=""/>
-        <p:cNvGrpSpPr/>
-        <p:nvPr/>
-      </p:nvGrpSpPr>
-      <p:grpSpPr>
-        <a:xfrm>
-          <a:off x="0" y="0"/>
-          <a:ext cx="0" cy="0"/>
-          <a:chOff x="0" y="0"/>
-          <a:chExt cx="0" cy="0"/>
-        </a:xfrm>
-      </p:grpSpPr>
-      <p:sp>
-        <p:nvSpPr>
-          <p:cNvPr id="2" name="Title 1">
-            <a:extLst>
-              <a:ext uri="{FF2B5EF4-FFF2-40B4-BE49-F238E27FC236}">
-                <a16:creationId xmlns:a16="http://schemas.microsoft.com/office/drawing/2014/main" id="{6D9117DE-3798-152A-8C10-66D6A5E71A6B}"/>
-              </a:ext>
-            </a:extLst>
-          </p:cNvPr>
-          <p:cNvSpPr>
-            <a:spLocks noGrp="1"/>
-          </p:cNvSpPr>
-          <p:nvPr>
-            <p:ph type="title"/>
-          </p:nvPr>
-        </p:nvSpPr>
-        <p:spPr/>
-        <p:txBody>
-          <a:bodyPr/>
-          <a:lstStyle/>
-          <a:p>
-            <a:r>
-              <a:rPr lang="en-US" dirty="0">
-                <a:solidFill>
-                  <a:schemeClr val="accent5">
-                    <a:lumMod val="75000"/>
-                  </a:schemeClr>
-                </a:solidFill>
-              </a:rPr>
-              <a:t>Extra:</a:t>
-            </a:r>
-            <a:r>
-              <a:rPr lang="en-US" dirty="0">
-                <a:solidFill>
-                  <a:srgbClr val="C00000"/>
-                </a:solidFill>
-              </a:rPr>
-              <a:t> </a:t>
-            </a:r>
-            <a:r>
-              <a:rPr lang="en-US" dirty="0"/>
-              <a:t>Visualizing covariance</a:t>
-            </a:r>
-          </a:p>
-        </p:txBody>
-      </p:sp>
-      <p:sp>
-        <p:nvSpPr>
-          <p:cNvPr id="3" name="Content Placeholder 2">
-            <a:extLst>
-              <a:ext uri="{FF2B5EF4-FFF2-40B4-BE49-F238E27FC236}">
-                <a16:creationId xmlns:a16="http://schemas.microsoft.com/office/drawing/2014/main" id="{7BFFEEE5-44DF-1F72-EBD4-76D133CFB5FA}"/>
-              </a:ext>
-            </a:extLst>
-          </p:cNvPr>
-          <p:cNvSpPr>
-            <a:spLocks noGrp="1"/>
-          </p:cNvSpPr>
-          <p:nvPr>
-            <p:ph idx="1"/>
-          </p:nvPr>
-        </p:nvSpPr>
-        <p:spPr>
-          <a:xfrm>
-            <a:off x="838200" y="1825625"/>
-            <a:ext cx="10515600" cy="1603375"/>
-          </a:xfrm>
-        </p:spPr>
-        <p:txBody>
-          <a:bodyPr/>
-          <a:lstStyle/>
-          <a:p>
-            <a:r>
-              <a:rPr lang="en-US" dirty="0"/>
-              <a:t>Paper: </a:t>
-            </a:r>
-            <a:r>
-              <a:rPr lang="en-US" u="sng" dirty="0">
-                <a:hlinkClick r:id="rId2"/>
-              </a:rPr>
-              <a:t>https://psyarxiv.com/gwu8b</a:t>
-            </a:r>
-            <a:endParaRPr lang="en-US" u="sng" dirty="0"/>
-          </a:p>
-          <a:p>
-            <a:r>
-              <a:rPr lang="en-US" dirty="0"/>
-              <a:t>Game: </a:t>
-            </a:r>
-            <a:r>
-              <a:rPr lang="en-US" dirty="0">
-                <a:hlinkClick r:id="rId3"/>
-              </a:rPr>
-              <a:t>https://www.guessthecorrelation.com/</a:t>
-            </a:r>
-            <a:endParaRPr lang="en-US" dirty="0"/>
-          </a:p>
-        </p:txBody>
-      </p:sp>
-    </p:spTree>
-    <p:extLst>
-      <p:ext uri="{BB962C8B-B14F-4D97-AF65-F5344CB8AC3E}">
-        <p14:creationId xmlns:p14="http://schemas.microsoft.com/office/powerpoint/2010/main" val="1680230573"/>
-      </p:ext>
-    </p:extLst>
-  </p:cSld>
-  <p:clrMapOvr>
-    <a:masterClrMapping/>
-  </p:clrMapOvr>
-</p:sld>
-</file>
-
-<file path=ppt/slides/slide4.xml><?xml version="1.0" encoding="utf-8"?>
+<file path=ppt/slides/slide3.xml><?xml version="1.0" encoding="utf-8"?>
 <p:sld xmlns:a="http://schemas.openxmlformats.org/drawingml/2006/main" xmlns:r="http://schemas.openxmlformats.org/officeDocument/2006/relationships" xmlns:p="http://schemas.openxmlformats.org/presentationml/2006/main">
   <p:cSld>
     <p:spTree>
@@ -17800,7 +13445,3638 @@
 </p:sld>
 </file>
 
-<file path=ppt/slides/slide40.xml><?xml version="1.0" encoding="utf-8"?>
+<file path=ppt/slides/slide30.xml><?xml version="1.0" encoding="utf-8"?>
+<p:sld xmlns:a="http://schemas.openxmlformats.org/drawingml/2006/main" xmlns:r="http://schemas.openxmlformats.org/officeDocument/2006/relationships" xmlns:p="http://schemas.openxmlformats.org/presentationml/2006/main">
+  <p:cSld>
+    <p:spTree>
+      <p:nvGrpSpPr>
+        <p:cNvPr id="1" name=""/>
+        <p:cNvGrpSpPr/>
+        <p:nvPr/>
+      </p:nvGrpSpPr>
+      <p:grpSpPr>
+        <a:xfrm>
+          <a:off x="0" y="0"/>
+          <a:ext cx="0" cy="0"/>
+          <a:chOff x="0" y="0"/>
+          <a:chExt cx="0" cy="0"/>
+        </a:xfrm>
+      </p:grpSpPr>
+      <p:sp>
+        <p:nvSpPr>
+          <p:cNvPr id="2" name="Title 1">
+            <a:extLst>
+              <a:ext uri="{FF2B5EF4-FFF2-40B4-BE49-F238E27FC236}">
+                <a16:creationId xmlns:a16="http://schemas.microsoft.com/office/drawing/2014/main" id="{EB97F503-BC5A-D210-C8CB-BC9E55A33818}"/>
+              </a:ext>
+            </a:extLst>
+          </p:cNvPr>
+          <p:cNvSpPr>
+            <a:spLocks noGrp="1"/>
+          </p:cNvSpPr>
+          <p:nvPr>
+            <p:ph type="title"/>
+          </p:nvPr>
+        </p:nvSpPr>
+        <p:spPr/>
+        <p:txBody>
+          <a:bodyPr/>
+          <a:lstStyle/>
+          <a:p>
+            <a:r>
+              <a:rPr lang="en-US" dirty="0"/>
+              <a:t>Let’s launch some cats</a:t>
+            </a:r>
+            <a:endParaRPr lang="LID4096" dirty="0"/>
+          </a:p>
+        </p:txBody>
+      </p:sp>
+      <p:pic>
+        <p:nvPicPr>
+          <p:cNvPr id="4" name="Content Placeholder 4">
+            <a:extLst>
+              <a:ext uri="{FF2B5EF4-FFF2-40B4-BE49-F238E27FC236}">
+                <a16:creationId xmlns:a16="http://schemas.microsoft.com/office/drawing/2014/main" id="{F6354694-814F-87E0-67D4-795723151AD6}"/>
+              </a:ext>
+            </a:extLst>
+          </p:cNvPr>
+          <p:cNvPicPr>
+            <a:picLocks noGrp="1" noChangeAspect="1"/>
+          </p:cNvPicPr>
+          <p:nvPr>
+            <p:ph idx="1"/>
+          </p:nvPr>
+        </p:nvPicPr>
+        <p:blipFill>
+          <a:blip r:embed="rId2"/>
+          <a:stretch>
+            <a:fillRect/>
+          </a:stretch>
+        </p:blipFill>
+        <p:spPr>
+          <a:xfrm>
+            <a:off x="734492" y="3114501"/>
+            <a:ext cx="4940554" cy="3378374"/>
+          </a:xfrm>
+          <a:prstGeom prst="rect">
+            <a:avLst/>
+          </a:prstGeom>
+        </p:spPr>
+      </p:pic>
+      <p:sp>
+        <p:nvSpPr>
+          <p:cNvPr id="5" name="TextBox 4">
+            <a:extLst>
+              <a:ext uri="{FF2B5EF4-FFF2-40B4-BE49-F238E27FC236}">
+                <a16:creationId xmlns:a16="http://schemas.microsoft.com/office/drawing/2014/main" id="{75AE0D7F-4E5C-AE38-0E90-FB604CD0B73E}"/>
+              </a:ext>
+            </a:extLst>
+          </p:cNvPr>
+          <p:cNvSpPr txBox="1"/>
+          <p:nvPr/>
+        </p:nvSpPr>
+        <p:spPr>
+          <a:xfrm>
+            <a:off x="5501175" y="1449423"/>
+            <a:ext cx="6627564" cy="3539430"/>
+          </a:xfrm>
+          <a:prstGeom prst="rect">
+            <a:avLst/>
+          </a:prstGeom>
+          <a:noFill/>
+        </p:spPr>
+        <p:txBody>
+          <a:bodyPr wrap="square" rtlCol="0">
+            <a:spAutoFit/>
+          </a:bodyPr>
+          <a:lstStyle/>
+          <a:p>
+            <a:endParaRPr lang="en-US" sz="2800" dirty="0"/>
+          </a:p>
+          <a:p>
+            <a:pPr marL="342900" indent="-342900">
+              <a:buFont typeface="Arial" panose="020B0604020202020204" pitchFamily="34" charset="0"/>
+              <a:buChar char="•"/>
+            </a:pPr>
+            <a:r>
+              <a:rPr lang="en-US" sz="2800" dirty="0"/>
+              <a:t>Launch them </a:t>
+            </a:r>
+            <a:r>
+              <a:rPr lang="en-US" sz="2800" b="1" dirty="0"/>
+              <a:t>20 meters </a:t>
+            </a:r>
+            <a:r>
+              <a:rPr lang="en-US" sz="2800" dirty="0"/>
+              <a:t>in the air (T0)</a:t>
+            </a:r>
+          </a:p>
+          <a:p>
+            <a:pPr marL="342900" indent="-342900">
+              <a:buFont typeface="Arial" panose="020B0604020202020204" pitchFamily="34" charset="0"/>
+              <a:buChar char="•"/>
+            </a:pPr>
+            <a:r>
+              <a:rPr lang="en-US" sz="2800" dirty="0"/>
+              <a:t>Model their fall using the AR-1 model</a:t>
+            </a:r>
+          </a:p>
+          <a:p>
+            <a:pPr marL="342900" indent="-342900">
+              <a:buFont typeface="Arial" panose="020B0604020202020204" pitchFamily="34" charset="0"/>
+              <a:buChar char="•"/>
+            </a:pPr>
+            <a:r>
+              <a:rPr lang="en-US" sz="2800" dirty="0"/>
+              <a:t>By hand calculate where they will be after 4 seconds, i.e., by time point (T4)</a:t>
+            </a:r>
+          </a:p>
+          <a:p>
+            <a:pPr marL="342900" indent="-342900">
+              <a:buFont typeface="Arial" panose="020B0604020202020204" pitchFamily="34" charset="0"/>
+              <a:buChar char="•"/>
+            </a:pPr>
+            <a:r>
+              <a:rPr lang="en-US" sz="2800" dirty="0"/>
+              <a:t>Draw a graph of their current height at each time point</a:t>
+            </a:r>
+          </a:p>
+          <a:p>
+            <a:endParaRPr lang="LID4096" sz="2800" dirty="0"/>
+          </a:p>
+        </p:txBody>
+      </p:sp>
+      <mc:AlternateContent xmlns:mc="http://schemas.openxmlformats.org/markup-compatibility/2006" xmlns:a14="http://schemas.microsoft.com/office/drawing/2010/main">
+        <mc:Choice Requires="a14">
+          <p:sp>
+            <p:nvSpPr>
+              <p:cNvPr id="6" name="TextBox 5">
+                <a:extLst>
+                  <a:ext uri="{FF2B5EF4-FFF2-40B4-BE49-F238E27FC236}">
+                    <a16:creationId xmlns:a16="http://schemas.microsoft.com/office/drawing/2014/main" id="{CD88093D-AF68-4C52-990F-3E1BFD36CB9A}"/>
+                  </a:ext>
+                </a:extLst>
+              </p:cNvPr>
+              <p:cNvSpPr txBox="1"/>
+              <p:nvPr/>
+            </p:nvSpPr>
+            <p:spPr>
+              <a:xfrm>
+                <a:off x="6051220" y="4803688"/>
+                <a:ext cx="4903009" cy="677108"/>
+              </a:xfrm>
+              <a:prstGeom prst="rect">
+                <a:avLst/>
+              </a:prstGeom>
+              <a:noFill/>
+            </p:spPr>
+            <p:txBody>
+              <a:bodyPr wrap="none" lIns="0" tIns="0" rIns="0" bIns="0" rtlCol="0">
+                <a:spAutoFit/>
+              </a:bodyPr>
+              <a:lstStyle/>
+              <a:p>
+                <a:pPr/>
+                <a14:m>
+                  <m:oMathPara xmlns:m="http://schemas.openxmlformats.org/officeDocument/2006/math">
+                    <m:oMath>
+                      <m:r>
+                        <a:rPr lang="en-US" sz="4400" b="0" i="1" smtClean="0">
+                          <a:latin typeface="Cambria Math" panose="02040503050406030204" pitchFamily="18" charset="0"/>
+                        </a:rPr>
+                        <m:t>𝑦</m:t>
+                      </m:r>
+                      <m:d>
+                        <m:dPr>
+                          <m:ctrlPr>
+                            <a:rPr lang="en-US" sz="4400" b="0" i="1" smtClean="0">
+                              <a:latin typeface="Cambria Math" panose="02040503050406030204" pitchFamily="18" charset="0"/>
+                            </a:rPr>
+                          </m:ctrlPr>
+                        </m:dPr>
+                        <m:e>
+                          <m:r>
+                            <a:rPr lang="en-US" sz="4400" b="0" i="1" smtClean="0">
+                              <a:latin typeface="Cambria Math" panose="02040503050406030204" pitchFamily="18" charset="0"/>
+                            </a:rPr>
+                            <m:t>𝑡</m:t>
+                          </m:r>
+                        </m:e>
+                      </m:d>
+                      <m:r>
+                        <a:rPr lang="en-US" sz="4400" b="0" i="1" smtClean="0">
+                          <a:latin typeface="Cambria Math" panose="02040503050406030204" pitchFamily="18" charset="0"/>
+                        </a:rPr>
+                        <m:t>=</m:t>
+                      </m:r>
+                      <m:r>
+                        <a:rPr lang="en-US" sz="4400" b="0" i="1" smtClean="0">
+                          <a:solidFill>
+                            <a:srgbClr val="FF0000"/>
+                          </a:solidFill>
+                          <a:latin typeface="Cambria Math" panose="02040503050406030204" pitchFamily="18" charset="0"/>
+                        </a:rPr>
+                        <m:t>𝛽</m:t>
+                      </m:r>
+                      <m:r>
+                        <a:rPr lang="en-US" sz="4400" b="0" i="1" smtClean="0">
+                          <a:latin typeface="Cambria Math" panose="02040503050406030204" pitchFamily="18" charset="0"/>
+                        </a:rPr>
+                        <m:t>∗</m:t>
+                      </m:r>
+                      <m:r>
+                        <a:rPr lang="en-US" sz="4400" b="0" i="1" smtClean="0">
+                          <a:latin typeface="Cambria Math" panose="02040503050406030204" pitchFamily="18" charset="0"/>
+                        </a:rPr>
+                        <m:t>𝑦</m:t>
+                      </m:r>
+                      <m:d>
+                        <m:dPr>
+                          <m:ctrlPr>
+                            <a:rPr lang="en-US" sz="4400" b="0" i="1" smtClean="0">
+                              <a:latin typeface="Cambria Math" panose="02040503050406030204" pitchFamily="18" charset="0"/>
+                            </a:rPr>
+                          </m:ctrlPr>
+                        </m:dPr>
+                        <m:e>
+                          <m:r>
+                            <a:rPr lang="en-US" sz="4400" b="0" i="1" smtClean="0">
+                              <a:latin typeface="Cambria Math" panose="02040503050406030204" pitchFamily="18" charset="0"/>
+                            </a:rPr>
+                            <m:t>𝑡</m:t>
+                          </m:r>
+                          <m:r>
+                            <a:rPr lang="en-US" sz="4400" b="0" i="1" smtClean="0">
+                              <a:latin typeface="Cambria Math" panose="02040503050406030204" pitchFamily="18" charset="0"/>
+                            </a:rPr>
+                            <m:t>−1</m:t>
+                          </m:r>
+                        </m:e>
+                      </m:d>
+                      <m:r>
+                        <a:rPr lang="en-US" sz="4400" b="0" i="1" smtClean="0">
+                          <a:latin typeface="Cambria Math" panose="02040503050406030204" pitchFamily="18" charset="0"/>
+                        </a:rPr>
+                        <m:t> </m:t>
+                      </m:r>
+                    </m:oMath>
+                  </m:oMathPara>
+                </a14:m>
+                <a:endParaRPr lang="LID4096" sz="4400" dirty="0"/>
+              </a:p>
+            </p:txBody>
+          </p:sp>
+        </mc:Choice>
+        <mc:Fallback xmlns="">
+          <p:sp>
+            <p:nvSpPr>
+              <p:cNvPr id="6" name="TextBox 5">
+                <a:extLst>
+                  <a:ext uri="{FF2B5EF4-FFF2-40B4-BE49-F238E27FC236}">
+                    <a16:creationId xmlns:a16="http://schemas.microsoft.com/office/drawing/2014/main" id="{CD88093D-AF68-4C52-990F-3E1BFD36CB9A}"/>
+                  </a:ext>
+                </a:extLst>
+              </p:cNvPr>
+              <p:cNvSpPr txBox="1">
+                <a:spLocks noRot="1" noChangeAspect="1" noMove="1" noResize="1" noEditPoints="1" noAdjustHandles="1" noChangeArrowheads="1" noChangeShapeType="1" noTextEdit="1"/>
+              </p:cNvSpPr>
+              <p:nvPr/>
+            </p:nvSpPr>
+            <p:spPr>
+              <a:xfrm>
+                <a:off x="6051220" y="4803688"/>
+                <a:ext cx="4903009" cy="677108"/>
+              </a:xfrm>
+              <a:prstGeom prst="rect">
+                <a:avLst/>
+              </a:prstGeom>
+              <a:blipFill>
+                <a:blip r:embed="rId3"/>
+                <a:stretch>
+                  <a:fillRect/>
+                </a:stretch>
+              </a:blipFill>
+            </p:spPr>
+            <p:txBody>
+              <a:bodyPr/>
+              <a:lstStyle/>
+              <a:p>
+                <a:r>
+                  <a:rPr lang="LID4096">
+                    <a:noFill/>
+                  </a:rPr>
+                  <a:t> </a:t>
+                </a:r>
+              </a:p>
+            </p:txBody>
+          </p:sp>
+        </mc:Fallback>
+      </mc:AlternateContent>
+      <mc:AlternateContent xmlns:mc="http://schemas.openxmlformats.org/markup-compatibility/2006" xmlns:a14="http://schemas.microsoft.com/office/drawing/2010/main">
+        <mc:Choice Requires="a14">
+          <p:sp>
+            <p:nvSpPr>
+              <p:cNvPr id="7" name="TextBox 6">
+                <a:extLst>
+                  <a:ext uri="{FF2B5EF4-FFF2-40B4-BE49-F238E27FC236}">
+                    <a16:creationId xmlns:a16="http://schemas.microsoft.com/office/drawing/2014/main" id="{3EC067A0-2D30-E5FC-8CE4-0035FC2B47C2}"/>
+                  </a:ext>
+                </a:extLst>
+              </p:cNvPr>
+              <p:cNvSpPr txBox="1"/>
+              <p:nvPr/>
+            </p:nvSpPr>
+            <p:spPr>
+              <a:xfrm>
+                <a:off x="6051220" y="5734597"/>
+                <a:ext cx="5285101" cy="677108"/>
+              </a:xfrm>
+              <a:prstGeom prst="rect">
+                <a:avLst/>
+              </a:prstGeom>
+              <a:noFill/>
+            </p:spPr>
+            <p:txBody>
+              <a:bodyPr wrap="none" lIns="0" tIns="0" rIns="0" bIns="0" rtlCol="0">
+                <a:spAutoFit/>
+              </a:bodyPr>
+              <a:lstStyle/>
+              <a:p>
+                <a:pPr/>
+                <a14:m>
+                  <m:oMathPara xmlns:m="http://schemas.openxmlformats.org/officeDocument/2006/math">
+                    <m:oMath>
+                      <m:r>
+                        <a:rPr lang="en-US" sz="4400" b="0" i="1" smtClean="0">
+                          <a:latin typeface="Cambria Math" panose="02040503050406030204" pitchFamily="18" charset="0"/>
+                        </a:rPr>
+                        <m:t>𝑦</m:t>
+                      </m:r>
+                      <m:d>
+                        <m:dPr>
+                          <m:ctrlPr>
+                            <a:rPr lang="en-US" sz="4400" b="0" i="1" smtClean="0">
+                              <a:latin typeface="Cambria Math" panose="02040503050406030204" pitchFamily="18" charset="0"/>
+                            </a:rPr>
+                          </m:ctrlPr>
+                        </m:dPr>
+                        <m:e>
+                          <m:r>
+                            <a:rPr lang="en-US" sz="4400" b="0" i="1" smtClean="0">
+                              <a:latin typeface="Cambria Math" panose="02040503050406030204" pitchFamily="18" charset="0"/>
+                            </a:rPr>
+                            <m:t>𝑡</m:t>
+                          </m:r>
+                        </m:e>
+                      </m:d>
+                      <m:r>
+                        <a:rPr lang="en-US" sz="4400" b="0" i="1" smtClean="0">
+                          <a:latin typeface="Cambria Math" panose="02040503050406030204" pitchFamily="18" charset="0"/>
+                        </a:rPr>
+                        <m:t>=</m:t>
+                      </m:r>
+                      <m:r>
+                        <a:rPr lang="en-US" sz="4400" b="0" i="1" smtClean="0">
+                          <a:solidFill>
+                            <a:srgbClr val="FF0000"/>
+                          </a:solidFill>
+                          <a:latin typeface="Cambria Math" panose="02040503050406030204" pitchFamily="18" charset="0"/>
+                        </a:rPr>
+                        <m:t>0.5</m:t>
+                      </m:r>
+                      <m:r>
+                        <a:rPr lang="en-US" sz="4400" b="0" i="1" smtClean="0">
+                          <a:latin typeface="Cambria Math" panose="02040503050406030204" pitchFamily="18" charset="0"/>
+                        </a:rPr>
+                        <m:t>∗</m:t>
+                      </m:r>
+                      <m:r>
+                        <a:rPr lang="en-US" sz="4400" b="0" i="1" smtClean="0">
+                          <a:latin typeface="Cambria Math" panose="02040503050406030204" pitchFamily="18" charset="0"/>
+                        </a:rPr>
+                        <m:t>𝑦</m:t>
+                      </m:r>
+                      <m:d>
+                        <m:dPr>
+                          <m:ctrlPr>
+                            <a:rPr lang="en-US" sz="4400" b="0" i="1" smtClean="0">
+                              <a:latin typeface="Cambria Math" panose="02040503050406030204" pitchFamily="18" charset="0"/>
+                            </a:rPr>
+                          </m:ctrlPr>
+                        </m:dPr>
+                        <m:e>
+                          <m:r>
+                            <a:rPr lang="en-US" sz="4400" b="0" i="1" smtClean="0">
+                              <a:latin typeface="Cambria Math" panose="02040503050406030204" pitchFamily="18" charset="0"/>
+                            </a:rPr>
+                            <m:t>𝑡</m:t>
+                          </m:r>
+                          <m:r>
+                            <a:rPr lang="en-US" sz="4400" b="0" i="1" smtClean="0">
+                              <a:latin typeface="Cambria Math" panose="02040503050406030204" pitchFamily="18" charset="0"/>
+                            </a:rPr>
+                            <m:t>−1</m:t>
+                          </m:r>
+                        </m:e>
+                      </m:d>
+                      <m:r>
+                        <a:rPr lang="en-US" sz="4400" b="0" i="1" smtClean="0">
+                          <a:latin typeface="Cambria Math" panose="02040503050406030204" pitchFamily="18" charset="0"/>
+                        </a:rPr>
+                        <m:t> </m:t>
+                      </m:r>
+                    </m:oMath>
+                  </m:oMathPara>
+                </a14:m>
+                <a:endParaRPr lang="LID4096" sz="4400" dirty="0"/>
+              </a:p>
+            </p:txBody>
+          </p:sp>
+        </mc:Choice>
+        <mc:Fallback xmlns="">
+          <p:sp>
+            <p:nvSpPr>
+              <p:cNvPr id="7" name="TextBox 6">
+                <a:extLst>
+                  <a:ext uri="{FF2B5EF4-FFF2-40B4-BE49-F238E27FC236}">
+                    <a16:creationId xmlns:a16="http://schemas.microsoft.com/office/drawing/2014/main" id="{3EC067A0-2D30-E5FC-8CE4-0035FC2B47C2}"/>
+                  </a:ext>
+                </a:extLst>
+              </p:cNvPr>
+              <p:cNvSpPr txBox="1">
+                <a:spLocks noRot="1" noChangeAspect="1" noMove="1" noResize="1" noEditPoints="1" noAdjustHandles="1" noChangeArrowheads="1" noChangeShapeType="1" noTextEdit="1"/>
+              </p:cNvSpPr>
+              <p:nvPr/>
+            </p:nvSpPr>
+            <p:spPr>
+              <a:xfrm>
+                <a:off x="6051220" y="5734597"/>
+                <a:ext cx="5285101" cy="677108"/>
+              </a:xfrm>
+              <a:prstGeom prst="rect">
+                <a:avLst/>
+              </a:prstGeom>
+              <a:blipFill>
+                <a:blip r:embed="rId4"/>
+                <a:stretch>
+                  <a:fillRect/>
+                </a:stretch>
+              </a:blipFill>
+            </p:spPr>
+            <p:txBody>
+              <a:bodyPr/>
+              <a:lstStyle/>
+              <a:p>
+                <a:r>
+                  <a:rPr lang="LID4096">
+                    <a:noFill/>
+                  </a:rPr>
+                  <a:t> </a:t>
+                </a:r>
+              </a:p>
+            </p:txBody>
+          </p:sp>
+        </mc:Fallback>
+      </mc:AlternateContent>
+    </p:spTree>
+    <p:extLst>
+      <p:ext uri="{BB962C8B-B14F-4D97-AF65-F5344CB8AC3E}">
+        <p14:creationId xmlns:p14="http://schemas.microsoft.com/office/powerpoint/2010/main" val="3210891694"/>
+      </p:ext>
+    </p:extLst>
+  </p:cSld>
+  <p:clrMapOvr>
+    <a:masterClrMapping/>
+  </p:clrMapOvr>
+</p:sld>
+</file>
+
+<file path=ppt/slides/slide31.xml><?xml version="1.0" encoding="utf-8"?>
+<p:sld xmlns:a="http://schemas.openxmlformats.org/drawingml/2006/main" xmlns:r="http://schemas.openxmlformats.org/officeDocument/2006/relationships" xmlns:p="http://schemas.openxmlformats.org/presentationml/2006/main">
+  <p:cSld>
+    <p:spTree>
+      <p:nvGrpSpPr>
+        <p:cNvPr id="1" name=""/>
+        <p:cNvGrpSpPr/>
+        <p:nvPr/>
+      </p:nvGrpSpPr>
+      <p:grpSpPr>
+        <a:xfrm>
+          <a:off x="0" y="0"/>
+          <a:ext cx="0" cy="0"/>
+          <a:chOff x="0" y="0"/>
+          <a:chExt cx="0" cy="0"/>
+        </a:xfrm>
+      </p:grpSpPr>
+      <p:sp>
+        <p:nvSpPr>
+          <p:cNvPr id="2" name="Title 1">
+            <a:extLst>
+              <a:ext uri="{FF2B5EF4-FFF2-40B4-BE49-F238E27FC236}">
+                <a16:creationId xmlns:a16="http://schemas.microsoft.com/office/drawing/2014/main" id="{24E45AFB-0166-E685-3CAC-395C79AFD893}"/>
+              </a:ext>
+            </a:extLst>
+          </p:cNvPr>
+          <p:cNvSpPr>
+            <a:spLocks noGrp="1"/>
+          </p:cNvSpPr>
+          <p:nvPr>
+            <p:ph type="title"/>
+          </p:nvPr>
+        </p:nvSpPr>
+        <p:spPr/>
+        <p:txBody>
+          <a:bodyPr/>
+          <a:lstStyle/>
+          <a:p>
+            <a:r>
+              <a:rPr lang="en-US" dirty="0"/>
+              <a:t>Let’s add some shocks!</a:t>
+            </a:r>
+            <a:endParaRPr lang="LID4096" dirty="0"/>
+          </a:p>
+        </p:txBody>
+      </p:sp>
+      <p:sp>
+        <p:nvSpPr>
+          <p:cNvPr id="4" name="TextBox 3">
+            <a:extLst>
+              <a:ext uri="{FF2B5EF4-FFF2-40B4-BE49-F238E27FC236}">
+                <a16:creationId xmlns:a16="http://schemas.microsoft.com/office/drawing/2014/main" id="{DC8D7D05-9F4D-A661-3DA1-26A3CC208906}"/>
+              </a:ext>
+            </a:extLst>
+          </p:cNvPr>
+          <p:cNvSpPr txBox="1"/>
+          <p:nvPr/>
+        </p:nvSpPr>
+        <p:spPr>
+          <a:xfrm>
+            <a:off x="1001486" y="2166257"/>
+            <a:ext cx="9960428" cy="2677656"/>
+          </a:xfrm>
+          <a:prstGeom prst="rect">
+            <a:avLst/>
+          </a:prstGeom>
+          <a:noFill/>
+        </p:spPr>
+        <p:txBody>
+          <a:bodyPr wrap="square" rtlCol="0">
+            <a:spAutoFit/>
+          </a:bodyPr>
+          <a:lstStyle/>
+          <a:p>
+            <a:r>
+              <a:rPr lang="en-US" sz="2800" dirty="0"/>
+              <a:t>Two people getting in an argument, John and Luca.</a:t>
+            </a:r>
+          </a:p>
+          <a:p>
+            <a:endParaRPr lang="en-US" sz="2800" dirty="0"/>
+          </a:p>
+          <a:p>
+            <a:r>
+              <a:rPr lang="en-US" sz="2800" dirty="0">
+                <a:solidFill>
+                  <a:schemeClr val="accent2"/>
+                </a:solidFill>
+              </a:rPr>
+              <a:t>John</a:t>
+            </a:r>
+            <a:r>
+              <a:rPr lang="en-US" sz="2800" dirty="0"/>
+              <a:t> (reactive, composes himself quick)</a:t>
+            </a:r>
+          </a:p>
+          <a:p>
+            <a:r>
+              <a:rPr lang="en-US" sz="2800" dirty="0">
+                <a:solidFill>
+                  <a:schemeClr val="accent5">
+                    <a:lumMod val="75000"/>
+                  </a:schemeClr>
+                </a:solidFill>
+              </a:rPr>
+              <a:t>Luca</a:t>
+            </a:r>
+            <a:r>
+              <a:rPr lang="en-US" sz="2800" dirty="0"/>
+              <a:t> (hard to shake, slow to compose himself)</a:t>
+            </a:r>
+          </a:p>
+          <a:p>
+            <a:endParaRPr lang="en-US" sz="2800" dirty="0"/>
+          </a:p>
+          <a:p>
+            <a:endParaRPr lang="en-US" sz="2800" dirty="0"/>
+          </a:p>
+        </p:txBody>
+      </p:sp>
+    </p:spTree>
+    <p:extLst>
+      <p:ext uri="{BB962C8B-B14F-4D97-AF65-F5344CB8AC3E}">
+        <p14:creationId xmlns:p14="http://schemas.microsoft.com/office/powerpoint/2010/main" val="1400339295"/>
+      </p:ext>
+    </p:extLst>
+  </p:cSld>
+  <p:clrMapOvr>
+    <a:masterClrMapping/>
+  </p:clrMapOvr>
+</p:sld>
+</file>
+
+<file path=ppt/slides/slide32.xml><?xml version="1.0" encoding="utf-8"?>
+<p:sld xmlns:a="http://schemas.openxmlformats.org/drawingml/2006/main" xmlns:r="http://schemas.openxmlformats.org/officeDocument/2006/relationships" xmlns:p="http://schemas.openxmlformats.org/presentationml/2006/main">
+  <p:cSld>
+    <p:spTree>
+      <p:nvGrpSpPr>
+        <p:cNvPr id="1" name="">
+          <a:extLst>
+            <a:ext uri="{FF2B5EF4-FFF2-40B4-BE49-F238E27FC236}">
+              <a16:creationId xmlns:a16="http://schemas.microsoft.com/office/drawing/2014/main" id="{6FBCE967-0AFB-726F-A422-8EECDD1B9041}"/>
+            </a:ext>
+          </a:extLst>
+        </p:cNvPr>
+        <p:cNvGrpSpPr/>
+        <p:nvPr/>
+      </p:nvGrpSpPr>
+      <p:grpSpPr>
+        <a:xfrm>
+          <a:off x="0" y="0"/>
+          <a:ext cx="0" cy="0"/>
+          <a:chOff x="0" y="0"/>
+          <a:chExt cx="0" cy="0"/>
+        </a:xfrm>
+      </p:grpSpPr>
+      <p:sp>
+        <p:nvSpPr>
+          <p:cNvPr id="2" name="Title 1">
+            <a:extLst>
+              <a:ext uri="{FF2B5EF4-FFF2-40B4-BE49-F238E27FC236}">
+                <a16:creationId xmlns:a16="http://schemas.microsoft.com/office/drawing/2014/main" id="{6BBB46CC-D73C-2139-CA99-933631A55A0B}"/>
+              </a:ext>
+            </a:extLst>
+          </p:cNvPr>
+          <p:cNvSpPr>
+            <a:spLocks noGrp="1"/>
+          </p:cNvSpPr>
+          <p:nvPr>
+            <p:ph type="title"/>
+          </p:nvPr>
+        </p:nvSpPr>
+        <p:spPr/>
+        <p:txBody>
+          <a:bodyPr/>
+          <a:lstStyle/>
+          <a:p>
+            <a:r>
+              <a:rPr lang="en-US" dirty="0"/>
+              <a:t>Let’s add some shocks!</a:t>
+            </a:r>
+            <a:endParaRPr lang="LID4096" dirty="0"/>
+          </a:p>
+        </p:txBody>
+      </p:sp>
+      <p:sp>
+        <p:nvSpPr>
+          <p:cNvPr id="4" name="TextBox 3">
+            <a:extLst>
+              <a:ext uri="{FF2B5EF4-FFF2-40B4-BE49-F238E27FC236}">
+                <a16:creationId xmlns:a16="http://schemas.microsoft.com/office/drawing/2014/main" id="{8D494D1E-88CB-74AF-1E5E-729B4193A6D3}"/>
+              </a:ext>
+            </a:extLst>
+          </p:cNvPr>
+          <p:cNvSpPr txBox="1"/>
+          <p:nvPr/>
+        </p:nvSpPr>
+        <p:spPr>
+          <a:xfrm>
+            <a:off x="1001486" y="2166257"/>
+            <a:ext cx="9960428" cy="2677656"/>
+          </a:xfrm>
+          <a:prstGeom prst="rect">
+            <a:avLst/>
+          </a:prstGeom>
+          <a:noFill/>
+        </p:spPr>
+        <p:txBody>
+          <a:bodyPr wrap="square" rtlCol="0">
+            <a:spAutoFit/>
+          </a:bodyPr>
+          <a:lstStyle/>
+          <a:p>
+            <a:r>
+              <a:rPr lang="en-US" sz="2800" dirty="0"/>
+              <a:t>Two people getting in an argument, John and Luca.</a:t>
+            </a:r>
+          </a:p>
+          <a:p>
+            <a:endParaRPr lang="en-US" sz="2800" dirty="0"/>
+          </a:p>
+          <a:p>
+            <a:r>
+              <a:rPr lang="en-US" sz="2800" dirty="0">
+                <a:solidFill>
+                  <a:schemeClr val="accent2"/>
+                </a:solidFill>
+              </a:rPr>
+              <a:t>John</a:t>
+            </a:r>
+            <a:r>
+              <a:rPr lang="en-US" sz="2800" dirty="0"/>
+              <a:t> (reactive, composes himself quick)</a:t>
+            </a:r>
+          </a:p>
+          <a:p>
+            <a:r>
+              <a:rPr lang="en-US" sz="2800" dirty="0">
+                <a:solidFill>
+                  <a:schemeClr val="accent5">
+                    <a:lumMod val="75000"/>
+                  </a:schemeClr>
+                </a:solidFill>
+              </a:rPr>
+              <a:t>Luca</a:t>
+            </a:r>
+            <a:r>
+              <a:rPr lang="en-US" sz="2800" dirty="0"/>
+              <a:t> (hard to shake, slow to compose himself)</a:t>
+            </a:r>
+          </a:p>
+          <a:p>
+            <a:endParaRPr lang="en-US" sz="2800" dirty="0"/>
+          </a:p>
+          <a:p>
+            <a:endParaRPr lang="en-US" sz="2800" dirty="0"/>
+          </a:p>
+        </p:txBody>
+      </p:sp>
+      <mc:AlternateContent xmlns:mc="http://schemas.openxmlformats.org/markup-compatibility/2006" xmlns:a14="http://schemas.microsoft.com/office/drawing/2010/main">
+        <mc:Choice Requires="a14">
+          <p:sp>
+            <p:nvSpPr>
+              <p:cNvPr id="3" name="TextBox 2">
+                <a:extLst>
+                  <a:ext uri="{FF2B5EF4-FFF2-40B4-BE49-F238E27FC236}">
+                    <a16:creationId xmlns:a16="http://schemas.microsoft.com/office/drawing/2014/main" id="{CC7B3F49-61FB-AD0E-98C4-B07AF6F535A2}"/>
+                  </a:ext>
+                </a:extLst>
+              </p:cNvPr>
+              <p:cNvSpPr txBox="1"/>
+              <p:nvPr/>
+            </p:nvSpPr>
+            <p:spPr>
+              <a:xfrm>
+                <a:off x="2538071" y="4843913"/>
+                <a:ext cx="7115858" cy="706797"/>
+              </a:xfrm>
+              <a:prstGeom prst="rect">
+                <a:avLst/>
+              </a:prstGeom>
+              <a:noFill/>
+            </p:spPr>
+            <p:txBody>
+              <a:bodyPr wrap="none" lIns="0" tIns="0" rIns="0" bIns="0" rtlCol="0">
+                <a:spAutoFit/>
+              </a:bodyPr>
+              <a:lstStyle/>
+              <a:p>
+                <a:pPr/>
+                <a14:m>
+                  <m:oMathPara xmlns:m="http://schemas.openxmlformats.org/officeDocument/2006/math">
+                    <m:oMath>
+                      <m:r>
+                        <a:rPr lang="en-US" sz="4400" b="0" i="1" smtClean="0">
+                          <a:latin typeface="Cambria Math" panose="02040503050406030204" pitchFamily="18" charset="0"/>
+                        </a:rPr>
+                        <m:t>𝑦</m:t>
+                      </m:r>
+                      <m:d>
+                        <m:dPr>
+                          <m:ctrlPr>
+                            <a:rPr lang="en-US" sz="4400" b="0" i="1" smtClean="0">
+                              <a:latin typeface="Cambria Math" panose="02040503050406030204" pitchFamily="18" charset="0"/>
+                            </a:rPr>
+                          </m:ctrlPr>
+                        </m:dPr>
+                        <m:e>
+                          <m:r>
+                            <a:rPr lang="en-US" sz="4400" b="0" i="1" smtClean="0">
+                              <a:latin typeface="Cambria Math" panose="02040503050406030204" pitchFamily="18" charset="0"/>
+                            </a:rPr>
+                            <m:t>𝑖</m:t>
+                          </m:r>
+                          <m:r>
+                            <a:rPr lang="en-US" sz="4400" b="0" i="1" smtClean="0">
+                              <a:latin typeface="Cambria Math" panose="02040503050406030204" pitchFamily="18" charset="0"/>
+                            </a:rPr>
+                            <m:t>,</m:t>
+                          </m:r>
+                          <m:r>
+                            <a:rPr lang="en-US" sz="4400" b="0" i="1" smtClean="0">
+                              <a:latin typeface="Cambria Math" panose="02040503050406030204" pitchFamily="18" charset="0"/>
+                            </a:rPr>
+                            <m:t>𝑡</m:t>
+                          </m:r>
+                        </m:e>
+                      </m:d>
+                      <m:r>
+                        <a:rPr lang="en-US" sz="4400" b="0" i="1" smtClean="0">
+                          <a:latin typeface="Cambria Math" panose="02040503050406030204" pitchFamily="18" charset="0"/>
+                        </a:rPr>
+                        <m:t>=</m:t>
+                      </m:r>
+                      <m:sSub>
+                        <m:sSubPr>
+                          <m:ctrlPr>
+                            <a:rPr lang="en-US" sz="4400" b="0" i="1" smtClean="0">
+                              <a:latin typeface="Cambria Math" panose="02040503050406030204" pitchFamily="18" charset="0"/>
+                            </a:rPr>
+                          </m:ctrlPr>
+                        </m:sSubPr>
+                        <m:e>
+                          <m:r>
+                            <a:rPr lang="en-US" sz="4400" b="0" i="1" smtClean="0">
+                              <a:latin typeface="Cambria Math" panose="02040503050406030204" pitchFamily="18" charset="0"/>
+                            </a:rPr>
+                            <m:t>𝛽</m:t>
+                          </m:r>
+                        </m:e>
+                        <m:sub>
+                          <m:r>
+                            <a:rPr lang="en-US" sz="4400" b="0" i="1" smtClean="0">
+                              <a:latin typeface="Cambria Math" panose="02040503050406030204" pitchFamily="18" charset="0"/>
+                            </a:rPr>
+                            <m:t>𝑖</m:t>
+                          </m:r>
+                        </m:sub>
+                      </m:sSub>
+                      <m:r>
+                        <a:rPr lang="en-US" sz="4400" b="0" i="1" smtClean="0">
+                          <a:latin typeface="Cambria Math" panose="02040503050406030204" pitchFamily="18" charset="0"/>
+                        </a:rPr>
+                        <m:t>∗</m:t>
+                      </m:r>
+                      <m:r>
+                        <a:rPr lang="en-US" sz="4400" b="0" i="1" smtClean="0">
+                          <a:latin typeface="Cambria Math" panose="02040503050406030204" pitchFamily="18" charset="0"/>
+                        </a:rPr>
+                        <m:t>𝑦</m:t>
+                      </m:r>
+                      <m:d>
+                        <m:dPr>
+                          <m:ctrlPr>
+                            <a:rPr lang="en-US" sz="4400" b="0" i="1" smtClean="0">
+                              <a:latin typeface="Cambria Math" panose="02040503050406030204" pitchFamily="18" charset="0"/>
+                            </a:rPr>
+                          </m:ctrlPr>
+                        </m:dPr>
+                        <m:e>
+                          <m:r>
+                            <a:rPr lang="en-US" sz="4400" b="0" i="1" smtClean="0">
+                              <a:latin typeface="Cambria Math" panose="02040503050406030204" pitchFamily="18" charset="0"/>
+                            </a:rPr>
+                            <m:t>𝑖</m:t>
+                          </m:r>
+                          <m:r>
+                            <a:rPr lang="en-US" sz="4400" b="0" i="1" smtClean="0">
+                              <a:latin typeface="Cambria Math" panose="02040503050406030204" pitchFamily="18" charset="0"/>
+                            </a:rPr>
+                            <m:t>,</m:t>
+                          </m:r>
+                          <m:r>
+                            <a:rPr lang="en-US" sz="4400" b="0" i="1" smtClean="0">
+                              <a:latin typeface="Cambria Math" panose="02040503050406030204" pitchFamily="18" charset="0"/>
+                            </a:rPr>
+                            <m:t>𝑡</m:t>
+                          </m:r>
+                          <m:r>
+                            <a:rPr lang="en-US" sz="4400" b="0" i="1" smtClean="0">
+                              <a:latin typeface="Cambria Math" panose="02040503050406030204" pitchFamily="18" charset="0"/>
+                            </a:rPr>
+                            <m:t>−1</m:t>
+                          </m:r>
+                        </m:e>
+                      </m:d>
+                      <m:r>
+                        <a:rPr lang="en-US" sz="4400" b="0" i="1" smtClean="0">
+                          <a:latin typeface="Cambria Math" panose="02040503050406030204" pitchFamily="18" charset="0"/>
+                        </a:rPr>
+                        <m:t>+</m:t>
+                      </m:r>
+                      <m:sSub>
+                        <m:sSubPr>
+                          <m:ctrlPr>
+                            <a:rPr lang="en-US" sz="4400" b="0" i="1" smtClean="0">
+                              <a:latin typeface="Cambria Math" panose="02040503050406030204" pitchFamily="18" charset="0"/>
+                            </a:rPr>
+                          </m:ctrlPr>
+                        </m:sSubPr>
+                        <m:e>
+                          <m:r>
+                            <a:rPr lang="en-US" sz="4400" b="0" i="1" smtClean="0">
+                              <a:latin typeface="Cambria Math" panose="02040503050406030204" pitchFamily="18" charset="0"/>
+                            </a:rPr>
+                            <m:t>𝑒</m:t>
+                          </m:r>
+                        </m:e>
+                        <m:sub>
+                          <m:r>
+                            <a:rPr lang="en-US" sz="4400" b="0" i="1" smtClean="0">
+                              <a:latin typeface="Cambria Math" panose="02040503050406030204" pitchFamily="18" charset="0"/>
+                            </a:rPr>
+                            <m:t>𝑖</m:t>
+                          </m:r>
+                          <m:r>
+                            <a:rPr lang="en-US" sz="4400" b="0" i="1" smtClean="0">
+                              <a:latin typeface="Cambria Math" panose="02040503050406030204" pitchFamily="18" charset="0"/>
+                            </a:rPr>
+                            <m:t>,</m:t>
+                          </m:r>
+                          <m:r>
+                            <a:rPr lang="en-US" sz="4400" b="0" i="1" smtClean="0">
+                              <a:latin typeface="Cambria Math" panose="02040503050406030204" pitchFamily="18" charset="0"/>
+                            </a:rPr>
+                            <m:t>𝑡</m:t>
+                          </m:r>
+                        </m:sub>
+                      </m:sSub>
+                    </m:oMath>
+                  </m:oMathPara>
+                </a14:m>
+                <a:endParaRPr lang="LID4096" sz="4400" dirty="0"/>
+              </a:p>
+            </p:txBody>
+          </p:sp>
+        </mc:Choice>
+        <mc:Fallback xmlns="">
+          <p:sp>
+            <p:nvSpPr>
+              <p:cNvPr id="3" name="TextBox 2">
+                <a:extLst>
+                  <a:ext uri="{FF2B5EF4-FFF2-40B4-BE49-F238E27FC236}">
+                    <a16:creationId xmlns:a16="http://schemas.microsoft.com/office/drawing/2014/main" id="{CC7B3F49-61FB-AD0E-98C4-B07AF6F535A2}"/>
+                  </a:ext>
+                </a:extLst>
+              </p:cNvPr>
+              <p:cNvSpPr txBox="1">
+                <a:spLocks noRot="1" noChangeAspect="1" noMove="1" noResize="1" noEditPoints="1" noAdjustHandles="1" noChangeArrowheads="1" noChangeShapeType="1" noTextEdit="1"/>
+              </p:cNvSpPr>
+              <p:nvPr/>
+            </p:nvSpPr>
+            <p:spPr>
+              <a:xfrm>
+                <a:off x="2538071" y="4843913"/>
+                <a:ext cx="7115858" cy="706797"/>
+              </a:xfrm>
+              <a:prstGeom prst="rect">
+                <a:avLst/>
+              </a:prstGeom>
+              <a:blipFill>
+                <a:blip r:embed="rId2"/>
+                <a:stretch>
+                  <a:fillRect/>
+                </a:stretch>
+              </a:blipFill>
+            </p:spPr>
+            <p:txBody>
+              <a:bodyPr/>
+              <a:lstStyle/>
+              <a:p>
+                <a:r>
+                  <a:rPr lang="LID4096">
+                    <a:noFill/>
+                  </a:rPr>
+                  <a:t> </a:t>
+                </a:r>
+              </a:p>
+            </p:txBody>
+          </p:sp>
+        </mc:Fallback>
+      </mc:AlternateContent>
+    </p:spTree>
+    <p:extLst>
+      <p:ext uri="{BB962C8B-B14F-4D97-AF65-F5344CB8AC3E}">
+        <p14:creationId xmlns:p14="http://schemas.microsoft.com/office/powerpoint/2010/main" val="718001610"/>
+      </p:ext>
+    </p:extLst>
+  </p:cSld>
+  <p:clrMapOvr>
+    <a:masterClrMapping/>
+  </p:clrMapOvr>
+</p:sld>
+</file>
+
+<file path=ppt/slides/slide33.xml><?xml version="1.0" encoding="utf-8"?>
+<p:sld xmlns:a="http://schemas.openxmlformats.org/drawingml/2006/main" xmlns:r="http://schemas.openxmlformats.org/officeDocument/2006/relationships" xmlns:p="http://schemas.openxmlformats.org/presentationml/2006/main">
+  <p:cSld>
+    <p:spTree>
+      <p:nvGrpSpPr>
+        <p:cNvPr id="1" name="">
+          <a:extLst>
+            <a:ext uri="{FF2B5EF4-FFF2-40B4-BE49-F238E27FC236}">
+              <a16:creationId xmlns:a16="http://schemas.microsoft.com/office/drawing/2014/main" id="{7C00DFCF-90D2-7D45-F51F-B871B17A161F}"/>
+            </a:ext>
+          </a:extLst>
+        </p:cNvPr>
+        <p:cNvGrpSpPr/>
+        <p:nvPr/>
+      </p:nvGrpSpPr>
+      <p:grpSpPr>
+        <a:xfrm>
+          <a:off x="0" y="0"/>
+          <a:ext cx="0" cy="0"/>
+          <a:chOff x="0" y="0"/>
+          <a:chExt cx="0" cy="0"/>
+        </a:xfrm>
+      </p:grpSpPr>
+      <p:sp>
+        <p:nvSpPr>
+          <p:cNvPr id="2" name="Title 1">
+            <a:extLst>
+              <a:ext uri="{FF2B5EF4-FFF2-40B4-BE49-F238E27FC236}">
+                <a16:creationId xmlns:a16="http://schemas.microsoft.com/office/drawing/2014/main" id="{BFAC562F-EAEE-BD4C-8646-EE41BEFBF3F0}"/>
+              </a:ext>
+            </a:extLst>
+          </p:cNvPr>
+          <p:cNvSpPr>
+            <a:spLocks noGrp="1"/>
+          </p:cNvSpPr>
+          <p:nvPr>
+            <p:ph type="title"/>
+          </p:nvPr>
+        </p:nvSpPr>
+        <p:spPr/>
+        <p:txBody>
+          <a:bodyPr/>
+          <a:lstStyle/>
+          <a:p>
+            <a:r>
+              <a:rPr lang="en-US" dirty="0"/>
+              <a:t>Let’s add some shocks!</a:t>
+            </a:r>
+            <a:endParaRPr lang="LID4096" dirty="0"/>
+          </a:p>
+        </p:txBody>
+      </p:sp>
+      <p:sp>
+        <p:nvSpPr>
+          <p:cNvPr id="4" name="TextBox 3">
+            <a:extLst>
+              <a:ext uri="{FF2B5EF4-FFF2-40B4-BE49-F238E27FC236}">
+                <a16:creationId xmlns:a16="http://schemas.microsoft.com/office/drawing/2014/main" id="{D4D4A998-4C73-4792-F7D4-F41AB193FF22}"/>
+              </a:ext>
+            </a:extLst>
+          </p:cNvPr>
+          <p:cNvSpPr txBox="1"/>
+          <p:nvPr/>
+        </p:nvSpPr>
+        <p:spPr>
+          <a:xfrm>
+            <a:off x="1001486" y="2166257"/>
+            <a:ext cx="9960428" cy="2677656"/>
+          </a:xfrm>
+          <a:prstGeom prst="rect">
+            <a:avLst/>
+          </a:prstGeom>
+          <a:noFill/>
+        </p:spPr>
+        <p:txBody>
+          <a:bodyPr wrap="square" rtlCol="0">
+            <a:spAutoFit/>
+          </a:bodyPr>
+          <a:lstStyle/>
+          <a:p>
+            <a:r>
+              <a:rPr lang="en-US" sz="2800" dirty="0"/>
+              <a:t>Two people getting in an argument, John and Luca.</a:t>
+            </a:r>
+          </a:p>
+          <a:p>
+            <a:endParaRPr lang="en-US" sz="2800" dirty="0"/>
+          </a:p>
+          <a:p>
+            <a:r>
+              <a:rPr lang="en-US" sz="2800" dirty="0">
+                <a:solidFill>
+                  <a:schemeClr val="accent2"/>
+                </a:solidFill>
+              </a:rPr>
+              <a:t>John</a:t>
+            </a:r>
+            <a:r>
+              <a:rPr lang="en-US" sz="2800" dirty="0"/>
+              <a:t> (reactive, composes himself quick)</a:t>
+            </a:r>
+          </a:p>
+          <a:p>
+            <a:r>
+              <a:rPr lang="en-US" sz="2800" dirty="0">
+                <a:solidFill>
+                  <a:schemeClr val="accent5">
+                    <a:lumMod val="75000"/>
+                  </a:schemeClr>
+                </a:solidFill>
+              </a:rPr>
+              <a:t>Luca</a:t>
+            </a:r>
+            <a:r>
+              <a:rPr lang="en-US" sz="2800" dirty="0"/>
+              <a:t> (hard to shake, slow to compose himself)</a:t>
+            </a:r>
+          </a:p>
+          <a:p>
+            <a:endParaRPr lang="en-US" sz="2800" dirty="0"/>
+          </a:p>
+          <a:p>
+            <a:endParaRPr lang="en-US" sz="2800" dirty="0"/>
+          </a:p>
+        </p:txBody>
+      </p:sp>
+      <mc:AlternateContent xmlns:mc="http://schemas.openxmlformats.org/markup-compatibility/2006" xmlns:a14="http://schemas.microsoft.com/office/drawing/2010/main">
+        <mc:Choice Requires="a14">
+          <p:sp>
+            <p:nvSpPr>
+              <p:cNvPr id="3" name="TextBox 2">
+                <a:extLst>
+                  <a:ext uri="{FF2B5EF4-FFF2-40B4-BE49-F238E27FC236}">
+                    <a16:creationId xmlns:a16="http://schemas.microsoft.com/office/drawing/2014/main" id="{215EA723-8B0A-8C58-248B-BA2A9CCA4845}"/>
+                  </a:ext>
+                </a:extLst>
+              </p:cNvPr>
+              <p:cNvSpPr txBox="1"/>
+              <p:nvPr/>
+            </p:nvSpPr>
+            <p:spPr>
+              <a:xfrm>
+                <a:off x="2538071" y="4490514"/>
+                <a:ext cx="7115858" cy="706797"/>
+              </a:xfrm>
+              <a:prstGeom prst="rect">
+                <a:avLst/>
+              </a:prstGeom>
+              <a:noFill/>
+            </p:spPr>
+            <p:txBody>
+              <a:bodyPr wrap="none" lIns="0" tIns="0" rIns="0" bIns="0" rtlCol="0">
+                <a:spAutoFit/>
+              </a:bodyPr>
+              <a:lstStyle/>
+              <a:p>
+                <a:pPr/>
+                <a14:m>
+                  <m:oMathPara xmlns:m="http://schemas.openxmlformats.org/officeDocument/2006/math">
+                    <m:oMath>
+                      <m:r>
+                        <a:rPr lang="en-US" sz="4400" b="0" i="1" smtClean="0">
+                          <a:latin typeface="Cambria Math" panose="02040503050406030204" pitchFamily="18" charset="0"/>
+                        </a:rPr>
+                        <m:t>𝑦</m:t>
+                      </m:r>
+                      <m:d>
+                        <m:dPr>
+                          <m:ctrlPr>
+                            <a:rPr lang="en-US" sz="4400" b="0" i="1" smtClean="0">
+                              <a:latin typeface="Cambria Math" panose="02040503050406030204" pitchFamily="18" charset="0"/>
+                            </a:rPr>
+                          </m:ctrlPr>
+                        </m:dPr>
+                        <m:e>
+                          <m:r>
+                            <a:rPr lang="en-US" sz="4400" b="0" i="1" smtClean="0">
+                              <a:latin typeface="Cambria Math" panose="02040503050406030204" pitchFamily="18" charset="0"/>
+                            </a:rPr>
+                            <m:t>𝑖</m:t>
+                          </m:r>
+                          <m:r>
+                            <a:rPr lang="en-US" sz="4400" b="0" i="1" smtClean="0">
+                              <a:latin typeface="Cambria Math" panose="02040503050406030204" pitchFamily="18" charset="0"/>
+                            </a:rPr>
+                            <m:t>,</m:t>
+                          </m:r>
+                          <m:r>
+                            <a:rPr lang="en-US" sz="4400" b="0" i="1" smtClean="0">
+                              <a:latin typeface="Cambria Math" panose="02040503050406030204" pitchFamily="18" charset="0"/>
+                            </a:rPr>
+                            <m:t>𝑡</m:t>
+                          </m:r>
+                        </m:e>
+                      </m:d>
+                      <m:r>
+                        <a:rPr lang="en-US" sz="4400" b="0" i="1" smtClean="0">
+                          <a:latin typeface="Cambria Math" panose="02040503050406030204" pitchFamily="18" charset="0"/>
+                        </a:rPr>
+                        <m:t>=</m:t>
+                      </m:r>
+                      <m:sSub>
+                        <m:sSubPr>
+                          <m:ctrlPr>
+                            <a:rPr lang="en-US" sz="4400" b="0" i="1" smtClean="0">
+                              <a:latin typeface="Cambria Math" panose="02040503050406030204" pitchFamily="18" charset="0"/>
+                            </a:rPr>
+                          </m:ctrlPr>
+                        </m:sSubPr>
+                        <m:e>
+                          <m:r>
+                            <a:rPr lang="en-US" sz="4400" b="0" i="1" smtClean="0">
+                              <a:latin typeface="Cambria Math" panose="02040503050406030204" pitchFamily="18" charset="0"/>
+                            </a:rPr>
+                            <m:t>𝛽</m:t>
+                          </m:r>
+                        </m:e>
+                        <m:sub>
+                          <m:r>
+                            <a:rPr lang="en-US" sz="4400" b="0" i="1" smtClean="0">
+                              <a:latin typeface="Cambria Math" panose="02040503050406030204" pitchFamily="18" charset="0"/>
+                            </a:rPr>
+                            <m:t>𝑖</m:t>
+                          </m:r>
+                        </m:sub>
+                      </m:sSub>
+                      <m:r>
+                        <a:rPr lang="en-US" sz="4400" b="0" i="1" smtClean="0">
+                          <a:latin typeface="Cambria Math" panose="02040503050406030204" pitchFamily="18" charset="0"/>
+                        </a:rPr>
+                        <m:t>∗</m:t>
+                      </m:r>
+                      <m:r>
+                        <a:rPr lang="en-US" sz="4400" b="0" i="1" smtClean="0">
+                          <a:latin typeface="Cambria Math" panose="02040503050406030204" pitchFamily="18" charset="0"/>
+                        </a:rPr>
+                        <m:t>𝑦</m:t>
+                      </m:r>
+                      <m:d>
+                        <m:dPr>
+                          <m:ctrlPr>
+                            <a:rPr lang="en-US" sz="4400" b="0" i="1" smtClean="0">
+                              <a:latin typeface="Cambria Math" panose="02040503050406030204" pitchFamily="18" charset="0"/>
+                            </a:rPr>
+                          </m:ctrlPr>
+                        </m:dPr>
+                        <m:e>
+                          <m:r>
+                            <a:rPr lang="en-US" sz="4400" b="0" i="1" smtClean="0">
+                              <a:latin typeface="Cambria Math" panose="02040503050406030204" pitchFamily="18" charset="0"/>
+                            </a:rPr>
+                            <m:t>𝑖</m:t>
+                          </m:r>
+                          <m:r>
+                            <a:rPr lang="en-US" sz="4400" b="0" i="1" smtClean="0">
+                              <a:latin typeface="Cambria Math" panose="02040503050406030204" pitchFamily="18" charset="0"/>
+                            </a:rPr>
+                            <m:t>,</m:t>
+                          </m:r>
+                          <m:r>
+                            <a:rPr lang="en-US" sz="4400" b="0" i="1" smtClean="0">
+                              <a:latin typeface="Cambria Math" panose="02040503050406030204" pitchFamily="18" charset="0"/>
+                            </a:rPr>
+                            <m:t>𝑡</m:t>
+                          </m:r>
+                          <m:r>
+                            <a:rPr lang="en-US" sz="4400" b="0" i="1" smtClean="0">
+                              <a:latin typeface="Cambria Math" panose="02040503050406030204" pitchFamily="18" charset="0"/>
+                            </a:rPr>
+                            <m:t>−1</m:t>
+                          </m:r>
+                        </m:e>
+                      </m:d>
+                      <m:r>
+                        <a:rPr lang="en-US" sz="4400" b="0" i="1" smtClean="0">
+                          <a:latin typeface="Cambria Math" panose="02040503050406030204" pitchFamily="18" charset="0"/>
+                        </a:rPr>
+                        <m:t>+</m:t>
+                      </m:r>
+                      <m:sSub>
+                        <m:sSubPr>
+                          <m:ctrlPr>
+                            <a:rPr lang="en-US" sz="4400" b="0" i="1" smtClean="0">
+                              <a:latin typeface="Cambria Math" panose="02040503050406030204" pitchFamily="18" charset="0"/>
+                            </a:rPr>
+                          </m:ctrlPr>
+                        </m:sSubPr>
+                        <m:e>
+                          <m:r>
+                            <a:rPr lang="en-US" sz="4400" b="0" i="1" smtClean="0">
+                              <a:latin typeface="Cambria Math" panose="02040503050406030204" pitchFamily="18" charset="0"/>
+                            </a:rPr>
+                            <m:t>𝑒</m:t>
+                          </m:r>
+                        </m:e>
+                        <m:sub>
+                          <m:r>
+                            <a:rPr lang="en-US" sz="4400" b="0" i="1" smtClean="0">
+                              <a:latin typeface="Cambria Math" panose="02040503050406030204" pitchFamily="18" charset="0"/>
+                            </a:rPr>
+                            <m:t>𝑖</m:t>
+                          </m:r>
+                          <m:r>
+                            <a:rPr lang="en-US" sz="4400" b="0" i="1" smtClean="0">
+                              <a:latin typeface="Cambria Math" panose="02040503050406030204" pitchFamily="18" charset="0"/>
+                            </a:rPr>
+                            <m:t>,</m:t>
+                          </m:r>
+                          <m:r>
+                            <a:rPr lang="en-US" sz="4400" b="0" i="1" smtClean="0">
+                              <a:latin typeface="Cambria Math" panose="02040503050406030204" pitchFamily="18" charset="0"/>
+                            </a:rPr>
+                            <m:t>𝑡</m:t>
+                          </m:r>
+                        </m:sub>
+                      </m:sSub>
+                    </m:oMath>
+                  </m:oMathPara>
+                </a14:m>
+                <a:endParaRPr lang="LID4096" sz="4400" dirty="0"/>
+              </a:p>
+            </p:txBody>
+          </p:sp>
+        </mc:Choice>
+        <mc:Fallback xmlns="">
+          <p:sp>
+            <p:nvSpPr>
+              <p:cNvPr id="3" name="TextBox 2">
+                <a:extLst>
+                  <a:ext uri="{FF2B5EF4-FFF2-40B4-BE49-F238E27FC236}">
+                    <a16:creationId xmlns:a16="http://schemas.microsoft.com/office/drawing/2014/main" id="{215EA723-8B0A-8C58-248B-BA2A9CCA4845}"/>
+                  </a:ext>
+                </a:extLst>
+              </p:cNvPr>
+              <p:cNvSpPr txBox="1">
+                <a:spLocks noRot="1" noChangeAspect="1" noMove="1" noResize="1" noEditPoints="1" noAdjustHandles="1" noChangeArrowheads="1" noChangeShapeType="1" noTextEdit="1"/>
+              </p:cNvSpPr>
+              <p:nvPr/>
+            </p:nvSpPr>
+            <p:spPr>
+              <a:xfrm>
+                <a:off x="2538071" y="4490514"/>
+                <a:ext cx="7115858" cy="706797"/>
+              </a:xfrm>
+              <a:prstGeom prst="rect">
+                <a:avLst/>
+              </a:prstGeom>
+              <a:blipFill>
+                <a:blip r:embed="rId2"/>
+                <a:stretch>
+                  <a:fillRect/>
+                </a:stretch>
+              </a:blipFill>
+            </p:spPr>
+            <p:txBody>
+              <a:bodyPr/>
+              <a:lstStyle/>
+              <a:p>
+                <a:r>
+                  <a:rPr lang="LID4096">
+                    <a:noFill/>
+                  </a:rPr>
+                  <a:t> </a:t>
+                </a:r>
+              </a:p>
+            </p:txBody>
+          </p:sp>
+        </mc:Fallback>
+      </mc:AlternateContent>
+      <mc:AlternateContent xmlns:mc="http://schemas.openxmlformats.org/markup-compatibility/2006" xmlns:a14="http://schemas.microsoft.com/office/drawing/2010/main">
+        <mc:Choice Requires="a14">
+          <p:sp>
+            <p:nvSpPr>
+              <p:cNvPr id="6" name="TextBox 5">
+                <a:extLst>
+                  <a:ext uri="{FF2B5EF4-FFF2-40B4-BE49-F238E27FC236}">
+                    <a16:creationId xmlns:a16="http://schemas.microsoft.com/office/drawing/2014/main" id="{6FFD4433-4150-0B87-CD70-7F48716BCEB7}"/>
+                  </a:ext>
+                </a:extLst>
+              </p:cNvPr>
+              <p:cNvSpPr txBox="1"/>
+              <p:nvPr/>
+            </p:nvSpPr>
+            <p:spPr>
+              <a:xfrm>
+                <a:off x="2538071" y="5384878"/>
+                <a:ext cx="1560876" cy="492443"/>
+              </a:xfrm>
+              <a:prstGeom prst="rect">
+                <a:avLst/>
+              </a:prstGeom>
+              <a:noFill/>
+            </p:spPr>
+            <p:txBody>
+              <a:bodyPr wrap="none" lIns="0" tIns="0" rIns="0" bIns="0" rtlCol="0">
+                <a:spAutoFit/>
+              </a:bodyPr>
+              <a:lstStyle/>
+              <a:p>
+                <a:pPr/>
+                <a14:m>
+                  <m:oMathPara xmlns:m="http://schemas.openxmlformats.org/officeDocument/2006/math">
+                    <m:oMath>
+                      <m:sSub>
+                        <m:sSubPr>
+                          <m:ctrlPr>
+                            <a:rPr lang="en-US" sz="3200" b="0" i="1" smtClean="0">
+                              <a:latin typeface="Cambria Math" panose="02040503050406030204" pitchFamily="18" charset="0"/>
+                            </a:rPr>
+                          </m:ctrlPr>
+                        </m:sSubPr>
+                        <m:e>
+                          <m:r>
+                            <a:rPr lang="en-US" sz="3200" b="0" i="1" smtClean="0">
+                              <a:latin typeface="Cambria Math" panose="02040503050406030204" pitchFamily="18" charset="0"/>
+                            </a:rPr>
+                            <m:t>𝛽</m:t>
+                          </m:r>
+                        </m:e>
+                        <m:sub>
+                          <m:r>
+                            <a:rPr lang="en-US" sz="3200" b="0" i="1" smtClean="0">
+                              <a:latin typeface="Cambria Math" panose="02040503050406030204" pitchFamily="18" charset="0"/>
+                            </a:rPr>
+                            <m:t>1</m:t>
+                          </m:r>
+                        </m:sub>
+                      </m:sSub>
+                      <m:r>
+                        <a:rPr lang="en-US" sz="3200" b="0" i="1" smtClean="0">
+                          <a:latin typeface="Cambria Math" panose="02040503050406030204" pitchFamily="18" charset="0"/>
+                        </a:rPr>
+                        <m:t>=0.2</m:t>
+                      </m:r>
+                    </m:oMath>
+                  </m:oMathPara>
+                </a14:m>
+                <a:endParaRPr lang="LID4096" sz="3200" dirty="0"/>
+              </a:p>
+            </p:txBody>
+          </p:sp>
+        </mc:Choice>
+        <mc:Fallback xmlns="">
+          <p:sp>
+            <p:nvSpPr>
+              <p:cNvPr id="6" name="TextBox 5">
+                <a:extLst>
+                  <a:ext uri="{FF2B5EF4-FFF2-40B4-BE49-F238E27FC236}">
+                    <a16:creationId xmlns:a16="http://schemas.microsoft.com/office/drawing/2014/main" id="{6FFD4433-4150-0B87-CD70-7F48716BCEB7}"/>
+                  </a:ext>
+                </a:extLst>
+              </p:cNvPr>
+              <p:cNvSpPr txBox="1">
+                <a:spLocks noRot="1" noChangeAspect="1" noMove="1" noResize="1" noEditPoints="1" noAdjustHandles="1" noChangeArrowheads="1" noChangeShapeType="1" noTextEdit="1"/>
+              </p:cNvSpPr>
+              <p:nvPr/>
+            </p:nvSpPr>
+            <p:spPr>
+              <a:xfrm>
+                <a:off x="2538071" y="5384878"/>
+                <a:ext cx="1560876" cy="492443"/>
+              </a:xfrm>
+              <a:prstGeom prst="rect">
+                <a:avLst/>
+              </a:prstGeom>
+              <a:blipFill>
+                <a:blip r:embed="rId3"/>
+                <a:stretch>
+                  <a:fillRect/>
+                </a:stretch>
+              </a:blipFill>
+            </p:spPr>
+            <p:txBody>
+              <a:bodyPr/>
+              <a:lstStyle/>
+              <a:p>
+                <a:r>
+                  <a:rPr lang="LID4096">
+                    <a:noFill/>
+                  </a:rPr>
+                  <a:t> </a:t>
+                </a:r>
+              </a:p>
+            </p:txBody>
+          </p:sp>
+        </mc:Fallback>
+      </mc:AlternateContent>
+      <mc:AlternateContent xmlns:mc="http://schemas.openxmlformats.org/markup-compatibility/2006" xmlns:a14="http://schemas.microsoft.com/office/drawing/2010/main">
+        <mc:Choice Requires="a14">
+          <p:sp>
+            <p:nvSpPr>
+              <p:cNvPr id="7" name="TextBox 6">
+                <a:extLst>
+                  <a:ext uri="{FF2B5EF4-FFF2-40B4-BE49-F238E27FC236}">
+                    <a16:creationId xmlns:a16="http://schemas.microsoft.com/office/drawing/2014/main" id="{356934BF-9F8D-FE06-0B5C-24D8A49350B7}"/>
+                  </a:ext>
+                </a:extLst>
+              </p:cNvPr>
+              <p:cNvSpPr txBox="1"/>
+              <p:nvPr/>
+            </p:nvSpPr>
+            <p:spPr>
+              <a:xfrm>
+                <a:off x="2528582" y="6064888"/>
+                <a:ext cx="1570365" cy="492443"/>
+              </a:xfrm>
+              <a:prstGeom prst="rect">
+                <a:avLst/>
+              </a:prstGeom>
+              <a:noFill/>
+            </p:spPr>
+            <p:txBody>
+              <a:bodyPr wrap="none" lIns="0" tIns="0" rIns="0" bIns="0" rtlCol="0">
+                <a:spAutoFit/>
+              </a:bodyPr>
+              <a:lstStyle/>
+              <a:p>
+                <a:pPr/>
+                <a14:m>
+                  <m:oMathPara xmlns:m="http://schemas.openxmlformats.org/officeDocument/2006/math">
+                    <m:oMath>
+                      <m:sSub>
+                        <m:sSubPr>
+                          <m:ctrlPr>
+                            <a:rPr lang="en-US" sz="3200" b="0" i="1" smtClean="0">
+                              <a:latin typeface="Cambria Math" panose="02040503050406030204" pitchFamily="18" charset="0"/>
+                            </a:rPr>
+                          </m:ctrlPr>
+                        </m:sSubPr>
+                        <m:e>
+                          <m:r>
+                            <a:rPr lang="en-US" sz="3200" b="0" i="1" smtClean="0">
+                              <a:latin typeface="Cambria Math" panose="02040503050406030204" pitchFamily="18" charset="0"/>
+                            </a:rPr>
+                            <m:t>𝛽</m:t>
+                          </m:r>
+                        </m:e>
+                        <m:sub>
+                          <m:r>
+                            <a:rPr lang="en-US" sz="3200" b="0" i="1" smtClean="0">
+                              <a:latin typeface="Cambria Math" panose="02040503050406030204" pitchFamily="18" charset="0"/>
+                            </a:rPr>
+                            <m:t>2</m:t>
+                          </m:r>
+                        </m:sub>
+                      </m:sSub>
+                      <m:r>
+                        <a:rPr lang="en-US" sz="3200" b="0" i="1" smtClean="0">
+                          <a:latin typeface="Cambria Math" panose="02040503050406030204" pitchFamily="18" charset="0"/>
+                        </a:rPr>
+                        <m:t>=0.6</m:t>
+                      </m:r>
+                    </m:oMath>
+                  </m:oMathPara>
+                </a14:m>
+                <a:endParaRPr lang="LID4096" sz="3200" dirty="0"/>
+              </a:p>
+            </p:txBody>
+          </p:sp>
+        </mc:Choice>
+        <mc:Fallback xmlns="">
+          <p:sp>
+            <p:nvSpPr>
+              <p:cNvPr id="7" name="TextBox 6">
+                <a:extLst>
+                  <a:ext uri="{FF2B5EF4-FFF2-40B4-BE49-F238E27FC236}">
+                    <a16:creationId xmlns:a16="http://schemas.microsoft.com/office/drawing/2014/main" id="{356934BF-9F8D-FE06-0B5C-24D8A49350B7}"/>
+                  </a:ext>
+                </a:extLst>
+              </p:cNvPr>
+              <p:cNvSpPr txBox="1">
+                <a:spLocks noRot="1" noChangeAspect="1" noMove="1" noResize="1" noEditPoints="1" noAdjustHandles="1" noChangeArrowheads="1" noChangeShapeType="1" noTextEdit="1"/>
+              </p:cNvSpPr>
+              <p:nvPr/>
+            </p:nvSpPr>
+            <p:spPr>
+              <a:xfrm>
+                <a:off x="2528582" y="6064888"/>
+                <a:ext cx="1570365" cy="492443"/>
+              </a:xfrm>
+              <a:prstGeom prst="rect">
+                <a:avLst/>
+              </a:prstGeom>
+              <a:blipFill>
+                <a:blip r:embed="rId4"/>
+                <a:stretch>
+                  <a:fillRect/>
+                </a:stretch>
+              </a:blipFill>
+            </p:spPr>
+            <p:txBody>
+              <a:bodyPr/>
+              <a:lstStyle/>
+              <a:p>
+                <a:r>
+                  <a:rPr lang="LID4096">
+                    <a:noFill/>
+                  </a:rPr>
+                  <a:t> </a:t>
+                </a:r>
+              </a:p>
+            </p:txBody>
+          </p:sp>
+        </mc:Fallback>
+      </mc:AlternateContent>
+    </p:spTree>
+    <p:extLst>
+      <p:ext uri="{BB962C8B-B14F-4D97-AF65-F5344CB8AC3E}">
+        <p14:creationId xmlns:p14="http://schemas.microsoft.com/office/powerpoint/2010/main" val="3259288382"/>
+      </p:ext>
+    </p:extLst>
+  </p:cSld>
+  <p:clrMapOvr>
+    <a:masterClrMapping/>
+  </p:clrMapOvr>
+</p:sld>
+</file>
+
+<file path=ppt/slides/slide34.xml><?xml version="1.0" encoding="utf-8"?>
+<p:sld xmlns:a="http://schemas.openxmlformats.org/drawingml/2006/main" xmlns:r="http://schemas.openxmlformats.org/officeDocument/2006/relationships" xmlns:p="http://schemas.openxmlformats.org/presentationml/2006/main">
+  <p:cSld>
+    <p:spTree>
+      <p:nvGrpSpPr>
+        <p:cNvPr id="1" name="">
+          <a:extLst>
+            <a:ext uri="{FF2B5EF4-FFF2-40B4-BE49-F238E27FC236}">
+              <a16:creationId xmlns:a16="http://schemas.microsoft.com/office/drawing/2014/main" id="{51006E9C-E3B4-442D-97FF-A07A4A21E6B8}"/>
+            </a:ext>
+          </a:extLst>
+        </p:cNvPr>
+        <p:cNvGrpSpPr/>
+        <p:nvPr/>
+      </p:nvGrpSpPr>
+      <p:grpSpPr>
+        <a:xfrm>
+          <a:off x="0" y="0"/>
+          <a:ext cx="0" cy="0"/>
+          <a:chOff x="0" y="0"/>
+          <a:chExt cx="0" cy="0"/>
+        </a:xfrm>
+      </p:grpSpPr>
+      <p:sp>
+        <p:nvSpPr>
+          <p:cNvPr id="2" name="Title 1">
+            <a:extLst>
+              <a:ext uri="{FF2B5EF4-FFF2-40B4-BE49-F238E27FC236}">
+                <a16:creationId xmlns:a16="http://schemas.microsoft.com/office/drawing/2014/main" id="{AE9C7B85-DFA9-DFCE-F30C-F036C33D5FBD}"/>
+              </a:ext>
+            </a:extLst>
+          </p:cNvPr>
+          <p:cNvSpPr>
+            <a:spLocks noGrp="1"/>
+          </p:cNvSpPr>
+          <p:nvPr>
+            <p:ph type="title"/>
+          </p:nvPr>
+        </p:nvSpPr>
+        <p:spPr/>
+        <p:txBody>
+          <a:bodyPr/>
+          <a:lstStyle/>
+          <a:p>
+            <a:r>
+              <a:rPr lang="en-US" dirty="0"/>
+              <a:t>Let’s add some shocks!</a:t>
+            </a:r>
+            <a:endParaRPr lang="LID4096" dirty="0"/>
+          </a:p>
+        </p:txBody>
+      </p:sp>
+      <p:sp>
+        <p:nvSpPr>
+          <p:cNvPr id="4" name="TextBox 3">
+            <a:extLst>
+              <a:ext uri="{FF2B5EF4-FFF2-40B4-BE49-F238E27FC236}">
+                <a16:creationId xmlns:a16="http://schemas.microsoft.com/office/drawing/2014/main" id="{BC48C816-25FF-9394-867C-E18EA6E0BE5E}"/>
+              </a:ext>
+            </a:extLst>
+          </p:cNvPr>
+          <p:cNvSpPr txBox="1"/>
+          <p:nvPr/>
+        </p:nvSpPr>
+        <p:spPr>
+          <a:xfrm>
+            <a:off x="1001486" y="2166257"/>
+            <a:ext cx="9960428" cy="2677656"/>
+          </a:xfrm>
+          <a:prstGeom prst="rect">
+            <a:avLst/>
+          </a:prstGeom>
+          <a:noFill/>
+        </p:spPr>
+        <p:txBody>
+          <a:bodyPr wrap="square" rtlCol="0">
+            <a:spAutoFit/>
+          </a:bodyPr>
+          <a:lstStyle/>
+          <a:p>
+            <a:r>
+              <a:rPr lang="en-US" sz="2800" dirty="0"/>
+              <a:t>Two people getting in an argument, John and Luca.</a:t>
+            </a:r>
+          </a:p>
+          <a:p>
+            <a:endParaRPr lang="en-US" sz="2800" dirty="0"/>
+          </a:p>
+          <a:p>
+            <a:r>
+              <a:rPr lang="en-US" sz="2800" dirty="0">
+                <a:solidFill>
+                  <a:schemeClr val="accent2"/>
+                </a:solidFill>
+              </a:rPr>
+              <a:t>John</a:t>
+            </a:r>
+            <a:r>
+              <a:rPr lang="en-US" sz="2800" dirty="0"/>
+              <a:t> (reactive, composes himself quick)</a:t>
+            </a:r>
+          </a:p>
+          <a:p>
+            <a:r>
+              <a:rPr lang="en-US" sz="2800" dirty="0">
+                <a:solidFill>
+                  <a:schemeClr val="accent5">
+                    <a:lumMod val="75000"/>
+                  </a:schemeClr>
+                </a:solidFill>
+              </a:rPr>
+              <a:t>Luca</a:t>
+            </a:r>
+            <a:r>
+              <a:rPr lang="en-US" sz="2800" dirty="0"/>
+              <a:t> (hard to shake, slow to compose himself)</a:t>
+            </a:r>
+          </a:p>
+          <a:p>
+            <a:endParaRPr lang="en-US" sz="2800" dirty="0"/>
+          </a:p>
+          <a:p>
+            <a:endParaRPr lang="en-US" sz="2800" dirty="0"/>
+          </a:p>
+        </p:txBody>
+      </p:sp>
+      <mc:AlternateContent xmlns:mc="http://schemas.openxmlformats.org/markup-compatibility/2006" xmlns:a14="http://schemas.microsoft.com/office/drawing/2010/main">
+        <mc:Choice Requires="a14">
+          <p:sp>
+            <p:nvSpPr>
+              <p:cNvPr id="3" name="TextBox 2">
+                <a:extLst>
+                  <a:ext uri="{FF2B5EF4-FFF2-40B4-BE49-F238E27FC236}">
+                    <a16:creationId xmlns:a16="http://schemas.microsoft.com/office/drawing/2014/main" id="{617AA81D-C570-EA75-C0CC-C98165F3F9D4}"/>
+                  </a:ext>
+                </a:extLst>
+              </p:cNvPr>
+              <p:cNvSpPr txBox="1"/>
+              <p:nvPr/>
+            </p:nvSpPr>
+            <p:spPr>
+              <a:xfrm>
+                <a:off x="2538071" y="4490514"/>
+                <a:ext cx="7115858" cy="706797"/>
+              </a:xfrm>
+              <a:prstGeom prst="rect">
+                <a:avLst/>
+              </a:prstGeom>
+              <a:noFill/>
+            </p:spPr>
+            <p:txBody>
+              <a:bodyPr wrap="none" lIns="0" tIns="0" rIns="0" bIns="0" rtlCol="0">
+                <a:spAutoFit/>
+              </a:bodyPr>
+              <a:lstStyle/>
+              <a:p>
+                <a:pPr/>
+                <a14:m>
+                  <m:oMathPara xmlns:m="http://schemas.openxmlformats.org/officeDocument/2006/math">
+                    <m:oMath>
+                      <m:r>
+                        <a:rPr lang="en-US" sz="4400" b="0" i="1" smtClean="0">
+                          <a:latin typeface="Cambria Math" panose="02040503050406030204" pitchFamily="18" charset="0"/>
+                        </a:rPr>
+                        <m:t>𝑦</m:t>
+                      </m:r>
+                      <m:d>
+                        <m:dPr>
+                          <m:ctrlPr>
+                            <a:rPr lang="en-US" sz="4400" b="0" i="1" smtClean="0">
+                              <a:latin typeface="Cambria Math" panose="02040503050406030204" pitchFamily="18" charset="0"/>
+                            </a:rPr>
+                          </m:ctrlPr>
+                        </m:dPr>
+                        <m:e>
+                          <m:r>
+                            <a:rPr lang="en-US" sz="4400" b="0" i="1" smtClean="0">
+                              <a:latin typeface="Cambria Math" panose="02040503050406030204" pitchFamily="18" charset="0"/>
+                            </a:rPr>
+                            <m:t>𝑖</m:t>
+                          </m:r>
+                          <m:r>
+                            <a:rPr lang="en-US" sz="4400" b="0" i="1" smtClean="0">
+                              <a:latin typeface="Cambria Math" panose="02040503050406030204" pitchFamily="18" charset="0"/>
+                            </a:rPr>
+                            <m:t>,</m:t>
+                          </m:r>
+                          <m:r>
+                            <a:rPr lang="en-US" sz="4400" b="0" i="1" smtClean="0">
+                              <a:latin typeface="Cambria Math" panose="02040503050406030204" pitchFamily="18" charset="0"/>
+                            </a:rPr>
+                            <m:t>𝑡</m:t>
+                          </m:r>
+                        </m:e>
+                      </m:d>
+                      <m:r>
+                        <a:rPr lang="en-US" sz="4400" b="0" i="1" smtClean="0">
+                          <a:latin typeface="Cambria Math" panose="02040503050406030204" pitchFamily="18" charset="0"/>
+                        </a:rPr>
+                        <m:t>=</m:t>
+                      </m:r>
+                      <m:sSub>
+                        <m:sSubPr>
+                          <m:ctrlPr>
+                            <a:rPr lang="en-US" sz="4400" b="0" i="1" smtClean="0">
+                              <a:latin typeface="Cambria Math" panose="02040503050406030204" pitchFamily="18" charset="0"/>
+                            </a:rPr>
+                          </m:ctrlPr>
+                        </m:sSubPr>
+                        <m:e>
+                          <m:r>
+                            <a:rPr lang="en-US" sz="4400" b="0" i="1" smtClean="0">
+                              <a:latin typeface="Cambria Math" panose="02040503050406030204" pitchFamily="18" charset="0"/>
+                            </a:rPr>
+                            <m:t>𝛽</m:t>
+                          </m:r>
+                        </m:e>
+                        <m:sub>
+                          <m:r>
+                            <a:rPr lang="en-US" sz="4400" b="0" i="1" smtClean="0">
+                              <a:latin typeface="Cambria Math" panose="02040503050406030204" pitchFamily="18" charset="0"/>
+                            </a:rPr>
+                            <m:t>𝑖</m:t>
+                          </m:r>
+                        </m:sub>
+                      </m:sSub>
+                      <m:r>
+                        <a:rPr lang="en-US" sz="4400" b="0" i="1" smtClean="0">
+                          <a:latin typeface="Cambria Math" panose="02040503050406030204" pitchFamily="18" charset="0"/>
+                        </a:rPr>
+                        <m:t>∗</m:t>
+                      </m:r>
+                      <m:r>
+                        <a:rPr lang="en-US" sz="4400" b="0" i="1" smtClean="0">
+                          <a:latin typeface="Cambria Math" panose="02040503050406030204" pitchFamily="18" charset="0"/>
+                        </a:rPr>
+                        <m:t>𝑦</m:t>
+                      </m:r>
+                      <m:d>
+                        <m:dPr>
+                          <m:ctrlPr>
+                            <a:rPr lang="en-US" sz="4400" b="0" i="1" smtClean="0">
+                              <a:latin typeface="Cambria Math" panose="02040503050406030204" pitchFamily="18" charset="0"/>
+                            </a:rPr>
+                          </m:ctrlPr>
+                        </m:dPr>
+                        <m:e>
+                          <m:r>
+                            <a:rPr lang="en-US" sz="4400" b="0" i="1" smtClean="0">
+                              <a:latin typeface="Cambria Math" panose="02040503050406030204" pitchFamily="18" charset="0"/>
+                            </a:rPr>
+                            <m:t>𝑖</m:t>
+                          </m:r>
+                          <m:r>
+                            <a:rPr lang="en-US" sz="4400" b="0" i="1" smtClean="0">
+                              <a:latin typeface="Cambria Math" panose="02040503050406030204" pitchFamily="18" charset="0"/>
+                            </a:rPr>
+                            <m:t>,</m:t>
+                          </m:r>
+                          <m:r>
+                            <a:rPr lang="en-US" sz="4400" b="0" i="1" smtClean="0">
+                              <a:latin typeface="Cambria Math" panose="02040503050406030204" pitchFamily="18" charset="0"/>
+                            </a:rPr>
+                            <m:t>𝑡</m:t>
+                          </m:r>
+                          <m:r>
+                            <a:rPr lang="en-US" sz="4400" b="0" i="1" smtClean="0">
+                              <a:latin typeface="Cambria Math" panose="02040503050406030204" pitchFamily="18" charset="0"/>
+                            </a:rPr>
+                            <m:t>−1</m:t>
+                          </m:r>
+                        </m:e>
+                      </m:d>
+                      <m:r>
+                        <a:rPr lang="en-US" sz="4400" b="0" i="1" smtClean="0">
+                          <a:latin typeface="Cambria Math" panose="02040503050406030204" pitchFamily="18" charset="0"/>
+                        </a:rPr>
+                        <m:t>+</m:t>
+                      </m:r>
+                      <m:sSub>
+                        <m:sSubPr>
+                          <m:ctrlPr>
+                            <a:rPr lang="en-US" sz="4400" b="0" i="1" smtClean="0">
+                              <a:latin typeface="Cambria Math" panose="02040503050406030204" pitchFamily="18" charset="0"/>
+                            </a:rPr>
+                          </m:ctrlPr>
+                        </m:sSubPr>
+                        <m:e>
+                          <m:r>
+                            <a:rPr lang="en-US" sz="4400" b="0" i="1" smtClean="0">
+                              <a:latin typeface="Cambria Math" panose="02040503050406030204" pitchFamily="18" charset="0"/>
+                            </a:rPr>
+                            <m:t>𝑒</m:t>
+                          </m:r>
+                        </m:e>
+                        <m:sub>
+                          <m:r>
+                            <a:rPr lang="en-US" sz="4400" b="0" i="1" smtClean="0">
+                              <a:latin typeface="Cambria Math" panose="02040503050406030204" pitchFamily="18" charset="0"/>
+                            </a:rPr>
+                            <m:t>𝑖</m:t>
+                          </m:r>
+                          <m:r>
+                            <a:rPr lang="en-US" sz="4400" b="0" i="1" smtClean="0">
+                              <a:latin typeface="Cambria Math" panose="02040503050406030204" pitchFamily="18" charset="0"/>
+                            </a:rPr>
+                            <m:t>,</m:t>
+                          </m:r>
+                          <m:r>
+                            <a:rPr lang="en-US" sz="4400" b="0" i="1" smtClean="0">
+                              <a:latin typeface="Cambria Math" panose="02040503050406030204" pitchFamily="18" charset="0"/>
+                            </a:rPr>
+                            <m:t>𝑡</m:t>
+                          </m:r>
+                        </m:sub>
+                      </m:sSub>
+                    </m:oMath>
+                  </m:oMathPara>
+                </a14:m>
+                <a:endParaRPr lang="LID4096" sz="4400" dirty="0"/>
+              </a:p>
+            </p:txBody>
+          </p:sp>
+        </mc:Choice>
+        <mc:Fallback xmlns="">
+          <p:sp>
+            <p:nvSpPr>
+              <p:cNvPr id="3" name="TextBox 2">
+                <a:extLst>
+                  <a:ext uri="{FF2B5EF4-FFF2-40B4-BE49-F238E27FC236}">
+                    <a16:creationId xmlns:a16="http://schemas.microsoft.com/office/drawing/2014/main" id="{617AA81D-C570-EA75-C0CC-C98165F3F9D4}"/>
+                  </a:ext>
+                </a:extLst>
+              </p:cNvPr>
+              <p:cNvSpPr txBox="1">
+                <a:spLocks noRot="1" noChangeAspect="1" noMove="1" noResize="1" noEditPoints="1" noAdjustHandles="1" noChangeArrowheads="1" noChangeShapeType="1" noTextEdit="1"/>
+              </p:cNvSpPr>
+              <p:nvPr/>
+            </p:nvSpPr>
+            <p:spPr>
+              <a:xfrm>
+                <a:off x="2538071" y="4490514"/>
+                <a:ext cx="7115858" cy="706797"/>
+              </a:xfrm>
+              <a:prstGeom prst="rect">
+                <a:avLst/>
+              </a:prstGeom>
+              <a:blipFill>
+                <a:blip r:embed="rId2"/>
+                <a:stretch>
+                  <a:fillRect/>
+                </a:stretch>
+              </a:blipFill>
+            </p:spPr>
+            <p:txBody>
+              <a:bodyPr/>
+              <a:lstStyle/>
+              <a:p>
+                <a:r>
+                  <a:rPr lang="LID4096">
+                    <a:noFill/>
+                  </a:rPr>
+                  <a:t> </a:t>
+                </a:r>
+              </a:p>
+            </p:txBody>
+          </p:sp>
+        </mc:Fallback>
+      </mc:AlternateContent>
+      <mc:AlternateContent xmlns:mc="http://schemas.openxmlformats.org/markup-compatibility/2006" xmlns:a14="http://schemas.microsoft.com/office/drawing/2010/main">
+        <mc:Choice Requires="a14">
+          <p:sp>
+            <p:nvSpPr>
+              <p:cNvPr id="6" name="TextBox 5">
+                <a:extLst>
+                  <a:ext uri="{FF2B5EF4-FFF2-40B4-BE49-F238E27FC236}">
+                    <a16:creationId xmlns:a16="http://schemas.microsoft.com/office/drawing/2014/main" id="{8D8A7FB3-48ED-7EE7-2F5B-DE3A89E09456}"/>
+                  </a:ext>
+                </a:extLst>
+              </p:cNvPr>
+              <p:cNvSpPr txBox="1"/>
+              <p:nvPr/>
+            </p:nvSpPr>
+            <p:spPr>
+              <a:xfrm>
+                <a:off x="2538071" y="5384878"/>
+                <a:ext cx="1560876" cy="492443"/>
+              </a:xfrm>
+              <a:prstGeom prst="rect">
+                <a:avLst/>
+              </a:prstGeom>
+              <a:noFill/>
+            </p:spPr>
+            <p:txBody>
+              <a:bodyPr wrap="none" lIns="0" tIns="0" rIns="0" bIns="0" rtlCol="0">
+                <a:spAutoFit/>
+              </a:bodyPr>
+              <a:lstStyle/>
+              <a:p>
+                <a:pPr/>
+                <a14:m>
+                  <m:oMathPara xmlns:m="http://schemas.openxmlformats.org/officeDocument/2006/math">
+                    <m:oMath>
+                      <m:sSub>
+                        <m:sSubPr>
+                          <m:ctrlPr>
+                            <a:rPr lang="en-US" sz="3200" b="0" i="1" smtClean="0">
+                              <a:solidFill>
+                                <a:schemeClr val="accent2"/>
+                              </a:solidFill>
+                              <a:latin typeface="Cambria Math" panose="02040503050406030204" pitchFamily="18" charset="0"/>
+                            </a:rPr>
+                          </m:ctrlPr>
+                        </m:sSubPr>
+                        <m:e>
+                          <m:r>
+                            <a:rPr lang="en-US" sz="3200" b="0" i="1" smtClean="0">
+                              <a:solidFill>
+                                <a:schemeClr val="accent2"/>
+                              </a:solidFill>
+                              <a:latin typeface="Cambria Math" panose="02040503050406030204" pitchFamily="18" charset="0"/>
+                            </a:rPr>
+                            <m:t>𝛽</m:t>
+                          </m:r>
+                        </m:e>
+                        <m:sub>
+                          <m:r>
+                            <a:rPr lang="en-US" sz="3200" b="0" i="1" smtClean="0">
+                              <a:solidFill>
+                                <a:schemeClr val="accent2"/>
+                              </a:solidFill>
+                              <a:latin typeface="Cambria Math" panose="02040503050406030204" pitchFamily="18" charset="0"/>
+                            </a:rPr>
+                            <m:t>1</m:t>
+                          </m:r>
+                        </m:sub>
+                      </m:sSub>
+                      <m:r>
+                        <a:rPr lang="en-US" sz="3200" b="0" i="1" smtClean="0">
+                          <a:solidFill>
+                            <a:schemeClr val="accent2"/>
+                          </a:solidFill>
+                          <a:latin typeface="Cambria Math" panose="02040503050406030204" pitchFamily="18" charset="0"/>
+                        </a:rPr>
+                        <m:t>=0.2</m:t>
+                      </m:r>
+                    </m:oMath>
+                  </m:oMathPara>
+                </a14:m>
+                <a:endParaRPr lang="LID4096" sz="3200" dirty="0"/>
+              </a:p>
+            </p:txBody>
+          </p:sp>
+        </mc:Choice>
+        <mc:Fallback xmlns="">
+          <p:sp>
+            <p:nvSpPr>
+              <p:cNvPr id="6" name="TextBox 5">
+                <a:extLst>
+                  <a:ext uri="{FF2B5EF4-FFF2-40B4-BE49-F238E27FC236}">
+                    <a16:creationId xmlns:a16="http://schemas.microsoft.com/office/drawing/2014/main" id="{8D8A7FB3-48ED-7EE7-2F5B-DE3A89E09456}"/>
+                  </a:ext>
+                </a:extLst>
+              </p:cNvPr>
+              <p:cNvSpPr txBox="1">
+                <a:spLocks noRot="1" noChangeAspect="1" noMove="1" noResize="1" noEditPoints="1" noAdjustHandles="1" noChangeArrowheads="1" noChangeShapeType="1" noTextEdit="1"/>
+              </p:cNvSpPr>
+              <p:nvPr/>
+            </p:nvSpPr>
+            <p:spPr>
+              <a:xfrm>
+                <a:off x="2538071" y="5384878"/>
+                <a:ext cx="1560876" cy="492443"/>
+              </a:xfrm>
+              <a:prstGeom prst="rect">
+                <a:avLst/>
+              </a:prstGeom>
+              <a:blipFill>
+                <a:blip r:embed="rId3"/>
+                <a:stretch>
+                  <a:fillRect/>
+                </a:stretch>
+              </a:blipFill>
+            </p:spPr>
+            <p:txBody>
+              <a:bodyPr/>
+              <a:lstStyle/>
+              <a:p>
+                <a:r>
+                  <a:rPr lang="LID4096">
+                    <a:noFill/>
+                  </a:rPr>
+                  <a:t> </a:t>
+                </a:r>
+              </a:p>
+            </p:txBody>
+          </p:sp>
+        </mc:Fallback>
+      </mc:AlternateContent>
+      <mc:AlternateContent xmlns:mc="http://schemas.openxmlformats.org/markup-compatibility/2006" xmlns:a14="http://schemas.microsoft.com/office/drawing/2010/main">
+        <mc:Choice Requires="a14">
+          <p:sp>
+            <p:nvSpPr>
+              <p:cNvPr id="7" name="TextBox 6">
+                <a:extLst>
+                  <a:ext uri="{FF2B5EF4-FFF2-40B4-BE49-F238E27FC236}">
+                    <a16:creationId xmlns:a16="http://schemas.microsoft.com/office/drawing/2014/main" id="{7346C5DC-4A88-2FF5-FED5-82D02789321B}"/>
+                  </a:ext>
+                </a:extLst>
+              </p:cNvPr>
+              <p:cNvSpPr txBox="1"/>
+              <p:nvPr/>
+            </p:nvSpPr>
+            <p:spPr>
+              <a:xfrm>
+                <a:off x="2528582" y="6064888"/>
+                <a:ext cx="1570365" cy="492443"/>
+              </a:xfrm>
+              <a:prstGeom prst="rect">
+                <a:avLst/>
+              </a:prstGeom>
+              <a:noFill/>
+            </p:spPr>
+            <p:txBody>
+              <a:bodyPr wrap="none" lIns="0" tIns="0" rIns="0" bIns="0" rtlCol="0">
+                <a:spAutoFit/>
+              </a:bodyPr>
+              <a:lstStyle/>
+              <a:p>
+                <a:pPr/>
+                <a14:m>
+                  <m:oMathPara xmlns:m="http://schemas.openxmlformats.org/officeDocument/2006/math">
+                    <m:oMath>
+                      <m:sSub>
+                        <m:sSubPr>
+                          <m:ctrlPr>
+                            <a:rPr lang="en-US" sz="3200" b="0" i="1" smtClean="0">
+                              <a:solidFill>
+                                <a:srgbClr val="7030A0"/>
+                              </a:solidFill>
+                              <a:latin typeface="Cambria Math" panose="02040503050406030204" pitchFamily="18" charset="0"/>
+                            </a:rPr>
+                          </m:ctrlPr>
+                        </m:sSubPr>
+                        <m:e>
+                          <m:r>
+                            <a:rPr lang="en-US" sz="3200" b="0" i="1" smtClean="0">
+                              <a:solidFill>
+                                <a:srgbClr val="7030A0"/>
+                              </a:solidFill>
+                              <a:latin typeface="Cambria Math" panose="02040503050406030204" pitchFamily="18" charset="0"/>
+                            </a:rPr>
+                            <m:t>𝛽</m:t>
+                          </m:r>
+                        </m:e>
+                        <m:sub>
+                          <m:r>
+                            <a:rPr lang="en-US" sz="3200" b="0" i="1" smtClean="0">
+                              <a:solidFill>
+                                <a:srgbClr val="7030A0"/>
+                              </a:solidFill>
+                              <a:latin typeface="Cambria Math" panose="02040503050406030204" pitchFamily="18" charset="0"/>
+                            </a:rPr>
+                            <m:t>2</m:t>
+                          </m:r>
+                        </m:sub>
+                      </m:sSub>
+                      <m:r>
+                        <a:rPr lang="en-US" sz="3200" b="0" i="1" smtClean="0">
+                          <a:solidFill>
+                            <a:srgbClr val="7030A0"/>
+                          </a:solidFill>
+                          <a:latin typeface="Cambria Math" panose="02040503050406030204" pitchFamily="18" charset="0"/>
+                        </a:rPr>
+                        <m:t>=0.6</m:t>
+                      </m:r>
+                    </m:oMath>
+                  </m:oMathPara>
+                </a14:m>
+                <a:endParaRPr lang="LID4096" sz="3200" dirty="0">
+                  <a:solidFill>
+                    <a:srgbClr val="7030A0"/>
+                  </a:solidFill>
+                </a:endParaRPr>
+              </a:p>
+            </p:txBody>
+          </p:sp>
+        </mc:Choice>
+        <mc:Fallback xmlns="">
+          <p:sp>
+            <p:nvSpPr>
+              <p:cNvPr id="7" name="TextBox 6">
+                <a:extLst>
+                  <a:ext uri="{FF2B5EF4-FFF2-40B4-BE49-F238E27FC236}">
+                    <a16:creationId xmlns:a16="http://schemas.microsoft.com/office/drawing/2014/main" id="{7346C5DC-4A88-2FF5-FED5-82D02789321B}"/>
+                  </a:ext>
+                </a:extLst>
+              </p:cNvPr>
+              <p:cNvSpPr txBox="1">
+                <a:spLocks noRot="1" noChangeAspect="1" noMove="1" noResize="1" noEditPoints="1" noAdjustHandles="1" noChangeArrowheads="1" noChangeShapeType="1" noTextEdit="1"/>
+              </p:cNvSpPr>
+              <p:nvPr/>
+            </p:nvSpPr>
+            <p:spPr>
+              <a:xfrm>
+                <a:off x="2528582" y="6064888"/>
+                <a:ext cx="1570365" cy="492443"/>
+              </a:xfrm>
+              <a:prstGeom prst="rect">
+                <a:avLst/>
+              </a:prstGeom>
+              <a:blipFill>
+                <a:blip r:embed="rId4"/>
+                <a:stretch>
+                  <a:fillRect/>
+                </a:stretch>
+              </a:blipFill>
+            </p:spPr>
+            <p:txBody>
+              <a:bodyPr/>
+              <a:lstStyle/>
+              <a:p>
+                <a:r>
+                  <a:rPr lang="LID4096">
+                    <a:noFill/>
+                  </a:rPr>
+                  <a:t> </a:t>
+                </a:r>
+              </a:p>
+            </p:txBody>
+          </p:sp>
+        </mc:Fallback>
+      </mc:AlternateContent>
+    </p:spTree>
+    <p:extLst>
+      <p:ext uri="{BB962C8B-B14F-4D97-AF65-F5344CB8AC3E}">
+        <p14:creationId xmlns:p14="http://schemas.microsoft.com/office/powerpoint/2010/main" val="2015475321"/>
+      </p:ext>
+    </p:extLst>
+  </p:cSld>
+  <p:clrMapOvr>
+    <a:masterClrMapping/>
+  </p:clrMapOvr>
+</p:sld>
+</file>
+
+<file path=ppt/slides/slide35.xml><?xml version="1.0" encoding="utf-8"?>
+<p:sld xmlns:a="http://schemas.openxmlformats.org/drawingml/2006/main" xmlns:r="http://schemas.openxmlformats.org/officeDocument/2006/relationships" xmlns:p="http://schemas.openxmlformats.org/presentationml/2006/main">
+  <p:cSld>
+    <p:spTree>
+      <p:nvGrpSpPr>
+        <p:cNvPr id="1" name=""/>
+        <p:cNvGrpSpPr/>
+        <p:nvPr/>
+      </p:nvGrpSpPr>
+      <p:grpSpPr>
+        <a:xfrm>
+          <a:off x="0" y="0"/>
+          <a:ext cx="0" cy="0"/>
+          <a:chOff x="0" y="0"/>
+          <a:chExt cx="0" cy="0"/>
+        </a:xfrm>
+      </p:grpSpPr>
+      <p:sp>
+        <p:nvSpPr>
+          <p:cNvPr id="2" name="Title 1">
+            <a:extLst>
+              <a:ext uri="{FF2B5EF4-FFF2-40B4-BE49-F238E27FC236}">
+                <a16:creationId xmlns:a16="http://schemas.microsoft.com/office/drawing/2014/main" id="{82042941-0833-03A8-AE77-6127A49A2039}"/>
+              </a:ext>
+            </a:extLst>
+          </p:cNvPr>
+          <p:cNvSpPr>
+            <a:spLocks noGrp="1"/>
+          </p:cNvSpPr>
+          <p:nvPr>
+            <p:ph type="title"/>
+          </p:nvPr>
+        </p:nvSpPr>
+        <p:spPr/>
+        <p:txBody>
+          <a:bodyPr/>
+          <a:lstStyle/>
+          <a:p>
+            <a:r>
+              <a:rPr lang="en-US" dirty="0"/>
+              <a:t>Simulated arguing</a:t>
+            </a:r>
+            <a:endParaRPr lang="LID4096" dirty="0"/>
+          </a:p>
+        </p:txBody>
+      </p:sp>
+      <p:sp>
+        <p:nvSpPr>
+          <p:cNvPr id="3" name="Content Placeholder 2">
+            <a:extLst>
+              <a:ext uri="{FF2B5EF4-FFF2-40B4-BE49-F238E27FC236}">
+                <a16:creationId xmlns:a16="http://schemas.microsoft.com/office/drawing/2014/main" id="{8C2D298A-E852-C4A7-4B3D-0A475E7CB1DB}"/>
+              </a:ext>
+            </a:extLst>
+          </p:cNvPr>
+          <p:cNvSpPr>
+            <a:spLocks noGrp="1"/>
+          </p:cNvSpPr>
+          <p:nvPr>
+            <p:ph idx="1"/>
+          </p:nvPr>
+        </p:nvSpPr>
+        <p:spPr>
+          <a:xfrm>
+            <a:off x="838200" y="1825625"/>
+            <a:ext cx="10515600" cy="686221"/>
+          </a:xfrm>
+        </p:spPr>
+        <p:txBody>
+          <a:bodyPr>
+            <a:normAutofit/>
+          </a:bodyPr>
+          <a:lstStyle/>
+          <a:p>
+            <a:r>
+              <a:rPr lang="en-US" dirty="0"/>
+              <a:t>Draw the ebb and flow of John and Luca’s emotions as they argue</a:t>
+            </a:r>
+          </a:p>
+        </p:txBody>
+      </p:sp>
+      <mc:AlternateContent xmlns:mc="http://schemas.openxmlformats.org/markup-compatibility/2006" xmlns:a14="http://schemas.microsoft.com/office/drawing/2010/main">
+        <mc:Choice Requires="a14">
+          <p:sp>
+            <p:nvSpPr>
+              <p:cNvPr id="8" name="TextBox 7">
+                <a:extLst>
+                  <a:ext uri="{FF2B5EF4-FFF2-40B4-BE49-F238E27FC236}">
+                    <a16:creationId xmlns:a16="http://schemas.microsoft.com/office/drawing/2014/main" id="{C77B2214-39C6-3296-F81F-4B4C31300F31}"/>
+                  </a:ext>
+                </a:extLst>
+              </p:cNvPr>
+              <p:cNvSpPr txBox="1"/>
+              <p:nvPr/>
+            </p:nvSpPr>
+            <p:spPr>
+              <a:xfrm>
+                <a:off x="2075362" y="3075601"/>
+                <a:ext cx="8333884" cy="706797"/>
+              </a:xfrm>
+              <a:prstGeom prst="rect">
+                <a:avLst/>
+              </a:prstGeom>
+              <a:noFill/>
+            </p:spPr>
+            <p:txBody>
+              <a:bodyPr wrap="none" lIns="0" tIns="0" rIns="0" bIns="0" rtlCol="0">
+                <a:spAutoFit/>
+              </a:bodyPr>
+              <a:lstStyle/>
+              <a:p>
+                <a:pPr/>
+                <a14:m>
+                  <m:oMathPara xmlns:m="http://schemas.openxmlformats.org/officeDocument/2006/math">
+                    <m:oMath>
+                      <m:r>
+                        <a:rPr lang="en-US" sz="4400" b="0" i="1" smtClean="0">
+                          <a:solidFill>
+                            <a:schemeClr val="accent2">
+                              <a:lumMod val="75000"/>
+                            </a:schemeClr>
+                          </a:solidFill>
+                          <a:latin typeface="Cambria Math" panose="02040503050406030204" pitchFamily="18" charset="0"/>
+                        </a:rPr>
+                        <m:t>𝑦</m:t>
+                      </m:r>
+                      <m:d>
+                        <m:dPr>
+                          <m:ctrlPr>
+                            <a:rPr lang="en-US" sz="4400" b="0" i="1" smtClean="0">
+                              <a:solidFill>
+                                <a:schemeClr val="accent2">
+                                  <a:lumMod val="75000"/>
+                                </a:schemeClr>
+                              </a:solidFill>
+                              <a:latin typeface="Cambria Math" panose="02040503050406030204" pitchFamily="18" charset="0"/>
+                            </a:rPr>
+                          </m:ctrlPr>
+                        </m:dPr>
+                        <m:e>
+                          <m:r>
+                            <a:rPr lang="en-US" sz="4400" b="0" i="1" smtClean="0">
+                              <a:solidFill>
+                                <a:schemeClr val="accent2">
+                                  <a:lumMod val="75000"/>
+                                </a:schemeClr>
+                              </a:solidFill>
+                              <a:latin typeface="Cambria Math" panose="02040503050406030204" pitchFamily="18" charset="0"/>
+                            </a:rPr>
+                            <m:t>𝐽𝑜ℎ𝑛</m:t>
+                          </m:r>
+                          <m:r>
+                            <a:rPr lang="en-US" sz="4400" b="0" i="1" smtClean="0">
+                              <a:solidFill>
+                                <a:schemeClr val="accent2">
+                                  <a:lumMod val="75000"/>
+                                </a:schemeClr>
+                              </a:solidFill>
+                              <a:latin typeface="Cambria Math" panose="02040503050406030204" pitchFamily="18" charset="0"/>
+                            </a:rPr>
+                            <m:t>,</m:t>
+                          </m:r>
+                          <m:r>
+                            <a:rPr lang="en-US" sz="4400" b="0" i="1" smtClean="0">
+                              <a:solidFill>
+                                <a:schemeClr val="accent2">
+                                  <a:lumMod val="75000"/>
+                                </a:schemeClr>
+                              </a:solidFill>
+                              <a:latin typeface="Cambria Math" panose="02040503050406030204" pitchFamily="18" charset="0"/>
+                            </a:rPr>
+                            <m:t>𝑡</m:t>
+                          </m:r>
+                        </m:e>
+                      </m:d>
+                      <m:r>
+                        <a:rPr lang="en-US" sz="4400" b="0" i="1" smtClean="0">
+                          <a:solidFill>
+                            <a:schemeClr val="accent2">
+                              <a:lumMod val="75000"/>
+                            </a:schemeClr>
+                          </a:solidFill>
+                          <a:latin typeface="Cambria Math" panose="02040503050406030204" pitchFamily="18" charset="0"/>
+                        </a:rPr>
+                        <m:t>=0.2∗</m:t>
+                      </m:r>
+                      <m:r>
+                        <a:rPr lang="en-US" sz="4400" b="0" i="1" smtClean="0">
+                          <a:solidFill>
+                            <a:schemeClr val="accent2">
+                              <a:lumMod val="75000"/>
+                            </a:schemeClr>
+                          </a:solidFill>
+                          <a:latin typeface="Cambria Math" panose="02040503050406030204" pitchFamily="18" charset="0"/>
+                        </a:rPr>
+                        <m:t>𝑦</m:t>
+                      </m:r>
+                      <m:d>
+                        <m:dPr>
+                          <m:ctrlPr>
+                            <a:rPr lang="en-US" sz="4400" b="0" i="1" smtClean="0">
+                              <a:solidFill>
+                                <a:schemeClr val="accent2">
+                                  <a:lumMod val="75000"/>
+                                </a:schemeClr>
+                              </a:solidFill>
+                              <a:latin typeface="Cambria Math" panose="02040503050406030204" pitchFamily="18" charset="0"/>
+                            </a:rPr>
+                          </m:ctrlPr>
+                        </m:dPr>
+                        <m:e>
+                          <m:r>
+                            <a:rPr lang="en-US" sz="4400" b="0" i="1" smtClean="0">
+                              <a:solidFill>
+                                <a:schemeClr val="accent2">
+                                  <a:lumMod val="75000"/>
+                                </a:schemeClr>
+                              </a:solidFill>
+                              <a:latin typeface="Cambria Math" panose="02040503050406030204" pitchFamily="18" charset="0"/>
+                            </a:rPr>
+                            <m:t>𝑖</m:t>
+                          </m:r>
+                          <m:r>
+                            <a:rPr lang="en-US" sz="4400" b="0" i="1" smtClean="0">
+                              <a:solidFill>
+                                <a:schemeClr val="accent2">
+                                  <a:lumMod val="75000"/>
+                                </a:schemeClr>
+                              </a:solidFill>
+                              <a:latin typeface="Cambria Math" panose="02040503050406030204" pitchFamily="18" charset="0"/>
+                            </a:rPr>
+                            <m:t>,</m:t>
+                          </m:r>
+                          <m:r>
+                            <a:rPr lang="en-US" sz="4400" b="0" i="1" smtClean="0">
+                              <a:solidFill>
+                                <a:schemeClr val="accent2">
+                                  <a:lumMod val="75000"/>
+                                </a:schemeClr>
+                              </a:solidFill>
+                              <a:latin typeface="Cambria Math" panose="02040503050406030204" pitchFamily="18" charset="0"/>
+                            </a:rPr>
+                            <m:t>𝑡</m:t>
+                          </m:r>
+                          <m:r>
+                            <a:rPr lang="en-US" sz="4400" b="0" i="1" smtClean="0">
+                              <a:solidFill>
+                                <a:schemeClr val="accent2">
+                                  <a:lumMod val="75000"/>
+                                </a:schemeClr>
+                              </a:solidFill>
+                              <a:latin typeface="Cambria Math" panose="02040503050406030204" pitchFamily="18" charset="0"/>
+                            </a:rPr>
+                            <m:t>−1</m:t>
+                          </m:r>
+                        </m:e>
+                      </m:d>
+                      <m:r>
+                        <a:rPr lang="en-US" sz="4400" b="0" i="1" smtClean="0">
+                          <a:solidFill>
+                            <a:schemeClr val="accent2">
+                              <a:lumMod val="75000"/>
+                            </a:schemeClr>
+                          </a:solidFill>
+                          <a:latin typeface="Cambria Math" panose="02040503050406030204" pitchFamily="18" charset="0"/>
+                        </a:rPr>
+                        <m:t>+</m:t>
+                      </m:r>
+                      <m:sSub>
+                        <m:sSubPr>
+                          <m:ctrlPr>
+                            <a:rPr lang="en-US" sz="4400" b="0" i="1" smtClean="0">
+                              <a:solidFill>
+                                <a:schemeClr val="accent2">
+                                  <a:lumMod val="75000"/>
+                                </a:schemeClr>
+                              </a:solidFill>
+                              <a:latin typeface="Cambria Math" panose="02040503050406030204" pitchFamily="18" charset="0"/>
+                            </a:rPr>
+                          </m:ctrlPr>
+                        </m:sSubPr>
+                        <m:e>
+                          <m:r>
+                            <a:rPr lang="en-US" sz="4400" b="0" i="1" smtClean="0">
+                              <a:solidFill>
+                                <a:schemeClr val="accent2">
+                                  <a:lumMod val="75000"/>
+                                </a:schemeClr>
+                              </a:solidFill>
+                              <a:latin typeface="Cambria Math" panose="02040503050406030204" pitchFamily="18" charset="0"/>
+                            </a:rPr>
+                            <m:t>𝑒</m:t>
+                          </m:r>
+                        </m:e>
+                        <m:sub>
+                          <m:r>
+                            <a:rPr lang="en-US" sz="4400" b="0" i="1" smtClean="0">
+                              <a:solidFill>
+                                <a:schemeClr val="accent2">
+                                  <a:lumMod val="75000"/>
+                                </a:schemeClr>
+                              </a:solidFill>
+                              <a:latin typeface="Cambria Math" panose="02040503050406030204" pitchFamily="18" charset="0"/>
+                            </a:rPr>
+                            <m:t>𝑖</m:t>
+                          </m:r>
+                          <m:r>
+                            <a:rPr lang="en-US" sz="4400" b="0" i="1" smtClean="0">
+                              <a:solidFill>
+                                <a:schemeClr val="accent2">
+                                  <a:lumMod val="75000"/>
+                                </a:schemeClr>
+                              </a:solidFill>
+                              <a:latin typeface="Cambria Math" panose="02040503050406030204" pitchFamily="18" charset="0"/>
+                            </a:rPr>
+                            <m:t>,</m:t>
+                          </m:r>
+                          <m:r>
+                            <a:rPr lang="en-US" sz="4400" b="0" i="1" smtClean="0">
+                              <a:solidFill>
+                                <a:schemeClr val="accent2">
+                                  <a:lumMod val="75000"/>
+                                </a:schemeClr>
+                              </a:solidFill>
+                              <a:latin typeface="Cambria Math" panose="02040503050406030204" pitchFamily="18" charset="0"/>
+                            </a:rPr>
+                            <m:t>𝑡</m:t>
+                          </m:r>
+                        </m:sub>
+                      </m:sSub>
+                    </m:oMath>
+                  </m:oMathPara>
+                </a14:m>
+                <a:endParaRPr lang="LID4096" sz="4400" dirty="0">
+                  <a:solidFill>
+                    <a:schemeClr val="accent2">
+                      <a:lumMod val="75000"/>
+                    </a:schemeClr>
+                  </a:solidFill>
+                </a:endParaRPr>
+              </a:p>
+            </p:txBody>
+          </p:sp>
+        </mc:Choice>
+        <mc:Fallback xmlns="">
+          <p:sp>
+            <p:nvSpPr>
+              <p:cNvPr id="8" name="TextBox 7">
+                <a:extLst>
+                  <a:ext uri="{FF2B5EF4-FFF2-40B4-BE49-F238E27FC236}">
+                    <a16:creationId xmlns:a16="http://schemas.microsoft.com/office/drawing/2014/main" id="{C77B2214-39C6-3296-F81F-4B4C31300F31}"/>
+                  </a:ext>
+                </a:extLst>
+              </p:cNvPr>
+              <p:cNvSpPr txBox="1">
+                <a:spLocks noRot="1" noChangeAspect="1" noMove="1" noResize="1" noEditPoints="1" noAdjustHandles="1" noChangeArrowheads="1" noChangeShapeType="1" noTextEdit="1"/>
+              </p:cNvSpPr>
+              <p:nvPr/>
+            </p:nvSpPr>
+            <p:spPr>
+              <a:xfrm>
+                <a:off x="2075362" y="3075601"/>
+                <a:ext cx="8333884" cy="706797"/>
+              </a:xfrm>
+              <a:prstGeom prst="rect">
+                <a:avLst/>
+              </a:prstGeom>
+              <a:blipFill>
+                <a:blip r:embed="rId2"/>
+                <a:stretch>
+                  <a:fillRect/>
+                </a:stretch>
+              </a:blipFill>
+            </p:spPr>
+            <p:txBody>
+              <a:bodyPr/>
+              <a:lstStyle/>
+              <a:p>
+                <a:r>
+                  <a:rPr lang="en-US">
+                    <a:noFill/>
+                  </a:rPr>
+                  <a:t> </a:t>
+                </a:r>
+              </a:p>
+            </p:txBody>
+          </p:sp>
+        </mc:Fallback>
+      </mc:AlternateContent>
+      <mc:AlternateContent xmlns:mc="http://schemas.openxmlformats.org/markup-compatibility/2006" xmlns:a14="http://schemas.microsoft.com/office/drawing/2010/main">
+        <mc:Choice Requires="a14">
+          <p:sp>
+            <p:nvSpPr>
+              <p:cNvPr id="9" name="TextBox 8">
+                <a:extLst>
+                  <a:ext uri="{FF2B5EF4-FFF2-40B4-BE49-F238E27FC236}">
+                    <a16:creationId xmlns:a16="http://schemas.microsoft.com/office/drawing/2014/main" id="{A3994D20-CB9E-138A-A252-CEE7B72C5CFB}"/>
+                  </a:ext>
+                </a:extLst>
+              </p:cNvPr>
+              <p:cNvSpPr txBox="1"/>
+              <p:nvPr/>
+            </p:nvSpPr>
+            <p:spPr>
+              <a:xfrm>
+                <a:off x="2075361" y="4264283"/>
+                <a:ext cx="8382936" cy="706797"/>
+              </a:xfrm>
+              <a:prstGeom prst="rect">
+                <a:avLst/>
+              </a:prstGeom>
+              <a:noFill/>
+            </p:spPr>
+            <p:txBody>
+              <a:bodyPr wrap="none" lIns="0" tIns="0" rIns="0" bIns="0" rtlCol="0">
+                <a:spAutoFit/>
+              </a:bodyPr>
+              <a:lstStyle/>
+              <a:p>
+                <a:pPr/>
+                <a14:m>
+                  <m:oMathPara xmlns:m="http://schemas.openxmlformats.org/officeDocument/2006/math">
+                    <m:oMath>
+                      <m:r>
+                        <a:rPr lang="en-US" sz="4400" b="0" i="1" smtClean="0">
+                          <a:solidFill>
+                            <a:schemeClr val="accent5">
+                              <a:lumMod val="75000"/>
+                            </a:schemeClr>
+                          </a:solidFill>
+                          <a:latin typeface="Cambria Math" panose="02040503050406030204" pitchFamily="18" charset="0"/>
+                        </a:rPr>
+                        <m:t>𝑦</m:t>
+                      </m:r>
+                      <m:d>
+                        <m:dPr>
+                          <m:ctrlPr>
+                            <a:rPr lang="en-US" sz="4400" b="0" i="1" smtClean="0">
+                              <a:solidFill>
+                                <a:schemeClr val="accent5">
+                                  <a:lumMod val="75000"/>
+                                </a:schemeClr>
+                              </a:solidFill>
+                              <a:latin typeface="Cambria Math" panose="02040503050406030204" pitchFamily="18" charset="0"/>
+                            </a:rPr>
+                          </m:ctrlPr>
+                        </m:dPr>
+                        <m:e>
+                          <m:r>
+                            <a:rPr lang="en-US" sz="4400" b="0" i="1" smtClean="0">
+                              <a:solidFill>
+                                <a:schemeClr val="accent5">
+                                  <a:lumMod val="75000"/>
+                                </a:schemeClr>
+                              </a:solidFill>
+                              <a:latin typeface="Cambria Math" panose="02040503050406030204" pitchFamily="18" charset="0"/>
+                            </a:rPr>
+                            <m:t>𝐿𝑢𝑐𝑎</m:t>
+                          </m:r>
+                          <m:r>
+                            <a:rPr lang="en-US" sz="4400" b="0" i="1" smtClean="0">
+                              <a:solidFill>
+                                <a:schemeClr val="accent5">
+                                  <a:lumMod val="75000"/>
+                                </a:schemeClr>
+                              </a:solidFill>
+                              <a:latin typeface="Cambria Math" panose="02040503050406030204" pitchFamily="18" charset="0"/>
+                            </a:rPr>
+                            <m:t>,</m:t>
+                          </m:r>
+                          <m:r>
+                            <a:rPr lang="en-US" sz="4400" b="0" i="1" smtClean="0">
+                              <a:solidFill>
+                                <a:schemeClr val="accent5">
+                                  <a:lumMod val="75000"/>
+                                </a:schemeClr>
+                              </a:solidFill>
+                              <a:latin typeface="Cambria Math" panose="02040503050406030204" pitchFamily="18" charset="0"/>
+                            </a:rPr>
+                            <m:t>𝑡</m:t>
+                          </m:r>
+                        </m:e>
+                      </m:d>
+                      <m:r>
+                        <a:rPr lang="en-US" sz="4400" b="0" i="1" smtClean="0">
+                          <a:solidFill>
+                            <a:schemeClr val="accent5">
+                              <a:lumMod val="75000"/>
+                            </a:schemeClr>
+                          </a:solidFill>
+                          <a:latin typeface="Cambria Math" panose="02040503050406030204" pitchFamily="18" charset="0"/>
+                        </a:rPr>
+                        <m:t>=0.6∗</m:t>
+                      </m:r>
+                      <m:r>
+                        <a:rPr lang="en-US" sz="4400" b="0" i="1" smtClean="0">
+                          <a:solidFill>
+                            <a:schemeClr val="accent5">
+                              <a:lumMod val="75000"/>
+                            </a:schemeClr>
+                          </a:solidFill>
+                          <a:latin typeface="Cambria Math" panose="02040503050406030204" pitchFamily="18" charset="0"/>
+                        </a:rPr>
+                        <m:t>𝑦</m:t>
+                      </m:r>
+                      <m:d>
+                        <m:dPr>
+                          <m:ctrlPr>
+                            <a:rPr lang="en-US" sz="4400" b="0" i="1" smtClean="0">
+                              <a:solidFill>
+                                <a:schemeClr val="accent5">
+                                  <a:lumMod val="75000"/>
+                                </a:schemeClr>
+                              </a:solidFill>
+                              <a:latin typeface="Cambria Math" panose="02040503050406030204" pitchFamily="18" charset="0"/>
+                            </a:rPr>
+                          </m:ctrlPr>
+                        </m:dPr>
+                        <m:e>
+                          <m:r>
+                            <a:rPr lang="en-US" sz="4400" b="0" i="1" smtClean="0">
+                              <a:solidFill>
+                                <a:schemeClr val="accent5">
+                                  <a:lumMod val="75000"/>
+                                </a:schemeClr>
+                              </a:solidFill>
+                              <a:latin typeface="Cambria Math" panose="02040503050406030204" pitchFamily="18" charset="0"/>
+                            </a:rPr>
+                            <m:t>𝑖</m:t>
+                          </m:r>
+                          <m:r>
+                            <a:rPr lang="en-US" sz="4400" b="0" i="1" smtClean="0">
+                              <a:solidFill>
+                                <a:schemeClr val="accent5">
+                                  <a:lumMod val="75000"/>
+                                </a:schemeClr>
+                              </a:solidFill>
+                              <a:latin typeface="Cambria Math" panose="02040503050406030204" pitchFamily="18" charset="0"/>
+                            </a:rPr>
+                            <m:t>,</m:t>
+                          </m:r>
+                          <m:r>
+                            <a:rPr lang="en-US" sz="4400" b="0" i="1" smtClean="0">
+                              <a:solidFill>
+                                <a:schemeClr val="accent5">
+                                  <a:lumMod val="75000"/>
+                                </a:schemeClr>
+                              </a:solidFill>
+                              <a:latin typeface="Cambria Math" panose="02040503050406030204" pitchFamily="18" charset="0"/>
+                            </a:rPr>
+                            <m:t>𝑡</m:t>
+                          </m:r>
+                          <m:r>
+                            <a:rPr lang="en-US" sz="4400" b="0" i="1" smtClean="0">
+                              <a:solidFill>
+                                <a:schemeClr val="accent5">
+                                  <a:lumMod val="75000"/>
+                                </a:schemeClr>
+                              </a:solidFill>
+                              <a:latin typeface="Cambria Math" panose="02040503050406030204" pitchFamily="18" charset="0"/>
+                            </a:rPr>
+                            <m:t>−1</m:t>
+                          </m:r>
+                        </m:e>
+                      </m:d>
+                      <m:r>
+                        <a:rPr lang="en-US" sz="4400" b="0" i="1" smtClean="0">
+                          <a:solidFill>
+                            <a:schemeClr val="accent5">
+                              <a:lumMod val="75000"/>
+                            </a:schemeClr>
+                          </a:solidFill>
+                          <a:latin typeface="Cambria Math" panose="02040503050406030204" pitchFamily="18" charset="0"/>
+                        </a:rPr>
+                        <m:t>+</m:t>
+                      </m:r>
+                      <m:sSub>
+                        <m:sSubPr>
+                          <m:ctrlPr>
+                            <a:rPr lang="en-US" sz="4400" b="0" i="1" smtClean="0">
+                              <a:solidFill>
+                                <a:schemeClr val="accent5">
+                                  <a:lumMod val="75000"/>
+                                </a:schemeClr>
+                              </a:solidFill>
+                              <a:latin typeface="Cambria Math" panose="02040503050406030204" pitchFamily="18" charset="0"/>
+                            </a:rPr>
+                          </m:ctrlPr>
+                        </m:sSubPr>
+                        <m:e>
+                          <m:r>
+                            <a:rPr lang="en-US" sz="4400" b="0" i="1" smtClean="0">
+                              <a:solidFill>
+                                <a:schemeClr val="accent5">
+                                  <a:lumMod val="75000"/>
+                                </a:schemeClr>
+                              </a:solidFill>
+                              <a:latin typeface="Cambria Math" panose="02040503050406030204" pitchFamily="18" charset="0"/>
+                            </a:rPr>
+                            <m:t>𝑒</m:t>
+                          </m:r>
+                        </m:e>
+                        <m:sub>
+                          <m:r>
+                            <a:rPr lang="en-US" sz="4400" b="0" i="1" smtClean="0">
+                              <a:solidFill>
+                                <a:schemeClr val="accent5">
+                                  <a:lumMod val="75000"/>
+                                </a:schemeClr>
+                              </a:solidFill>
+                              <a:latin typeface="Cambria Math" panose="02040503050406030204" pitchFamily="18" charset="0"/>
+                            </a:rPr>
+                            <m:t>𝑖</m:t>
+                          </m:r>
+                          <m:r>
+                            <a:rPr lang="en-US" sz="4400" b="0" i="1" smtClean="0">
+                              <a:solidFill>
+                                <a:schemeClr val="accent5">
+                                  <a:lumMod val="75000"/>
+                                </a:schemeClr>
+                              </a:solidFill>
+                              <a:latin typeface="Cambria Math" panose="02040503050406030204" pitchFamily="18" charset="0"/>
+                            </a:rPr>
+                            <m:t>,</m:t>
+                          </m:r>
+                          <m:r>
+                            <a:rPr lang="en-US" sz="4400" b="0" i="1" smtClean="0">
+                              <a:solidFill>
+                                <a:schemeClr val="accent5">
+                                  <a:lumMod val="75000"/>
+                                </a:schemeClr>
+                              </a:solidFill>
+                              <a:latin typeface="Cambria Math" panose="02040503050406030204" pitchFamily="18" charset="0"/>
+                            </a:rPr>
+                            <m:t>𝑡</m:t>
+                          </m:r>
+                        </m:sub>
+                      </m:sSub>
+                    </m:oMath>
+                  </m:oMathPara>
+                </a14:m>
+                <a:endParaRPr lang="LID4096" sz="4400" dirty="0"/>
+              </a:p>
+            </p:txBody>
+          </p:sp>
+        </mc:Choice>
+        <mc:Fallback xmlns="">
+          <p:sp>
+            <p:nvSpPr>
+              <p:cNvPr id="9" name="TextBox 8">
+                <a:extLst>
+                  <a:ext uri="{FF2B5EF4-FFF2-40B4-BE49-F238E27FC236}">
+                    <a16:creationId xmlns:a16="http://schemas.microsoft.com/office/drawing/2014/main" id="{A3994D20-CB9E-138A-A252-CEE7B72C5CFB}"/>
+                  </a:ext>
+                </a:extLst>
+              </p:cNvPr>
+              <p:cNvSpPr txBox="1">
+                <a:spLocks noRot="1" noChangeAspect="1" noMove="1" noResize="1" noEditPoints="1" noAdjustHandles="1" noChangeArrowheads="1" noChangeShapeType="1" noTextEdit="1"/>
+              </p:cNvSpPr>
+              <p:nvPr/>
+            </p:nvSpPr>
+            <p:spPr>
+              <a:xfrm>
+                <a:off x="2075361" y="4264283"/>
+                <a:ext cx="8382936" cy="706797"/>
+              </a:xfrm>
+              <a:prstGeom prst="rect">
+                <a:avLst/>
+              </a:prstGeom>
+              <a:blipFill>
+                <a:blip r:embed="rId3"/>
+                <a:stretch>
+                  <a:fillRect/>
+                </a:stretch>
+              </a:blipFill>
+            </p:spPr>
+            <p:txBody>
+              <a:bodyPr/>
+              <a:lstStyle/>
+              <a:p>
+                <a:r>
+                  <a:rPr lang="en-US">
+                    <a:noFill/>
+                  </a:rPr>
+                  <a:t> </a:t>
+                </a:r>
+              </a:p>
+            </p:txBody>
+          </p:sp>
+        </mc:Fallback>
+      </mc:AlternateContent>
+      <mc:AlternateContent xmlns:mc="http://schemas.openxmlformats.org/markup-compatibility/2006" xmlns:a14="http://schemas.microsoft.com/office/drawing/2010/main">
+        <mc:Choice Requires="a14">
+          <p:sp>
+            <p:nvSpPr>
+              <p:cNvPr id="10" name="TextBox 9">
+                <a:extLst>
+                  <a:ext uri="{FF2B5EF4-FFF2-40B4-BE49-F238E27FC236}">
+                    <a16:creationId xmlns:a16="http://schemas.microsoft.com/office/drawing/2014/main" id="{9FB8A456-0819-0889-ADE1-D52DA1462990}"/>
+                  </a:ext>
+                </a:extLst>
+              </p:cNvPr>
+              <p:cNvSpPr txBox="1"/>
+              <p:nvPr/>
+            </p:nvSpPr>
+            <p:spPr>
+              <a:xfrm>
+                <a:off x="2075361" y="5534835"/>
+                <a:ext cx="4080476" cy="724557"/>
+              </a:xfrm>
+              <a:prstGeom prst="rect">
+                <a:avLst/>
+              </a:prstGeom>
+              <a:noFill/>
+            </p:spPr>
+            <p:txBody>
+              <a:bodyPr wrap="none" lIns="0" tIns="0" rIns="0" bIns="0" rtlCol="0">
+                <a:spAutoFit/>
+              </a:bodyPr>
+              <a:lstStyle/>
+              <a:p>
+                <a:pPr/>
+                <a14:m>
+                  <m:oMathPara xmlns:m="http://schemas.openxmlformats.org/officeDocument/2006/math">
+                    <m:oMath>
+                      <m:sSub>
+                        <m:sSubPr>
+                          <m:ctrlPr>
+                            <a:rPr lang="en-US" sz="4400" b="0" i="1" smtClean="0">
+                              <a:solidFill>
+                                <a:schemeClr val="accent2">
+                                  <a:lumMod val="75000"/>
+                                </a:schemeClr>
+                              </a:solidFill>
+                              <a:latin typeface="Cambria Math" panose="02040503050406030204" pitchFamily="18" charset="0"/>
+                            </a:rPr>
+                          </m:ctrlPr>
+                        </m:sSubPr>
+                        <m:e>
+                          <m:r>
+                            <a:rPr lang="en-US" sz="4400" b="0" i="1" smtClean="0">
+                              <a:solidFill>
+                                <a:schemeClr val="accent2">
+                                  <a:lumMod val="75000"/>
+                                </a:schemeClr>
+                              </a:solidFill>
+                              <a:latin typeface="Cambria Math" panose="02040503050406030204" pitchFamily="18" charset="0"/>
+                            </a:rPr>
+                            <m:t>𝑒</m:t>
+                          </m:r>
+                        </m:e>
+                        <m:sub>
+                          <m:r>
+                            <a:rPr lang="en-US" sz="4400" b="0" i="1" smtClean="0">
+                              <a:solidFill>
+                                <a:schemeClr val="accent2">
+                                  <a:lumMod val="75000"/>
+                                </a:schemeClr>
+                              </a:solidFill>
+                              <a:latin typeface="Cambria Math" panose="02040503050406030204" pitchFamily="18" charset="0"/>
+                            </a:rPr>
+                            <m:t>𝐽𝑜ℎ𝑛</m:t>
+                          </m:r>
+                          <m:r>
+                            <a:rPr lang="en-US" sz="4400" b="0" i="1" smtClean="0">
+                              <a:solidFill>
+                                <a:schemeClr val="accent2">
+                                  <a:lumMod val="75000"/>
+                                </a:schemeClr>
+                              </a:solidFill>
+                              <a:latin typeface="Cambria Math" panose="02040503050406030204" pitchFamily="18" charset="0"/>
+                            </a:rPr>
+                            <m:t>,</m:t>
+                          </m:r>
+                          <m:r>
+                            <a:rPr lang="en-US" sz="4400" b="0" i="1" smtClean="0">
+                              <a:solidFill>
+                                <a:schemeClr val="accent2">
+                                  <a:lumMod val="75000"/>
+                                </a:schemeClr>
+                              </a:solidFill>
+                              <a:latin typeface="Cambria Math" panose="02040503050406030204" pitchFamily="18" charset="0"/>
+                            </a:rPr>
+                            <m:t>𝑡</m:t>
+                          </m:r>
+                        </m:sub>
+                      </m:sSub>
+                      <m:r>
+                        <a:rPr lang="en-US" sz="4400" b="0" i="1" smtClean="0">
+                          <a:solidFill>
+                            <a:schemeClr val="accent2">
+                              <a:lumMod val="75000"/>
+                            </a:schemeClr>
+                          </a:solidFill>
+                          <a:latin typeface="Cambria Math" panose="02040503050406030204" pitchFamily="18" charset="0"/>
+                        </a:rPr>
+                        <m:t>=6,0,8,0 </m:t>
+                      </m:r>
+                    </m:oMath>
+                  </m:oMathPara>
+                </a14:m>
+                <a:endParaRPr lang="LID4096" sz="4400" dirty="0"/>
+              </a:p>
+            </p:txBody>
+          </p:sp>
+        </mc:Choice>
+        <mc:Fallback xmlns="">
+          <p:sp>
+            <p:nvSpPr>
+              <p:cNvPr id="10" name="TextBox 9">
+                <a:extLst>
+                  <a:ext uri="{FF2B5EF4-FFF2-40B4-BE49-F238E27FC236}">
+                    <a16:creationId xmlns:a16="http://schemas.microsoft.com/office/drawing/2014/main" id="{9FB8A456-0819-0889-ADE1-D52DA1462990}"/>
+                  </a:ext>
+                </a:extLst>
+              </p:cNvPr>
+              <p:cNvSpPr txBox="1">
+                <a:spLocks noRot="1" noChangeAspect="1" noMove="1" noResize="1" noEditPoints="1" noAdjustHandles="1" noChangeArrowheads="1" noChangeShapeType="1" noTextEdit="1"/>
+              </p:cNvSpPr>
+              <p:nvPr/>
+            </p:nvSpPr>
+            <p:spPr>
+              <a:xfrm>
+                <a:off x="2075361" y="5534835"/>
+                <a:ext cx="4080476" cy="724557"/>
+              </a:xfrm>
+              <a:prstGeom prst="rect">
+                <a:avLst/>
+              </a:prstGeom>
+              <a:blipFill>
+                <a:blip r:embed="rId4"/>
+                <a:stretch>
+                  <a:fillRect/>
+                </a:stretch>
+              </a:blipFill>
+            </p:spPr>
+            <p:txBody>
+              <a:bodyPr/>
+              <a:lstStyle/>
+              <a:p>
+                <a:r>
+                  <a:rPr lang="en-US">
+                    <a:noFill/>
+                  </a:rPr>
+                  <a:t> </a:t>
+                </a:r>
+              </a:p>
+            </p:txBody>
+          </p:sp>
+        </mc:Fallback>
+      </mc:AlternateContent>
+      <mc:AlternateContent xmlns:mc="http://schemas.openxmlformats.org/markup-compatibility/2006" xmlns:a14="http://schemas.microsoft.com/office/drawing/2010/main">
+        <mc:Choice Requires="a14">
+          <p:sp>
+            <p:nvSpPr>
+              <p:cNvPr id="11" name="TextBox 10">
+                <a:extLst>
+                  <a:ext uri="{FF2B5EF4-FFF2-40B4-BE49-F238E27FC236}">
+                    <a16:creationId xmlns:a16="http://schemas.microsoft.com/office/drawing/2014/main" id="{50A98EBB-5B69-86FF-24CA-32492E25B0B6}"/>
+                  </a:ext>
+                </a:extLst>
+              </p:cNvPr>
+              <p:cNvSpPr txBox="1"/>
+              <p:nvPr/>
+            </p:nvSpPr>
+            <p:spPr>
+              <a:xfrm>
+                <a:off x="7033835" y="5534835"/>
+                <a:ext cx="4105226" cy="706797"/>
+              </a:xfrm>
+              <a:prstGeom prst="rect">
+                <a:avLst/>
+              </a:prstGeom>
+              <a:noFill/>
+            </p:spPr>
+            <p:txBody>
+              <a:bodyPr wrap="none" lIns="0" tIns="0" rIns="0" bIns="0" rtlCol="0">
+                <a:spAutoFit/>
+              </a:bodyPr>
+              <a:lstStyle/>
+              <a:p>
+                <a:pPr/>
+                <a14:m>
+                  <m:oMathPara xmlns:m="http://schemas.openxmlformats.org/officeDocument/2006/math">
+                    <m:oMath>
+                      <m:sSub>
+                        <m:sSubPr>
+                          <m:ctrlPr>
+                            <a:rPr lang="en-US" sz="4400" b="0" i="1" smtClean="0">
+                              <a:solidFill>
+                                <a:schemeClr val="accent5">
+                                  <a:lumMod val="75000"/>
+                                </a:schemeClr>
+                              </a:solidFill>
+                              <a:latin typeface="Cambria Math" panose="02040503050406030204" pitchFamily="18" charset="0"/>
+                            </a:rPr>
+                          </m:ctrlPr>
+                        </m:sSubPr>
+                        <m:e>
+                          <m:r>
+                            <a:rPr lang="en-US" sz="4400" b="0" i="1" smtClean="0">
+                              <a:solidFill>
+                                <a:schemeClr val="accent5">
+                                  <a:lumMod val="75000"/>
+                                </a:schemeClr>
+                              </a:solidFill>
+                              <a:latin typeface="Cambria Math" panose="02040503050406030204" pitchFamily="18" charset="0"/>
+                            </a:rPr>
+                            <m:t>𝑒</m:t>
+                          </m:r>
+                        </m:e>
+                        <m:sub>
+                          <m:r>
+                            <a:rPr lang="en-US" sz="4400" b="0" i="1" smtClean="0">
+                              <a:solidFill>
+                                <a:schemeClr val="accent5">
+                                  <a:lumMod val="75000"/>
+                                </a:schemeClr>
+                              </a:solidFill>
+                              <a:latin typeface="Cambria Math" panose="02040503050406030204" pitchFamily="18" charset="0"/>
+                            </a:rPr>
+                            <m:t>𝐿𝑢𝑐𝑎</m:t>
+                          </m:r>
+                          <m:r>
+                            <a:rPr lang="en-US" sz="4400" b="0" i="1" smtClean="0">
+                              <a:solidFill>
+                                <a:schemeClr val="accent5">
+                                  <a:lumMod val="75000"/>
+                                </a:schemeClr>
+                              </a:solidFill>
+                              <a:latin typeface="Cambria Math" panose="02040503050406030204" pitchFamily="18" charset="0"/>
+                            </a:rPr>
+                            <m:t>,</m:t>
+                          </m:r>
+                          <m:r>
+                            <a:rPr lang="en-US" sz="4400" b="0" i="1" smtClean="0">
+                              <a:solidFill>
+                                <a:schemeClr val="accent5">
+                                  <a:lumMod val="75000"/>
+                                </a:schemeClr>
+                              </a:solidFill>
+                              <a:latin typeface="Cambria Math" panose="02040503050406030204" pitchFamily="18" charset="0"/>
+                            </a:rPr>
+                            <m:t>𝑡</m:t>
+                          </m:r>
+                        </m:sub>
+                      </m:sSub>
+                      <m:r>
+                        <a:rPr lang="en-US" sz="4400" b="0" i="1" smtClean="0">
+                          <a:solidFill>
+                            <a:schemeClr val="accent5">
+                              <a:lumMod val="75000"/>
+                            </a:schemeClr>
+                          </a:solidFill>
+                          <a:latin typeface="Cambria Math" panose="02040503050406030204" pitchFamily="18" charset="0"/>
+                        </a:rPr>
+                        <m:t>=0,2,0,6 </m:t>
+                      </m:r>
+                    </m:oMath>
+                  </m:oMathPara>
+                </a14:m>
+                <a:endParaRPr lang="LID4096" sz="4400" dirty="0"/>
+              </a:p>
+            </p:txBody>
+          </p:sp>
+        </mc:Choice>
+        <mc:Fallback xmlns="">
+          <p:sp>
+            <p:nvSpPr>
+              <p:cNvPr id="11" name="TextBox 10">
+                <a:extLst>
+                  <a:ext uri="{FF2B5EF4-FFF2-40B4-BE49-F238E27FC236}">
+                    <a16:creationId xmlns:a16="http://schemas.microsoft.com/office/drawing/2014/main" id="{50A98EBB-5B69-86FF-24CA-32492E25B0B6}"/>
+                  </a:ext>
+                </a:extLst>
+              </p:cNvPr>
+              <p:cNvSpPr txBox="1">
+                <a:spLocks noRot="1" noChangeAspect="1" noMove="1" noResize="1" noEditPoints="1" noAdjustHandles="1" noChangeArrowheads="1" noChangeShapeType="1" noTextEdit="1"/>
+              </p:cNvSpPr>
+              <p:nvPr/>
+            </p:nvSpPr>
+            <p:spPr>
+              <a:xfrm>
+                <a:off x="7033835" y="5534835"/>
+                <a:ext cx="4105226" cy="706797"/>
+              </a:xfrm>
+              <a:prstGeom prst="rect">
+                <a:avLst/>
+              </a:prstGeom>
+              <a:blipFill>
+                <a:blip r:embed="rId5"/>
+                <a:stretch>
+                  <a:fillRect/>
+                </a:stretch>
+              </a:blipFill>
+            </p:spPr>
+            <p:txBody>
+              <a:bodyPr/>
+              <a:lstStyle/>
+              <a:p>
+                <a:r>
+                  <a:rPr lang="en-US">
+                    <a:noFill/>
+                  </a:rPr>
+                  <a:t> </a:t>
+                </a:r>
+              </a:p>
+            </p:txBody>
+          </p:sp>
+        </mc:Fallback>
+      </mc:AlternateContent>
+    </p:spTree>
+    <p:extLst>
+      <p:ext uri="{BB962C8B-B14F-4D97-AF65-F5344CB8AC3E}">
+        <p14:creationId xmlns:p14="http://schemas.microsoft.com/office/powerpoint/2010/main" val="1540284240"/>
+      </p:ext>
+    </p:extLst>
+  </p:cSld>
+  <p:clrMapOvr>
+    <a:masterClrMapping/>
+  </p:clrMapOvr>
+</p:sld>
+</file>
+
+<file path=ppt/slides/slide36.xml><?xml version="1.0" encoding="utf-8"?>
+<p:sld xmlns:a="http://schemas.openxmlformats.org/drawingml/2006/main" xmlns:r="http://schemas.openxmlformats.org/officeDocument/2006/relationships" xmlns:p="http://schemas.openxmlformats.org/presentationml/2006/main">
+  <p:cSld>
+    <p:spTree>
+      <p:nvGrpSpPr>
+        <p:cNvPr id="1" name=""/>
+        <p:cNvGrpSpPr/>
+        <p:nvPr/>
+      </p:nvGrpSpPr>
+      <p:grpSpPr>
+        <a:xfrm>
+          <a:off x="0" y="0"/>
+          <a:ext cx="0" cy="0"/>
+          <a:chOff x="0" y="0"/>
+          <a:chExt cx="0" cy="0"/>
+        </a:xfrm>
+      </p:grpSpPr>
+      <p:sp>
+        <p:nvSpPr>
+          <p:cNvPr id="2" name="Title 1">
+            <a:extLst>
+              <a:ext uri="{FF2B5EF4-FFF2-40B4-BE49-F238E27FC236}">
+                <a16:creationId xmlns:a16="http://schemas.microsoft.com/office/drawing/2014/main" id="{99BD79AA-2962-DA7E-8E5C-B5F2293072B7}"/>
+              </a:ext>
+            </a:extLst>
+          </p:cNvPr>
+          <p:cNvSpPr>
+            <a:spLocks noGrp="1"/>
+          </p:cNvSpPr>
+          <p:nvPr>
+            <p:ph type="title"/>
+          </p:nvPr>
+        </p:nvSpPr>
+        <p:spPr/>
+        <p:txBody>
+          <a:bodyPr/>
+          <a:lstStyle/>
+          <a:p>
+            <a:r>
+              <a:rPr lang="en-US" dirty="0"/>
+              <a:t>Two questions about these models</a:t>
+            </a:r>
+            <a:endParaRPr lang="LID4096" dirty="0"/>
+          </a:p>
+        </p:txBody>
+      </p:sp>
+      <p:sp>
+        <p:nvSpPr>
+          <p:cNvPr id="3" name="Content Placeholder 2">
+            <a:extLst>
+              <a:ext uri="{FF2B5EF4-FFF2-40B4-BE49-F238E27FC236}">
+                <a16:creationId xmlns:a16="http://schemas.microsoft.com/office/drawing/2014/main" id="{60A9DF38-9B9A-533A-E0C4-169EEC0E917E}"/>
+              </a:ext>
+            </a:extLst>
+          </p:cNvPr>
+          <p:cNvSpPr>
+            <a:spLocks noGrp="1"/>
+          </p:cNvSpPr>
+          <p:nvPr>
+            <p:ph idx="1"/>
+          </p:nvPr>
+        </p:nvSpPr>
+        <p:spPr/>
+        <p:txBody>
+          <a:bodyPr>
+            <a:normAutofit/>
+          </a:bodyPr>
+          <a:lstStyle/>
+          <a:p>
+            <a:r>
+              <a:rPr lang="en-US" sz="3200" dirty="0"/>
+              <a:t>What happens in between the observations?</a:t>
+            </a:r>
+          </a:p>
+          <a:p>
+            <a:r>
+              <a:rPr lang="en-US" sz="3200" dirty="0"/>
+              <a:t>How can we stop noise from carrying over to the next occasion?</a:t>
+            </a:r>
+            <a:endParaRPr lang="LID4096" sz="3200" dirty="0"/>
+          </a:p>
+        </p:txBody>
+      </p:sp>
+    </p:spTree>
+    <p:extLst>
+      <p:ext uri="{BB962C8B-B14F-4D97-AF65-F5344CB8AC3E}">
+        <p14:creationId xmlns:p14="http://schemas.microsoft.com/office/powerpoint/2010/main" val="2347330004"/>
+      </p:ext>
+    </p:extLst>
+  </p:cSld>
+  <p:clrMapOvr>
+    <a:masterClrMapping/>
+  </p:clrMapOvr>
+</p:sld>
+</file>
+
+<file path=ppt/slides/slide37.xml><?xml version="1.0" encoding="utf-8"?>
+<p:sld xmlns:a="http://schemas.openxmlformats.org/drawingml/2006/main" xmlns:r="http://schemas.openxmlformats.org/officeDocument/2006/relationships" xmlns:p="http://schemas.openxmlformats.org/presentationml/2006/main">
+  <p:cSld>
+    <p:spTree>
+      <p:nvGrpSpPr>
+        <p:cNvPr id="1" name=""/>
+        <p:cNvGrpSpPr/>
+        <p:nvPr/>
+      </p:nvGrpSpPr>
+      <p:grpSpPr>
+        <a:xfrm>
+          <a:off x="0" y="0"/>
+          <a:ext cx="0" cy="0"/>
+          <a:chOff x="0" y="0"/>
+          <a:chExt cx="0" cy="0"/>
+        </a:xfrm>
+      </p:grpSpPr>
+      <p:sp>
+        <p:nvSpPr>
+          <p:cNvPr id="2" name="Title 1">
+            <a:extLst>
+              <a:ext uri="{FF2B5EF4-FFF2-40B4-BE49-F238E27FC236}">
+                <a16:creationId xmlns:a16="http://schemas.microsoft.com/office/drawing/2014/main" id="{B9FA17AC-A41C-8EE8-FF84-33210C97C9B4}"/>
+              </a:ext>
+            </a:extLst>
+          </p:cNvPr>
+          <p:cNvSpPr>
+            <a:spLocks noGrp="1"/>
+          </p:cNvSpPr>
+          <p:nvPr>
+            <p:ph type="title"/>
+          </p:nvPr>
+        </p:nvSpPr>
+        <p:spPr/>
+        <p:txBody>
+          <a:bodyPr/>
+          <a:lstStyle/>
+          <a:p>
+            <a:r>
+              <a:rPr lang="en-US" dirty="0"/>
+              <a:t>Download </a:t>
+            </a:r>
+            <a:r>
+              <a:rPr lang="en-US" b="1" dirty="0" err="1"/>
+              <a:t>ctsem</a:t>
+            </a:r>
+            <a:r>
+              <a:rPr lang="en-US" dirty="0"/>
+              <a:t> package in R</a:t>
+            </a:r>
+            <a:endParaRPr lang="LID4096" dirty="0"/>
+          </a:p>
+        </p:txBody>
+      </p:sp>
+      <p:pic>
+        <p:nvPicPr>
+          <p:cNvPr id="5" name="Picture 4">
+            <a:extLst>
+              <a:ext uri="{FF2B5EF4-FFF2-40B4-BE49-F238E27FC236}">
+                <a16:creationId xmlns:a16="http://schemas.microsoft.com/office/drawing/2014/main" id="{122701FC-577E-83F3-0000-F56E00FC950C}"/>
+              </a:ext>
+            </a:extLst>
+          </p:cNvPr>
+          <p:cNvPicPr>
+            <a:picLocks noChangeAspect="1"/>
+          </p:cNvPicPr>
+          <p:nvPr/>
+        </p:nvPicPr>
+        <p:blipFill>
+          <a:blip r:embed="rId2"/>
+          <a:stretch>
+            <a:fillRect/>
+          </a:stretch>
+        </p:blipFill>
+        <p:spPr>
+          <a:xfrm>
+            <a:off x="1620510" y="1613934"/>
+            <a:ext cx="8950980" cy="4878941"/>
+          </a:xfrm>
+          <a:prstGeom prst="rect">
+            <a:avLst/>
+          </a:prstGeom>
+        </p:spPr>
+      </p:pic>
+    </p:spTree>
+    <p:extLst>
+      <p:ext uri="{BB962C8B-B14F-4D97-AF65-F5344CB8AC3E}">
+        <p14:creationId xmlns:p14="http://schemas.microsoft.com/office/powerpoint/2010/main" val="3883886726"/>
+      </p:ext>
+    </p:extLst>
+  </p:cSld>
+  <p:clrMapOvr>
+    <a:masterClrMapping/>
+  </p:clrMapOvr>
+</p:sld>
+</file>
+
+<file path=ppt/slides/slide38.xml><?xml version="1.0" encoding="utf-8"?>
+<p:sld xmlns:a="http://schemas.openxmlformats.org/drawingml/2006/main" xmlns:r="http://schemas.openxmlformats.org/officeDocument/2006/relationships" xmlns:p="http://schemas.openxmlformats.org/presentationml/2006/main">
+  <p:cSld>
+    <p:spTree>
+      <p:nvGrpSpPr>
+        <p:cNvPr id="1" name=""/>
+        <p:cNvGrpSpPr/>
+        <p:nvPr/>
+      </p:nvGrpSpPr>
+      <p:grpSpPr>
+        <a:xfrm>
+          <a:off x="0" y="0"/>
+          <a:ext cx="0" cy="0"/>
+          <a:chOff x="0" y="0"/>
+          <a:chExt cx="0" cy="0"/>
+        </a:xfrm>
+      </p:grpSpPr>
+      <p:sp>
+        <p:nvSpPr>
+          <p:cNvPr id="2" name="Title 1">
+            <a:extLst>
+              <a:ext uri="{FF2B5EF4-FFF2-40B4-BE49-F238E27FC236}">
+                <a16:creationId xmlns:a16="http://schemas.microsoft.com/office/drawing/2014/main" id="{6D9117DE-3798-152A-8C10-66D6A5E71A6B}"/>
+              </a:ext>
+            </a:extLst>
+          </p:cNvPr>
+          <p:cNvSpPr>
+            <a:spLocks noGrp="1"/>
+          </p:cNvSpPr>
+          <p:nvPr>
+            <p:ph type="title"/>
+          </p:nvPr>
+        </p:nvSpPr>
+        <p:spPr/>
+        <p:txBody>
+          <a:bodyPr/>
+          <a:lstStyle/>
+          <a:p>
+            <a:r>
+              <a:rPr lang="en-US" dirty="0">
+                <a:solidFill>
+                  <a:schemeClr val="accent5">
+                    <a:lumMod val="75000"/>
+                  </a:schemeClr>
+                </a:solidFill>
+              </a:rPr>
+              <a:t>Extra:</a:t>
+            </a:r>
+            <a:r>
+              <a:rPr lang="en-US" dirty="0">
+                <a:solidFill>
+                  <a:srgbClr val="C00000"/>
+                </a:solidFill>
+              </a:rPr>
+              <a:t> </a:t>
+            </a:r>
+            <a:r>
+              <a:rPr lang="en-US" dirty="0"/>
+              <a:t>Visualizing covariance</a:t>
+            </a:r>
+          </a:p>
+        </p:txBody>
+      </p:sp>
+      <p:sp>
+        <p:nvSpPr>
+          <p:cNvPr id="3" name="Content Placeholder 2">
+            <a:extLst>
+              <a:ext uri="{FF2B5EF4-FFF2-40B4-BE49-F238E27FC236}">
+                <a16:creationId xmlns:a16="http://schemas.microsoft.com/office/drawing/2014/main" id="{7BFFEEE5-44DF-1F72-EBD4-76D133CFB5FA}"/>
+              </a:ext>
+            </a:extLst>
+          </p:cNvPr>
+          <p:cNvSpPr>
+            <a:spLocks noGrp="1"/>
+          </p:cNvSpPr>
+          <p:nvPr>
+            <p:ph idx="1"/>
+          </p:nvPr>
+        </p:nvSpPr>
+        <p:spPr>
+          <a:xfrm>
+            <a:off x="838200" y="1825625"/>
+            <a:ext cx="10515600" cy="1603375"/>
+          </a:xfrm>
+        </p:spPr>
+        <p:txBody>
+          <a:bodyPr/>
+          <a:lstStyle/>
+          <a:p>
+            <a:r>
+              <a:rPr lang="en-US" dirty="0"/>
+              <a:t>Paper: </a:t>
+            </a:r>
+            <a:r>
+              <a:rPr lang="en-US" u="sng" dirty="0">
+                <a:hlinkClick r:id="rId2"/>
+              </a:rPr>
+              <a:t>https://psyarxiv.com/gwu8b</a:t>
+            </a:r>
+            <a:endParaRPr lang="en-US" u="sng" dirty="0"/>
+          </a:p>
+          <a:p>
+            <a:r>
+              <a:rPr lang="en-US" dirty="0"/>
+              <a:t>Game: </a:t>
+            </a:r>
+            <a:r>
+              <a:rPr lang="en-US" dirty="0">
+                <a:hlinkClick r:id="rId3"/>
+              </a:rPr>
+              <a:t>https://www.guessthecorrelation.com/</a:t>
+            </a:r>
+            <a:endParaRPr lang="en-US" dirty="0"/>
+          </a:p>
+        </p:txBody>
+      </p:sp>
+    </p:spTree>
+    <p:extLst>
+      <p:ext uri="{BB962C8B-B14F-4D97-AF65-F5344CB8AC3E}">
+        <p14:creationId xmlns:p14="http://schemas.microsoft.com/office/powerpoint/2010/main" val="1680230573"/>
+      </p:ext>
+    </p:extLst>
+  </p:cSld>
+  <p:clrMapOvr>
+    <a:masterClrMapping/>
+  </p:clrMapOvr>
+</p:sld>
+</file>
+
+<file path=ppt/slides/slide39.xml><?xml version="1.0" encoding="utf-8"?>
 <p:sld xmlns:a="http://schemas.openxmlformats.org/drawingml/2006/main" xmlns:r="http://schemas.openxmlformats.org/officeDocument/2006/relationships" xmlns:p="http://schemas.openxmlformats.org/presentationml/2006/main">
   <p:cSld>
     <p:spTree>
@@ -17865,7 +17141,7 @@
 </p:sld>
 </file>
 
-<file path=ppt/slides/slide5.xml><?xml version="1.0" encoding="utf-8"?>
+<file path=ppt/slides/slide4.xml><?xml version="1.0" encoding="utf-8"?>
 <p:sld xmlns:a="http://schemas.openxmlformats.org/drawingml/2006/main" xmlns:r="http://schemas.openxmlformats.org/officeDocument/2006/relationships" xmlns:p="http://schemas.openxmlformats.org/presentationml/2006/main">
   <p:cSld>
     <p:spTree>
@@ -18013,7 +17289,7 @@
 </p:sld>
 </file>
 
-<file path=ppt/slides/slide6.xml><?xml version="1.0" encoding="utf-8"?>
+<file path=ppt/slides/slide5.xml><?xml version="1.0" encoding="utf-8"?>
 <p:sld xmlns:a="http://schemas.openxmlformats.org/drawingml/2006/main" xmlns:r="http://schemas.openxmlformats.org/officeDocument/2006/relationships" xmlns:p="http://schemas.openxmlformats.org/presentationml/2006/main">
   <p:cSld>
     <p:spTree>
@@ -18126,7 +17402,7 @@
 </p:sld>
 </file>
 
-<file path=ppt/slides/slide7.xml><?xml version="1.0" encoding="utf-8"?>
+<file path=ppt/slides/slide6.xml><?xml version="1.0" encoding="utf-8"?>
 <p:sld xmlns:a="http://schemas.openxmlformats.org/drawingml/2006/main" xmlns:r="http://schemas.openxmlformats.org/officeDocument/2006/relationships" xmlns:p="http://schemas.openxmlformats.org/presentationml/2006/main">
   <p:cSld>
     <p:spTree>
@@ -18217,7 +17493,7 @@
 </p:sld>
 </file>
 
-<file path=ppt/slides/slide8.xml><?xml version="1.0" encoding="utf-8"?>
+<file path=ppt/slides/slide7.xml><?xml version="1.0" encoding="utf-8"?>
 <p:sld xmlns:a="http://schemas.openxmlformats.org/drawingml/2006/main" xmlns:r="http://schemas.openxmlformats.org/officeDocument/2006/relationships" xmlns:p="http://schemas.openxmlformats.org/presentationml/2006/main">
   <p:cSld>
     <p:spTree>
@@ -18775,7 +18051,7 @@
 </p:sld>
 </file>
 
-<file path=ppt/slides/slide9.xml><?xml version="1.0" encoding="utf-8"?>
+<file path=ppt/slides/slide8.xml><?xml version="1.0" encoding="utf-8"?>
 <p:sld xmlns:a="http://schemas.openxmlformats.org/drawingml/2006/main" xmlns:r="http://schemas.openxmlformats.org/officeDocument/2006/relationships" xmlns:p="http://schemas.openxmlformats.org/presentationml/2006/main">
   <p:cSld>
     <p:spTree>
@@ -19321,6 +18597,579 @@
     <p:extLst>
       <p:ext uri="{BB962C8B-B14F-4D97-AF65-F5344CB8AC3E}">
         <p14:creationId xmlns:p14="http://schemas.microsoft.com/office/powerpoint/2010/main" val="2579125978"/>
+      </p:ext>
+    </p:extLst>
+  </p:cSld>
+  <p:clrMapOvr>
+    <a:masterClrMapping/>
+  </p:clrMapOvr>
+</p:sld>
+</file>
+
+<file path=ppt/slides/slide9.xml><?xml version="1.0" encoding="utf-8"?>
+<p:sld xmlns:a="http://schemas.openxmlformats.org/drawingml/2006/main" xmlns:r="http://schemas.openxmlformats.org/officeDocument/2006/relationships" xmlns:p="http://schemas.openxmlformats.org/presentationml/2006/main">
+  <p:cSld>
+    <p:spTree>
+      <p:nvGrpSpPr>
+        <p:cNvPr id="1" name="">
+          <a:extLst>
+            <a:ext uri="{FF2B5EF4-FFF2-40B4-BE49-F238E27FC236}">
+              <a16:creationId xmlns:a16="http://schemas.microsoft.com/office/drawing/2014/main" id="{CB36E30A-682D-8103-5379-A4C332366FF6}"/>
+            </a:ext>
+          </a:extLst>
+        </p:cNvPr>
+        <p:cNvGrpSpPr/>
+        <p:nvPr/>
+      </p:nvGrpSpPr>
+      <p:grpSpPr>
+        <a:xfrm>
+          <a:off x="0" y="0"/>
+          <a:ext cx="0" cy="0"/>
+          <a:chOff x="0" y="0"/>
+          <a:chExt cx="0" cy="0"/>
+        </a:xfrm>
+      </p:grpSpPr>
+      <p:sp>
+        <p:nvSpPr>
+          <p:cNvPr id="2" name="Title 1">
+            <a:extLst>
+              <a:ext uri="{FF2B5EF4-FFF2-40B4-BE49-F238E27FC236}">
+                <a16:creationId xmlns:a16="http://schemas.microsoft.com/office/drawing/2014/main" id="{EE2A2004-6EAA-D504-07C3-671634B203F6}"/>
+              </a:ext>
+            </a:extLst>
+          </p:cNvPr>
+          <p:cNvSpPr>
+            <a:spLocks noGrp="1"/>
+          </p:cNvSpPr>
+          <p:nvPr>
+            <p:ph type="title"/>
+          </p:nvPr>
+        </p:nvSpPr>
+        <p:spPr/>
+        <p:txBody>
+          <a:bodyPr/>
+          <a:lstStyle/>
+          <a:p>
+            <a:r>
+              <a:rPr lang="en-US" dirty="0"/>
+              <a:t>What if people actually differ?</a:t>
+            </a:r>
+            <a:endParaRPr lang="en-CH" dirty="0"/>
+          </a:p>
+        </p:txBody>
+      </p:sp>
+      <p:sp>
+        <p:nvSpPr>
+          <p:cNvPr id="3" name="Content Placeholder 2">
+            <a:extLst>
+              <a:ext uri="{FF2B5EF4-FFF2-40B4-BE49-F238E27FC236}">
+                <a16:creationId xmlns:a16="http://schemas.microsoft.com/office/drawing/2014/main" id="{B7A7C5E4-AFF0-E246-FB42-D417224191EE}"/>
+              </a:ext>
+            </a:extLst>
+          </p:cNvPr>
+          <p:cNvSpPr>
+            <a:spLocks noGrp="1"/>
+          </p:cNvSpPr>
+          <p:nvPr>
+            <p:ph idx="1"/>
+          </p:nvPr>
+        </p:nvSpPr>
+        <p:spPr>
+          <a:xfrm>
+            <a:off x="838200" y="1825625"/>
+            <a:ext cx="10515600" cy="2024132"/>
+          </a:xfrm>
+        </p:spPr>
+        <p:txBody>
+          <a:bodyPr>
+            <a:normAutofit/>
+          </a:bodyPr>
+          <a:lstStyle/>
+          <a:p>
+            <a:pPr marL="0" indent="0">
+              <a:buNone/>
+            </a:pPr>
+            <a:r>
+              <a:rPr lang="en-US" b="1" dirty="0"/>
+              <a:t>What do we need to change in this model?</a:t>
+            </a:r>
+            <a:endParaRPr lang="en-CH" b="1" dirty="0"/>
+          </a:p>
+        </p:txBody>
+      </p:sp>
+      <mc:AlternateContent xmlns:mc="http://schemas.openxmlformats.org/markup-compatibility/2006" xmlns:a14="http://schemas.microsoft.com/office/drawing/2010/main">
+        <mc:Choice Requires="a14">
+          <p:sp>
+            <p:nvSpPr>
+              <p:cNvPr id="15" name="TextBox 14">
+                <a:extLst>
+                  <a:ext uri="{FF2B5EF4-FFF2-40B4-BE49-F238E27FC236}">
+                    <a16:creationId xmlns:a16="http://schemas.microsoft.com/office/drawing/2014/main" id="{6699F381-15BB-1C9F-3199-94B9FF383858}"/>
+                  </a:ext>
+                </a:extLst>
+              </p:cNvPr>
+              <p:cNvSpPr txBox="1"/>
+              <p:nvPr/>
+            </p:nvSpPr>
+            <p:spPr>
+              <a:xfrm>
+                <a:off x="3741401" y="3335706"/>
+                <a:ext cx="5229317" cy="514051"/>
+              </a:xfrm>
+              <a:prstGeom prst="rect">
+                <a:avLst/>
+              </a:prstGeom>
+              <a:noFill/>
+            </p:spPr>
+            <p:txBody>
+              <a:bodyPr wrap="none" lIns="0" tIns="0" rIns="0" bIns="0" rtlCol="0">
+                <a:spAutoFit/>
+              </a:bodyPr>
+              <a:lstStyle/>
+              <a:p>
+                <a:pPr/>
+                <a14:m>
+                  <m:oMathPara xmlns:m="http://schemas.openxmlformats.org/officeDocument/2006/math">
+                    <m:oMath>
+                      <m:sSub>
+                        <m:sSubPr>
+                          <m:ctrlPr>
+                            <a:rPr lang="en-US" sz="3200" b="0" i="1" smtClean="0">
+                              <a:latin typeface="Cambria Math" panose="02040503050406030204" pitchFamily="18" charset="0"/>
+                            </a:rPr>
+                          </m:ctrlPr>
+                        </m:sSubPr>
+                        <m:e>
+                          <m:r>
+                            <a:rPr lang="en-US" sz="3200" b="0" i="1" smtClean="0">
+                              <a:latin typeface="Cambria Math" panose="02040503050406030204" pitchFamily="18" charset="0"/>
+                            </a:rPr>
+                            <m:t>𝑌</m:t>
+                          </m:r>
+                        </m:e>
+                        <m:sub>
+                          <m:r>
+                            <a:rPr lang="en-US" sz="3200" b="0" i="1" smtClean="0">
+                              <a:latin typeface="Cambria Math" panose="02040503050406030204" pitchFamily="18" charset="0"/>
+                            </a:rPr>
+                            <m:t>𝑖</m:t>
+                          </m:r>
+                          <m:r>
+                            <a:rPr lang="en-US" sz="3200" b="0" i="1" smtClean="0">
+                              <a:latin typeface="Cambria Math" panose="02040503050406030204" pitchFamily="18" charset="0"/>
+                            </a:rPr>
+                            <m:t>,</m:t>
+                          </m:r>
+                          <m:r>
+                            <a:rPr lang="en-US" sz="3200" b="0" i="1" smtClean="0">
+                              <a:latin typeface="Cambria Math" panose="02040503050406030204" pitchFamily="18" charset="0"/>
+                            </a:rPr>
+                            <m:t>𝑡</m:t>
+                          </m:r>
+                        </m:sub>
+                      </m:sSub>
+                      <m:r>
+                        <a:rPr lang="en-US" sz="3200" b="0" i="1" smtClean="0">
+                          <a:latin typeface="Cambria Math" panose="02040503050406030204" pitchFamily="18" charset="0"/>
+                        </a:rPr>
+                        <m:t>=</m:t>
+                      </m:r>
+                      <m:sSub>
+                        <m:sSubPr>
+                          <m:ctrlPr>
+                            <a:rPr lang="en-US" sz="3200" i="1">
+                              <a:latin typeface="Cambria Math" panose="02040503050406030204" pitchFamily="18" charset="0"/>
+                            </a:rPr>
+                          </m:ctrlPr>
+                        </m:sSubPr>
+                        <m:e>
+                          <m:r>
+                            <a:rPr lang="en-US" sz="3200" i="1">
+                              <a:latin typeface="Cambria Math" panose="02040503050406030204" pitchFamily="18" charset="0"/>
+                            </a:rPr>
+                            <m:t>𝛽</m:t>
+                          </m:r>
+                        </m:e>
+                        <m:sub>
+                          <m:r>
+                            <a:rPr lang="en-US" sz="3200" b="0" i="1" smtClean="0">
+                              <a:latin typeface="Cambria Math" panose="02040503050406030204" pitchFamily="18" charset="0"/>
+                            </a:rPr>
+                            <m:t>0</m:t>
+                          </m:r>
+                          <m:r>
+                            <a:rPr lang="en-US" sz="3200" b="0" i="1" smtClean="0">
+                              <a:solidFill>
+                                <a:srgbClr val="FF0000"/>
+                              </a:solidFill>
+                              <a:latin typeface="Cambria Math" panose="02040503050406030204" pitchFamily="18" charset="0"/>
+                            </a:rPr>
+                            <m:t>𝑖</m:t>
+                          </m:r>
+                        </m:sub>
+                      </m:sSub>
+                      <m:r>
+                        <a:rPr lang="en-US" sz="3200" b="0" i="1" smtClean="0">
+                          <a:latin typeface="Cambria Math" panose="02040503050406030204" pitchFamily="18" charset="0"/>
+                        </a:rPr>
+                        <m:t>+</m:t>
+                      </m:r>
+                      <m:sSub>
+                        <m:sSubPr>
+                          <m:ctrlPr>
+                            <a:rPr lang="en-US" sz="3200" i="1">
+                              <a:latin typeface="Cambria Math" panose="02040503050406030204" pitchFamily="18" charset="0"/>
+                            </a:rPr>
+                          </m:ctrlPr>
+                        </m:sSubPr>
+                        <m:e>
+                          <m:r>
+                            <a:rPr lang="en-US" sz="3200" i="1">
+                              <a:latin typeface="Cambria Math" panose="02040503050406030204" pitchFamily="18" charset="0"/>
+                            </a:rPr>
+                            <m:t>𝛽</m:t>
+                          </m:r>
+                        </m:e>
+                        <m:sub>
+                          <m:r>
+                            <a:rPr lang="en-US" sz="3200" b="0" i="1" smtClean="0">
+                              <a:latin typeface="Cambria Math" panose="02040503050406030204" pitchFamily="18" charset="0"/>
+                            </a:rPr>
+                            <m:t>1</m:t>
+                          </m:r>
+                          <m:r>
+                            <a:rPr lang="en-US" sz="3200" b="0" i="1" smtClean="0">
+                              <a:solidFill>
+                                <a:srgbClr val="FF0000"/>
+                              </a:solidFill>
+                              <a:latin typeface="Cambria Math" panose="02040503050406030204" pitchFamily="18" charset="0"/>
+                            </a:rPr>
+                            <m:t>𝑖</m:t>
+                          </m:r>
+                        </m:sub>
+                      </m:sSub>
+                      <m:r>
+                        <a:rPr lang="en-US" sz="3200" b="0" i="1" smtClean="0">
+                          <a:latin typeface="Cambria Math" panose="02040503050406030204" pitchFamily="18" charset="0"/>
+                        </a:rPr>
+                        <m:t>∗</m:t>
+                      </m:r>
+                      <m:r>
+                        <a:rPr lang="en-US" sz="3200" b="0" i="1" smtClean="0">
+                          <a:latin typeface="Cambria Math" panose="02040503050406030204" pitchFamily="18" charset="0"/>
+                        </a:rPr>
+                        <m:t>𝑡𝑖𝑚</m:t>
+                      </m:r>
+                      <m:sSub>
+                        <m:sSubPr>
+                          <m:ctrlPr>
+                            <a:rPr lang="en-US" sz="3200" b="0" i="1" smtClean="0">
+                              <a:latin typeface="Cambria Math" panose="02040503050406030204" pitchFamily="18" charset="0"/>
+                            </a:rPr>
+                          </m:ctrlPr>
+                        </m:sSubPr>
+                        <m:e>
+                          <m:r>
+                            <a:rPr lang="en-US" sz="3200" b="0" i="1" smtClean="0">
+                              <a:latin typeface="Cambria Math" panose="02040503050406030204" pitchFamily="18" charset="0"/>
+                            </a:rPr>
+                            <m:t>𝑒</m:t>
+                          </m:r>
+                        </m:e>
+                        <m:sub>
+                          <m:r>
+                            <a:rPr lang="en-US" sz="3200" b="0" i="1" smtClean="0">
+                              <a:latin typeface="Cambria Math" panose="02040503050406030204" pitchFamily="18" charset="0"/>
+                            </a:rPr>
+                            <m:t>𝑖</m:t>
+                          </m:r>
+                          <m:r>
+                            <a:rPr lang="en-US" sz="3200" b="0" i="1" smtClean="0">
+                              <a:latin typeface="Cambria Math" panose="02040503050406030204" pitchFamily="18" charset="0"/>
+                            </a:rPr>
+                            <m:t>,</m:t>
+                          </m:r>
+                          <m:r>
+                            <a:rPr lang="en-US" sz="3200" b="0" i="1" smtClean="0">
+                              <a:latin typeface="Cambria Math" panose="02040503050406030204" pitchFamily="18" charset="0"/>
+                            </a:rPr>
+                            <m:t>𝑡</m:t>
+                          </m:r>
+                        </m:sub>
+                      </m:sSub>
+                      <m:r>
+                        <a:rPr lang="en-US" sz="3200" b="0" i="1" smtClean="0">
+                          <a:latin typeface="Cambria Math" panose="02040503050406030204" pitchFamily="18" charset="0"/>
+                        </a:rPr>
+                        <m:t>+</m:t>
+                      </m:r>
+                      <m:sSub>
+                        <m:sSubPr>
+                          <m:ctrlPr>
+                            <a:rPr lang="en-US" sz="3200" b="0" i="1" smtClean="0">
+                              <a:latin typeface="Cambria Math" panose="02040503050406030204" pitchFamily="18" charset="0"/>
+                            </a:rPr>
+                          </m:ctrlPr>
+                        </m:sSubPr>
+                        <m:e>
+                          <m:r>
+                            <a:rPr lang="en-US" sz="3200" b="0" i="1" smtClean="0">
+                              <a:latin typeface="Cambria Math" panose="02040503050406030204" pitchFamily="18" charset="0"/>
+                            </a:rPr>
+                            <m:t>𝜖</m:t>
+                          </m:r>
+                        </m:e>
+                        <m:sub>
+                          <m:r>
+                            <a:rPr lang="en-US" sz="3200" b="0" i="1" smtClean="0">
+                              <a:latin typeface="Cambria Math" panose="02040503050406030204" pitchFamily="18" charset="0"/>
+                            </a:rPr>
+                            <m:t>𝑖</m:t>
+                          </m:r>
+                          <m:r>
+                            <a:rPr lang="en-US" sz="3200" b="0" i="1" smtClean="0">
+                              <a:latin typeface="Cambria Math" panose="02040503050406030204" pitchFamily="18" charset="0"/>
+                            </a:rPr>
+                            <m:t>,</m:t>
+                          </m:r>
+                          <m:r>
+                            <a:rPr lang="en-US" sz="3200" b="0" i="1" smtClean="0">
+                              <a:latin typeface="Cambria Math" panose="02040503050406030204" pitchFamily="18" charset="0"/>
+                            </a:rPr>
+                            <m:t>𝑡</m:t>
+                          </m:r>
+                        </m:sub>
+                      </m:sSub>
+                    </m:oMath>
+                  </m:oMathPara>
+                </a14:m>
+                <a:endParaRPr lang="en-US" sz="3200" b="0" dirty="0"/>
+              </a:p>
+            </p:txBody>
+          </p:sp>
+        </mc:Choice>
+        <mc:Fallback xmlns="">
+          <p:sp>
+            <p:nvSpPr>
+              <p:cNvPr id="15" name="TextBox 14">
+                <a:extLst>
+                  <a:ext uri="{FF2B5EF4-FFF2-40B4-BE49-F238E27FC236}">
+                    <a16:creationId xmlns:a16="http://schemas.microsoft.com/office/drawing/2014/main" id="{6699F381-15BB-1C9F-3199-94B9FF383858}"/>
+                  </a:ext>
+                </a:extLst>
+              </p:cNvPr>
+              <p:cNvSpPr txBox="1">
+                <a:spLocks noRot="1" noChangeAspect="1" noMove="1" noResize="1" noEditPoints="1" noAdjustHandles="1" noChangeArrowheads="1" noChangeShapeType="1" noTextEdit="1"/>
+              </p:cNvSpPr>
+              <p:nvPr/>
+            </p:nvSpPr>
+            <p:spPr>
+              <a:xfrm>
+                <a:off x="3741401" y="3335706"/>
+                <a:ext cx="5229317" cy="514051"/>
+              </a:xfrm>
+              <a:prstGeom prst="rect">
+                <a:avLst/>
+              </a:prstGeom>
+              <a:blipFill>
+                <a:blip r:embed="rId2"/>
+                <a:stretch>
+                  <a:fillRect/>
+                </a:stretch>
+              </a:blipFill>
+            </p:spPr>
+            <p:txBody>
+              <a:bodyPr/>
+              <a:lstStyle/>
+              <a:p>
+                <a:r>
+                  <a:rPr lang="en-US">
+                    <a:noFill/>
+                  </a:rPr>
+                  <a:t> </a:t>
+                </a:r>
+              </a:p>
+            </p:txBody>
+          </p:sp>
+        </mc:Fallback>
+      </mc:AlternateContent>
+      <mc:AlternateContent xmlns:mc="http://schemas.openxmlformats.org/markup-compatibility/2006" xmlns:a14="http://schemas.microsoft.com/office/drawing/2010/main">
+        <mc:Choice Requires="a14">
+          <p:sp>
+            <p:nvSpPr>
+              <p:cNvPr id="17" name="TextBox 16">
+                <a:extLst>
+                  <a:ext uri="{FF2B5EF4-FFF2-40B4-BE49-F238E27FC236}">
+                    <a16:creationId xmlns:a16="http://schemas.microsoft.com/office/drawing/2014/main" id="{7AF3CC1A-3145-6621-D288-52732757D7EA}"/>
+                  </a:ext>
+                </a:extLst>
+              </p:cNvPr>
+              <p:cNvSpPr txBox="1"/>
+              <p:nvPr/>
+            </p:nvSpPr>
+            <p:spPr>
+              <a:xfrm>
+                <a:off x="5042302" y="4171790"/>
+                <a:ext cx="2167966" cy="458459"/>
+              </a:xfrm>
+              <a:prstGeom prst="rect">
+                <a:avLst/>
+              </a:prstGeom>
+              <a:noFill/>
+            </p:spPr>
+            <p:txBody>
+              <a:bodyPr wrap="none" lIns="0" tIns="0" rIns="0" bIns="0" rtlCol="0">
+                <a:spAutoFit/>
+              </a:bodyPr>
+              <a:lstStyle/>
+              <a:p>
+                <a:pPr/>
+                <a14:m>
+                  <m:oMathPara xmlns:m="http://schemas.openxmlformats.org/officeDocument/2006/math">
+                    <m:oMath>
+                      <m:sSub>
+                        <m:sSubPr>
+                          <m:ctrlPr>
+                            <a:rPr lang="en-US" sz="2800" b="0" i="1" smtClean="0">
+                              <a:latin typeface="Cambria Math" panose="02040503050406030204" pitchFamily="18" charset="0"/>
+                            </a:rPr>
+                          </m:ctrlPr>
+                        </m:sSubPr>
+                        <m:e>
+                          <m:r>
+                            <a:rPr lang="en-US" sz="2800" b="0" i="1" smtClean="0">
+                              <a:latin typeface="Cambria Math" panose="02040503050406030204" pitchFamily="18" charset="0"/>
+                            </a:rPr>
+                            <m:t>𝜖</m:t>
+                          </m:r>
+                        </m:e>
+                        <m:sub>
+                          <m:r>
+                            <a:rPr lang="en-US" sz="2800" b="0" i="1" smtClean="0">
+                              <a:latin typeface="Cambria Math" panose="02040503050406030204" pitchFamily="18" charset="0"/>
+                            </a:rPr>
+                            <m:t>𝑖</m:t>
+                          </m:r>
+                          <m:r>
+                            <a:rPr lang="en-US" sz="2800" b="0" i="1" smtClean="0">
+                              <a:latin typeface="Cambria Math" panose="02040503050406030204" pitchFamily="18" charset="0"/>
+                            </a:rPr>
+                            <m:t>,</m:t>
+                          </m:r>
+                          <m:r>
+                            <a:rPr lang="en-US" sz="2800" b="0" i="1" smtClean="0">
+                              <a:latin typeface="Cambria Math" panose="02040503050406030204" pitchFamily="18" charset="0"/>
+                            </a:rPr>
+                            <m:t>𝑡</m:t>
+                          </m:r>
+                        </m:sub>
+                      </m:sSub>
+                      <m:r>
+                        <a:rPr lang="en-US" sz="2800" b="0" i="1" smtClean="0">
+                          <a:latin typeface="Cambria Math" panose="02040503050406030204" pitchFamily="18" charset="0"/>
+                        </a:rPr>
+                        <m:t>~ </m:t>
+                      </m:r>
+                      <m:r>
+                        <a:rPr lang="en-US" sz="2800" b="0" i="1" smtClean="0">
+                          <a:latin typeface="Cambria Math" panose="02040503050406030204" pitchFamily="18" charset="0"/>
+                        </a:rPr>
+                        <m:t>𝑁</m:t>
+                      </m:r>
+                      <m:r>
+                        <a:rPr lang="en-US" sz="2800" b="0" i="1" smtClean="0">
+                          <a:latin typeface="Cambria Math" panose="02040503050406030204" pitchFamily="18" charset="0"/>
+                        </a:rPr>
+                        <m:t>(0,</m:t>
+                      </m:r>
+                      <m:sSup>
+                        <m:sSupPr>
+                          <m:ctrlPr>
+                            <a:rPr lang="en-US" sz="2800" b="0" i="1" smtClean="0">
+                              <a:latin typeface="Cambria Math" panose="02040503050406030204" pitchFamily="18" charset="0"/>
+                            </a:rPr>
+                          </m:ctrlPr>
+                        </m:sSupPr>
+                        <m:e>
+                          <m:r>
+                            <a:rPr lang="en-US" sz="2800" b="0" i="1" smtClean="0">
+                              <a:latin typeface="Cambria Math" panose="02040503050406030204" pitchFamily="18" charset="0"/>
+                            </a:rPr>
+                            <m:t>𝜎</m:t>
+                          </m:r>
+                        </m:e>
+                        <m:sup>
+                          <m:r>
+                            <a:rPr lang="en-US" sz="2800" b="0" i="1" smtClean="0">
+                              <a:latin typeface="Cambria Math" panose="02040503050406030204" pitchFamily="18" charset="0"/>
+                            </a:rPr>
+                            <m:t>2</m:t>
+                          </m:r>
+                        </m:sup>
+                      </m:sSup>
+                      <m:r>
+                        <a:rPr lang="en-US" sz="2800" b="0" i="1" smtClean="0">
+                          <a:latin typeface="Cambria Math" panose="02040503050406030204" pitchFamily="18" charset="0"/>
+                        </a:rPr>
+                        <m:t>)</m:t>
+                      </m:r>
+                    </m:oMath>
+                  </m:oMathPara>
+                </a14:m>
+                <a:endParaRPr lang="en-CH" sz="2800" dirty="0"/>
+              </a:p>
+            </p:txBody>
+          </p:sp>
+        </mc:Choice>
+        <mc:Fallback xmlns="">
+          <p:sp>
+            <p:nvSpPr>
+              <p:cNvPr id="17" name="TextBox 16">
+                <a:extLst>
+                  <a:ext uri="{FF2B5EF4-FFF2-40B4-BE49-F238E27FC236}">
+                    <a16:creationId xmlns:a16="http://schemas.microsoft.com/office/drawing/2014/main" id="{7AF3CC1A-3145-6621-D288-52732757D7EA}"/>
+                  </a:ext>
+                </a:extLst>
+              </p:cNvPr>
+              <p:cNvSpPr txBox="1">
+                <a:spLocks noRot="1" noChangeAspect="1" noMove="1" noResize="1" noEditPoints="1" noAdjustHandles="1" noChangeArrowheads="1" noChangeShapeType="1" noTextEdit="1"/>
+              </p:cNvSpPr>
+              <p:nvPr/>
+            </p:nvSpPr>
+            <p:spPr>
+              <a:xfrm>
+                <a:off x="5042302" y="4171790"/>
+                <a:ext cx="2167966" cy="458459"/>
+              </a:xfrm>
+              <a:prstGeom prst="rect">
+                <a:avLst/>
+              </a:prstGeom>
+              <a:blipFill>
+                <a:blip r:embed="rId3"/>
+                <a:stretch>
+                  <a:fillRect/>
+                </a:stretch>
+              </a:blipFill>
+            </p:spPr>
+            <p:txBody>
+              <a:bodyPr/>
+              <a:lstStyle/>
+              <a:p>
+                <a:r>
+                  <a:rPr lang="en-US">
+                    <a:noFill/>
+                  </a:rPr>
+                  <a:t> </a:t>
+                </a:r>
+              </a:p>
+            </p:txBody>
+          </p:sp>
+        </mc:Fallback>
+      </mc:AlternateContent>
+    </p:spTree>
+    <p:extLst>
+      <p:ext uri="{BB962C8B-B14F-4D97-AF65-F5344CB8AC3E}">
+        <p14:creationId xmlns:p14="http://schemas.microsoft.com/office/powerpoint/2010/main" val="3462526471"/>
       </p:ext>
     </p:extLst>
   </p:cSld>
